--- a/presentation/plumetrace_presentation.pptx
+++ b/presentation/plumetrace_presentation.pptx
@@ -4080,7 +4080,7 @@
         </p:nvSpPr>
         <p:spPr>
           <a:xfrm>
-            <a:off x="4663440" y="2057400"/>
+            <a:off x="4663440" y="2103120"/>
             <a:ext cx="6766560" cy="2743200"/>
           </a:xfrm>
           <a:prstGeom prst="rect">
@@ -4094,11 +4094,11 @@
           </a:bodyPr>
           <a:lstStyle/>
           <a:p>
-            <a:pPr>
+            <a:pPr algn="l">
               <a:spcAft>
                 <a:spcPts val="1400"/>
               </a:spcAft>
-              <a:defRPr sz="5600" b="1">
+              <a:defRPr sz="6400" b="1">
                 <a:solidFill>
                   <a:srgbClr val="219EBC"/>
                 </a:solidFill>
@@ -4110,8 +4110,8 @@
             </a:r>
           </a:p>
           <a:p>
-            <a:pPr>
-              <a:defRPr sz="2400" b="1">
+            <a:pPr algn="l">
+              <a:defRPr sz="2600" b="1">
                 <a:solidFill>
                   <a:srgbClr val="023047"/>
                 </a:solidFill>
@@ -4159,7 +4159,7 @@
         <p:spPr>
           <a:xfrm>
             <a:off x="731520" y="502920"/>
-            <a:ext cx="10728655" cy="777240"/>
+            <a:ext cx="10728655" cy="822960"/>
           </a:xfrm>
           <a:prstGeom prst="rect">
             <a:avLst/>
@@ -4172,8 +4172,8 @@
           </a:bodyPr>
           <a:lstStyle/>
           <a:p>
-            <a:pPr>
-              <a:defRPr sz="3600" b="1">
+            <a:pPr algn="l">
+              <a:defRPr sz="4000" b="1">
                 <a:solidFill>
                   <a:srgbClr val="023047"/>
                 </a:solidFill>
@@ -4195,10 +4195,12 @@
         <p:spPr>
           <a:xfrm>
             <a:off x="731520" y="1554480"/>
-            <a:ext cx="5180990" cy="2194560"/>
+            <a:ext cx="5180990" cy="2240280"/>
           </a:xfrm>
           <a:prstGeom prst="roundRect">
-            <a:avLst/>
+            <a:avLst>
+              <a:gd name="adj" fmla="val 3500"/>
+            </a:avLst>
           </a:prstGeom>
           <a:solidFill>
             <a:srgbClr val="F4F9FC"/>
@@ -4224,17 +4226,17 @@
           </a:fontRef>
         </p:style>
         <p:txBody>
-          <a:bodyPr rtlCol="0" anchor="t" wrap="square" lIns="256032" rIns="256032" tIns="201168" bIns="164592"/>
-          <a:lstStyle/>
-          <a:p>
-            <a:pPr algn="ctr">
+          <a:bodyPr rtlCol="0" anchor="t" wrap="square" lIns="320040" rIns="320040" tIns="274320" bIns="228600"/>
+          <a:lstStyle/>
+          <a:p>
+            <a:pPr algn="l">
               <a:spcBef>
                 <a:spcPts val="0"/>
               </a:spcBef>
               <a:spcAft>
-                <a:spcPts val="1000"/>
+                <a:spcPts val="1200"/>
               </a:spcAft>
-              <a:defRPr sz="1900" b="1">
+              <a:defRPr sz="2200" b="1">
                 <a:solidFill>
                   <a:srgbClr val="023047"/>
                 </a:solidFill>
@@ -4246,14 +4248,14 @@
             </a:r>
           </a:p>
           <a:p>
-            <a:pPr>
+            <a:pPr algn="l">
               <a:spcBef>
                 <a:spcPts val="0"/>
               </a:spcBef>
               <a:spcAft>
-                <a:spcPts val="600"/>
+                <a:spcPts val="900"/>
               </a:spcAft>
-              <a:defRPr sz="1400">
+              <a:defRPr sz="1600">
                 <a:solidFill>
                   <a:srgbClr val="023047"/>
                 </a:solidFill>
@@ -4265,14 +4267,14 @@
             </a:r>
           </a:p>
           <a:p>
-            <a:pPr>
+            <a:pPr algn="l">
               <a:spcBef>
                 <a:spcPts val="0"/>
               </a:spcBef>
               <a:spcAft>
-                <a:spcPts val="600"/>
+                <a:spcPts val="900"/>
               </a:spcAft>
-              <a:defRPr sz="1400">
+              <a:defRPr sz="1600">
                 <a:solidFill>
                   <a:srgbClr val="023047"/>
                 </a:solidFill>
@@ -4294,10 +4296,12 @@
         <p:spPr>
           <a:xfrm>
             <a:off x="6278270" y="1554480"/>
-            <a:ext cx="5180990" cy="2194560"/>
+            <a:ext cx="5180990" cy="2240280"/>
           </a:xfrm>
           <a:prstGeom prst="roundRect">
-            <a:avLst/>
+            <a:avLst>
+              <a:gd name="adj" fmla="val 3500"/>
+            </a:avLst>
           </a:prstGeom>
           <a:solidFill>
             <a:srgbClr val="F4F9FC"/>
@@ -4323,17 +4327,17 @@
           </a:fontRef>
         </p:style>
         <p:txBody>
-          <a:bodyPr rtlCol="0" anchor="t" wrap="square" lIns="256032" rIns="256032" tIns="201168" bIns="164592"/>
-          <a:lstStyle/>
-          <a:p>
-            <a:pPr algn="ctr">
+          <a:bodyPr rtlCol="0" anchor="t" wrap="square" lIns="320040" rIns="320040" tIns="274320" bIns="228600"/>
+          <a:lstStyle/>
+          <a:p>
+            <a:pPr algn="l">
               <a:spcBef>
                 <a:spcPts val="0"/>
               </a:spcBef>
               <a:spcAft>
-                <a:spcPts val="1000"/>
+                <a:spcPts val="1200"/>
               </a:spcAft>
-              <a:defRPr sz="1900" b="1">
+              <a:defRPr sz="2200" b="1">
                 <a:solidFill>
                   <a:srgbClr val="023047"/>
                 </a:solidFill>
@@ -4345,14 +4349,14 @@
             </a:r>
           </a:p>
           <a:p>
-            <a:pPr>
+            <a:pPr algn="l">
               <a:spcBef>
                 <a:spcPts val="0"/>
               </a:spcBef>
               <a:spcAft>
-                <a:spcPts val="600"/>
+                <a:spcPts val="900"/>
               </a:spcAft>
-              <a:defRPr sz="1400">
+              <a:defRPr sz="1600">
                 <a:solidFill>
                   <a:srgbClr val="023047"/>
                 </a:solidFill>
@@ -4364,14 +4368,14 @@
             </a:r>
           </a:p>
           <a:p>
-            <a:pPr>
+            <a:pPr algn="l">
               <a:spcBef>
                 <a:spcPts val="0"/>
               </a:spcBef>
               <a:spcAft>
-                <a:spcPts val="600"/>
+                <a:spcPts val="900"/>
               </a:spcAft>
-              <a:defRPr sz="1400">
+              <a:defRPr sz="1600">
                 <a:solidFill>
                   <a:srgbClr val="023047"/>
                 </a:solidFill>
@@ -4393,10 +4397,12 @@
         <p:spPr>
           <a:xfrm>
             <a:off x="731520" y="4069080"/>
-            <a:ext cx="5180990" cy="2194560"/>
+            <a:ext cx="5180990" cy="2240280"/>
           </a:xfrm>
           <a:prstGeom prst="roundRect">
-            <a:avLst/>
+            <a:avLst>
+              <a:gd name="adj" fmla="val 3500"/>
+            </a:avLst>
           </a:prstGeom>
           <a:solidFill>
             <a:srgbClr val="F4F9FC"/>
@@ -4422,17 +4428,17 @@
           </a:fontRef>
         </p:style>
         <p:txBody>
-          <a:bodyPr rtlCol="0" anchor="t" wrap="square" lIns="256032" rIns="256032" tIns="201168" bIns="164592"/>
-          <a:lstStyle/>
-          <a:p>
-            <a:pPr algn="ctr">
+          <a:bodyPr rtlCol="0" anchor="t" wrap="square" lIns="320040" rIns="320040" tIns="274320" bIns="228600"/>
+          <a:lstStyle/>
+          <a:p>
+            <a:pPr algn="l">
               <a:spcBef>
                 <a:spcPts val="0"/>
               </a:spcBef>
               <a:spcAft>
-                <a:spcPts val="1000"/>
+                <a:spcPts val="1200"/>
               </a:spcAft>
-              <a:defRPr sz="1900" b="1">
+              <a:defRPr sz="2200" b="1">
                 <a:solidFill>
                   <a:srgbClr val="023047"/>
                 </a:solidFill>
@@ -4444,14 +4450,14 @@
             </a:r>
           </a:p>
           <a:p>
-            <a:pPr>
+            <a:pPr algn="l">
               <a:spcBef>
                 <a:spcPts val="0"/>
               </a:spcBef>
               <a:spcAft>
-                <a:spcPts val="600"/>
+                <a:spcPts val="900"/>
               </a:spcAft>
-              <a:defRPr sz="1400">
+              <a:defRPr sz="1600">
                 <a:solidFill>
                   <a:srgbClr val="023047"/>
                 </a:solidFill>
@@ -4463,14 +4469,14 @@
             </a:r>
           </a:p>
           <a:p>
-            <a:pPr>
+            <a:pPr algn="l">
               <a:spcBef>
                 <a:spcPts val="0"/>
               </a:spcBef>
               <a:spcAft>
-                <a:spcPts val="600"/>
+                <a:spcPts val="900"/>
               </a:spcAft>
-              <a:defRPr sz="1400">
+              <a:defRPr sz="1600">
                 <a:solidFill>
                   <a:srgbClr val="023047"/>
                 </a:solidFill>
@@ -4492,10 +4498,12 @@
         <p:spPr>
           <a:xfrm>
             <a:off x="6278270" y="4069080"/>
-            <a:ext cx="5180990" cy="2194560"/>
+            <a:ext cx="5180990" cy="2240280"/>
           </a:xfrm>
           <a:prstGeom prst="roundRect">
-            <a:avLst/>
+            <a:avLst>
+              <a:gd name="adj" fmla="val 3500"/>
+            </a:avLst>
           </a:prstGeom>
           <a:solidFill>
             <a:srgbClr val="F4F9FC"/>
@@ -4521,17 +4529,17 @@
           </a:fontRef>
         </p:style>
         <p:txBody>
-          <a:bodyPr rtlCol="0" anchor="t" wrap="square" lIns="256032" rIns="256032" tIns="201168" bIns="164592"/>
-          <a:lstStyle/>
-          <a:p>
-            <a:pPr algn="ctr">
+          <a:bodyPr rtlCol="0" anchor="t" wrap="square" lIns="320040" rIns="320040" tIns="274320" bIns="228600"/>
+          <a:lstStyle/>
+          <a:p>
+            <a:pPr algn="l">
               <a:spcBef>
                 <a:spcPts val="0"/>
               </a:spcBef>
               <a:spcAft>
-                <a:spcPts val="1000"/>
+                <a:spcPts val="1200"/>
               </a:spcAft>
-              <a:defRPr sz="1900" b="1">
+              <a:defRPr sz="2200" b="1">
                 <a:solidFill>
                   <a:srgbClr val="023047"/>
                 </a:solidFill>
@@ -4543,14 +4551,14 @@
             </a:r>
           </a:p>
           <a:p>
-            <a:pPr>
+            <a:pPr algn="l">
               <a:spcBef>
                 <a:spcPts val="0"/>
               </a:spcBef>
               <a:spcAft>
-                <a:spcPts val="600"/>
+                <a:spcPts val="900"/>
               </a:spcAft>
-              <a:defRPr sz="1400">
+              <a:defRPr sz="1600">
                 <a:solidFill>
                   <a:srgbClr val="023047"/>
                 </a:solidFill>
@@ -4562,14 +4570,14 @@
             </a:r>
           </a:p>
           <a:p>
-            <a:pPr>
+            <a:pPr algn="l">
               <a:spcBef>
                 <a:spcPts val="0"/>
               </a:spcBef>
               <a:spcAft>
-                <a:spcPts val="600"/>
+                <a:spcPts val="900"/>
               </a:spcAft>
-              <a:defRPr sz="1400">
+              <a:defRPr sz="1600">
                 <a:solidFill>
                   <a:srgbClr val="023047"/>
                 </a:solidFill>
@@ -4617,7 +4625,7 @@
         <p:spPr>
           <a:xfrm>
             <a:off x="731520" y="502920"/>
-            <a:ext cx="10728655" cy="777240"/>
+            <a:ext cx="10728655" cy="822960"/>
           </a:xfrm>
           <a:prstGeom prst="rect">
             <a:avLst/>
@@ -4630,8 +4638,8 @@
           </a:bodyPr>
           <a:lstStyle/>
           <a:p>
-            <a:pPr>
-              <a:defRPr sz="3600" b="1">
+            <a:pPr algn="l">
+              <a:defRPr sz="4000" b="1">
                 <a:solidFill>
                   <a:srgbClr val="023047"/>
                 </a:solidFill>
@@ -4652,11 +4660,13 @@
         </p:nvSpPr>
         <p:spPr>
           <a:xfrm>
-            <a:off x="731520" y="1508760"/>
-            <a:ext cx="5180990" cy="3840480"/>
+            <a:off x="731520" y="1554480"/>
+            <a:ext cx="5180990" cy="3794760"/>
           </a:xfrm>
           <a:prstGeom prst="roundRect">
-            <a:avLst/>
+            <a:avLst>
+              <a:gd name="adj" fmla="val 3500"/>
+            </a:avLst>
           </a:prstGeom>
           <a:solidFill>
             <a:srgbClr val="F4F9FC"/>
@@ -4682,17 +4692,17 @@
           </a:fontRef>
         </p:style>
         <p:txBody>
-          <a:bodyPr rtlCol="0" anchor="t" wrap="square" lIns="256032" rIns="256032" tIns="201168" bIns="164592"/>
-          <a:lstStyle/>
-          <a:p>
-            <a:pPr algn="ctr">
+          <a:bodyPr rtlCol="0" anchor="t" wrap="square" lIns="320040" rIns="320040" tIns="274320" bIns="228600"/>
+          <a:lstStyle/>
+          <a:p>
+            <a:pPr algn="l">
               <a:spcBef>
                 <a:spcPts val="0"/>
               </a:spcBef>
               <a:spcAft>
                 <a:spcPts val="400"/>
               </a:spcAft>
-              <a:defRPr sz="1900" b="1">
+              <a:defRPr sz="2300" b="1">
                 <a:solidFill>
                   <a:srgbClr val="023047"/>
                 </a:solidFill>
@@ -4704,14 +4714,14 @@
             </a:r>
           </a:p>
           <a:p>
-            <a:pPr>
+            <a:pPr algn="l">
               <a:spcBef>
                 <a:spcPts val="0"/>
               </a:spcBef>
               <a:spcAft>
-                <a:spcPts val="1000"/>
+                <a:spcPts val="1400"/>
               </a:spcAft>
-              <a:defRPr sz="1300" b="1">
+              <a:defRPr sz="1400" b="1">
                 <a:solidFill>
                   <a:srgbClr val="219EBC"/>
                 </a:solidFill>
@@ -4723,14 +4733,14 @@
             </a:r>
           </a:p>
           <a:p>
-            <a:pPr>
+            <a:pPr algn="l">
               <a:spcBef>
                 <a:spcPts val="0"/>
               </a:spcBef>
               <a:spcAft>
-                <a:spcPts val="600"/>
+                <a:spcPts val="900"/>
               </a:spcAft>
-              <a:defRPr sz="1400">
+              <a:defRPr sz="1700">
                 <a:solidFill>
                   <a:srgbClr val="023047"/>
                 </a:solidFill>
@@ -4742,14 +4752,14 @@
             </a:r>
           </a:p>
           <a:p>
-            <a:pPr>
+            <a:pPr algn="l">
               <a:spcBef>
                 <a:spcPts val="0"/>
               </a:spcBef>
               <a:spcAft>
-                <a:spcPts val="600"/>
+                <a:spcPts val="900"/>
               </a:spcAft>
-              <a:defRPr sz="1400">
+              <a:defRPr sz="1700">
                 <a:solidFill>
                   <a:srgbClr val="023047"/>
                 </a:solidFill>
@@ -4761,14 +4771,14 @@
             </a:r>
           </a:p>
           <a:p>
-            <a:pPr>
+            <a:pPr algn="l">
               <a:spcBef>
                 <a:spcPts val="0"/>
               </a:spcBef>
               <a:spcAft>
-                <a:spcPts val="600"/>
+                <a:spcPts val="900"/>
               </a:spcAft>
-              <a:defRPr sz="1400">
+              <a:defRPr sz="1700">
                 <a:solidFill>
                   <a:srgbClr val="023047"/>
                 </a:solidFill>
@@ -4789,11 +4799,13 @@
         </p:nvSpPr>
         <p:spPr>
           <a:xfrm>
-            <a:off x="6278270" y="1508760"/>
-            <a:ext cx="5180990" cy="3840480"/>
+            <a:off x="6278270" y="1554480"/>
+            <a:ext cx="5180990" cy="3794760"/>
           </a:xfrm>
           <a:prstGeom prst="roundRect">
-            <a:avLst/>
+            <a:avLst>
+              <a:gd name="adj" fmla="val 3500"/>
+            </a:avLst>
           </a:prstGeom>
           <a:solidFill>
             <a:srgbClr val="F4F9FC"/>
@@ -4819,17 +4831,17 @@
           </a:fontRef>
         </p:style>
         <p:txBody>
-          <a:bodyPr rtlCol="0" anchor="t" wrap="square" lIns="256032" rIns="256032" tIns="201168" bIns="164592"/>
-          <a:lstStyle/>
-          <a:p>
-            <a:pPr algn="ctr">
+          <a:bodyPr rtlCol="0" anchor="t" wrap="square" lIns="320040" rIns="320040" tIns="274320" bIns="228600"/>
+          <a:lstStyle/>
+          <a:p>
+            <a:pPr algn="l">
               <a:spcBef>
                 <a:spcPts val="0"/>
               </a:spcBef>
               <a:spcAft>
-                <a:spcPts val="1000"/>
+                <a:spcPts val="1200"/>
               </a:spcAft>
-              <a:defRPr sz="1900" b="1">
+              <a:defRPr sz="2300" b="1">
                 <a:solidFill>
                   <a:srgbClr val="023047"/>
                 </a:solidFill>
@@ -4841,14 +4853,14 @@
             </a:r>
           </a:p>
           <a:p>
-            <a:pPr>
+            <a:pPr algn="l">
               <a:spcBef>
                 <a:spcPts val="0"/>
               </a:spcBef>
               <a:spcAft>
-                <a:spcPts val="600"/>
+                <a:spcPts val="900"/>
               </a:spcAft>
-              <a:defRPr sz="1400">
+              <a:defRPr sz="1700">
                 <a:solidFill>
                   <a:srgbClr val="023047"/>
                 </a:solidFill>
@@ -4860,14 +4872,14 @@
             </a:r>
           </a:p>
           <a:p>
-            <a:pPr>
+            <a:pPr algn="l">
               <a:spcBef>
                 <a:spcPts val="0"/>
               </a:spcBef>
               <a:spcAft>
-                <a:spcPts val="600"/>
+                <a:spcPts val="900"/>
               </a:spcAft>
-              <a:defRPr sz="1400">
+              <a:defRPr sz="1700">
                 <a:solidFill>
                   <a:srgbClr val="023047"/>
                 </a:solidFill>
@@ -4879,14 +4891,14 @@
             </a:r>
           </a:p>
           <a:p>
-            <a:pPr>
+            <a:pPr algn="l">
               <a:spcBef>
                 <a:spcPts val="0"/>
               </a:spcBef>
               <a:spcAft>
-                <a:spcPts val="600"/>
+                <a:spcPts val="900"/>
               </a:spcAft>
-              <a:defRPr sz="1400">
+              <a:defRPr sz="1700">
                 <a:solidFill>
                   <a:srgbClr val="023047"/>
                 </a:solidFill>
@@ -4907,11 +4919,13 @@
         </p:nvSpPr>
         <p:spPr>
           <a:xfrm>
-            <a:off x="731520" y="5623560"/>
+            <a:off x="731520" y="5577840"/>
             <a:ext cx="10728655" cy="685800"/>
           </a:xfrm>
           <a:prstGeom prst="roundRect">
-            <a:avLst/>
+            <a:avLst>
+              <a:gd name="adj" fmla="val 3500"/>
+            </a:avLst>
           </a:prstGeom>
           <a:solidFill>
             <a:srgbClr val="F4F9FC"/>
@@ -4937,11 +4951,11 @@
           </a:fontRef>
         </p:style>
         <p:txBody>
-          <a:bodyPr rtlCol="0" anchor="ctr" wrap="square" lIns="274320" tIns="91440"/>
-          <a:lstStyle/>
-          <a:p>
-            <a:pPr algn="ctr">
-              <a:defRPr sz="1600" b="1">
+          <a:bodyPr rtlCol="0" anchor="ctr" wrap="square" lIns="320040" rIns="320040" tIns="91440"/>
+          <a:lstStyle/>
+          <a:p>
+            <a:pPr algn="l">
+              <a:defRPr sz="1800" b="1">
                 <a:solidFill>
                   <a:srgbClr val="FB8500"/>
                 </a:solidFill>
@@ -4952,7 +4966,7 @@
               <a:t>The Result:  </a:t>
             </a:r>
             <a:r>
-              <a:rPr sz="1600" b="1">
+              <a:rPr sz="1800" b="1">
                 <a:solidFill>
                   <a:srgbClr val="023047"/>
                 </a:solidFill>
@@ -4998,7 +5012,7 @@
         <p:spPr>
           <a:xfrm>
             <a:off x="731520" y="502920"/>
-            <a:ext cx="10728655" cy="777240"/>
+            <a:ext cx="10728655" cy="822960"/>
           </a:xfrm>
           <a:prstGeom prst="rect">
             <a:avLst/>
@@ -5011,8 +5025,8 @@
           </a:bodyPr>
           <a:lstStyle/>
           <a:p>
-            <a:pPr>
-              <a:defRPr sz="3600" b="1">
+            <a:pPr algn="l">
+              <a:defRPr sz="4000" b="1">
                 <a:solidFill>
                   <a:srgbClr val="023047"/>
                 </a:solidFill>
@@ -5033,11 +5047,13 @@
         </p:nvSpPr>
         <p:spPr>
           <a:xfrm>
-            <a:off x="731520" y="1508760"/>
-            <a:ext cx="5180990" cy="4663440"/>
+            <a:off x="731520" y="1554480"/>
+            <a:ext cx="5180990" cy="4709160"/>
           </a:xfrm>
           <a:prstGeom prst="roundRect">
-            <a:avLst/>
+            <a:avLst>
+              <a:gd name="adj" fmla="val 3500"/>
+            </a:avLst>
           </a:prstGeom>
           <a:solidFill>
             <a:srgbClr val="F4F9FC"/>
@@ -5063,17 +5079,17 @@
           </a:fontRef>
         </p:style>
         <p:txBody>
-          <a:bodyPr rtlCol="0" anchor="t" wrap="square" lIns="256032" rIns="256032" tIns="201168" bIns="164592"/>
-          <a:lstStyle/>
-          <a:p>
-            <a:pPr algn="ctr">
+          <a:bodyPr rtlCol="0" anchor="t" wrap="square" lIns="320040" rIns="320040" tIns="274320" bIns="228600"/>
+          <a:lstStyle/>
+          <a:p>
+            <a:pPr algn="l">
               <a:spcBef>
                 <a:spcPts val="0"/>
               </a:spcBef>
               <a:spcAft>
-                <a:spcPts val="1000"/>
+                <a:spcPts val="1200"/>
               </a:spcAft>
-              <a:defRPr sz="1900" b="1">
+              <a:defRPr sz="2300" b="1">
                 <a:solidFill>
                   <a:srgbClr val="023047"/>
                 </a:solidFill>
@@ -5085,14 +5101,14 @@
             </a:r>
           </a:p>
           <a:p>
-            <a:pPr>
+            <a:pPr algn="l">
               <a:spcBef>
                 <a:spcPts val="0"/>
               </a:spcBef>
               <a:spcAft>
-                <a:spcPts val="600"/>
+                <a:spcPts val="900"/>
               </a:spcAft>
-              <a:defRPr sz="1400">
+              <a:defRPr sz="1700">
                 <a:solidFill>
                   <a:srgbClr val="023047"/>
                 </a:solidFill>
@@ -5104,14 +5120,14 @@
             </a:r>
           </a:p>
           <a:p>
-            <a:pPr>
+            <a:pPr algn="l">
               <a:spcBef>
                 <a:spcPts val="0"/>
               </a:spcBef>
               <a:spcAft>
-                <a:spcPts val="600"/>
+                <a:spcPts val="900"/>
               </a:spcAft>
-              <a:defRPr sz="1400">
+              <a:defRPr sz="1700">
                 <a:solidFill>
                   <a:srgbClr val="023047"/>
                 </a:solidFill>
@@ -5123,14 +5139,14 @@
             </a:r>
           </a:p>
           <a:p>
-            <a:pPr>
+            <a:pPr algn="l">
               <a:spcBef>
                 <a:spcPts val="0"/>
               </a:spcBef>
               <a:spcAft>
-                <a:spcPts val="600"/>
+                <a:spcPts val="900"/>
               </a:spcAft>
-              <a:defRPr sz="1400">
+              <a:defRPr sz="1700">
                 <a:solidFill>
                   <a:srgbClr val="023047"/>
                 </a:solidFill>
@@ -5142,14 +5158,14 @@
             </a:r>
           </a:p>
           <a:p>
-            <a:pPr>
+            <a:pPr algn="l">
               <a:spcBef>
                 <a:spcPts val="0"/>
               </a:spcBef>
               <a:spcAft>
-                <a:spcPts val="600"/>
+                <a:spcPts val="900"/>
               </a:spcAft>
-              <a:defRPr sz="1400">
+              <a:defRPr sz="1700">
                 <a:solidFill>
                   <a:srgbClr val="023047"/>
                 </a:solidFill>
@@ -5170,11 +5186,13 @@
         </p:nvSpPr>
         <p:spPr>
           <a:xfrm>
-            <a:off x="6278270" y="1508760"/>
-            <a:ext cx="5180990" cy="4663440"/>
+            <a:off x="6278270" y="1554480"/>
+            <a:ext cx="5180990" cy="4709160"/>
           </a:xfrm>
           <a:prstGeom prst="roundRect">
-            <a:avLst/>
+            <a:avLst>
+              <a:gd name="adj" fmla="val 3500"/>
+            </a:avLst>
           </a:prstGeom>
           <a:solidFill>
             <a:srgbClr val="F4F9FC"/>
@@ -5200,17 +5218,17 @@
           </a:fontRef>
         </p:style>
         <p:txBody>
-          <a:bodyPr rtlCol="0" anchor="t" wrap="square" lIns="256032" rIns="256032" tIns="201168" bIns="164592"/>
-          <a:lstStyle/>
-          <a:p>
-            <a:pPr algn="ctr">
+          <a:bodyPr rtlCol="0" anchor="t" wrap="square" lIns="320040" rIns="320040" tIns="274320" bIns="228600"/>
+          <a:lstStyle/>
+          <a:p>
+            <a:pPr algn="l">
               <a:spcBef>
                 <a:spcPts val="0"/>
               </a:spcBef>
               <a:spcAft>
-                <a:spcPts val="1000"/>
+                <a:spcPts val="1200"/>
               </a:spcAft>
-              <a:defRPr sz="1900" b="1">
+              <a:defRPr sz="2300" b="1">
                 <a:solidFill>
                   <a:srgbClr val="023047"/>
                 </a:solidFill>
@@ -5222,14 +5240,14 @@
             </a:r>
           </a:p>
           <a:p>
-            <a:pPr>
+            <a:pPr algn="l">
               <a:spcBef>
                 <a:spcPts val="0"/>
               </a:spcBef>
               <a:spcAft>
-                <a:spcPts val="600"/>
+                <a:spcPts val="900"/>
               </a:spcAft>
-              <a:defRPr sz="1400">
+              <a:defRPr sz="1700">
                 <a:solidFill>
                   <a:srgbClr val="023047"/>
                 </a:solidFill>
@@ -5241,14 +5259,14 @@
             </a:r>
           </a:p>
           <a:p>
-            <a:pPr>
+            <a:pPr algn="l">
               <a:spcBef>
                 <a:spcPts val="0"/>
               </a:spcBef>
               <a:spcAft>
-                <a:spcPts val="600"/>
+                <a:spcPts val="900"/>
               </a:spcAft>
-              <a:defRPr sz="1400">
+              <a:defRPr sz="1700">
                 <a:solidFill>
                   <a:srgbClr val="023047"/>
                 </a:solidFill>
@@ -5260,14 +5278,14 @@
             </a:r>
           </a:p>
           <a:p>
-            <a:pPr>
+            <a:pPr algn="l">
               <a:spcBef>
                 <a:spcPts val="0"/>
               </a:spcBef>
               <a:spcAft>
-                <a:spcPts val="600"/>
+                <a:spcPts val="900"/>
               </a:spcAft>
-              <a:defRPr sz="1400">
+              <a:defRPr sz="1700">
                 <a:solidFill>
                   <a:srgbClr val="023047"/>
                 </a:solidFill>
@@ -5279,14 +5297,14 @@
             </a:r>
           </a:p>
           <a:p>
-            <a:pPr>
+            <a:pPr algn="l">
               <a:spcBef>
                 <a:spcPts val="0"/>
               </a:spcBef>
               <a:spcAft>
-                <a:spcPts val="600"/>
+                <a:spcPts val="900"/>
               </a:spcAft>
-              <a:defRPr sz="1400">
+              <a:defRPr sz="1700">
                 <a:solidFill>
                   <a:srgbClr val="023047"/>
                 </a:solidFill>
@@ -5334,7 +5352,7 @@
         <p:spPr>
           <a:xfrm>
             <a:off x="731520" y="502920"/>
-            <a:ext cx="10728655" cy="777240"/>
+            <a:ext cx="10728655" cy="822960"/>
           </a:xfrm>
           <a:prstGeom prst="rect">
             <a:avLst/>
@@ -5347,8 +5365,8 @@
           </a:bodyPr>
           <a:lstStyle/>
           <a:p>
-            <a:pPr>
-              <a:defRPr sz="3600" b="1">
+            <a:pPr algn="l">
+              <a:defRPr sz="4000" b="1">
                 <a:solidFill>
                   <a:srgbClr val="023047"/>
                 </a:solidFill>
@@ -5369,11 +5387,13 @@
         </p:nvSpPr>
         <p:spPr>
           <a:xfrm>
-            <a:off x="731520" y="1508760"/>
-            <a:ext cx="3332073" cy="4663440"/>
+            <a:off x="731520" y="1554480"/>
+            <a:ext cx="3332073" cy="4709160"/>
           </a:xfrm>
           <a:prstGeom prst="roundRect">
-            <a:avLst/>
+            <a:avLst>
+              <a:gd name="adj" fmla="val 3500"/>
+            </a:avLst>
           </a:prstGeom>
           <a:solidFill>
             <a:srgbClr val="F4F9FC"/>
@@ -5399,17 +5419,17 @@
           </a:fontRef>
         </p:style>
         <p:txBody>
-          <a:bodyPr rtlCol="0" anchor="t" wrap="square" lIns="256032" rIns="256032" tIns="201168" bIns="164592"/>
-          <a:lstStyle/>
-          <a:p>
-            <a:pPr algn="ctr">
+          <a:bodyPr rtlCol="0" anchor="t" wrap="square" lIns="320040" rIns="320040" tIns="274320" bIns="228600"/>
+          <a:lstStyle/>
+          <a:p>
+            <a:pPr algn="l">
               <a:spcBef>
                 <a:spcPts val="0"/>
               </a:spcBef>
               <a:spcAft>
-                <a:spcPts val="1000"/>
+                <a:spcPts val="1200"/>
               </a:spcAft>
-              <a:defRPr sz="1900" b="1">
+              <a:defRPr sz="2100" b="1">
                 <a:solidFill>
                   <a:srgbClr val="023047"/>
                 </a:solidFill>
@@ -5421,14 +5441,14 @@
             </a:r>
           </a:p>
           <a:p>
-            <a:pPr>
+            <a:pPr algn="l">
               <a:spcBef>
                 <a:spcPts val="0"/>
               </a:spcBef>
               <a:spcAft>
-                <a:spcPts val="600"/>
+                <a:spcPts val="900"/>
               </a:spcAft>
-              <a:defRPr sz="1400">
+              <a:defRPr sz="1500">
                 <a:solidFill>
                   <a:srgbClr val="023047"/>
                 </a:solidFill>
@@ -5440,14 +5460,14 @@
             </a:r>
           </a:p>
           <a:p>
-            <a:pPr>
+            <a:pPr algn="l">
               <a:spcBef>
                 <a:spcPts val="0"/>
               </a:spcBef>
               <a:spcAft>
-                <a:spcPts val="600"/>
+                <a:spcPts val="900"/>
               </a:spcAft>
-              <a:defRPr sz="1400">
+              <a:defRPr sz="1500">
                 <a:solidFill>
                   <a:srgbClr val="023047"/>
                 </a:solidFill>
@@ -5459,14 +5479,14 @@
             </a:r>
           </a:p>
           <a:p>
-            <a:pPr>
+            <a:pPr algn="l">
               <a:spcBef>
                 <a:spcPts val="0"/>
               </a:spcBef>
               <a:spcAft>
-                <a:spcPts val="600"/>
+                <a:spcPts val="900"/>
               </a:spcAft>
-              <a:defRPr sz="1400">
+              <a:defRPr sz="1500">
                 <a:solidFill>
                   <a:srgbClr val="023047"/>
                 </a:solidFill>
@@ -5478,14 +5498,14 @@
             </a:r>
           </a:p>
           <a:p>
-            <a:pPr>
+            <a:pPr algn="l">
               <a:spcBef>
                 <a:spcPts val="0"/>
               </a:spcBef>
               <a:spcAft>
-                <a:spcPts val="600"/>
+                <a:spcPts val="900"/>
               </a:spcAft>
-              <a:defRPr sz="1400">
+              <a:defRPr sz="1500">
                 <a:solidFill>
                   <a:srgbClr val="023047"/>
                 </a:solidFill>
@@ -5506,11 +5526,13 @@
         </p:nvSpPr>
         <p:spPr>
           <a:xfrm>
-            <a:off x="4429353" y="1508760"/>
-            <a:ext cx="3332073" cy="4663440"/>
+            <a:off x="4429353" y="1554480"/>
+            <a:ext cx="3332073" cy="4709160"/>
           </a:xfrm>
           <a:prstGeom prst="roundRect">
-            <a:avLst/>
+            <a:avLst>
+              <a:gd name="adj" fmla="val 3500"/>
+            </a:avLst>
           </a:prstGeom>
           <a:solidFill>
             <a:srgbClr val="F4F9FC"/>
@@ -5536,17 +5558,17 @@
           </a:fontRef>
         </p:style>
         <p:txBody>
-          <a:bodyPr rtlCol="0" anchor="t" wrap="square" lIns="256032" rIns="256032" tIns="201168" bIns="164592"/>
-          <a:lstStyle/>
-          <a:p>
-            <a:pPr algn="ctr">
+          <a:bodyPr rtlCol="0" anchor="t" wrap="square" lIns="320040" rIns="320040" tIns="274320" bIns="228600"/>
+          <a:lstStyle/>
+          <a:p>
+            <a:pPr algn="l">
               <a:spcBef>
                 <a:spcPts val="0"/>
               </a:spcBef>
               <a:spcAft>
-                <a:spcPts val="1000"/>
+                <a:spcPts val="1200"/>
               </a:spcAft>
-              <a:defRPr sz="1900" b="1">
+              <a:defRPr sz="2100" b="1">
                 <a:solidFill>
                   <a:srgbClr val="023047"/>
                 </a:solidFill>
@@ -5558,14 +5580,14 @@
             </a:r>
           </a:p>
           <a:p>
-            <a:pPr>
+            <a:pPr algn="l">
               <a:spcBef>
                 <a:spcPts val="0"/>
               </a:spcBef>
               <a:spcAft>
-                <a:spcPts val="600"/>
+                <a:spcPts val="900"/>
               </a:spcAft>
-              <a:defRPr sz="1400">
+              <a:defRPr sz="1500">
                 <a:solidFill>
                   <a:srgbClr val="023047"/>
                 </a:solidFill>
@@ -5577,14 +5599,14 @@
             </a:r>
           </a:p>
           <a:p>
-            <a:pPr>
+            <a:pPr algn="l">
               <a:spcBef>
                 <a:spcPts val="0"/>
               </a:spcBef>
               <a:spcAft>
-                <a:spcPts val="600"/>
+                <a:spcPts val="900"/>
               </a:spcAft>
-              <a:defRPr sz="1400">
+              <a:defRPr sz="1500">
                 <a:solidFill>
                   <a:srgbClr val="023047"/>
                 </a:solidFill>
@@ -5596,14 +5618,14 @@
             </a:r>
           </a:p>
           <a:p>
-            <a:pPr>
+            <a:pPr algn="l">
               <a:spcBef>
                 <a:spcPts val="0"/>
               </a:spcBef>
               <a:spcAft>
-                <a:spcPts val="600"/>
+                <a:spcPts val="900"/>
               </a:spcAft>
-              <a:defRPr sz="1400">
+              <a:defRPr sz="1500">
                 <a:solidFill>
                   <a:srgbClr val="023047"/>
                 </a:solidFill>
@@ -5615,14 +5637,14 @@
             </a:r>
           </a:p>
           <a:p>
-            <a:pPr>
+            <a:pPr algn="l">
               <a:spcBef>
                 <a:spcPts val="0"/>
               </a:spcBef>
               <a:spcAft>
-                <a:spcPts val="600"/>
+                <a:spcPts val="900"/>
               </a:spcAft>
-              <a:defRPr sz="1400">
+              <a:defRPr sz="1500">
                 <a:solidFill>
                   <a:srgbClr val="023047"/>
                 </a:solidFill>
@@ -5643,11 +5665,13 @@
         </p:nvSpPr>
         <p:spPr>
           <a:xfrm>
-            <a:off x="8127186" y="1508760"/>
-            <a:ext cx="3332073" cy="4663440"/>
+            <a:off x="8127186" y="1554480"/>
+            <a:ext cx="3332073" cy="4709160"/>
           </a:xfrm>
           <a:prstGeom prst="roundRect">
-            <a:avLst/>
+            <a:avLst>
+              <a:gd name="adj" fmla="val 3500"/>
+            </a:avLst>
           </a:prstGeom>
           <a:solidFill>
             <a:srgbClr val="F4F9FC"/>
@@ -5673,17 +5697,17 @@
           </a:fontRef>
         </p:style>
         <p:txBody>
-          <a:bodyPr rtlCol="0" anchor="t" wrap="square" lIns="256032" rIns="256032" tIns="201168" bIns="164592"/>
-          <a:lstStyle/>
-          <a:p>
-            <a:pPr algn="ctr">
+          <a:bodyPr rtlCol="0" anchor="t" wrap="square" lIns="320040" rIns="320040" tIns="274320" bIns="228600"/>
+          <a:lstStyle/>
+          <a:p>
+            <a:pPr algn="l">
               <a:spcBef>
                 <a:spcPts val="0"/>
               </a:spcBef>
               <a:spcAft>
-                <a:spcPts val="1000"/>
+                <a:spcPts val="1200"/>
               </a:spcAft>
-              <a:defRPr sz="1900" b="1">
+              <a:defRPr sz="2100" b="1">
                 <a:solidFill>
                   <a:srgbClr val="023047"/>
                 </a:solidFill>
@@ -5695,14 +5719,14 @@
             </a:r>
           </a:p>
           <a:p>
-            <a:pPr>
+            <a:pPr algn="l">
               <a:spcBef>
                 <a:spcPts val="0"/>
               </a:spcBef>
               <a:spcAft>
-                <a:spcPts val="600"/>
+                <a:spcPts val="900"/>
               </a:spcAft>
-              <a:defRPr sz="1400">
+              <a:defRPr sz="1500">
                 <a:solidFill>
                   <a:srgbClr val="023047"/>
                 </a:solidFill>
@@ -5714,14 +5738,14 @@
             </a:r>
           </a:p>
           <a:p>
-            <a:pPr>
+            <a:pPr algn="l">
               <a:spcBef>
                 <a:spcPts val="0"/>
               </a:spcBef>
               <a:spcAft>
-                <a:spcPts val="600"/>
+                <a:spcPts val="900"/>
               </a:spcAft>
-              <a:defRPr sz="1400">
+              <a:defRPr sz="1500">
                 <a:solidFill>
                   <a:srgbClr val="023047"/>
                 </a:solidFill>
@@ -5733,14 +5757,14 @@
             </a:r>
           </a:p>
           <a:p>
-            <a:pPr>
+            <a:pPr algn="l">
               <a:spcBef>
                 <a:spcPts val="0"/>
               </a:spcBef>
               <a:spcAft>
-                <a:spcPts val="600"/>
+                <a:spcPts val="900"/>
               </a:spcAft>
-              <a:defRPr sz="1400">
+              <a:defRPr sz="1500">
                 <a:solidFill>
                   <a:srgbClr val="023047"/>
                 </a:solidFill>
@@ -5752,14 +5776,14 @@
             </a:r>
           </a:p>
           <a:p>
-            <a:pPr>
+            <a:pPr algn="l">
               <a:spcBef>
                 <a:spcPts val="0"/>
               </a:spcBef>
               <a:spcAft>
-                <a:spcPts val="600"/>
+                <a:spcPts val="900"/>
               </a:spcAft>
-              <a:defRPr sz="1400">
+              <a:defRPr sz="1500">
                 <a:solidFill>
                   <a:srgbClr val="023047"/>
                 </a:solidFill>
@@ -5807,7 +5831,7 @@
         <p:spPr>
           <a:xfrm>
             <a:off x="731520" y="502920"/>
-            <a:ext cx="10728655" cy="777240"/>
+            <a:ext cx="10728655" cy="822960"/>
           </a:xfrm>
           <a:prstGeom prst="rect">
             <a:avLst/>
@@ -5820,8 +5844,8 @@
           </a:bodyPr>
           <a:lstStyle/>
           <a:p>
-            <a:pPr>
-              <a:defRPr sz="3600" b="1">
+            <a:pPr algn="l">
+              <a:defRPr sz="4000" b="1">
                 <a:solidFill>
                   <a:srgbClr val="023047"/>
                 </a:solidFill>
@@ -5842,11 +5866,13 @@
         </p:nvSpPr>
         <p:spPr>
           <a:xfrm>
-            <a:off x="731520" y="1508760"/>
-            <a:ext cx="5180990" cy="4663440"/>
+            <a:off x="731520" y="1554480"/>
+            <a:ext cx="5180990" cy="4709160"/>
           </a:xfrm>
           <a:prstGeom prst="roundRect">
-            <a:avLst/>
+            <a:avLst>
+              <a:gd name="adj" fmla="val 3500"/>
+            </a:avLst>
           </a:prstGeom>
           <a:solidFill>
             <a:srgbClr val="F4F9FC"/>
@@ -5872,17 +5898,17 @@
           </a:fontRef>
         </p:style>
         <p:txBody>
-          <a:bodyPr rtlCol="0" anchor="t" wrap="square" lIns="256032" rIns="256032" tIns="201168" bIns="164592"/>
-          <a:lstStyle/>
-          <a:p>
-            <a:pPr algn="ctr">
+          <a:bodyPr rtlCol="0" anchor="t" wrap="square" lIns="320040" rIns="320040" tIns="274320" bIns="228600"/>
+          <a:lstStyle/>
+          <a:p>
+            <a:pPr algn="l">
               <a:spcBef>
                 <a:spcPts val="0"/>
               </a:spcBef>
               <a:spcAft>
-                <a:spcPts val="1000"/>
+                <a:spcPts val="1200"/>
               </a:spcAft>
-              <a:defRPr sz="1900" b="1">
+              <a:defRPr sz="2300" b="1">
                 <a:solidFill>
                   <a:srgbClr val="023047"/>
                 </a:solidFill>
@@ -5894,14 +5920,14 @@
             </a:r>
           </a:p>
           <a:p>
-            <a:pPr>
+            <a:pPr algn="l">
               <a:spcBef>
                 <a:spcPts val="0"/>
               </a:spcBef>
               <a:spcAft>
-                <a:spcPts val="600"/>
+                <a:spcPts val="900"/>
               </a:spcAft>
-              <a:defRPr sz="1400">
+              <a:defRPr sz="1700">
                 <a:solidFill>
                   <a:srgbClr val="023047"/>
                 </a:solidFill>
@@ -5913,14 +5939,14 @@
             </a:r>
           </a:p>
           <a:p>
-            <a:pPr>
+            <a:pPr algn="l">
               <a:spcBef>
                 <a:spcPts val="0"/>
               </a:spcBef>
               <a:spcAft>
-                <a:spcPts val="600"/>
+                <a:spcPts val="900"/>
               </a:spcAft>
-              <a:defRPr sz="1400">
+              <a:defRPr sz="1700">
                 <a:solidFill>
                   <a:srgbClr val="023047"/>
                 </a:solidFill>
@@ -5932,14 +5958,14 @@
             </a:r>
           </a:p>
           <a:p>
-            <a:pPr>
+            <a:pPr algn="l">
               <a:spcBef>
                 <a:spcPts val="0"/>
               </a:spcBef>
               <a:spcAft>
-                <a:spcPts val="600"/>
+                <a:spcPts val="900"/>
               </a:spcAft>
-              <a:defRPr sz="1400">
+              <a:defRPr sz="1700">
                 <a:solidFill>
                   <a:srgbClr val="023047"/>
                 </a:solidFill>
@@ -5951,14 +5977,14 @@
             </a:r>
           </a:p>
           <a:p>
-            <a:pPr>
+            <a:pPr algn="l">
               <a:spcBef>
                 <a:spcPts val="0"/>
               </a:spcBef>
               <a:spcAft>
-                <a:spcPts val="600"/>
+                <a:spcPts val="900"/>
               </a:spcAft>
-              <a:defRPr sz="1400">
+              <a:defRPr sz="1700">
                 <a:solidFill>
                   <a:srgbClr val="023047"/>
                 </a:solidFill>
@@ -5979,11 +6005,13 @@
         </p:nvSpPr>
         <p:spPr>
           <a:xfrm>
-            <a:off x="6278270" y="1508760"/>
-            <a:ext cx="5180990" cy="4663440"/>
+            <a:off x="6278270" y="1554480"/>
+            <a:ext cx="5180990" cy="4709160"/>
           </a:xfrm>
           <a:prstGeom prst="roundRect">
-            <a:avLst/>
+            <a:avLst>
+              <a:gd name="adj" fmla="val 3500"/>
+            </a:avLst>
           </a:prstGeom>
           <a:solidFill>
             <a:srgbClr val="F4F9FC"/>
@@ -6009,17 +6037,17 @@
           </a:fontRef>
         </p:style>
         <p:txBody>
-          <a:bodyPr rtlCol="0" anchor="t" wrap="square" lIns="256032" rIns="256032" tIns="201168" bIns="164592"/>
-          <a:lstStyle/>
-          <a:p>
-            <a:pPr algn="ctr">
+          <a:bodyPr rtlCol="0" anchor="t" wrap="square" lIns="320040" rIns="320040" tIns="274320" bIns="228600"/>
+          <a:lstStyle/>
+          <a:p>
+            <a:pPr algn="l">
               <a:spcBef>
                 <a:spcPts val="0"/>
               </a:spcBef>
               <a:spcAft>
-                <a:spcPts val="1000"/>
+                <a:spcPts val="1200"/>
               </a:spcAft>
-              <a:defRPr sz="1900" b="1">
+              <a:defRPr sz="2300" b="1">
                 <a:solidFill>
                   <a:srgbClr val="023047"/>
                 </a:solidFill>
@@ -6031,14 +6059,14 @@
             </a:r>
           </a:p>
           <a:p>
-            <a:pPr>
+            <a:pPr algn="l">
               <a:spcBef>
                 <a:spcPts val="0"/>
               </a:spcBef>
               <a:spcAft>
-                <a:spcPts val="600"/>
+                <a:spcPts val="900"/>
               </a:spcAft>
-              <a:defRPr sz="1400">
+              <a:defRPr sz="1700">
                 <a:solidFill>
                   <a:srgbClr val="023047"/>
                 </a:solidFill>
@@ -6050,14 +6078,14 @@
             </a:r>
           </a:p>
           <a:p>
-            <a:pPr>
+            <a:pPr algn="l">
               <a:spcBef>
                 <a:spcPts val="0"/>
               </a:spcBef>
               <a:spcAft>
-                <a:spcPts val="600"/>
+                <a:spcPts val="900"/>
               </a:spcAft>
-              <a:defRPr sz="1400">
+              <a:defRPr sz="1700">
                 <a:solidFill>
                   <a:srgbClr val="023047"/>
                 </a:solidFill>
@@ -6069,14 +6097,14 @@
             </a:r>
           </a:p>
           <a:p>
-            <a:pPr>
+            <a:pPr algn="l">
               <a:spcBef>
                 <a:spcPts val="0"/>
               </a:spcBef>
               <a:spcAft>
-                <a:spcPts val="600"/>
+                <a:spcPts val="900"/>
               </a:spcAft>
-              <a:defRPr sz="1400">
+              <a:defRPr sz="1700">
                 <a:solidFill>
                   <a:srgbClr val="023047"/>
                 </a:solidFill>
@@ -6088,14 +6116,14 @@
             </a:r>
           </a:p>
           <a:p>
-            <a:pPr>
+            <a:pPr algn="l">
               <a:spcBef>
                 <a:spcPts val="0"/>
               </a:spcBef>
               <a:spcAft>
-                <a:spcPts val="600"/>
+                <a:spcPts val="900"/>
               </a:spcAft>
-              <a:defRPr sz="1400">
+              <a:defRPr sz="1700">
                 <a:solidFill>
                   <a:srgbClr val="023047"/>
                 </a:solidFill>
@@ -6143,7 +6171,7 @@
         <p:spPr>
           <a:xfrm>
             <a:off x="731520" y="502920"/>
-            <a:ext cx="10728655" cy="777240"/>
+            <a:ext cx="10728655" cy="822960"/>
           </a:xfrm>
           <a:prstGeom prst="rect">
             <a:avLst/>
@@ -6156,8 +6184,8 @@
           </a:bodyPr>
           <a:lstStyle/>
           <a:p>
-            <a:pPr>
-              <a:defRPr sz="3600" b="1">
+            <a:pPr algn="l">
+              <a:defRPr sz="4000" b="1">
                 <a:solidFill>
                   <a:srgbClr val="023047"/>
                 </a:solidFill>
@@ -6179,10 +6207,12 @@
         <p:spPr>
           <a:xfrm>
             <a:off x="731520" y="1554480"/>
-            <a:ext cx="5180990" cy="2194560"/>
+            <a:ext cx="5180990" cy="2240280"/>
           </a:xfrm>
           <a:prstGeom prst="roundRect">
-            <a:avLst/>
+            <a:avLst>
+              <a:gd name="adj" fmla="val 3500"/>
+            </a:avLst>
           </a:prstGeom>
           <a:solidFill>
             <a:srgbClr val="F4F9FC"/>
@@ -6208,17 +6238,17 @@
           </a:fontRef>
         </p:style>
         <p:txBody>
-          <a:bodyPr rtlCol="0" anchor="t" wrap="square" lIns="256032" rIns="256032" tIns="201168" bIns="164592"/>
-          <a:lstStyle/>
-          <a:p>
-            <a:pPr algn="ctr">
+          <a:bodyPr rtlCol="0" anchor="t" wrap="square" lIns="320040" rIns="320040" tIns="274320" bIns="228600"/>
+          <a:lstStyle/>
+          <a:p>
+            <a:pPr algn="l">
               <a:spcBef>
                 <a:spcPts val="0"/>
               </a:spcBef>
               <a:spcAft>
-                <a:spcPts val="1000"/>
+                <a:spcPts val="1200"/>
               </a:spcAft>
-              <a:defRPr sz="1900" b="1">
+              <a:defRPr sz="2200" b="1">
                 <a:solidFill>
                   <a:srgbClr val="023047"/>
                 </a:solidFill>
@@ -6230,14 +6260,14 @@
             </a:r>
           </a:p>
           <a:p>
-            <a:pPr>
+            <a:pPr algn="l">
               <a:spcBef>
                 <a:spcPts val="0"/>
               </a:spcBef>
               <a:spcAft>
-                <a:spcPts val="600"/>
+                <a:spcPts val="900"/>
               </a:spcAft>
-              <a:defRPr sz="1400">
+              <a:defRPr sz="1600">
                 <a:solidFill>
                   <a:srgbClr val="023047"/>
                 </a:solidFill>
@@ -6249,14 +6279,14 @@
             </a:r>
           </a:p>
           <a:p>
-            <a:pPr>
+            <a:pPr algn="l">
               <a:spcBef>
                 <a:spcPts val="0"/>
               </a:spcBef>
               <a:spcAft>
-                <a:spcPts val="600"/>
+                <a:spcPts val="900"/>
               </a:spcAft>
-              <a:defRPr sz="1400">
+              <a:defRPr sz="1600">
                 <a:solidFill>
                   <a:srgbClr val="023047"/>
                 </a:solidFill>
@@ -6278,10 +6308,12 @@
         <p:spPr>
           <a:xfrm>
             <a:off x="6278270" y="1554480"/>
-            <a:ext cx="5180990" cy="2194560"/>
+            <a:ext cx="5180990" cy="2240280"/>
           </a:xfrm>
           <a:prstGeom prst="roundRect">
-            <a:avLst/>
+            <a:avLst>
+              <a:gd name="adj" fmla="val 3500"/>
+            </a:avLst>
           </a:prstGeom>
           <a:solidFill>
             <a:srgbClr val="F4F9FC"/>
@@ -6307,17 +6339,17 @@
           </a:fontRef>
         </p:style>
         <p:txBody>
-          <a:bodyPr rtlCol="0" anchor="t" wrap="square" lIns="256032" rIns="256032" tIns="201168" bIns="164592"/>
-          <a:lstStyle/>
-          <a:p>
-            <a:pPr algn="ctr">
+          <a:bodyPr rtlCol="0" anchor="t" wrap="square" lIns="320040" rIns="320040" tIns="274320" bIns="228600"/>
+          <a:lstStyle/>
+          <a:p>
+            <a:pPr algn="l">
               <a:spcBef>
                 <a:spcPts val="0"/>
               </a:spcBef>
               <a:spcAft>
-                <a:spcPts val="1000"/>
+                <a:spcPts val="1200"/>
               </a:spcAft>
-              <a:defRPr sz="1900" b="1">
+              <a:defRPr sz="2200" b="1">
                 <a:solidFill>
                   <a:srgbClr val="023047"/>
                 </a:solidFill>
@@ -6329,14 +6361,14 @@
             </a:r>
           </a:p>
           <a:p>
-            <a:pPr>
+            <a:pPr algn="l">
               <a:spcBef>
                 <a:spcPts val="0"/>
               </a:spcBef>
               <a:spcAft>
-                <a:spcPts val="600"/>
+                <a:spcPts val="900"/>
               </a:spcAft>
-              <a:defRPr sz="1400">
+              <a:defRPr sz="1600">
                 <a:solidFill>
                   <a:srgbClr val="023047"/>
                 </a:solidFill>
@@ -6348,14 +6380,14 @@
             </a:r>
           </a:p>
           <a:p>
-            <a:pPr>
+            <a:pPr algn="l">
               <a:spcBef>
                 <a:spcPts val="0"/>
               </a:spcBef>
               <a:spcAft>
-                <a:spcPts val="600"/>
+                <a:spcPts val="900"/>
               </a:spcAft>
-              <a:defRPr sz="1400">
+              <a:defRPr sz="1600">
                 <a:solidFill>
                   <a:srgbClr val="023047"/>
                 </a:solidFill>
@@ -6377,10 +6409,12 @@
         <p:spPr>
           <a:xfrm>
             <a:off x="731520" y="4069080"/>
-            <a:ext cx="5180990" cy="2194560"/>
+            <a:ext cx="5180990" cy="2240280"/>
           </a:xfrm>
           <a:prstGeom prst="roundRect">
-            <a:avLst/>
+            <a:avLst>
+              <a:gd name="adj" fmla="val 3500"/>
+            </a:avLst>
           </a:prstGeom>
           <a:solidFill>
             <a:srgbClr val="F4F9FC"/>
@@ -6406,17 +6440,17 @@
           </a:fontRef>
         </p:style>
         <p:txBody>
-          <a:bodyPr rtlCol="0" anchor="t" wrap="square" lIns="256032" rIns="256032" tIns="201168" bIns="164592"/>
-          <a:lstStyle/>
-          <a:p>
-            <a:pPr algn="ctr">
+          <a:bodyPr rtlCol="0" anchor="t" wrap="square" lIns="320040" rIns="320040" tIns="274320" bIns="228600"/>
+          <a:lstStyle/>
+          <a:p>
+            <a:pPr algn="l">
               <a:spcBef>
                 <a:spcPts val="0"/>
               </a:spcBef>
               <a:spcAft>
-                <a:spcPts val="1000"/>
+                <a:spcPts val="1200"/>
               </a:spcAft>
-              <a:defRPr sz="1900" b="1">
+              <a:defRPr sz="2200" b="1">
                 <a:solidFill>
                   <a:srgbClr val="023047"/>
                 </a:solidFill>
@@ -6428,14 +6462,14 @@
             </a:r>
           </a:p>
           <a:p>
-            <a:pPr>
+            <a:pPr algn="l">
               <a:spcBef>
                 <a:spcPts val="0"/>
               </a:spcBef>
               <a:spcAft>
-                <a:spcPts val="600"/>
+                <a:spcPts val="900"/>
               </a:spcAft>
-              <a:defRPr sz="1400">
+              <a:defRPr sz="1600">
                 <a:solidFill>
                   <a:srgbClr val="023047"/>
                 </a:solidFill>
@@ -6447,14 +6481,14 @@
             </a:r>
           </a:p>
           <a:p>
-            <a:pPr>
+            <a:pPr algn="l">
               <a:spcBef>
                 <a:spcPts val="0"/>
               </a:spcBef>
               <a:spcAft>
-                <a:spcPts val="600"/>
+                <a:spcPts val="900"/>
               </a:spcAft>
-              <a:defRPr sz="1400">
+              <a:defRPr sz="1600">
                 <a:solidFill>
                   <a:srgbClr val="023047"/>
                 </a:solidFill>
@@ -6476,10 +6510,12 @@
         <p:spPr>
           <a:xfrm>
             <a:off x="6278270" y="4069080"/>
-            <a:ext cx="5180990" cy="2194560"/>
+            <a:ext cx="5180990" cy="2240280"/>
           </a:xfrm>
           <a:prstGeom prst="roundRect">
-            <a:avLst/>
+            <a:avLst>
+              <a:gd name="adj" fmla="val 3500"/>
+            </a:avLst>
           </a:prstGeom>
           <a:solidFill>
             <a:srgbClr val="F4F9FC"/>
@@ -6505,17 +6541,17 @@
           </a:fontRef>
         </p:style>
         <p:txBody>
-          <a:bodyPr rtlCol="0" anchor="t" wrap="square" lIns="256032" rIns="256032" tIns="201168" bIns="164592"/>
-          <a:lstStyle/>
-          <a:p>
-            <a:pPr algn="ctr">
+          <a:bodyPr rtlCol="0" anchor="t" wrap="square" lIns="320040" rIns="320040" tIns="274320" bIns="228600"/>
+          <a:lstStyle/>
+          <a:p>
+            <a:pPr algn="l">
               <a:spcBef>
                 <a:spcPts val="0"/>
               </a:spcBef>
               <a:spcAft>
-                <a:spcPts val="1000"/>
+                <a:spcPts val="1200"/>
               </a:spcAft>
-              <a:defRPr sz="1900" b="1">
+              <a:defRPr sz="2200" b="1">
                 <a:solidFill>
                   <a:srgbClr val="023047"/>
                 </a:solidFill>
@@ -6527,14 +6563,14 @@
             </a:r>
           </a:p>
           <a:p>
-            <a:pPr>
+            <a:pPr algn="l">
               <a:spcBef>
                 <a:spcPts val="0"/>
               </a:spcBef>
               <a:spcAft>
-                <a:spcPts val="600"/>
+                <a:spcPts val="900"/>
               </a:spcAft>
-              <a:defRPr sz="1400">
+              <a:defRPr sz="1600">
                 <a:solidFill>
                   <a:srgbClr val="023047"/>
                 </a:solidFill>
@@ -6546,14 +6582,14 @@
             </a:r>
           </a:p>
           <a:p>
-            <a:pPr>
+            <a:pPr algn="l">
               <a:spcBef>
                 <a:spcPts val="0"/>
               </a:spcBef>
               <a:spcAft>
-                <a:spcPts val="600"/>
+                <a:spcPts val="900"/>
               </a:spcAft>
-              <a:defRPr sz="1400">
+              <a:defRPr sz="1600">
                 <a:solidFill>
                   <a:srgbClr val="023047"/>
                 </a:solidFill>

--- a/presentation/plumetrace_presentation.pptx
+++ b/presentation/plumetrace_presentation.pptx
@@ -778,6 +778,12 @@
               <a:t>Second, Citizens and Surfers: People entering the Pegnitz at the Fuchslochwelle or in city parks have zero real-time warning. They unknowingly expose themselves to acute bacterial contamination because municipal data is either delayed by days or buried in complex chemical reports.</a:t>
             </a:r>
           </a:p>
+          <a:p/>
+          <a:p>
+            <a:r>
+              <a:t>This brings us to our formal challenge definition: How can digital twinning be applied to autonomous systems to detect and localize transient Combined Sewer Overflows for environmental authorities?</a:t>
+            </a:r>
+          </a:p>
         </p:txBody>
       </p:sp>
       <p:sp>
@@ -845,23 +851,25 @@
           <a:lstStyle/>
           <a:p>
             <a:r>
-              <a:t>To solve this, we designed the PlumeTrace System Architecture across three tightly synchronized tiers:</a:t>
+              <a:t>Here is our overarching technical solution: PlumeTrace connects physical robotics, cloud digital twinning, and municipal decision-making into one unified ecosystem.</a:t>
             </a:r>
           </a:p>
           <a:p/>
           <a:p>
             <a:r>
-              <a:t>On the water, our Physical Platform is a robotic surface vessel equipped with ROS 2 Jazzy, 360-degree LiDAR, tracking cameras, and emulated real-time chemical payloads.</a:t>
-            </a:r>
-          </a:p>
-          <a:p>
-            <a:r>
-              <a:t>In the cloud, a Simulation Mirror running Gazebo Harmonic tracks physics and obstacles in real time, validating robot health and sensor sanity.</a:t>
-            </a:r>
-          </a:p>
-          <a:p>
-            <a:r>
-              <a:t>At the command level, our 3D Digital Twin in CesiumJS visualizes Bavarian LOD2 building and river geometry, streaming live WebSocket telemetry to generate actionable heatmaps and asset health scores for city managers.</a:t>
+              <a:t>First, on the water: An Autonomous Surface Vessel continuously patrols the Pegnitz corridor, equipped with chemical sensors for ammonium and dissolved oxygen, and 360-degree LiDAR mapping riverbank morphology.</a:t>
+            </a:r>
+          </a:p>
+          <a:p/>
+          <a:p>
+            <a:r>
+              <a:t>Second, in the cloud: A predictive Digital Twin runs hydrodynamic advection-dispersion modeling. By assimilating real-time weather radar from the German Weather Service (DWD) and river discharge, the twin anticipates where storm runoff will arrive and tells the robot where to navigate next.</a:t>
+            </a:r>
+          </a:p>
+          <a:p/>
+          <a:p>
+            <a:r>
+              <a:t>Third, in the city hall: A 3D geospatial dashboard built on CesiumJS and Bavarian LOD2 OpenData translates raw data into outfall asset health scores, enabling targeted infrastructure investment and immediate public warnings.</a:t>
             </a:r>
           </a:p>
         </p:txBody>
@@ -943,7 +951,7 @@
           <a:p/>
           <a:p>
             <a:r>
-              <a:t>Crucially, we build in industrial resilience: a dual obstacle cloud separates smooth rerouting from emergency collision stops, while onboard edge buffers guarantee zero telemetry loss even when wireless links drop.</a:t>
+              <a:t>Why does digital twinning beat traditional static sensors? Static probes suffer from point dilution: they tell you pollution passed, but cannot identify where it originated. By coupling physical sensing with predictive twin simulation, we pinpoint the exact leaking outfall in minutes.</a:t>
             </a:r>
           </a:p>
         </p:txBody>
@@ -1013,28 +1021,19 @@
           <a:lstStyle/>
           <a:p>
             <a:r>
-              <a:t>Why does mobile robotics decisively outperform traditional fixed monitoring networks?</a:t>
+              <a:t>Finally, how do stakeholders interact with PlumeTrace?</a:t>
             </a:r>
           </a:p>
           <a:p/>
           <a:p>
             <a:r>
-              <a:t>First, Gradient Tracing: A static sensor only tells you pollution passed by. A mobile robot follows the plume upstream directly to the faulty outfall pipe.</a:t>
-            </a:r>
-          </a:p>
-          <a:p>
-            <a:r>
-              <a:t>Second, Asset Intelligence: We give water authorities concrete evidence to prioritize multi-million euro infrastructure budgets.</a:t>
-            </a:r>
-          </a:p>
-          <a:p>
-            <a:r>
-              <a:t>Third, Corridor Mapping: LiDAR scans detect physical bank erosion and siltation for EU river renaturation programs.</a:t>
-            </a:r>
-          </a:p>
-          <a:p>
-            <a:r>
-              <a:t>And fourth, Economics: Instead of maintaining hundreds of submerged probes prone to biofouling and flood destruction, one mobile platform delivers continuous, protected spatial coverage.</a:t>
+              <a:t>For Water Authorities (SUN &amp; WWA): We provide concrete asset intelligence. By assigning health scores to specific outfall IDs, we provide the empirical justification needed to prioritize multi-million euro retention basin expansions.</a:t>
+            </a:r>
+          </a:p>
+          <a:p/>
+          <a:p>
+            <a:r>
+              <a:t>For Citizens and Surfers: We expose the Digital Twin via the Model Context Protocol (MCP). Anyone can ask an AI assistant: 'Can I surf at the Fuchslochwelle wave today?' or 'Is the river safe for my dog right now?'. The AI queries live telemetry and forecasts, returning a clear traffic light advisory (Green, Yellow, or Red). This transforms complex environmental chemistry into immediate, transparent public safety.</a:t>
             </a:r>
           </a:p>
         </p:txBody>
@@ -4064,8 +4063,8 @@
         </p:blipFill>
         <p:spPr>
           <a:xfrm>
-            <a:off x="1280160" y="1920240"/>
-            <a:ext cx="3017520" cy="3017520"/>
+            <a:off x="1097280" y="1737360"/>
+            <a:ext cx="3200400" cy="3200400"/>
           </a:xfrm>
           <a:prstGeom prst="rect">
             <a:avLst/>
@@ -4080,8 +4079,8 @@
         </p:nvSpPr>
         <p:spPr>
           <a:xfrm>
-            <a:off x="4663440" y="2103120"/>
-            <a:ext cx="6766560" cy="2743200"/>
+            <a:off x="4572000" y="1920240"/>
+            <a:ext cx="6858000" cy="2926080"/>
           </a:xfrm>
           <a:prstGeom prst="rect">
             <a:avLst/>
@@ -4096,7 +4095,23 @@
           <a:p>
             <a:pPr algn="l">
               <a:spcAft>
-                <a:spcPts val="1400"/>
+                <a:spcPts val="800"/>
+              </a:spcAft>
+              <a:defRPr sz="1300" b="1">
+                <a:solidFill>
+                  <a:srgbClr val="219EBC"/>
+                </a:solidFill>
+                <a:latin typeface="Calibri"/>
+              </a:defRPr>
+            </a:pPr>
+            <a:r>
+              <a:t>EUROTEQ ENGINEERING UNIVERSITY | TRACK 3</a:t>
+            </a:r>
+          </a:p>
+          <a:p>
+            <a:pPr algn="l">
+              <a:spcAft>
+                <a:spcPts val="1000"/>
               </a:spcAft>
               <a:defRPr sz="6400" b="1">
                 <a:solidFill>
@@ -4111,7 +4126,10 @@
           </a:p>
           <a:p>
             <a:pPr algn="l">
-              <a:defRPr sz="2600" b="1">
+              <a:spcAft>
+                <a:spcPts val="2000"/>
+              </a:spcAft>
+              <a:defRPr sz="2400" b="1">
                 <a:solidFill>
                   <a:srgbClr val="023047"/>
                 </a:solidFill>
@@ -4120,6 +4138,177 @@
             </a:pPr>
             <a:r>
               <a:t>Autonomous Water Protection for the Pegnitz River</a:t>
+            </a:r>
+          </a:p>
+        </p:txBody>
+      </p:sp>
+      <p:sp>
+        <p:nvSpPr>
+          <p:cNvPr id="4" name="Rounded Rectangle 3"/>
+          <p:cNvSpPr/>
+          <p:nvPr/>
+        </p:nvSpPr>
+        <p:spPr>
+          <a:xfrm>
+            <a:off x="4572000" y="4389120"/>
+            <a:ext cx="2103120" cy="384048"/>
+          </a:xfrm>
+          <a:prstGeom prst="roundRect">
+            <a:avLst>
+              <a:gd name="adj" fmla="val 10000"/>
+            </a:avLst>
+          </a:prstGeom>
+          <a:solidFill>
+            <a:srgbClr val="F4F9FC"/>
+          </a:solidFill>
+          <a:ln w="12700">
+            <a:solidFill>
+              <a:srgbClr val="8ECAE6"/>
+            </a:solidFill>
+          </a:ln>
+        </p:spPr>
+        <p:style>
+          <a:lnRef idx="1">
+            <a:schemeClr val="accent1"/>
+          </a:lnRef>
+          <a:fillRef idx="3">
+            <a:schemeClr val="accent1"/>
+          </a:fillRef>
+          <a:effectRef idx="2">
+            <a:schemeClr val="accent1"/>
+          </a:effectRef>
+          <a:fontRef idx="minor">
+            <a:schemeClr val="lt1"/>
+          </a:fontRef>
+        </p:style>
+        <p:txBody>
+          <a:bodyPr rtlCol="0" anchor="ctr" lIns="0" rIns="0" tIns="0" bIns="0"/>
+          <a:lstStyle/>
+          <a:p>
+            <a:pPr algn="ctr">
+              <a:defRPr sz="1100" b="1">
+                <a:solidFill>
+                  <a:srgbClr val="023047"/>
+                </a:solidFill>
+                <a:latin typeface="Calibri"/>
+              </a:defRPr>
+            </a:pPr>
+            <a:r>
+              <a:t>Autonomous River Robotics</a:t>
+            </a:r>
+          </a:p>
+        </p:txBody>
+      </p:sp>
+      <p:sp>
+        <p:nvSpPr>
+          <p:cNvPr id="5" name="Rounded Rectangle 4"/>
+          <p:cNvSpPr/>
+          <p:nvPr/>
+        </p:nvSpPr>
+        <p:spPr>
+          <a:xfrm>
+            <a:off x="6812280" y="4389120"/>
+            <a:ext cx="2103120" cy="384048"/>
+          </a:xfrm>
+          <a:prstGeom prst="roundRect">
+            <a:avLst>
+              <a:gd name="adj" fmla="val 10000"/>
+            </a:avLst>
+          </a:prstGeom>
+          <a:solidFill>
+            <a:srgbClr val="F4F9FC"/>
+          </a:solidFill>
+          <a:ln w="12700">
+            <a:solidFill>
+              <a:srgbClr val="8ECAE6"/>
+            </a:solidFill>
+          </a:ln>
+        </p:spPr>
+        <p:style>
+          <a:lnRef idx="1">
+            <a:schemeClr val="accent1"/>
+          </a:lnRef>
+          <a:fillRef idx="3">
+            <a:schemeClr val="accent1"/>
+          </a:fillRef>
+          <a:effectRef idx="2">
+            <a:schemeClr val="accent1"/>
+          </a:effectRef>
+          <a:fontRef idx="minor">
+            <a:schemeClr val="lt1"/>
+          </a:fontRef>
+        </p:style>
+        <p:txBody>
+          <a:bodyPr rtlCol="0" anchor="ctr" lIns="0" rIns="0" tIns="0" bIns="0"/>
+          <a:lstStyle/>
+          <a:p>
+            <a:pPr algn="ctr">
+              <a:defRPr sz="1100" b="1">
+                <a:solidFill>
+                  <a:srgbClr val="023047"/>
+                </a:solidFill>
+                <a:latin typeface="Calibri"/>
+              </a:defRPr>
+            </a:pPr>
+            <a:r>
+              <a:t>Predictive Digital Twin</a:t>
+            </a:r>
+          </a:p>
+        </p:txBody>
+      </p:sp>
+      <p:sp>
+        <p:nvSpPr>
+          <p:cNvPr id="6" name="Rounded Rectangle 5"/>
+          <p:cNvSpPr/>
+          <p:nvPr/>
+        </p:nvSpPr>
+        <p:spPr>
+          <a:xfrm>
+            <a:off x="9052560" y="4389120"/>
+            <a:ext cx="2103120" cy="384048"/>
+          </a:xfrm>
+          <a:prstGeom prst="roundRect">
+            <a:avLst>
+              <a:gd name="adj" fmla="val 10000"/>
+            </a:avLst>
+          </a:prstGeom>
+          <a:solidFill>
+            <a:srgbClr val="F4F9FC"/>
+          </a:solidFill>
+          <a:ln w="12700">
+            <a:solidFill>
+              <a:srgbClr val="8ECAE6"/>
+            </a:solidFill>
+          </a:ln>
+        </p:spPr>
+        <p:style>
+          <a:lnRef idx="1">
+            <a:schemeClr val="accent1"/>
+          </a:lnRef>
+          <a:fillRef idx="3">
+            <a:schemeClr val="accent1"/>
+          </a:fillRef>
+          <a:effectRef idx="2">
+            <a:schemeClr val="accent1"/>
+          </a:effectRef>
+          <a:fontRef idx="minor">
+            <a:schemeClr val="lt1"/>
+          </a:fontRef>
+        </p:style>
+        <p:txBody>
+          <a:bodyPr rtlCol="0" anchor="ctr" lIns="0" rIns="0" tIns="0" bIns="0"/>
+          <a:lstStyle/>
+          <a:p>
+            <a:pPr algn="ctr">
+              <a:defRPr sz="1100" b="1">
+                <a:solidFill>
+                  <a:srgbClr val="023047"/>
+                </a:solidFill>
+                <a:latin typeface="Calibri"/>
+              </a:defRPr>
+            </a:pPr>
+            <a:r>
+              <a:t>AI &amp; Open Data Interface</a:t>
             </a:r>
           </a:p>
         </p:txBody>
@@ -4158,8 +4347,8 @@
         </p:nvSpPr>
         <p:spPr>
           <a:xfrm>
-            <a:off x="731520" y="502920"/>
-            <a:ext cx="10728655" cy="822960"/>
+            <a:off x="731520" y="411480"/>
+            <a:ext cx="9144000" cy="292608"/>
           </a:xfrm>
           <a:prstGeom prst="rect">
             <a:avLst/>
@@ -4172,8 +4361,44 @@
           </a:bodyPr>
           <a:lstStyle/>
           <a:p>
+            <a:pPr>
+              <a:defRPr sz="1100" b="1">
+                <a:solidFill>
+                  <a:srgbClr val="219EBC"/>
+                </a:solidFill>
+                <a:latin typeface="Calibri"/>
+              </a:defRPr>
+            </a:pPr>
+            <a:r>
+              <a:t>CONTEXT &amp; PROBLEM STATEMENT</a:t>
+            </a:r>
+          </a:p>
+        </p:txBody>
+      </p:sp>
+      <p:sp>
+        <p:nvSpPr>
+          <p:cNvPr id="3" name="TextBox 2"/>
+          <p:cNvSpPr txBox="1"/>
+          <p:nvPr/>
+        </p:nvSpPr>
+        <p:spPr>
+          <a:xfrm>
+            <a:off x="731520" y="658368"/>
+            <a:ext cx="10728655" cy="640080"/>
+          </a:xfrm>
+          <a:prstGeom prst="rect">
+            <a:avLst/>
+          </a:prstGeom>
+          <a:noFill/>
+        </p:spPr>
+        <p:txBody>
+          <a:bodyPr wrap="square" anchor="t" lIns="0" tIns="0" rIns="0" bIns="0">
+            <a:spAutoFit/>
+          </a:bodyPr>
+          <a:lstStyle/>
+          <a:p>
             <a:pPr algn="l">
-              <a:defRPr sz="4000" b="1">
+              <a:defRPr sz="3600" b="1">
                 <a:solidFill>
                   <a:srgbClr val="023047"/>
                 </a:solidFill>
@@ -4188,14 +4413,14 @@
       </p:sp>
       <p:sp>
         <p:nvSpPr>
-          <p:cNvPr id="3" name="Rounded Rectangle 2"/>
+          <p:cNvPr id="4" name="Rounded Rectangle 3"/>
           <p:cNvSpPr/>
           <p:nvPr/>
         </p:nvSpPr>
         <p:spPr>
           <a:xfrm>
-            <a:off x="731520" y="1554480"/>
-            <a:ext cx="5180990" cy="2240280"/>
+            <a:off x="731520" y="1417320"/>
+            <a:ext cx="5180990" cy="2331720"/>
           </a:xfrm>
           <a:prstGeom prst="roundRect">
             <a:avLst>
@@ -4207,7 +4432,7 @@
           </a:solidFill>
           <a:ln w="19050">
             <a:solidFill>
-              <a:srgbClr val="8ECAE6"/>
+              <a:srgbClr val="B4DAEE"/>
             </a:solidFill>
           </a:ln>
         </p:spPr>
@@ -4226,7 +4451,93 @@
           </a:fontRef>
         </p:style>
         <p:txBody>
-          <a:bodyPr rtlCol="0" anchor="t" wrap="square" lIns="320040" rIns="320040" tIns="274320" bIns="228600"/>
+          <a:bodyPr rtlCol="0" anchor="ctr"/>
+          <a:lstStyle/>
+          <a:p>
+            <a:pPr algn="ctr"/>
+          </a:p>
+        </p:txBody>
+      </p:sp>
+      <p:pic>
+        <p:nvPicPr>
+          <p:cNvPr id="5" name="Picture 4" descr="health.png"/>
+          <p:cNvPicPr>
+            <a:picLocks noChangeAspect="1"/>
+          </p:cNvPicPr>
+          <p:nvPr/>
+        </p:nvPicPr>
+        <p:blipFill>
+          <a:blip r:embed="rId2"/>
+          <a:stretch>
+            <a:fillRect/>
+          </a:stretch>
+        </p:blipFill>
+        <p:spPr>
+          <a:xfrm>
+            <a:off x="1005840" y="1636776"/>
+            <a:ext cx="438912" cy="438912"/>
+          </a:xfrm>
+          <a:prstGeom prst="rect">
+            <a:avLst/>
+          </a:prstGeom>
+        </p:spPr>
+      </p:pic>
+      <p:sp>
+        <p:nvSpPr>
+          <p:cNvPr id="6" name="TextBox 5"/>
+          <p:cNvSpPr txBox="1"/>
+          <p:nvPr/>
+        </p:nvSpPr>
+        <p:spPr>
+          <a:xfrm>
+            <a:off x="1536192" y="1581912"/>
+            <a:ext cx="4129430" cy="594360"/>
+          </a:xfrm>
+          <a:prstGeom prst="rect">
+            <a:avLst/>
+          </a:prstGeom>
+          <a:noFill/>
+        </p:spPr>
+        <p:txBody>
+          <a:bodyPr wrap="square" anchor="t" lIns="0" tIns="0" rIns="0" bIns="0">
+            <a:spAutoFit/>
+          </a:bodyPr>
+          <a:lstStyle/>
+          <a:p>
+            <a:pPr algn="l">
+              <a:defRPr sz="2000" b="1">
+                <a:solidFill>
+                  <a:srgbClr val="023047"/>
+                </a:solidFill>
+                <a:latin typeface="Calibri"/>
+              </a:defRPr>
+            </a:pPr>
+            <a:r>
+              <a:t>Public Health</a:t>
+            </a:r>
+          </a:p>
+        </p:txBody>
+      </p:sp>
+      <p:sp>
+        <p:nvSpPr>
+          <p:cNvPr id="7" name="TextBox 6"/>
+          <p:cNvSpPr txBox="1"/>
+          <p:nvPr/>
+        </p:nvSpPr>
+        <p:spPr>
+          <a:xfrm>
+            <a:off x="1024128" y="2167128"/>
+            <a:ext cx="4595774" cy="1097280"/>
+          </a:xfrm>
+          <a:prstGeom prst="rect">
+            <a:avLst/>
+          </a:prstGeom>
+          <a:noFill/>
+        </p:spPr>
+        <p:txBody>
+          <a:bodyPr wrap="square" anchor="t" lIns="0" tIns="0" rIns="0" bIns="0">
+            <a:spAutoFit/>
+          </a:bodyPr>
           <a:lstStyle/>
           <a:p>
             <a:pPr algn="l">
@@ -4234,9 +4545,9 @@
                 <a:spcPts val="0"/>
               </a:spcBef>
               <a:spcAft>
-                <a:spcPts val="1200"/>
+                <a:spcPts val="600"/>
               </a:spcAft>
-              <a:defRPr sz="2200" b="1">
+              <a:defRPr sz="1500">
                 <a:solidFill>
                   <a:srgbClr val="023047"/>
                 </a:solidFill>
@@ -4244,7 +4555,7 @@
               </a:defRPr>
             </a:pPr>
             <a:r>
-              <a:t>Public Health</a:t>
+              <a:t>-  Raw sewage spikes after convective rainfall</a:t>
             </a:r>
           </a:p>
           <a:p>
@@ -4253,9 +4564,9 @@
                 <a:spcPts val="0"/>
               </a:spcBef>
               <a:spcAft>
-                <a:spcPts val="900"/>
+                <a:spcPts val="600"/>
               </a:spcAft>
-              <a:defRPr sz="1600">
+              <a:defRPr sz="1500">
                 <a:solidFill>
                   <a:srgbClr val="023047"/>
                 </a:solidFill>
@@ -4263,18 +4574,205 @@
               </a:defRPr>
             </a:pPr>
             <a:r>
-              <a:t>-  Raw sewage spikes after rainfall</a:t>
-            </a:r>
-          </a:p>
+              <a:t>-  Instant health risk for surfers, waders, and park visitors</a:t>
+            </a:r>
+          </a:p>
+        </p:txBody>
+      </p:sp>
+      <p:sp>
+        <p:nvSpPr>
+          <p:cNvPr id="8" name="Rounded Rectangle 7"/>
+          <p:cNvSpPr/>
+          <p:nvPr/>
+        </p:nvSpPr>
+        <p:spPr>
+          <a:xfrm>
+            <a:off x="987552" y="3291840"/>
+            <a:ext cx="4668926" cy="320040"/>
+          </a:xfrm>
+          <a:prstGeom prst="roundRect">
+            <a:avLst>
+              <a:gd name="adj" fmla="val 8000"/>
+            </a:avLst>
+          </a:prstGeom>
+          <a:solidFill>
+            <a:srgbClr val="EBF4FA"/>
+          </a:solidFill>
+          <a:ln w="12700">
+            <a:solidFill>
+              <a:srgbClr val="8ECAE6"/>
+            </a:solidFill>
+          </a:ln>
+        </p:spPr>
+        <p:style>
+          <a:lnRef idx="1">
+            <a:schemeClr val="accent1"/>
+          </a:lnRef>
+          <a:fillRef idx="3">
+            <a:schemeClr val="accent1"/>
+          </a:fillRef>
+          <a:effectRef idx="2">
+            <a:schemeClr val="accent1"/>
+          </a:effectRef>
+          <a:fontRef idx="minor">
+            <a:schemeClr val="lt1"/>
+          </a:fontRef>
+        </p:style>
+        <p:txBody>
+          <a:bodyPr rtlCol="0" anchor="ctr" wrap="square" lIns="137160" rIns="137160" tIns="0" bIns="0"/>
+          <a:lstStyle/>
+          <a:p>
+            <a:pPr algn="l">
+              <a:defRPr sz="1100" b="1">
+                <a:solidFill>
+                  <a:srgbClr val="219EBC"/>
+                </a:solidFill>
+                <a:latin typeface="Calibri"/>
+              </a:defRPr>
+            </a:pPr>
+            <a:r>
+              <a:t>Fuchslochwelle Surf Wave  |  Acute Bacterial Risk</a:t>
+            </a:r>
+          </a:p>
+        </p:txBody>
+      </p:sp>
+      <p:sp>
+        <p:nvSpPr>
+          <p:cNvPr id="9" name="Rounded Rectangle 8"/>
+          <p:cNvSpPr/>
+          <p:nvPr/>
+        </p:nvSpPr>
+        <p:spPr>
+          <a:xfrm>
+            <a:off x="6278270" y="1417320"/>
+            <a:ext cx="5180990" cy="2331720"/>
+          </a:xfrm>
+          <a:prstGeom prst="roundRect">
+            <a:avLst>
+              <a:gd name="adj" fmla="val 3500"/>
+            </a:avLst>
+          </a:prstGeom>
+          <a:solidFill>
+            <a:srgbClr val="F4F9FC"/>
+          </a:solidFill>
+          <a:ln w="19050">
+            <a:solidFill>
+              <a:srgbClr val="B4DAEE"/>
+            </a:solidFill>
+          </a:ln>
+        </p:spPr>
+        <p:style>
+          <a:lnRef idx="1">
+            <a:schemeClr val="accent1"/>
+          </a:lnRef>
+          <a:fillRef idx="3">
+            <a:schemeClr val="accent1"/>
+          </a:fillRef>
+          <a:effectRef idx="2">
+            <a:schemeClr val="accent1"/>
+          </a:effectRef>
+          <a:fontRef idx="minor">
+            <a:schemeClr val="lt1"/>
+          </a:fontRef>
+        </p:style>
+        <p:txBody>
+          <a:bodyPr rtlCol="0" anchor="ctr"/>
+          <a:lstStyle/>
+          <a:p>
+            <a:pPr algn="ctr"/>
+          </a:p>
+        </p:txBody>
+      </p:sp>
+      <p:pic>
+        <p:nvPicPr>
+          <p:cNvPr id="10" name="Picture 9" descr="storm_pipe.png"/>
+          <p:cNvPicPr>
+            <a:picLocks noChangeAspect="1"/>
+          </p:cNvPicPr>
+          <p:nvPr/>
+        </p:nvPicPr>
+        <p:blipFill>
+          <a:blip r:embed="rId3"/>
+          <a:stretch>
+            <a:fillRect/>
+          </a:stretch>
+        </p:blipFill>
+        <p:spPr>
+          <a:xfrm>
+            <a:off x="6552590" y="1636776"/>
+            <a:ext cx="438912" cy="438912"/>
+          </a:xfrm>
+          <a:prstGeom prst="rect">
+            <a:avLst/>
+          </a:prstGeom>
+        </p:spPr>
+      </p:pic>
+      <p:sp>
+        <p:nvSpPr>
+          <p:cNvPr id="11" name="TextBox 10"/>
+          <p:cNvSpPr txBox="1"/>
+          <p:nvPr/>
+        </p:nvSpPr>
+        <p:spPr>
+          <a:xfrm>
+            <a:off x="7082942" y="1581912"/>
+            <a:ext cx="4129430" cy="594360"/>
+          </a:xfrm>
+          <a:prstGeom prst="rect">
+            <a:avLst/>
+          </a:prstGeom>
+          <a:noFill/>
+        </p:spPr>
+        <p:txBody>
+          <a:bodyPr wrap="square" anchor="t" lIns="0" tIns="0" rIns="0" bIns="0">
+            <a:spAutoFit/>
+          </a:bodyPr>
+          <a:lstStyle/>
+          <a:p>
+            <a:pPr algn="l">
+              <a:defRPr sz="2000" b="1">
+                <a:solidFill>
+                  <a:srgbClr val="023047"/>
+                </a:solidFill>
+                <a:latin typeface="Calibri"/>
+              </a:defRPr>
+            </a:pPr>
+            <a:r>
+              <a:t>Sewer Overflows (CSOs)</a:t>
+            </a:r>
+          </a:p>
+        </p:txBody>
+      </p:sp>
+      <p:sp>
+        <p:nvSpPr>
+          <p:cNvPr id="12" name="TextBox 11"/>
+          <p:cNvSpPr txBox="1"/>
+          <p:nvPr/>
+        </p:nvSpPr>
+        <p:spPr>
+          <a:xfrm>
+            <a:off x="6570878" y="2167128"/>
+            <a:ext cx="4595774" cy="1097280"/>
+          </a:xfrm>
+          <a:prstGeom prst="rect">
+            <a:avLst/>
+          </a:prstGeom>
+          <a:noFill/>
+        </p:spPr>
+        <p:txBody>
+          <a:bodyPr wrap="square" anchor="t" lIns="0" tIns="0" rIns="0" bIns="0">
+            <a:spAutoFit/>
+          </a:bodyPr>
+          <a:lstStyle/>
           <a:p>
             <a:pPr algn="l">
               <a:spcBef>
                 <a:spcPts val="0"/>
               </a:spcBef>
               <a:spcAft>
-                <a:spcPts val="900"/>
+                <a:spcPts val="600"/>
               </a:spcAft>
-              <a:defRPr sz="1600">
+              <a:defRPr sz="1500">
                 <a:solidFill>
                   <a:srgbClr val="023047"/>
                 </a:solidFill>
@@ -4282,21 +4780,97 @@
               </a:defRPr>
             </a:pPr>
             <a:r>
-              <a:t>-  Instant health risk for surfers, waders, and park visitors</a:t>
-            </a:r>
-          </a:p>
-        </p:txBody>
-      </p:sp>
-      <p:sp>
-        <p:nvSpPr>
-          <p:cNvPr id="4" name="Rounded Rectangle 3"/>
+              <a:t>-  1,500 km municipal network overloaded by storms</a:t>
+            </a:r>
+          </a:p>
+          <a:p>
+            <a:pPr algn="l">
+              <a:spcBef>
+                <a:spcPts val="0"/>
+              </a:spcBef>
+              <a:spcAft>
+                <a:spcPts val="600"/>
+              </a:spcAft>
+              <a:defRPr sz="1500">
+                <a:solidFill>
+                  <a:srgbClr val="023047"/>
+                </a:solidFill>
+                <a:latin typeface="Calibri"/>
+              </a:defRPr>
+            </a:pPr>
+            <a:r>
+              <a:t>-  1.5M - 5M+ EUR cost per retention basin</a:t>
+            </a:r>
+          </a:p>
+        </p:txBody>
+      </p:sp>
+      <p:sp>
+        <p:nvSpPr>
+          <p:cNvPr id="13" name="Rounded Rectangle 12"/>
           <p:cNvSpPr/>
           <p:nvPr/>
         </p:nvSpPr>
         <p:spPr>
           <a:xfrm>
-            <a:off x="6278270" y="1554480"/>
-            <a:ext cx="5180990" cy="2240280"/>
+            <a:off x="6534302" y="3291840"/>
+            <a:ext cx="4668926" cy="320040"/>
+          </a:xfrm>
+          <a:prstGeom prst="roundRect">
+            <a:avLst>
+              <a:gd name="adj" fmla="val 8000"/>
+            </a:avLst>
+          </a:prstGeom>
+          <a:solidFill>
+            <a:srgbClr val="EBF4FA"/>
+          </a:solidFill>
+          <a:ln w="12700">
+            <a:solidFill>
+              <a:srgbClr val="8ECAE6"/>
+            </a:solidFill>
+          </a:ln>
+        </p:spPr>
+        <p:style>
+          <a:lnRef idx="1">
+            <a:schemeClr val="accent1"/>
+          </a:lnRef>
+          <a:fillRef idx="3">
+            <a:schemeClr val="accent1"/>
+          </a:fillRef>
+          <a:effectRef idx="2">
+            <a:schemeClr val="accent1"/>
+          </a:effectRef>
+          <a:fontRef idx="minor">
+            <a:schemeClr val="lt1"/>
+          </a:fontRef>
+        </p:style>
+        <p:txBody>
+          <a:bodyPr rtlCol="0" anchor="ctr" wrap="square" lIns="137160" rIns="137160" tIns="0" bIns="0"/>
+          <a:lstStyle/>
+          <a:p>
+            <a:pPr algn="l">
+              <a:defRPr sz="1100" b="1">
+                <a:solidFill>
+                  <a:srgbClr val="219EBC"/>
+                </a:solidFill>
+                <a:latin typeface="Calibri"/>
+              </a:defRPr>
+            </a:pPr>
+            <a:r>
+              <a:t>1,500 km Sewer Grid  |  €1.5M - €5M+ CapEx per Basin</a:t>
+            </a:r>
+          </a:p>
+        </p:txBody>
+      </p:sp>
+      <p:sp>
+        <p:nvSpPr>
+          <p:cNvPr id="14" name="Rounded Rectangle 13"/>
+          <p:cNvSpPr/>
+          <p:nvPr/>
+        </p:nvSpPr>
+        <p:spPr>
+          <a:xfrm>
+            <a:off x="731520" y="3977639"/>
+            <a:ext cx="5180990" cy="2331720"/>
           </a:xfrm>
           <a:prstGeom prst="roundRect">
             <a:avLst>
@@ -4308,7 +4882,7 @@
           </a:solidFill>
           <a:ln w="19050">
             <a:solidFill>
-              <a:srgbClr val="8ECAE6"/>
+              <a:srgbClr val="B4DAEE"/>
             </a:solidFill>
           </a:ln>
         </p:spPr>
@@ -4327,7 +4901,93 @@
           </a:fontRef>
         </p:style>
         <p:txBody>
-          <a:bodyPr rtlCol="0" anchor="t" wrap="square" lIns="320040" rIns="320040" tIns="274320" bIns="228600"/>
+          <a:bodyPr rtlCol="0" anchor="ctr"/>
+          <a:lstStyle/>
+          <a:p>
+            <a:pPr algn="ctr"/>
+          </a:p>
+        </p:txBody>
+      </p:sp>
+      <p:pic>
+        <p:nvPicPr>
+          <p:cNvPr id="15" name="Picture 14" descr="agriculture.png"/>
+          <p:cNvPicPr>
+            <a:picLocks noChangeAspect="1"/>
+          </p:cNvPicPr>
+          <p:nvPr/>
+        </p:nvPicPr>
+        <p:blipFill>
+          <a:blip r:embed="rId4"/>
+          <a:stretch>
+            <a:fillRect/>
+          </a:stretch>
+        </p:blipFill>
+        <p:spPr>
+          <a:xfrm>
+            <a:off x="1005840" y="4197095"/>
+            <a:ext cx="438912" cy="438912"/>
+          </a:xfrm>
+          <a:prstGeom prst="rect">
+            <a:avLst/>
+          </a:prstGeom>
+        </p:spPr>
+      </p:pic>
+      <p:sp>
+        <p:nvSpPr>
+          <p:cNvPr id="16" name="TextBox 15"/>
+          <p:cNvSpPr txBox="1"/>
+          <p:nvPr/>
+        </p:nvSpPr>
+        <p:spPr>
+          <a:xfrm>
+            <a:off x="1536192" y="4142231"/>
+            <a:ext cx="4129430" cy="594360"/>
+          </a:xfrm>
+          <a:prstGeom prst="rect">
+            <a:avLst/>
+          </a:prstGeom>
+          <a:noFill/>
+        </p:spPr>
+        <p:txBody>
+          <a:bodyPr wrap="square" anchor="t" lIns="0" tIns="0" rIns="0" bIns="0">
+            <a:spAutoFit/>
+          </a:bodyPr>
+          <a:lstStyle/>
+          <a:p>
+            <a:pPr algn="l">
+              <a:defRPr sz="2000" b="1">
+                <a:solidFill>
+                  <a:srgbClr val="023047"/>
+                </a:solidFill>
+                <a:latin typeface="Calibri"/>
+              </a:defRPr>
+            </a:pPr>
+            <a:r>
+              <a:t>Knoblauchsland Agriculture</a:t>
+            </a:r>
+          </a:p>
+        </p:txBody>
+      </p:sp>
+      <p:sp>
+        <p:nvSpPr>
+          <p:cNvPr id="17" name="TextBox 16"/>
+          <p:cNvSpPr txBox="1"/>
+          <p:nvPr/>
+        </p:nvSpPr>
+        <p:spPr>
+          <a:xfrm>
+            <a:off x="1024128" y="4727447"/>
+            <a:ext cx="4595774" cy="1097280"/>
+          </a:xfrm>
+          <a:prstGeom prst="rect">
+            <a:avLst/>
+          </a:prstGeom>
+          <a:noFill/>
+        </p:spPr>
+        <p:txBody>
+          <a:bodyPr wrap="square" anchor="t" lIns="0" tIns="0" rIns="0" bIns="0">
+            <a:spAutoFit/>
+          </a:bodyPr>
           <a:lstStyle/>
           <a:p>
             <a:pPr algn="l">
@@ -4335,9 +4995,9 @@
                 <a:spcPts val="0"/>
               </a:spcBef>
               <a:spcAft>
-                <a:spcPts val="1200"/>
+                <a:spcPts val="600"/>
               </a:spcAft>
-              <a:defRPr sz="2200" b="1">
+              <a:defRPr sz="1500">
                 <a:solidFill>
                   <a:srgbClr val="023047"/>
                 </a:solidFill>
@@ -4345,7 +5005,7 @@
               </a:defRPr>
             </a:pPr>
             <a:r>
-              <a:t>Sewer Overflows (CSOs)</a:t>
+              <a:t>-  Nitrate leaching into drinking water aquifers</a:t>
             </a:r>
           </a:p>
           <a:p>
@@ -4354,9 +5014,9 @@
                 <a:spcPts val="0"/>
               </a:spcBef>
               <a:spcAft>
-                <a:spcPts val="900"/>
+                <a:spcPts val="600"/>
               </a:spcAft>
-              <a:defRPr sz="1600">
+              <a:defRPr sz="1500">
                 <a:solidFill>
                   <a:srgbClr val="023047"/>
                 </a:solidFill>
@@ -4364,18 +5024,205 @@
               </a:defRPr>
             </a:pPr>
             <a:r>
-              <a:t>-  1,500 km municipal network overloaded by storms</a:t>
-            </a:r>
-          </a:p>
+              <a:t>-  Strict EU limits and compliance penalties</a:t>
+            </a:r>
+          </a:p>
+        </p:txBody>
+      </p:sp>
+      <p:sp>
+        <p:nvSpPr>
+          <p:cNvPr id="18" name="Rounded Rectangle 17"/>
+          <p:cNvSpPr/>
+          <p:nvPr/>
+        </p:nvSpPr>
+        <p:spPr>
+          <a:xfrm>
+            <a:off x="987552" y="5852159"/>
+            <a:ext cx="4668926" cy="320040"/>
+          </a:xfrm>
+          <a:prstGeom prst="roundRect">
+            <a:avLst>
+              <a:gd name="adj" fmla="val 8000"/>
+            </a:avLst>
+          </a:prstGeom>
+          <a:solidFill>
+            <a:srgbClr val="EBF4FA"/>
+          </a:solidFill>
+          <a:ln w="12700">
+            <a:solidFill>
+              <a:srgbClr val="8ECAE6"/>
+            </a:solidFill>
+          </a:ln>
+        </p:spPr>
+        <p:style>
+          <a:lnRef idx="1">
+            <a:schemeClr val="accent1"/>
+          </a:lnRef>
+          <a:fillRef idx="3">
+            <a:schemeClr val="accent1"/>
+          </a:fillRef>
+          <a:effectRef idx="2">
+            <a:schemeClr val="accent1"/>
+          </a:effectRef>
+          <a:fontRef idx="minor">
+            <a:schemeClr val="lt1"/>
+          </a:fontRef>
+        </p:style>
+        <p:txBody>
+          <a:bodyPr rtlCol="0" anchor="ctr" wrap="square" lIns="137160" rIns="137160" tIns="0" bIns="0"/>
+          <a:lstStyle/>
+          <a:p>
+            <a:pPr algn="l">
+              <a:defRPr sz="1100" b="1">
+                <a:solidFill>
+                  <a:srgbClr val="219EBC"/>
+                </a:solidFill>
+                <a:latin typeface="Calibri"/>
+              </a:defRPr>
+            </a:pPr>
+            <a:r>
+              <a:t>Alluvial Drinking Aquifers  |  EU Compliance Risk</a:t>
+            </a:r>
+          </a:p>
+        </p:txBody>
+      </p:sp>
+      <p:sp>
+        <p:nvSpPr>
+          <p:cNvPr id="19" name="Rounded Rectangle 18"/>
+          <p:cNvSpPr/>
+          <p:nvPr/>
+        </p:nvSpPr>
+        <p:spPr>
+          <a:xfrm>
+            <a:off x="6278270" y="3977639"/>
+            <a:ext cx="5180990" cy="2331720"/>
+          </a:xfrm>
+          <a:prstGeom prst="roundRect">
+            <a:avLst>
+              <a:gd name="adj" fmla="val 3500"/>
+            </a:avLst>
+          </a:prstGeom>
+          <a:solidFill>
+            <a:srgbClr val="F4F9FC"/>
+          </a:solidFill>
+          <a:ln w="19050">
+            <a:solidFill>
+              <a:srgbClr val="B4DAEE"/>
+            </a:solidFill>
+          </a:ln>
+        </p:spPr>
+        <p:style>
+          <a:lnRef idx="1">
+            <a:schemeClr val="accent1"/>
+          </a:lnRef>
+          <a:fillRef idx="3">
+            <a:schemeClr val="accent1"/>
+          </a:fillRef>
+          <a:effectRef idx="2">
+            <a:schemeClr val="accent1"/>
+          </a:effectRef>
+          <a:fontRef idx="minor">
+            <a:schemeClr val="lt1"/>
+          </a:fontRef>
+        </p:style>
+        <p:txBody>
+          <a:bodyPr rtlCol="0" anchor="ctr"/>
+          <a:lstStyle/>
+          <a:p>
+            <a:pPr algn="ctr"/>
+          </a:p>
+        </p:txBody>
+      </p:sp>
+      <p:pic>
+        <p:nvPicPr>
+          <p:cNvPr id="20" name="Picture 19" descr="drought.png"/>
+          <p:cNvPicPr>
+            <a:picLocks noChangeAspect="1"/>
+          </p:cNvPicPr>
+          <p:nvPr/>
+        </p:nvPicPr>
+        <p:blipFill>
+          <a:blip r:embed="rId5"/>
+          <a:stretch>
+            <a:fillRect/>
+          </a:stretch>
+        </p:blipFill>
+        <p:spPr>
+          <a:xfrm>
+            <a:off x="6552590" y="4197095"/>
+            <a:ext cx="438912" cy="438912"/>
+          </a:xfrm>
+          <a:prstGeom prst="rect">
+            <a:avLst/>
+          </a:prstGeom>
+        </p:spPr>
+      </p:pic>
+      <p:sp>
+        <p:nvSpPr>
+          <p:cNvPr id="21" name="TextBox 20"/>
+          <p:cNvSpPr txBox="1"/>
+          <p:nvPr/>
+        </p:nvSpPr>
+        <p:spPr>
+          <a:xfrm>
+            <a:off x="7082942" y="4142231"/>
+            <a:ext cx="4129430" cy="594360"/>
+          </a:xfrm>
+          <a:prstGeom prst="rect">
+            <a:avLst/>
+          </a:prstGeom>
+          <a:noFill/>
+        </p:spPr>
+        <p:txBody>
+          <a:bodyPr wrap="square" anchor="t" lIns="0" tIns="0" rIns="0" bIns="0">
+            <a:spAutoFit/>
+          </a:bodyPr>
+          <a:lstStyle/>
+          <a:p>
+            <a:pPr algn="l">
+              <a:defRPr sz="2000" b="1">
+                <a:solidFill>
+                  <a:srgbClr val="023047"/>
+                </a:solidFill>
+                <a:latin typeface="Calibri"/>
+              </a:defRPr>
+            </a:pPr>
+            <a:r>
+              <a:t>Summer Heat and Drought</a:t>
+            </a:r>
+          </a:p>
+        </p:txBody>
+      </p:sp>
+      <p:sp>
+        <p:nvSpPr>
+          <p:cNvPr id="22" name="TextBox 21"/>
+          <p:cNvSpPr txBox="1"/>
+          <p:nvPr/>
+        </p:nvSpPr>
+        <p:spPr>
+          <a:xfrm>
+            <a:off x="6570878" y="4727447"/>
+            <a:ext cx="4595774" cy="1097280"/>
+          </a:xfrm>
+          <a:prstGeom prst="rect">
+            <a:avLst/>
+          </a:prstGeom>
+          <a:noFill/>
+        </p:spPr>
+        <p:txBody>
+          <a:bodyPr wrap="square" anchor="t" lIns="0" tIns="0" rIns="0" bIns="0">
+            <a:spAutoFit/>
+          </a:bodyPr>
+          <a:lstStyle/>
           <a:p>
             <a:pPr algn="l">
               <a:spcBef>
                 <a:spcPts val="0"/>
               </a:spcBef>
               <a:spcAft>
-                <a:spcPts val="900"/>
+                <a:spcPts val="600"/>
               </a:spcAft>
-              <a:defRPr sz="1600">
+              <a:defRPr sz="1500">
                 <a:solidFill>
                   <a:srgbClr val="023047"/>
                 </a:solidFill>
@@ -4383,31 +5230,50 @@
               </a:defRPr>
             </a:pPr>
             <a:r>
-              <a:t>-  1.5M - 5M+ EUR cost per retention basin</a:t>
-            </a:r>
-          </a:p>
-        </p:txBody>
-      </p:sp>
-      <p:sp>
-        <p:nvSpPr>
-          <p:cNvPr id="5" name="Rounded Rectangle 4"/>
+              <a:t>-  Low flow concentrates urban pollutants</a:t>
+            </a:r>
+          </a:p>
+          <a:p>
+            <a:pPr algn="l">
+              <a:spcBef>
+                <a:spcPts val="0"/>
+              </a:spcBef>
+              <a:spcAft>
+                <a:spcPts val="600"/>
+              </a:spcAft>
+              <a:defRPr sz="1500">
+                <a:solidFill>
+                  <a:srgbClr val="023047"/>
+                </a:solidFill>
+                <a:latin typeface="Calibri"/>
+              </a:defRPr>
+            </a:pPr>
+            <a:r>
+              <a:t>-  Dissolved oxygen drops &lt; 3 mg/L causing fish mortality</a:t>
+            </a:r>
+          </a:p>
+        </p:txBody>
+      </p:sp>
+      <p:sp>
+        <p:nvSpPr>
+          <p:cNvPr id="23" name="Rounded Rectangle 22"/>
           <p:cNvSpPr/>
           <p:nvPr/>
         </p:nvSpPr>
         <p:spPr>
           <a:xfrm>
-            <a:off x="731520" y="4069080"/>
-            <a:ext cx="5180990" cy="2240280"/>
+            <a:off x="6534302" y="5852159"/>
+            <a:ext cx="4668926" cy="320040"/>
           </a:xfrm>
           <a:prstGeom prst="roundRect">
             <a:avLst>
-              <a:gd name="adj" fmla="val 3500"/>
+              <a:gd name="adj" fmla="val 8000"/>
             </a:avLst>
           </a:prstGeom>
           <a:solidFill>
-            <a:srgbClr val="F4F9FC"/>
+            <a:srgbClr val="EBF4FA"/>
           </a:solidFill>
-          <a:ln w="19050">
+          <a:ln w="12700">
             <a:solidFill>
               <a:srgbClr val="8ECAE6"/>
             </a:solidFill>
@@ -4428,164 +5294,19 @@
           </a:fontRef>
         </p:style>
         <p:txBody>
-          <a:bodyPr rtlCol="0" anchor="t" wrap="square" lIns="320040" rIns="320040" tIns="274320" bIns="228600"/>
+          <a:bodyPr rtlCol="0" anchor="ctr" wrap="square" lIns="137160" rIns="137160" tIns="0" bIns="0"/>
           <a:lstStyle/>
           <a:p>
             <a:pPr algn="l">
-              <a:spcBef>
-                <a:spcPts val="0"/>
-              </a:spcBef>
-              <a:spcAft>
-                <a:spcPts val="1200"/>
-              </a:spcAft>
-              <a:defRPr sz="2200" b="1">
-                <a:solidFill>
-                  <a:srgbClr val="023047"/>
-                </a:solidFill>
-                <a:latin typeface="Calibri"/>
-              </a:defRPr>
-            </a:pPr>
-            <a:r>
-              <a:t>Knoblauchsland Agriculture</a:t>
-            </a:r>
-          </a:p>
-          <a:p>
-            <a:pPr algn="l">
-              <a:spcBef>
-                <a:spcPts val="0"/>
-              </a:spcBef>
-              <a:spcAft>
-                <a:spcPts val="900"/>
-              </a:spcAft>
-              <a:defRPr sz="1600">
-                <a:solidFill>
-                  <a:srgbClr val="023047"/>
-                </a:solidFill>
-                <a:latin typeface="Calibri"/>
-              </a:defRPr>
-            </a:pPr>
-            <a:r>
-              <a:t>-  Nitrate leaching into drinking water aquifers</a:t>
-            </a:r>
-          </a:p>
-          <a:p>
-            <a:pPr algn="l">
-              <a:spcBef>
-                <a:spcPts val="0"/>
-              </a:spcBef>
-              <a:spcAft>
-                <a:spcPts val="900"/>
-              </a:spcAft>
-              <a:defRPr sz="1600">
-                <a:solidFill>
-                  <a:srgbClr val="023047"/>
-                </a:solidFill>
-                <a:latin typeface="Calibri"/>
-              </a:defRPr>
-            </a:pPr>
-            <a:r>
-              <a:t>-  Strict EU limits and compliance pressure</a:t>
-            </a:r>
-          </a:p>
-        </p:txBody>
-      </p:sp>
-      <p:sp>
-        <p:nvSpPr>
-          <p:cNvPr id="6" name="Rounded Rectangle 5"/>
-          <p:cNvSpPr/>
-          <p:nvPr/>
-        </p:nvSpPr>
-        <p:spPr>
-          <a:xfrm>
-            <a:off x="6278270" y="4069080"/>
-            <a:ext cx="5180990" cy="2240280"/>
-          </a:xfrm>
-          <a:prstGeom prst="roundRect">
-            <a:avLst>
-              <a:gd name="adj" fmla="val 3500"/>
-            </a:avLst>
-          </a:prstGeom>
-          <a:solidFill>
-            <a:srgbClr val="F4F9FC"/>
-          </a:solidFill>
-          <a:ln w="19050">
-            <a:solidFill>
-              <a:srgbClr val="8ECAE6"/>
-            </a:solidFill>
-          </a:ln>
-        </p:spPr>
-        <p:style>
-          <a:lnRef idx="1">
-            <a:schemeClr val="accent1"/>
-          </a:lnRef>
-          <a:fillRef idx="3">
-            <a:schemeClr val="accent1"/>
-          </a:fillRef>
-          <a:effectRef idx="2">
-            <a:schemeClr val="accent1"/>
-          </a:effectRef>
-          <a:fontRef idx="minor">
-            <a:schemeClr val="lt1"/>
-          </a:fontRef>
-        </p:style>
-        <p:txBody>
-          <a:bodyPr rtlCol="0" anchor="t" wrap="square" lIns="320040" rIns="320040" tIns="274320" bIns="228600"/>
-          <a:lstStyle/>
-          <a:p>
-            <a:pPr algn="l">
-              <a:spcBef>
-                <a:spcPts val="0"/>
-              </a:spcBef>
-              <a:spcAft>
-                <a:spcPts val="1200"/>
-              </a:spcAft>
-              <a:defRPr sz="2200" b="1">
-                <a:solidFill>
-                  <a:srgbClr val="023047"/>
-                </a:solidFill>
-                <a:latin typeface="Calibri"/>
-              </a:defRPr>
-            </a:pPr>
-            <a:r>
-              <a:t>Summer Heat and Drought</a:t>
-            </a:r>
-          </a:p>
-          <a:p>
-            <a:pPr algn="l">
-              <a:spcBef>
-                <a:spcPts val="0"/>
-              </a:spcBef>
-              <a:spcAft>
-                <a:spcPts val="900"/>
-              </a:spcAft>
-              <a:defRPr sz="1600">
-                <a:solidFill>
-                  <a:srgbClr val="023047"/>
-                </a:solidFill>
-                <a:latin typeface="Calibri"/>
-              </a:defRPr>
-            </a:pPr>
-            <a:r>
-              <a:t>-  Low flow concentrates pollutants</a:t>
-            </a:r>
-          </a:p>
-          <a:p>
-            <a:pPr algn="l">
-              <a:spcBef>
-                <a:spcPts val="0"/>
-              </a:spcBef>
-              <a:spcAft>
-                <a:spcPts val="900"/>
-              </a:spcAft>
-              <a:defRPr sz="1600">
-                <a:solidFill>
-                  <a:srgbClr val="023047"/>
-                </a:solidFill>
-                <a:latin typeface="Calibri"/>
-              </a:defRPr>
-            </a:pPr>
-            <a:r>
-              <a:t>-  Dissolved oxygen drops &lt; 3 mg/L (fish kills)</a:t>
+              <a:defRPr sz="1100" b="1">
+                <a:solidFill>
+                  <a:srgbClr val="219EBC"/>
+                </a:solidFill>
+                <a:latin typeface="Calibri"/>
+              </a:defRPr>
+            </a:pPr>
+            <a:r>
+              <a:t>Oxygen Collapses &lt; 3 mg/L  |  Summer Ecosystem Crisis</a:t>
             </a:r>
           </a:p>
         </p:txBody>
@@ -4624,8 +5345,8 @@
         </p:nvSpPr>
         <p:spPr>
           <a:xfrm>
-            <a:off x="731520" y="502920"/>
-            <a:ext cx="10728655" cy="822960"/>
+            <a:off x="731520" y="411480"/>
+            <a:ext cx="9144000" cy="292608"/>
           </a:xfrm>
           <a:prstGeom prst="rect">
             <a:avLst/>
@@ -4638,8 +5359,44 @@
           </a:bodyPr>
           <a:lstStyle/>
           <a:p>
+            <a:pPr>
+              <a:defRPr sz="1100" b="1">
+                <a:solidFill>
+                  <a:srgbClr val="219EBC"/>
+                </a:solidFill>
+                <a:latin typeface="Calibri"/>
+              </a:defRPr>
+            </a:pPr>
+            <a:r>
+              <a:t>THE MONITORING BOTTLENECK</a:t>
+            </a:r>
+          </a:p>
+        </p:txBody>
+      </p:sp>
+      <p:sp>
+        <p:nvSpPr>
+          <p:cNvPr id="3" name="TextBox 2"/>
+          <p:cNvSpPr txBox="1"/>
+          <p:nvPr/>
+        </p:nvSpPr>
+        <p:spPr>
+          <a:xfrm>
+            <a:off x="731520" y="658368"/>
+            <a:ext cx="10728655" cy="640080"/>
+          </a:xfrm>
+          <a:prstGeom prst="rect">
+            <a:avLst/>
+          </a:prstGeom>
+          <a:noFill/>
+        </p:spPr>
+        <p:txBody>
+          <a:bodyPr wrap="square" anchor="t" lIns="0" tIns="0" rIns="0" bIns="0">
+            <a:spAutoFit/>
+          </a:bodyPr>
+          <a:lstStyle/>
+          <a:p>
             <a:pPr algn="l">
-              <a:defRPr sz="4000" b="1">
+              <a:defRPr sz="3600" b="1">
                 <a:solidFill>
                   <a:srgbClr val="023047"/>
                 </a:solidFill>
@@ -4654,14 +5411,14 @@
       </p:sp>
       <p:sp>
         <p:nvSpPr>
-          <p:cNvPr id="3" name="Rounded Rectangle 2"/>
+          <p:cNvPr id="4" name="Rounded Rectangle 3"/>
           <p:cNvSpPr/>
           <p:nvPr/>
         </p:nvSpPr>
         <p:spPr>
           <a:xfrm>
-            <a:off x="731520" y="1554480"/>
-            <a:ext cx="5180990" cy="3794760"/>
+            <a:off x="731520" y="1417320"/>
+            <a:ext cx="5180990" cy="2788920"/>
           </a:xfrm>
           <a:prstGeom prst="roundRect">
             <a:avLst>
@@ -4673,7 +5430,7 @@
           </a:solidFill>
           <a:ln w="19050">
             <a:solidFill>
-              <a:srgbClr val="8ECAE6"/>
+              <a:srgbClr val="B4DAEE"/>
             </a:solidFill>
           </a:ln>
         </p:spPr>
@@ -4692,7 +5449,109 @@
           </a:fontRef>
         </p:style>
         <p:txBody>
-          <a:bodyPr rtlCol="0" anchor="t" wrap="square" lIns="320040" rIns="320040" tIns="274320" bIns="228600"/>
+          <a:bodyPr rtlCol="0" anchor="ctr"/>
+          <a:lstStyle/>
+          <a:p>
+            <a:pPr algn="ctr"/>
+          </a:p>
+        </p:txBody>
+      </p:sp>
+      <p:pic>
+        <p:nvPicPr>
+          <p:cNvPr id="5" name="Picture 4" descr="municipal_sensor.png"/>
+          <p:cNvPicPr>
+            <a:picLocks noChangeAspect="1"/>
+          </p:cNvPicPr>
+          <p:nvPr/>
+        </p:nvPicPr>
+        <p:blipFill>
+          <a:blip r:embed="rId2"/>
+          <a:stretch>
+            <a:fillRect/>
+          </a:stretch>
+        </p:blipFill>
+        <p:spPr>
+          <a:xfrm>
+            <a:off x="1005840" y="1636776"/>
+            <a:ext cx="438912" cy="438912"/>
+          </a:xfrm>
+          <a:prstGeom prst="rect">
+            <a:avLst/>
+          </a:prstGeom>
+        </p:spPr>
+      </p:pic>
+      <p:sp>
+        <p:nvSpPr>
+          <p:cNvPr id="6" name="TextBox 5"/>
+          <p:cNvSpPr txBox="1"/>
+          <p:nvPr/>
+        </p:nvSpPr>
+        <p:spPr>
+          <a:xfrm>
+            <a:off x="1536192" y="1581912"/>
+            <a:ext cx="4129430" cy="594360"/>
+          </a:xfrm>
+          <a:prstGeom prst="rect">
+            <a:avLst/>
+          </a:prstGeom>
+          <a:noFill/>
+        </p:spPr>
+        <p:txBody>
+          <a:bodyPr wrap="square" anchor="t" lIns="0" tIns="0" rIns="0" bIns="0">
+            <a:spAutoFit/>
+          </a:bodyPr>
+          <a:lstStyle/>
+          <a:p>
+            <a:pPr algn="l">
+              <a:defRPr sz="2100" b="1">
+                <a:solidFill>
+                  <a:srgbClr val="023047"/>
+                </a:solidFill>
+                <a:latin typeface="Calibri"/>
+              </a:defRPr>
+            </a:pPr>
+            <a:r>
+              <a:t>Municipal Authorities</a:t>
+            </a:r>
+          </a:p>
+          <a:p>
+            <a:pPr algn="l">
+              <a:spcBef>
+                <a:spcPts val="200"/>
+              </a:spcBef>
+              <a:defRPr sz="1300" b="1">
+                <a:solidFill>
+                  <a:srgbClr val="219EBC"/>
+                </a:solidFill>
+                <a:latin typeface="Calibri"/>
+              </a:defRPr>
+            </a:pPr>
+            <a:r>
+              <a:t>Stadtentwässerung Nürnberg (SUN) &amp; WWA</a:t>
+            </a:r>
+          </a:p>
+        </p:txBody>
+      </p:sp>
+      <p:sp>
+        <p:nvSpPr>
+          <p:cNvPr id="7" name="TextBox 6"/>
+          <p:cNvSpPr txBox="1"/>
+          <p:nvPr/>
+        </p:nvSpPr>
+        <p:spPr>
+          <a:xfrm>
+            <a:off x="1024128" y="2258568"/>
+            <a:ext cx="4595774" cy="1554480"/>
+          </a:xfrm>
+          <a:prstGeom prst="rect">
+            <a:avLst/>
+          </a:prstGeom>
+          <a:noFill/>
+        </p:spPr>
+        <p:txBody>
+          <a:bodyPr wrap="square" anchor="t" lIns="0" tIns="0" rIns="0" bIns="0">
+            <a:spAutoFit/>
+          </a:bodyPr>
           <a:lstStyle/>
           <a:p>
             <a:pPr algn="l">
@@ -4700,9 +5559,9 @@
                 <a:spcPts val="0"/>
               </a:spcBef>
               <a:spcAft>
-                <a:spcPts val="400"/>
+                <a:spcPts val="600"/>
               </a:spcAft>
-              <a:defRPr sz="2300" b="1">
+              <a:defRPr sz="1500">
                 <a:solidFill>
                   <a:srgbClr val="023047"/>
                 </a:solidFill>
@@ -4710,7 +5569,7 @@
               </a:defRPr>
             </a:pPr>
             <a:r>
-              <a:t>Municipal Authorities</a:t>
+              <a:t>-  Temperature, pH, conductivity, turbidity</a:t>
             </a:r>
           </a:p>
           <a:p>
@@ -4719,17 +5578,17 @@
                 <a:spcPts val="0"/>
               </a:spcBef>
               <a:spcAft>
-                <a:spcPts val="1400"/>
+                <a:spcPts val="600"/>
               </a:spcAft>
-              <a:defRPr sz="1400" b="1">
-                <a:solidFill>
-                  <a:srgbClr val="219EBC"/>
-                </a:solidFill>
-                <a:latin typeface="Calibri"/>
-              </a:defRPr>
-            </a:pPr>
-            <a:r>
-              <a:t>Stadtentwässerung Nürnberg (SUN) &amp; Wasserwirtschaftsamt (WWA)</a:t>
+              <a:defRPr sz="1500">
+                <a:solidFill>
+                  <a:srgbClr val="023047"/>
+                </a:solidFill>
+                <a:latin typeface="Calibri"/>
+              </a:defRPr>
+            </a:pPr>
+            <a:r>
+              <a:t>-  Dissolved oxygen and nutrients (Nitrate, Phosphate)</a:t>
             </a:r>
           </a:p>
           <a:p>
@@ -4738,9 +5597,9 @@
                 <a:spcPts val="0"/>
               </a:spcBef>
               <a:spcAft>
-                <a:spcPts val="900"/>
+                <a:spcPts val="600"/>
               </a:spcAft>
-              <a:defRPr sz="1700">
+              <a:defRPr sz="1500">
                 <a:solidFill>
                   <a:srgbClr val="023047"/>
                 </a:solidFill>
@@ -4748,18 +5607,205 @@
               </a:defRPr>
             </a:pPr>
             <a:r>
-              <a:t>-  Temperature, pH, conductivity, turbidity</a:t>
-            </a:r>
-          </a:p>
+              <a:t>-  Ammonium (NH4+): primary raw sewage tracer</a:t>
+            </a:r>
+          </a:p>
+        </p:txBody>
+      </p:sp>
+      <p:sp>
+        <p:nvSpPr>
+          <p:cNvPr id="8" name="Rounded Rectangle 7"/>
+          <p:cNvSpPr/>
+          <p:nvPr/>
+        </p:nvSpPr>
+        <p:spPr>
+          <a:xfrm>
+            <a:off x="987552" y="3749040"/>
+            <a:ext cx="4668926" cy="320040"/>
+          </a:xfrm>
+          <a:prstGeom prst="roundRect">
+            <a:avLst>
+              <a:gd name="adj" fmla="val 8000"/>
+            </a:avLst>
+          </a:prstGeom>
+          <a:solidFill>
+            <a:srgbClr val="EBF4FA"/>
+          </a:solidFill>
+          <a:ln w="12700">
+            <a:solidFill>
+              <a:srgbClr val="8ECAE6"/>
+            </a:solidFill>
+          </a:ln>
+        </p:spPr>
+        <p:style>
+          <a:lnRef idx="1">
+            <a:schemeClr val="accent1"/>
+          </a:lnRef>
+          <a:fillRef idx="3">
+            <a:schemeClr val="accent1"/>
+          </a:fillRef>
+          <a:effectRef idx="2">
+            <a:schemeClr val="accent1"/>
+          </a:effectRef>
+          <a:fontRef idx="minor">
+            <a:schemeClr val="lt1"/>
+          </a:fontRef>
+        </p:style>
+        <p:txBody>
+          <a:bodyPr rtlCol="0" anchor="ctr" wrap="square" lIns="137160" rIns="137160" tIns="0" bIns="0"/>
+          <a:lstStyle/>
+          <a:p>
+            <a:pPr algn="l">
+              <a:defRPr sz="1100" b="1">
+                <a:solidFill>
+                  <a:srgbClr val="219EBC"/>
+                </a:solidFill>
+                <a:latin typeface="Calibri"/>
+              </a:defRPr>
+            </a:pPr>
+            <a:r>
+              <a:t>Tracked Parameters: pH, Temp, DO, Turbidity, NH4+, NO3-</a:t>
+            </a:r>
+          </a:p>
+        </p:txBody>
+      </p:sp>
+      <p:sp>
+        <p:nvSpPr>
+          <p:cNvPr id="9" name="Rounded Rectangle 8"/>
+          <p:cNvSpPr/>
+          <p:nvPr/>
+        </p:nvSpPr>
+        <p:spPr>
+          <a:xfrm>
+            <a:off x="6278270" y="1417320"/>
+            <a:ext cx="5180990" cy="2788920"/>
+          </a:xfrm>
+          <a:prstGeom prst="roundRect">
+            <a:avLst>
+              <a:gd name="adj" fmla="val 3500"/>
+            </a:avLst>
+          </a:prstGeom>
+          <a:solidFill>
+            <a:srgbClr val="F4F9FC"/>
+          </a:solidFill>
+          <a:ln w="19050">
+            <a:solidFill>
+              <a:srgbClr val="B4DAEE"/>
+            </a:solidFill>
+          </a:ln>
+        </p:spPr>
+        <p:style>
+          <a:lnRef idx="1">
+            <a:schemeClr val="accent1"/>
+          </a:lnRef>
+          <a:fillRef idx="3">
+            <a:schemeClr val="accent1"/>
+          </a:fillRef>
+          <a:effectRef idx="2">
+            <a:schemeClr val="accent1"/>
+          </a:effectRef>
+          <a:fontRef idx="minor">
+            <a:schemeClr val="lt1"/>
+          </a:fontRef>
+        </p:style>
+        <p:txBody>
+          <a:bodyPr rtlCol="0" anchor="ctr"/>
+          <a:lstStyle/>
+          <a:p>
+            <a:pPr algn="ctr"/>
+          </a:p>
+        </p:txBody>
+      </p:sp>
+      <p:pic>
+        <p:nvPicPr>
+          <p:cNvPr id="10" name="Picture 9" descr="sampling_gap.png"/>
+          <p:cNvPicPr>
+            <a:picLocks noChangeAspect="1"/>
+          </p:cNvPicPr>
+          <p:nvPr/>
+        </p:nvPicPr>
+        <p:blipFill>
+          <a:blip r:embed="rId3"/>
+          <a:stretch>
+            <a:fillRect/>
+          </a:stretch>
+        </p:blipFill>
+        <p:spPr>
+          <a:xfrm>
+            <a:off x="6552590" y="1636776"/>
+            <a:ext cx="438912" cy="438912"/>
+          </a:xfrm>
+          <a:prstGeom prst="rect">
+            <a:avLst/>
+          </a:prstGeom>
+        </p:spPr>
+      </p:pic>
+      <p:sp>
+        <p:nvSpPr>
+          <p:cNvPr id="11" name="TextBox 10"/>
+          <p:cNvSpPr txBox="1"/>
+          <p:nvPr/>
+        </p:nvSpPr>
+        <p:spPr>
+          <a:xfrm>
+            <a:off x="7082942" y="1581912"/>
+            <a:ext cx="4129430" cy="594360"/>
+          </a:xfrm>
+          <a:prstGeom prst="rect">
+            <a:avLst/>
+          </a:prstGeom>
+          <a:noFill/>
+        </p:spPr>
+        <p:txBody>
+          <a:bodyPr wrap="square" anchor="t" lIns="0" tIns="0" rIns="0" bIns="0">
+            <a:spAutoFit/>
+          </a:bodyPr>
+          <a:lstStyle/>
+          <a:p>
+            <a:pPr algn="l">
+              <a:defRPr sz="2100" b="1">
+                <a:solidFill>
+                  <a:srgbClr val="023047"/>
+                </a:solidFill>
+                <a:latin typeface="Calibri"/>
+              </a:defRPr>
+            </a:pPr>
+            <a:r>
+              <a:t>The Sampling Gap</a:t>
+            </a:r>
+          </a:p>
+        </p:txBody>
+      </p:sp>
+      <p:sp>
+        <p:nvSpPr>
+          <p:cNvPr id="12" name="TextBox 11"/>
+          <p:cNvSpPr txBox="1"/>
+          <p:nvPr/>
+        </p:nvSpPr>
+        <p:spPr>
+          <a:xfrm>
+            <a:off x="6570878" y="2167128"/>
+            <a:ext cx="4595774" cy="1554480"/>
+          </a:xfrm>
+          <a:prstGeom prst="rect">
+            <a:avLst/>
+          </a:prstGeom>
+          <a:noFill/>
+        </p:spPr>
+        <p:txBody>
+          <a:bodyPr wrap="square" anchor="t" lIns="0" tIns="0" rIns="0" bIns="0">
+            <a:spAutoFit/>
+          </a:bodyPr>
+          <a:lstStyle/>
           <a:p>
             <a:pPr algn="l">
               <a:spcBef>
                 <a:spcPts val="0"/>
               </a:spcBef>
               <a:spcAft>
-                <a:spcPts val="900"/>
+                <a:spcPts val="600"/>
               </a:spcAft>
-              <a:defRPr sz="1700">
+              <a:defRPr sz="1500">
                 <a:solidFill>
                   <a:srgbClr val="023047"/>
                 </a:solidFill>
@@ -4767,7 +5813,7 @@
               </a:defRPr>
             </a:pPr>
             <a:r>
-              <a:t>-  Dissolved oxygen and nutrients (Nitrate, Phosphate)</a:t>
+              <a:t>-  Automatic sensors: continuous, but confined to few fixed locations</a:t>
             </a:r>
           </a:p>
           <a:p>
@@ -4776,9 +5822,9 @@
                 <a:spcPts val="0"/>
               </a:spcBef>
               <a:spcAft>
-                <a:spcPts val="900"/>
+                <a:spcPts val="600"/>
               </a:spcAft>
-              <a:defRPr sz="1700">
+              <a:defRPr sz="1500">
                 <a:solidFill>
                   <a:srgbClr val="023047"/>
                 </a:solidFill>
@@ -4786,21 +5832,97 @@
               </a:defRPr>
             </a:pPr>
             <a:r>
-              <a:t>-  Ammonium (NH4+): primary raw sewage tracer</a:t>
-            </a:r>
-          </a:p>
-        </p:txBody>
-      </p:sp>
-      <p:sp>
-        <p:nvSpPr>
-          <p:cNvPr id="4" name="Rounded Rectangle 3"/>
+              <a:t>-  Manual grab sampling: often only 1x per month (24-48h lab delay)</a:t>
+            </a:r>
+          </a:p>
+          <a:p>
+            <a:pPr algn="l">
+              <a:spcBef>
+                <a:spcPts val="0"/>
+              </a:spcBef>
+              <a:spcAft>
+                <a:spcPts val="600"/>
+              </a:spcAft>
+              <a:defRPr sz="1500">
+                <a:solidFill>
+                  <a:srgbClr val="023047"/>
+                </a:solidFill>
+                <a:latin typeface="Calibri"/>
+              </a:defRPr>
+            </a:pPr>
+            <a:r>
+              <a:t>-  Convective storm overflows: last only 2 to 4 hours</a:t>
+            </a:r>
+          </a:p>
+        </p:txBody>
+      </p:sp>
+      <p:sp>
+        <p:nvSpPr>
+          <p:cNvPr id="13" name="Rounded Rectangle 12"/>
           <p:cNvSpPr/>
           <p:nvPr/>
         </p:nvSpPr>
         <p:spPr>
           <a:xfrm>
-            <a:off x="6278270" y="1554480"/>
-            <a:ext cx="5180990" cy="3794760"/>
+            <a:off x="6534302" y="3749040"/>
+            <a:ext cx="4668926" cy="320040"/>
+          </a:xfrm>
+          <a:prstGeom prst="roundRect">
+            <a:avLst>
+              <a:gd name="adj" fmla="val 8000"/>
+            </a:avLst>
+          </a:prstGeom>
+          <a:solidFill>
+            <a:srgbClr val="EBF4FA"/>
+          </a:solidFill>
+          <a:ln w="12700">
+            <a:solidFill>
+              <a:srgbClr val="8ECAE6"/>
+            </a:solidFill>
+          </a:ln>
+        </p:spPr>
+        <p:style>
+          <a:lnRef idx="1">
+            <a:schemeClr val="accent1"/>
+          </a:lnRef>
+          <a:fillRef idx="3">
+            <a:schemeClr val="accent1"/>
+          </a:fillRef>
+          <a:effectRef idx="2">
+            <a:schemeClr val="accent1"/>
+          </a:effectRef>
+          <a:fontRef idx="minor">
+            <a:schemeClr val="lt1"/>
+          </a:fontRef>
+        </p:style>
+        <p:txBody>
+          <a:bodyPr rtlCol="0" anchor="ctr" wrap="square" lIns="137160" rIns="137160" tIns="0" bIns="0"/>
+          <a:lstStyle/>
+          <a:p>
+            <a:pPr algn="l">
+              <a:defRPr sz="1100" b="1">
+                <a:solidFill>
+                  <a:srgbClr val="219EBC"/>
+                </a:solidFill>
+                <a:latin typeface="Calibri"/>
+              </a:defRPr>
+            </a:pPr>
+            <a:r>
+              <a:t>Critical Bottleneck: 1x/Month Sampling  |  24-48h Lab Delay</a:t>
+            </a:r>
+          </a:p>
+        </p:txBody>
+      </p:sp>
+      <p:sp>
+        <p:nvSpPr>
+          <p:cNvPr id="14" name="Rounded Rectangle 13"/>
+          <p:cNvSpPr/>
+          <p:nvPr/>
+        </p:nvSpPr>
+        <p:spPr>
+          <a:xfrm>
+            <a:off x="731520" y="4389120"/>
+            <a:ext cx="10728655" cy="1097280"/>
           </a:xfrm>
           <a:prstGeom prst="roundRect">
             <a:avLst>
@@ -4812,7 +5934,7 @@
           </a:solidFill>
           <a:ln w="19050">
             <a:solidFill>
-              <a:srgbClr val="8ECAE6"/>
+              <a:srgbClr val="B4DAEE"/>
             </a:solidFill>
           </a:ln>
         </p:spPr>
@@ -4831,17 +5953,160 @@
           </a:fontRef>
         </p:style>
         <p:txBody>
-          <a:bodyPr rtlCol="0" anchor="t" wrap="square" lIns="320040" rIns="320040" tIns="274320" bIns="228600"/>
-          <a:lstStyle/>
-          <a:p>
-            <a:pPr algn="l">
-              <a:spcBef>
-                <a:spcPts val="0"/>
-              </a:spcBef>
+          <a:bodyPr rtlCol="0" anchor="t" wrap="square" lIns="274320" rIns="274320" tIns="137160"/>
+          <a:lstStyle/>
+          <a:p>
+            <a:pPr algn="ctr">
               <a:spcAft>
-                <a:spcPts val="1200"/>
+                <a:spcPts val="600"/>
               </a:spcAft>
-              <a:defRPr sz="2300" b="1">
+              <a:defRPr sz="1100" b="1">
+                <a:solidFill>
+                  <a:srgbClr val="219EBC"/>
+                </a:solidFill>
+                <a:latin typeface="Calibri"/>
+              </a:defRPr>
+            </a:pPr>
+            <a:r>
+              <a:t>THE TEMPORAL MISMATCH INFOGRAPHIC</a:t>
+            </a:r>
+          </a:p>
+        </p:txBody>
+      </p:sp>
+      <p:sp>
+        <p:nvSpPr>
+          <p:cNvPr id="15" name="Rounded Rectangle 14"/>
+          <p:cNvSpPr/>
+          <p:nvPr/>
+        </p:nvSpPr>
+        <p:spPr>
+          <a:xfrm>
+            <a:off x="1005840" y="4828032"/>
+            <a:ext cx="2011680" cy="219456"/>
+          </a:xfrm>
+          <a:prstGeom prst="roundRect">
+            <a:avLst>
+              <a:gd name="adj" fmla="val 20000"/>
+            </a:avLst>
+          </a:prstGeom>
+          <a:solidFill>
+            <a:srgbClr val="FB8500"/>
+          </a:solidFill>
+          <a:ln>
+            <a:noFill/>
+          </a:ln>
+        </p:spPr>
+        <p:style>
+          <a:lnRef idx="1">
+            <a:schemeClr val="accent1"/>
+          </a:lnRef>
+          <a:fillRef idx="3">
+            <a:schemeClr val="accent1"/>
+          </a:fillRef>
+          <a:effectRef idx="2">
+            <a:schemeClr val="accent1"/>
+          </a:effectRef>
+          <a:fontRef idx="minor">
+            <a:schemeClr val="lt1"/>
+          </a:fontRef>
+        </p:style>
+        <p:txBody>
+          <a:bodyPr rtlCol="0" anchor="ctr"/>
+          <a:lstStyle/>
+          <a:p>
+            <a:pPr algn="ctr">
+              <a:defRPr sz="950" b="1">
+                <a:solidFill>
+                  <a:srgbClr val="FFFFFF"/>
+                </a:solidFill>
+                <a:latin typeface="Calibri"/>
+              </a:defRPr>
+            </a:pPr>
+            <a:r>
+              <a:t>Storm Overflow: 2-4 Hours</a:t>
+            </a:r>
+          </a:p>
+        </p:txBody>
+      </p:sp>
+      <p:sp>
+        <p:nvSpPr>
+          <p:cNvPr id="16" name="Rounded Rectangle 15"/>
+          <p:cNvSpPr/>
+          <p:nvPr/>
+        </p:nvSpPr>
+        <p:spPr>
+          <a:xfrm>
+            <a:off x="3291840" y="4828032"/>
+            <a:ext cx="7863840" cy="219456"/>
+          </a:xfrm>
+          <a:prstGeom prst="roundRect">
+            <a:avLst>
+              <a:gd name="adj" fmla="val 6000"/>
+            </a:avLst>
+          </a:prstGeom>
+          <a:solidFill>
+            <a:srgbClr val="023047"/>
+          </a:solidFill>
+          <a:ln>
+            <a:noFill/>
+          </a:ln>
+        </p:spPr>
+        <p:style>
+          <a:lnRef idx="1">
+            <a:schemeClr val="accent1"/>
+          </a:lnRef>
+          <a:fillRef idx="3">
+            <a:schemeClr val="accent1"/>
+          </a:fillRef>
+          <a:effectRef idx="2">
+            <a:schemeClr val="accent1"/>
+          </a:effectRef>
+          <a:fontRef idx="minor">
+            <a:schemeClr val="lt1"/>
+          </a:fontRef>
+        </p:style>
+        <p:txBody>
+          <a:bodyPr rtlCol="0" anchor="ctr" lIns="137160"/>
+          <a:lstStyle/>
+          <a:p>
+            <a:pPr algn="ctr">
+              <a:defRPr sz="950" b="1">
+                <a:solidFill>
+                  <a:srgbClr val="FFFFFF"/>
+                </a:solidFill>
+                <a:latin typeface="Calibri"/>
+              </a:defRPr>
+            </a:pPr>
+            <a:r>
+              <a:t>Laboratory Grab Sample Verification Delay: 24 to 48 Hours (Plume Long Cleared)</a:t>
+            </a:r>
+          </a:p>
+        </p:txBody>
+      </p:sp>
+      <p:sp>
+        <p:nvSpPr>
+          <p:cNvPr id="17" name="TextBox 16"/>
+          <p:cNvSpPr txBox="1"/>
+          <p:nvPr/>
+        </p:nvSpPr>
+        <p:spPr>
+          <a:xfrm>
+            <a:off x="1005840" y="5102352"/>
+            <a:ext cx="10149840" cy="274320"/>
+          </a:xfrm>
+          <a:prstGeom prst="rect">
+            <a:avLst/>
+          </a:prstGeom>
+          <a:noFill/>
+        </p:spPr>
+        <p:txBody>
+          <a:bodyPr wrap="square" lIns="0" tIns="0" rIns="0" bIns="0">
+            <a:spAutoFit/>
+          </a:bodyPr>
+          <a:lstStyle/>
+          <a:p>
+            <a:pPr>
+              <a:defRPr sz="1150">
                 <a:solidFill>
                   <a:srgbClr val="023047"/>
                 </a:solidFill>
@@ -4849,78 +6114,21 @@
               </a:defRPr>
             </a:pPr>
             <a:r>
-              <a:t>The Sampling Gap</a:t>
-            </a:r>
-          </a:p>
-          <a:p>
-            <a:pPr algn="l">
-              <a:spcBef>
-                <a:spcPts val="0"/>
-              </a:spcBef>
-              <a:spcAft>
-                <a:spcPts val="900"/>
-              </a:spcAft>
-              <a:defRPr sz="1700">
-                <a:solidFill>
-                  <a:srgbClr val="023047"/>
-                </a:solidFill>
-                <a:latin typeface="Calibri"/>
-              </a:defRPr>
-            </a:pPr>
-            <a:r>
-              <a:t>-  Automatic sensors: continuous, but confined to few fixed locations</a:t>
-            </a:r>
-          </a:p>
-          <a:p>
-            <a:pPr algn="l">
-              <a:spcBef>
-                <a:spcPts val="0"/>
-              </a:spcBef>
-              <a:spcAft>
-                <a:spcPts val="900"/>
-              </a:spcAft>
-              <a:defRPr sz="1700">
-                <a:solidFill>
-                  <a:srgbClr val="023047"/>
-                </a:solidFill>
-                <a:latin typeface="Calibri"/>
-              </a:defRPr>
-            </a:pPr>
-            <a:r>
-              <a:t>-  Manual grab sampling: often only 1x per month (24-48h lab delay)</a:t>
-            </a:r>
-          </a:p>
-          <a:p>
-            <a:pPr algn="l">
-              <a:spcBef>
-                <a:spcPts val="0"/>
-              </a:spcBef>
-              <a:spcAft>
-                <a:spcPts val="900"/>
-              </a:spcAft>
-              <a:defRPr sz="1700">
-                <a:solidFill>
-                  <a:srgbClr val="023047"/>
-                </a:solidFill>
-                <a:latin typeface="Calibri"/>
-              </a:defRPr>
-            </a:pPr>
-            <a:r>
-              <a:t>-  Convective storm overflows: last only 2 to 4 hours</a:t>
-            </a:r>
-          </a:p>
-        </p:txBody>
-      </p:sp>
-      <p:sp>
-        <p:nvSpPr>
-          <p:cNvPr id="5" name="Rounded Rectangle 4"/>
+              <a:t>Static sensors only show that something passed. Laboratory delays mean warnings arrive days after the pollution event has ended.</a:t>
+            </a:r>
+          </a:p>
+        </p:txBody>
+      </p:sp>
+      <p:sp>
+        <p:nvSpPr>
+          <p:cNvPr id="18" name="Rounded Rectangle 17"/>
           <p:cNvSpPr/>
           <p:nvPr/>
         </p:nvSpPr>
         <p:spPr>
           <a:xfrm>
-            <a:off x="731520" y="5577840"/>
-            <a:ext cx="10728655" cy="685800"/>
+            <a:off x="731520" y="5650992"/>
+            <a:ext cx="10728655" cy="621792"/>
           </a:xfrm>
           <a:prstGeom prst="roundRect">
             <a:avLst>
@@ -4951,7 +6159,7 @@
           </a:fontRef>
         </p:style>
         <p:txBody>
-          <a:bodyPr rtlCol="0" anchor="ctr" wrap="square" lIns="320040" rIns="320040" tIns="91440"/>
+          <a:bodyPr rtlCol="0" anchor="ctr" wrap="square" lIns="320040" rIns="320040" tIns="73152"/>
           <a:lstStyle/>
           <a:p>
             <a:pPr algn="l">
@@ -5011,8 +6219,8 @@
         </p:nvSpPr>
         <p:spPr>
           <a:xfrm>
-            <a:off x="731520" y="502920"/>
-            <a:ext cx="10728655" cy="822960"/>
+            <a:off x="731520" y="411480"/>
+            <a:ext cx="9144000" cy="292608"/>
           </a:xfrm>
           <a:prstGeom prst="rect">
             <a:avLst/>
@@ -5025,8 +6233,44 @@
           </a:bodyPr>
           <a:lstStyle/>
           <a:p>
+            <a:pPr>
+              <a:defRPr sz="1100" b="1">
+                <a:solidFill>
+                  <a:srgbClr val="219EBC"/>
+                </a:solidFill>
+                <a:latin typeface="Calibri"/>
+              </a:defRPr>
+            </a:pPr>
+            <a:r>
+              <a:t>STAKEHOLDER NEEDS &amp; CHALLENGE FRAMING</a:t>
+            </a:r>
+          </a:p>
+        </p:txBody>
+      </p:sp>
+      <p:sp>
+        <p:nvSpPr>
+          <p:cNvPr id="3" name="TextBox 2"/>
+          <p:cNvSpPr txBox="1"/>
+          <p:nvPr/>
+        </p:nvSpPr>
+        <p:spPr>
+          <a:xfrm>
+            <a:off x="731520" y="658368"/>
+            <a:ext cx="10728655" cy="640080"/>
+          </a:xfrm>
+          <a:prstGeom prst="rect">
+            <a:avLst/>
+          </a:prstGeom>
+          <a:noFill/>
+        </p:spPr>
+        <p:txBody>
+          <a:bodyPr wrap="square" anchor="t" lIns="0" tIns="0" rIns="0" bIns="0">
+            <a:spAutoFit/>
+          </a:bodyPr>
+          <a:lstStyle/>
+          <a:p>
             <a:pPr algn="l">
-              <a:defRPr sz="4000" b="1">
+              <a:defRPr sz="3600" b="1">
                 <a:solidFill>
                   <a:srgbClr val="023047"/>
                 </a:solidFill>
@@ -5034,21 +6278,21 @@
               </a:defRPr>
             </a:pPr>
             <a:r>
-              <a:t>Key Stakeholders</a:t>
-            </a:r>
-          </a:p>
-        </p:txBody>
-      </p:sp>
-      <p:sp>
-        <p:nvSpPr>
-          <p:cNvPr id="3" name="Rounded Rectangle 2"/>
+              <a:t>Key Stakeholders &amp; Challenge</a:t>
+            </a:r>
+          </a:p>
+        </p:txBody>
+      </p:sp>
+      <p:sp>
+        <p:nvSpPr>
+          <p:cNvPr id="4" name="Rounded Rectangle 3"/>
           <p:cNvSpPr/>
           <p:nvPr/>
         </p:nvSpPr>
         <p:spPr>
           <a:xfrm>
-            <a:off x="731520" y="1554480"/>
-            <a:ext cx="5180990" cy="4709160"/>
+            <a:off x="731520" y="1417320"/>
+            <a:ext cx="5180990" cy="2971800"/>
           </a:xfrm>
           <a:prstGeom prst="roundRect">
             <a:avLst>
@@ -5060,7 +6304,7 @@
           </a:solidFill>
           <a:ln w="19050">
             <a:solidFill>
-              <a:srgbClr val="8ECAE6"/>
+              <a:srgbClr val="B4DAEE"/>
             </a:solidFill>
           </a:ln>
         </p:spPr>
@@ -5079,7 +6323,109 @@
           </a:fontRef>
         </p:style>
         <p:txBody>
-          <a:bodyPr rtlCol="0" anchor="t" wrap="square" lIns="320040" rIns="320040" tIns="274320" bIns="228600"/>
+          <a:bodyPr rtlCol="0" anchor="ctr"/>
+          <a:lstStyle/>
+          <a:p>
+            <a:pPr algn="ctr"/>
+          </a:p>
+        </p:txBody>
+      </p:sp>
+      <p:pic>
+        <p:nvPicPr>
+          <p:cNvPr id="5" name="Picture 4" descr="authority.png"/>
+          <p:cNvPicPr>
+            <a:picLocks noChangeAspect="1"/>
+          </p:cNvPicPr>
+          <p:nvPr/>
+        </p:nvPicPr>
+        <p:blipFill>
+          <a:blip r:embed="rId2"/>
+          <a:stretch>
+            <a:fillRect/>
+          </a:stretch>
+        </p:blipFill>
+        <p:spPr>
+          <a:xfrm>
+            <a:off x="1005840" y="1636776"/>
+            <a:ext cx="438912" cy="438912"/>
+          </a:xfrm>
+          <a:prstGeom prst="rect">
+            <a:avLst/>
+          </a:prstGeom>
+        </p:spPr>
+      </p:pic>
+      <p:sp>
+        <p:nvSpPr>
+          <p:cNvPr id="6" name="TextBox 5"/>
+          <p:cNvSpPr txBox="1"/>
+          <p:nvPr/>
+        </p:nvSpPr>
+        <p:spPr>
+          <a:xfrm>
+            <a:off x="1536192" y="1581912"/>
+            <a:ext cx="4129430" cy="594360"/>
+          </a:xfrm>
+          <a:prstGeom prst="rect">
+            <a:avLst/>
+          </a:prstGeom>
+          <a:noFill/>
+        </p:spPr>
+        <p:txBody>
+          <a:bodyPr wrap="square" anchor="t" lIns="0" tIns="0" rIns="0" bIns="0">
+            <a:spAutoFit/>
+          </a:bodyPr>
+          <a:lstStyle/>
+          <a:p>
+            <a:pPr>
+              <a:spcAft>
+                <a:spcPts val="200"/>
+              </a:spcAft>
+              <a:defRPr sz="1000" b="1">
+                <a:solidFill>
+                  <a:srgbClr val="219EBC"/>
+                </a:solidFill>
+                <a:latin typeface="Calibri"/>
+              </a:defRPr>
+            </a:pPr>
+            <a:r>
+              <a:t>REGULATORY &amp; INFRASTRUCTURE</a:t>
+            </a:r>
+          </a:p>
+          <a:p>
+            <a:pPr algn="l">
+              <a:defRPr sz="2100" b="1">
+                <a:solidFill>
+                  <a:srgbClr val="023047"/>
+                </a:solidFill>
+                <a:latin typeface="Calibri"/>
+              </a:defRPr>
+            </a:pPr>
+            <a:r>
+              <a:t>Water Authorities (WWA, SUN)</a:t>
+            </a:r>
+          </a:p>
+        </p:txBody>
+      </p:sp>
+      <p:sp>
+        <p:nvSpPr>
+          <p:cNvPr id="7" name="TextBox 6"/>
+          <p:cNvSpPr txBox="1"/>
+          <p:nvPr/>
+        </p:nvSpPr>
+        <p:spPr>
+          <a:xfrm>
+            <a:off x="1024128" y="2258568"/>
+            <a:ext cx="4595774" cy="1737360"/>
+          </a:xfrm>
+          <a:prstGeom prst="rect">
+            <a:avLst/>
+          </a:prstGeom>
+          <a:noFill/>
+        </p:spPr>
+        <p:txBody>
+          <a:bodyPr wrap="square" anchor="t" lIns="0" tIns="0" rIns="0" bIns="0">
+            <a:spAutoFit/>
+          </a:bodyPr>
           <a:lstStyle/>
           <a:p>
             <a:pPr algn="l">
@@ -5087,9 +6433,9 @@
                 <a:spcPts val="0"/>
               </a:spcBef>
               <a:spcAft>
-                <a:spcPts val="1200"/>
+                <a:spcPts val="600"/>
               </a:spcAft>
-              <a:defRPr sz="2300" b="1">
+              <a:defRPr sz="1500">
                 <a:solidFill>
                   <a:srgbClr val="023047"/>
                 </a:solidFill>
@@ -5097,7 +6443,7 @@
               </a:defRPr>
             </a:pPr>
             <a:r>
-              <a:t>Water Authorities (WWA, SUN)</a:t>
+              <a:t>-  Cannot locate pollution origin (fixed stations lack spatial tracking)</a:t>
             </a:r>
           </a:p>
           <a:p>
@@ -5106,9 +6452,9 @@
                 <a:spcPts val="0"/>
               </a:spcBef>
               <a:spcAft>
-                <a:spcPts val="900"/>
+                <a:spcPts val="600"/>
               </a:spcAft>
-              <a:defRPr sz="1700">
+              <a:defRPr sz="1500">
                 <a:solidFill>
                   <a:srgbClr val="023047"/>
                 </a:solidFill>
@@ -5116,7 +6462,7 @@
               </a:defRPr>
             </a:pPr>
             <a:r>
-              <a:t>-  Cannot locate pollution origin (fixed stations lack spatial tracking)</a:t>
+              <a:t>-  Blind infrastructure spending (1.5M - 5M+ EUR per basin without plume data)</a:t>
             </a:r>
           </a:p>
           <a:p>
@@ -5125,9 +6471,9 @@
                 <a:spcPts val="0"/>
               </a:spcBef>
               <a:spcAft>
-                <a:spcPts val="900"/>
+                <a:spcPts val="600"/>
               </a:spcAft>
-              <a:defRPr sz="1700">
+              <a:defRPr sz="1500">
                 <a:solidFill>
                   <a:srgbClr val="023047"/>
                 </a:solidFill>
@@ -5135,7 +6481,7 @@
               </a:defRPr>
             </a:pPr>
             <a:r>
-              <a:t>-  Blind infrastructure spending (1.5M - 5M+ EUR per basin without plume data)</a:t>
+              <a:t>-  Chronic pipe seepage undetected until structural failure</a:t>
             </a:r>
           </a:p>
           <a:p>
@@ -5144,9 +6490,9 @@
                 <a:spcPts val="0"/>
               </a:spcBef>
               <a:spcAft>
-                <a:spcPts val="900"/>
+                <a:spcPts val="600"/>
               </a:spcAft>
-              <a:defRPr sz="1700">
+              <a:defRPr sz="1500">
                 <a:solidFill>
                   <a:srgbClr val="023047"/>
                 </a:solidFill>
@@ -5154,18 +6500,221 @@
               </a:defRPr>
             </a:pPr>
             <a:r>
-              <a:t>-  Chronic pipe seepage undetected until structural failure</a:t>
-            </a:r>
-          </a:p>
+              <a:t>-  Lab results arrive 24-48 hours too late for emergency action</a:t>
+            </a:r>
+          </a:p>
+        </p:txBody>
+      </p:sp>
+      <p:sp>
+        <p:nvSpPr>
+          <p:cNvPr id="8" name="Rounded Rectangle 7"/>
+          <p:cNvSpPr/>
+          <p:nvPr/>
+        </p:nvSpPr>
+        <p:spPr>
+          <a:xfrm>
+            <a:off x="987552" y="3931920"/>
+            <a:ext cx="4668926" cy="320040"/>
+          </a:xfrm>
+          <a:prstGeom prst="roundRect">
+            <a:avLst>
+              <a:gd name="adj" fmla="val 8000"/>
+            </a:avLst>
+          </a:prstGeom>
+          <a:solidFill>
+            <a:srgbClr val="EBF4FA"/>
+          </a:solidFill>
+          <a:ln w="12700">
+            <a:solidFill>
+              <a:srgbClr val="8ECAE6"/>
+            </a:solidFill>
+          </a:ln>
+        </p:spPr>
+        <p:style>
+          <a:lnRef idx="1">
+            <a:schemeClr val="accent1"/>
+          </a:lnRef>
+          <a:fillRef idx="3">
+            <a:schemeClr val="accent1"/>
+          </a:fillRef>
+          <a:effectRef idx="2">
+            <a:schemeClr val="accent1"/>
+          </a:effectRef>
+          <a:fontRef idx="minor">
+            <a:schemeClr val="lt1"/>
+          </a:fontRef>
+        </p:style>
+        <p:txBody>
+          <a:bodyPr rtlCol="0" anchor="ctr" wrap="square" lIns="137160" rIns="137160" tIns="0" bIns="0"/>
+          <a:lstStyle/>
+          <a:p>
+            <a:pPr algn="l">
+              <a:defRPr sz="1100" b="1">
+                <a:solidFill>
+                  <a:srgbClr val="219EBC"/>
+                </a:solidFill>
+                <a:latin typeface="Calibri"/>
+              </a:defRPr>
+            </a:pPr>
+            <a:r>
+              <a:t>High Financial Risk: €1.5M - €5M+ CapEx per Basin  |  Delayed Lab Data</a:t>
+            </a:r>
+          </a:p>
+        </p:txBody>
+      </p:sp>
+      <p:sp>
+        <p:nvSpPr>
+          <p:cNvPr id="9" name="Rounded Rectangle 8"/>
+          <p:cNvSpPr/>
+          <p:nvPr/>
+        </p:nvSpPr>
+        <p:spPr>
+          <a:xfrm>
+            <a:off x="6278270" y="1417320"/>
+            <a:ext cx="5180990" cy="2971800"/>
+          </a:xfrm>
+          <a:prstGeom prst="roundRect">
+            <a:avLst>
+              <a:gd name="adj" fmla="val 3500"/>
+            </a:avLst>
+          </a:prstGeom>
+          <a:solidFill>
+            <a:srgbClr val="F4F9FC"/>
+          </a:solidFill>
+          <a:ln w="19050">
+            <a:solidFill>
+              <a:srgbClr val="B4DAEE"/>
+            </a:solidFill>
+          </a:ln>
+        </p:spPr>
+        <p:style>
+          <a:lnRef idx="1">
+            <a:schemeClr val="accent1"/>
+          </a:lnRef>
+          <a:fillRef idx="3">
+            <a:schemeClr val="accent1"/>
+          </a:fillRef>
+          <a:effectRef idx="2">
+            <a:schemeClr val="accent1"/>
+          </a:effectRef>
+          <a:fontRef idx="minor">
+            <a:schemeClr val="lt1"/>
+          </a:fontRef>
+        </p:style>
+        <p:txBody>
+          <a:bodyPr rtlCol="0" anchor="ctr"/>
+          <a:lstStyle/>
+          <a:p>
+            <a:pPr algn="ctr"/>
+          </a:p>
+        </p:txBody>
+      </p:sp>
+      <p:pic>
+        <p:nvPicPr>
+          <p:cNvPr id="10" name="Picture 9" descr="citizens_surfer.png"/>
+          <p:cNvPicPr>
+            <a:picLocks noChangeAspect="1"/>
+          </p:cNvPicPr>
+          <p:nvPr/>
+        </p:nvPicPr>
+        <p:blipFill>
+          <a:blip r:embed="rId3"/>
+          <a:stretch>
+            <a:fillRect/>
+          </a:stretch>
+        </p:blipFill>
+        <p:spPr>
+          <a:xfrm>
+            <a:off x="6552590" y="1636776"/>
+            <a:ext cx="438912" cy="438912"/>
+          </a:xfrm>
+          <a:prstGeom prst="rect">
+            <a:avLst/>
+          </a:prstGeom>
+        </p:spPr>
+      </p:pic>
+      <p:sp>
+        <p:nvSpPr>
+          <p:cNvPr id="11" name="TextBox 10"/>
+          <p:cNvSpPr txBox="1"/>
+          <p:nvPr/>
+        </p:nvSpPr>
+        <p:spPr>
+          <a:xfrm>
+            <a:off x="7082942" y="1581912"/>
+            <a:ext cx="4129430" cy="594360"/>
+          </a:xfrm>
+          <a:prstGeom prst="rect">
+            <a:avLst/>
+          </a:prstGeom>
+          <a:noFill/>
+        </p:spPr>
+        <p:txBody>
+          <a:bodyPr wrap="square" anchor="t" lIns="0" tIns="0" rIns="0" bIns="0">
+            <a:spAutoFit/>
+          </a:bodyPr>
+          <a:lstStyle/>
+          <a:p>
+            <a:pPr>
+              <a:spcAft>
+                <a:spcPts val="200"/>
+              </a:spcAft>
+              <a:defRPr sz="1000" b="1">
+                <a:solidFill>
+                  <a:srgbClr val="219EBC"/>
+                </a:solidFill>
+                <a:latin typeface="Calibri"/>
+              </a:defRPr>
+            </a:pPr>
+            <a:r>
+              <a:t>PUBLIC HEALTH &amp; RECREATION</a:t>
+            </a:r>
+          </a:p>
+          <a:p>
+            <a:pPr algn="l">
+              <a:defRPr sz="2100" b="1">
+                <a:solidFill>
+                  <a:srgbClr val="023047"/>
+                </a:solidFill>
+                <a:latin typeface="Calibri"/>
+              </a:defRPr>
+            </a:pPr>
+            <a:r>
+              <a:t>Citizens and Surfers</a:t>
+            </a:r>
+          </a:p>
+        </p:txBody>
+      </p:sp>
+      <p:sp>
+        <p:nvSpPr>
+          <p:cNvPr id="12" name="TextBox 11"/>
+          <p:cNvSpPr txBox="1"/>
+          <p:nvPr/>
+        </p:nvSpPr>
+        <p:spPr>
+          <a:xfrm>
+            <a:off x="6570878" y="2258568"/>
+            <a:ext cx="4595774" cy="1737360"/>
+          </a:xfrm>
+          <a:prstGeom prst="rect">
+            <a:avLst/>
+          </a:prstGeom>
+          <a:noFill/>
+        </p:spPr>
+        <p:txBody>
+          <a:bodyPr wrap="square" anchor="t" lIns="0" tIns="0" rIns="0" bIns="0">
+            <a:spAutoFit/>
+          </a:bodyPr>
+          <a:lstStyle/>
           <a:p>
             <a:pPr algn="l">
               <a:spcBef>
                 <a:spcPts val="0"/>
               </a:spcBef>
               <a:spcAft>
-                <a:spcPts val="900"/>
+                <a:spcPts val="600"/>
               </a:spcAft>
-              <a:defRPr sz="1700">
+              <a:defRPr sz="1500">
                 <a:solidFill>
                   <a:srgbClr val="023047"/>
                 </a:solidFill>
@@ -5173,21 +6722,135 @@
               </a:defRPr>
             </a:pPr>
             <a:r>
-              <a:t>-  Lab results arrive 24-48 hours too late for emergency action</a:t>
-            </a:r>
-          </a:p>
-        </p:txBody>
-      </p:sp>
-      <p:sp>
-        <p:nvSpPr>
-          <p:cNvPr id="4" name="Rounded Rectangle 3"/>
+              <a:t>-  Zero real-time visibility into water safety</a:t>
+            </a:r>
+          </a:p>
+          <a:p>
+            <a:pPr algn="l">
+              <a:spcBef>
+                <a:spcPts val="0"/>
+              </a:spcBef>
+              <a:spcAft>
+                <a:spcPts val="600"/>
+              </a:spcAft>
+              <a:defRPr sz="1500">
+                <a:solidFill>
+                  <a:srgbClr val="023047"/>
+                </a:solidFill>
+                <a:latin typeface="Calibri"/>
+              </a:defRPr>
+            </a:pPr>
+            <a:r>
+              <a:t>-  Unknowingly enter water during toxic overflow events</a:t>
+            </a:r>
+          </a:p>
+          <a:p>
+            <a:pPr algn="l">
+              <a:spcBef>
+                <a:spcPts val="0"/>
+              </a:spcBef>
+              <a:spcAft>
+                <a:spcPts val="600"/>
+              </a:spcAft>
+              <a:defRPr sz="1500">
+                <a:solidFill>
+                  <a:srgbClr val="023047"/>
+                </a:solidFill>
+                <a:latin typeface="Calibri"/>
+              </a:defRPr>
+            </a:pPr>
+            <a:r>
+              <a:t>-  High risk of gastrointestinal and skin infections</a:t>
+            </a:r>
+          </a:p>
+          <a:p>
+            <a:pPr algn="l">
+              <a:spcBef>
+                <a:spcPts val="0"/>
+              </a:spcBef>
+              <a:spcAft>
+                <a:spcPts val="600"/>
+              </a:spcAft>
+              <a:defRPr sz="1500">
+                <a:solidFill>
+                  <a:srgbClr val="023047"/>
+                </a:solidFill>
+                <a:latin typeface="Calibri"/>
+              </a:defRPr>
+            </a:pPr>
+            <a:r>
+              <a:t>-  Delayed municipal reports provide no immediate guidance</a:t>
+            </a:r>
+          </a:p>
+        </p:txBody>
+      </p:sp>
+      <p:sp>
+        <p:nvSpPr>
+          <p:cNvPr id="13" name="Rounded Rectangle 12"/>
           <p:cNvSpPr/>
           <p:nvPr/>
         </p:nvSpPr>
         <p:spPr>
           <a:xfrm>
-            <a:off x="6278270" y="1554480"/>
-            <a:ext cx="5180990" cy="4709160"/>
+            <a:off x="6534302" y="3931920"/>
+            <a:ext cx="4668926" cy="320040"/>
+          </a:xfrm>
+          <a:prstGeom prst="roundRect">
+            <a:avLst>
+              <a:gd name="adj" fmla="val 8000"/>
+            </a:avLst>
+          </a:prstGeom>
+          <a:solidFill>
+            <a:srgbClr val="EBF4FA"/>
+          </a:solidFill>
+          <a:ln w="12700">
+            <a:solidFill>
+              <a:srgbClr val="8ECAE6"/>
+            </a:solidFill>
+          </a:ln>
+        </p:spPr>
+        <p:style>
+          <a:lnRef idx="1">
+            <a:schemeClr val="accent1"/>
+          </a:lnRef>
+          <a:fillRef idx="3">
+            <a:schemeClr val="accent1"/>
+          </a:fillRef>
+          <a:effectRef idx="2">
+            <a:schemeClr val="accent1"/>
+          </a:effectRef>
+          <a:fontRef idx="minor">
+            <a:schemeClr val="lt1"/>
+          </a:fontRef>
+        </p:style>
+        <p:txBody>
+          <a:bodyPr rtlCol="0" anchor="ctr" wrap="square" lIns="137160" rIns="137160" tIns="0" bIns="0"/>
+          <a:lstStyle/>
+          <a:p>
+            <a:pPr algn="l">
+              <a:defRPr sz="1100" b="1">
+                <a:solidFill>
+                  <a:srgbClr val="219EBC"/>
+                </a:solidFill>
+                <a:latin typeface="Calibri"/>
+              </a:defRPr>
+            </a:pPr>
+            <a:r>
+              <a:t>Acute Health Risk: Unwarned Bacterial Exposure  |  No Live Warnings</a:t>
+            </a:r>
+          </a:p>
+        </p:txBody>
+      </p:sp>
+      <p:sp>
+        <p:nvSpPr>
+          <p:cNvPr id="14" name="Rounded Rectangle 13"/>
+          <p:cNvSpPr/>
+          <p:nvPr/>
+        </p:nvSpPr>
+        <p:spPr>
+          <a:xfrm>
+            <a:off x="731520" y="4572000"/>
+            <a:ext cx="10728655" cy="1691640"/>
           </a:xfrm>
           <a:prstGeom prst="roundRect">
             <a:avLst>
@@ -5199,7 +6862,7 @@
           </a:solidFill>
           <a:ln w="19050">
             <a:solidFill>
-              <a:srgbClr val="8ECAE6"/>
+              <a:srgbClr val="219EBC"/>
             </a:solidFill>
           </a:ln>
         </p:spPr>
@@ -5218,17 +6881,30 @@
           </a:fontRef>
         </p:style>
         <p:txBody>
-          <a:bodyPr rtlCol="0" anchor="t" wrap="square" lIns="320040" rIns="320040" tIns="274320" bIns="228600"/>
-          <a:lstStyle/>
-          <a:p>
-            <a:pPr algn="l">
-              <a:spcBef>
-                <a:spcPts val="0"/>
-              </a:spcBef>
+          <a:bodyPr rtlCol="0" anchor="t" wrap="square" lIns="320040" rIns="320040" tIns="164592"/>
+          <a:lstStyle/>
+          <a:p>
+            <a:pPr algn="ctr">
               <a:spcAft>
-                <a:spcPts val="1200"/>
+                <a:spcPts val="600"/>
               </a:spcAft>
-              <a:defRPr sz="2300" b="1">
+              <a:defRPr sz="1100" b="1">
+                <a:solidFill>
+                  <a:srgbClr val="219EBC"/>
+                </a:solidFill>
+                <a:latin typeface="Calibri"/>
+              </a:defRPr>
+            </a:pPr>
+            <a:r>
+              <a:t>FORMAL DTAS CHALLENGE DEFINITION</a:t>
+            </a:r>
+          </a:p>
+          <a:p>
+            <a:pPr>
+              <a:spcAft>
+                <a:spcPts val="800"/>
+              </a:spcAft>
+              <a:defRPr sz="1550" b="1">
                 <a:solidFill>
                   <a:srgbClr val="023047"/>
                 </a:solidFill>
@@ -5236,83 +6912,20 @@
               </a:defRPr>
             </a:pPr>
             <a:r>
-              <a:t>Citizens and Surfers</a:t>
-            </a:r>
-          </a:p>
-          <a:p>
-            <a:pPr algn="l">
-              <a:spcBef>
-                <a:spcPts val="0"/>
-              </a:spcBef>
-              <a:spcAft>
-                <a:spcPts val="900"/>
-              </a:spcAft>
-              <a:defRPr sz="1700">
-                <a:solidFill>
-                  <a:srgbClr val="023047"/>
-                </a:solidFill>
-                <a:latin typeface="Calibri"/>
-              </a:defRPr>
-            </a:pPr>
-            <a:r>
-              <a:t>-  Zero real-time visibility into water safety</a:t>
-            </a:r>
-          </a:p>
-          <a:p>
-            <a:pPr algn="l">
-              <a:spcBef>
-                <a:spcPts val="0"/>
-              </a:spcBef>
-              <a:spcAft>
-                <a:spcPts val="900"/>
-              </a:spcAft>
-              <a:defRPr sz="1700">
-                <a:solidFill>
-                  <a:srgbClr val="023047"/>
-                </a:solidFill>
-                <a:latin typeface="Calibri"/>
-              </a:defRPr>
-            </a:pPr>
-            <a:r>
-              <a:t>-  Unknowingly enter water during toxic overflow events</a:t>
-            </a:r>
-          </a:p>
-          <a:p>
-            <a:pPr algn="l">
-              <a:spcBef>
-                <a:spcPts val="0"/>
-              </a:spcBef>
-              <a:spcAft>
-                <a:spcPts val="900"/>
-              </a:spcAft>
-              <a:defRPr sz="1700">
-                <a:solidFill>
-                  <a:srgbClr val="023047"/>
-                </a:solidFill>
-                <a:latin typeface="Calibri"/>
-              </a:defRPr>
-            </a:pPr>
-            <a:r>
-              <a:t>-  High risk of gastrointestinal and skin infections</a:t>
-            </a:r>
-          </a:p>
-          <a:p>
-            <a:pPr algn="l">
-              <a:spcBef>
-                <a:spcPts val="0"/>
-              </a:spcBef>
-              <a:spcAft>
-                <a:spcPts val="900"/>
-              </a:spcAft>
-              <a:defRPr sz="1700">
-                <a:solidFill>
-                  <a:srgbClr val="023047"/>
-                </a:solidFill>
-                <a:latin typeface="Calibri"/>
-              </a:defRPr>
-            </a:pPr>
-            <a:r>
-              <a:t>-  Delayed municipal reports provide no immediate guidance</a:t>
+              <a:t>"How can digital twinning be applied to autonomous systems in order to address the challenge of detecting and localizing transient Combined Sewer Overflows (CSOs) for the Wasserwirtschaftsamt and regional environmental authorities?"</a:t>
+            </a:r>
+          </a:p>
+          <a:p>
+            <a:pPr>
+              <a:defRPr sz="1200">
+                <a:solidFill>
+                  <a:srgbClr val="219EBC"/>
+                </a:solidFill>
+                <a:latin typeface="Calibri"/>
+              </a:defRPr>
+            </a:pPr>
+            <a:r>
+              <a:t>Goal: Replace delayed monthly grab testing with an autonomous closed-loop system connecting physical sensing to predictive action.</a:t>
             </a:r>
           </a:p>
         </p:txBody>
@@ -5351,8 +6964,8 @@
         </p:nvSpPr>
         <p:spPr>
           <a:xfrm>
-            <a:off x="731520" y="502920"/>
-            <a:ext cx="10728655" cy="822960"/>
+            <a:off x="731520" y="411480"/>
+            <a:ext cx="9144000" cy="292608"/>
           </a:xfrm>
           <a:prstGeom prst="rect">
             <a:avLst/>
@@ -5365,8 +6978,44 @@
           </a:bodyPr>
           <a:lstStyle/>
           <a:p>
+            <a:pPr>
+              <a:defRPr sz="1100" b="1">
+                <a:solidFill>
+                  <a:srgbClr val="219EBC"/>
+                </a:solidFill>
+                <a:latin typeface="Calibri"/>
+              </a:defRPr>
+            </a:pPr>
+            <a:r>
+              <a:t>TECHNICAL SOLUTION 1/3</a:t>
+            </a:r>
+          </a:p>
+        </p:txBody>
+      </p:sp>
+      <p:sp>
+        <p:nvSpPr>
+          <p:cNvPr id="3" name="TextBox 2"/>
+          <p:cNvSpPr txBox="1"/>
+          <p:nvPr/>
+        </p:nvSpPr>
+        <p:spPr>
+          <a:xfrm>
+            <a:off x="731520" y="658368"/>
+            <a:ext cx="10728655" cy="640080"/>
+          </a:xfrm>
+          <a:prstGeom prst="rect">
+            <a:avLst/>
+          </a:prstGeom>
+          <a:noFill/>
+        </p:spPr>
+        <p:txBody>
+          <a:bodyPr wrap="square" anchor="t" lIns="0" tIns="0" rIns="0" bIns="0">
+            <a:spAutoFit/>
+          </a:bodyPr>
+          <a:lstStyle/>
+          <a:p>
             <a:pPr algn="l">
-              <a:defRPr sz="4000" b="1">
+              <a:defRPr sz="3600" b="1">
                 <a:solidFill>
                   <a:srgbClr val="023047"/>
                 </a:solidFill>
@@ -5374,21 +7023,21 @@
               </a:defRPr>
             </a:pPr>
             <a:r>
-              <a:t>System Architecture</a:t>
-            </a:r>
-          </a:p>
-        </p:txBody>
-      </p:sp>
-      <p:sp>
-        <p:nvSpPr>
-          <p:cNvPr id="3" name="Rounded Rectangle 2"/>
+              <a:t>The PlumeTrace Architecture</a:t>
+            </a:r>
+          </a:p>
+        </p:txBody>
+      </p:sp>
+      <p:sp>
+        <p:nvSpPr>
+          <p:cNvPr id="4" name="Rounded Rectangle 3"/>
           <p:cNvSpPr/>
           <p:nvPr/>
         </p:nvSpPr>
         <p:spPr>
           <a:xfrm>
-            <a:off x="731520" y="1554480"/>
-            <a:ext cx="3332073" cy="4709160"/>
+            <a:off x="731520" y="1417320"/>
+            <a:ext cx="3332073" cy="2971800"/>
           </a:xfrm>
           <a:prstGeom prst="roundRect">
             <a:avLst>
@@ -5400,7 +7049,7 @@
           </a:solidFill>
           <a:ln w="19050">
             <a:solidFill>
-              <a:srgbClr val="8ECAE6"/>
+              <a:srgbClr val="B4DAEE"/>
             </a:solidFill>
           </a:ln>
         </p:spPr>
@@ -5419,7 +7068,109 @@
           </a:fontRef>
         </p:style>
         <p:txBody>
-          <a:bodyPr rtlCol="0" anchor="t" wrap="square" lIns="320040" rIns="320040" tIns="274320" bIns="228600"/>
+          <a:bodyPr rtlCol="0" anchor="ctr"/>
+          <a:lstStyle/>
+          <a:p>
+            <a:pPr algn="ctr"/>
+          </a:p>
+        </p:txBody>
+      </p:sp>
+      <p:pic>
+        <p:nvPicPr>
+          <p:cNvPr id="5" name="Picture 4" descr="river_asv.png"/>
+          <p:cNvPicPr>
+            <a:picLocks noChangeAspect="1"/>
+          </p:cNvPicPr>
+          <p:nvPr/>
+        </p:nvPicPr>
+        <p:blipFill>
+          <a:blip r:embed="rId2"/>
+          <a:stretch>
+            <a:fillRect/>
+          </a:stretch>
+        </p:blipFill>
+        <p:spPr>
+          <a:xfrm>
+            <a:off x="1005840" y="1636776"/>
+            <a:ext cx="438912" cy="438912"/>
+          </a:xfrm>
+          <a:prstGeom prst="rect">
+            <a:avLst/>
+          </a:prstGeom>
+        </p:spPr>
+      </p:pic>
+      <p:sp>
+        <p:nvSpPr>
+          <p:cNvPr id="6" name="TextBox 5"/>
+          <p:cNvSpPr txBox="1"/>
+          <p:nvPr/>
+        </p:nvSpPr>
+        <p:spPr>
+          <a:xfrm>
+            <a:off x="1536192" y="1581912"/>
+            <a:ext cx="2280513" cy="594360"/>
+          </a:xfrm>
+          <a:prstGeom prst="rect">
+            <a:avLst/>
+          </a:prstGeom>
+          <a:noFill/>
+        </p:spPr>
+        <p:txBody>
+          <a:bodyPr wrap="square" anchor="t" lIns="0" tIns="0" rIns="0" bIns="0">
+            <a:spAutoFit/>
+          </a:bodyPr>
+          <a:lstStyle/>
+          <a:p>
+            <a:pPr>
+              <a:spcAft>
+                <a:spcPts val="200"/>
+              </a:spcAft>
+              <a:defRPr sz="1000" b="1">
+                <a:solidFill>
+                  <a:srgbClr val="219EBC"/>
+                </a:solidFill>
+                <a:latin typeface="Calibri"/>
+              </a:defRPr>
+            </a:pPr>
+            <a:r>
+              <a:t>AQUATIC PHYSICAL LAYER</a:t>
+            </a:r>
+          </a:p>
+          <a:p>
+            <a:pPr algn="l">
+              <a:defRPr sz="1900" b="1">
+                <a:solidFill>
+                  <a:srgbClr val="023047"/>
+                </a:solidFill>
+                <a:latin typeface="Calibri"/>
+              </a:defRPr>
+            </a:pPr>
+            <a:r>
+              <a:t>Autonomous River Robot</a:t>
+            </a:r>
+          </a:p>
+        </p:txBody>
+      </p:sp>
+      <p:sp>
+        <p:nvSpPr>
+          <p:cNvPr id="7" name="TextBox 6"/>
+          <p:cNvSpPr txBox="1"/>
+          <p:nvPr/>
+        </p:nvSpPr>
+        <p:spPr>
+          <a:xfrm>
+            <a:off x="1024128" y="2258568"/>
+            <a:ext cx="2746857" cy="1737360"/>
+          </a:xfrm>
+          <a:prstGeom prst="rect">
+            <a:avLst/>
+          </a:prstGeom>
+          <a:noFill/>
+        </p:spPr>
+        <p:txBody>
+          <a:bodyPr wrap="square" anchor="t" lIns="0" tIns="0" rIns="0" bIns="0">
+            <a:spAutoFit/>
+          </a:bodyPr>
           <a:lstStyle/>
           <a:p>
             <a:pPr algn="l">
@@ -5427,9 +7178,9 @@
                 <a:spcPts val="0"/>
               </a:spcBef>
               <a:spcAft>
-                <a:spcPts val="1200"/>
+                <a:spcPts val="600"/>
               </a:spcAft>
-              <a:defRPr sz="2100" b="1">
+              <a:defRPr sz="1400">
                 <a:solidFill>
                   <a:srgbClr val="023047"/>
                 </a:solidFill>
@@ -5437,7 +7188,7 @@
               </a:defRPr>
             </a:pPr>
             <a:r>
-              <a:t>Physical Platform</a:t>
+              <a:t>-  Autonomous Surface Vessel (ASV) on Pegnitz</a:t>
             </a:r>
           </a:p>
           <a:p>
@@ -5446,9 +7197,9 @@
                 <a:spcPts val="0"/>
               </a:spcBef>
               <a:spcAft>
-                <a:spcPts val="900"/>
+                <a:spcPts val="600"/>
               </a:spcAft>
-              <a:defRPr sz="1500">
+              <a:defRPr sz="1400">
                 <a:solidFill>
                   <a:srgbClr val="023047"/>
                 </a:solidFill>
@@ -5456,7 +7207,7 @@
               </a:defRPr>
             </a:pPr>
             <a:r>
-              <a:t>-  TurtleBot3 surface robotics testbed</a:t>
+              <a:t>-  Continuous chemical payload (Ammonium, DO, pH)</a:t>
             </a:r>
           </a:p>
           <a:p>
@@ -5465,9 +7216,9 @@
                 <a:spcPts val="0"/>
               </a:spcBef>
               <a:spcAft>
-                <a:spcPts val="900"/>
+                <a:spcPts val="600"/>
               </a:spcAft>
-              <a:defRPr sz="1500">
+              <a:defRPr sz="1400">
                 <a:solidFill>
                   <a:srgbClr val="023047"/>
                 </a:solidFill>
@@ -5475,7 +7226,7 @@
               </a:defRPr>
             </a:pPr>
             <a:r>
-              <a:t>-  ROS 2 Jazzy onboard computing</a:t>
+              <a:t>-  360° LiDAR maps riverbank morphology &amp; culverts</a:t>
             </a:r>
           </a:p>
           <a:p>
@@ -5484,9 +7235,9 @@
                 <a:spcPts val="0"/>
               </a:spcBef>
               <a:spcAft>
-                <a:spcPts val="900"/>
+                <a:spcPts val="600"/>
               </a:spcAft>
-              <a:defRPr sz="1500">
+              <a:defRPr sz="1400">
                 <a:solidFill>
                   <a:srgbClr val="023047"/>
                 </a:solidFill>
@@ -5494,18 +7245,264 @@
               </a:defRPr>
             </a:pPr>
             <a:r>
-              <a:t>-  LDS-02 LiDAR and overhead tracking</a:t>
-            </a:r>
-          </a:p>
+              <a:t>-  Edge autonomy with fail-safe return-to-dock</a:t>
+            </a:r>
+          </a:p>
+        </p:txBody>
+      </p:sp>
+      <p:sp>
+        <p:nvSpPr>
+          <p:cNvPr id="8" name="Rounded Rectangle 7"/>
+          <p:cNvSpPr/>
+          <p:nvPr/>
+        </p:nvSpPr>
+        <p:spPr>
+          <a:xfrm>
+            <a:off x="987552" y="3931920"/>
+            <a:ext cx="2820009" cy="320040"/>
+          </a:xfrm>
+          <a:prstGeom prst="roundRect">
+            <a:avLst>
+              <a:gd name="adj" fmla="val 8000"/>
+            </a:avLst>
+          </a:prstGeom>
+          <a:solidFill>
+            <a:srgbClr val="EBF4FA"/>
+          </a:solidFill>
+          <a:ln w="12700">
+            <a:solidFill>
+              <a:srgbClr val="8ECAE6"/>
+            </a:solidFill>
+          </a:ln>
+        </p:spPr>
+        <p:style>
+          <a:lnRef idx="1">
+            <a:schemeClr val="accent1"/>
+          </a:lnRef>
+          <a:fillRef idx="3">
+            <a:schemeClr val="accent1"/>
+          </a:fillRef>
+          <a:effectRef idx="2">
+            <a:schemeClr val="accent1"/>
+          </a:effectRef>
+          <a:fontRef idx="minor">
+            <a:schemeClr val="lt1"/>
+          </a:fontRef>
+        </p:style>
+        <p:txBody>
+          <a:bodyPr rtlCol="0" anchor="ctr" wrap="square" lIns="137160" rIns="137160" tIns="0" bIns="0"/>
+          <a:lstStyle/>
+          <a:p>
+            <a:pPr algn="l">
+              <a:defRPr sz="1100" b="1">
+                <a:solidFill>
+                  <a:srgbClr val="219EBC"/>
+                </a:solidFill>
+                <a:latin typeface="Calibri"/>
+              </a:defRPr>
+            </a:pPr>
+            <a:r>
+              <a:t>Active In-River Sensing  |  3D LiDAR  |  Auto-Dock</a:t>
+            </a:r>
+          </a:p>
+        </p:txBody>
+      </p:sp>
+      <p:sp>
+        <p:nvSpPr>
+          <p:cNvPr id="9" name="Right Arrow 8"/>
+          <p:cNvSpPr/>
+          <p:nvPr/>
+        </p:nvSpPr>
+        <p:spPr>
+          <a:xfrm>
+            <a:off x="4136745" y="2697480"/>
+            <a:ext cx="219456" cy="320040"/>
+          </a:xfrm>
+          <a:prstGeom prst="rightArrow">
+            <a:avLst/>
+          </a:prstGeom>
+          <a:solidFill>
+            <a:srgbClr val="219EBC"/>
+          </a:solidFill>
+          <a:ln>
+            <a:noFill/>
+          </a:ln>
+        </p:spPr>
+        <p:style>
+          <a:lnRef idx="1">
+            <a:schemeClr val="accent1"/>
+          </a:lnRef>
+          <a:fillRef idx="3">
+            <a:schemeClr val="accent1"/>
+          </a:fillRef>
+          <a:effectRef idx="2">
+            <a:schemeClr val="accent1"/>
+          </a:effectRef>
+          <a:fontRef idx="minor">
+            <a:schemeClr val="lt1"/>
+          </a:fontRef>
+        </p:style>
+        <p:txBody>
+          <a:bodyPr rtlCol="0" anchor="ctr"/>
+          <a:lstStyle/>
+          <a:p>
+            <a:pPr algn="ctr"/>
+          </a:p>
+        </p:txBody>
+      </p:sp>
+      <p:sp>
+        <p:nvSpPr>
+          <p:cNvPr id="10" name="Rounded Rectangle 9"/>
+          <p:cNvSpPr/>
+          <p:nvPr/>
+        </p:nvSpPr>
+        <p:spPr>
+          <a:xfrm>
+            <a:off x="4429353" y="1417320"/>
+            <a:ext cx="3332073" cy="2971800"/>
+          </a:xfrm>
+          <a:prstGeom prst="roundRect">
+            <a:avLst>
+              <a:gd name="adj" fmla="val 3500"/>
+            </a:avLst>
+          </a:prstGeom>
+          <a:solidFill>
+            <a:srgbClr val="F4F9FC"/>
+          </a:solidFill>
+          <a:ln w="19050">
+            <a:solidFill>
+              <a:srgbClr val="B4DAEE"/>
+            </a:solidFill>
+          </a:ln>
+        </p:spPr>
+        <p:style>
+          <a:lnRef idx="1">
+            <a:schemeClr val="accent1"/>
+          </a:lnRef>
+          <a:fillRef idx="3">
+            <a:schemeClr val="accent1"/>
+          </a:fillRef>
+          <a:effectRef idx="2">
+            <a:schemeClr val="accent1"/>
+          </a:effectRef>
+          <a:fontRef idx="minor">
+            <a:schemeClr val="lt1"/>
+          </a:fontRef>
+        </p:style>
+        <p:txBody>
+          <a:bodyPr rtlCol="0" anchor="ctr"/>
+          <a:lstStyle/>
+          <a:p>
+            <a:pPr algn="ctr"/>
+          </a:p>
+        </p:txBody>
+      </p:sp>
+      <p:pic>
+        <p:nvPicPr>
+          <p:cNvPr id="11" name="Picture 10" descr="cloud_twin.png"/>
+          <p:cNvPicPr>
+            <a:picLocks noChangeAspect="1"/>
+          </p:cNvPicPr>
+          <p:nvPr/>
+        </p:nvPicPr>
+        <p:blipFill>
+          <a:blip r:embed="rId3"/>
+          <a:stretch>
+            <a:fillRect/>
+          </a:stretch>
+        </p:blipFill>
+        <p:spPr>
+          <a:xfrm>
+            <a:off x="4703673" y="1636776"/>
+            <a:ext cx="438912" cy="438912"/>
+          </a:xfrm>
+          <a:prstGeom prst="rect">
+            <a:avLst/>
+          </a:prstGeom>
+        </p:spPr>
+      </p:pic>
+      <p:sp>
+        <p:nvSpPr>
+          <p:cNvPr id="12" name="TextBox 11"/>
+          <p:cNvSpPr txBox="1"/>
+          <p:nvPr/>
+        </p:nvSpPr>
+        <p:spPr>
+          <a:xfrm>
+            <a:off x="5234025" y="1581912"/>
+            <a:ext cx="2280513" cy="594360"/>
+          </a:xfrm>
+          <a:prstGeom prst="rect">
+            <a:avLst/>
+          </a:prstGeom>
+          <a:noFill/>
+        </p:spPr>
+        <p:txBody>
+          <a:bodyPr wrap="square" anchor="t" lIns="0" tIns="0" rIns="0" bIns="0">
+            <a:spAutoFit/>
+          </a:bodyPr>
+          <a:lstStyle/>
+          <a:p>
+            <a:pPr>
+              <a:spcAft>
+                <a:spcPts val="200"/>
+              </a:spcAft>
+              <a:defRPr sz="1000" b="1">
+                <a:solidFill>
+                  <a:srgbClr val="219EBC"/>
+                </a:solidFill>
+                <a:latin typeface="Calibri"/>
+              </a:defRPr>
+            </a:pPr>
+            <a:r>
+              <a:t>CLOUD SIMULATION &amp; AI CORE</a:t>
+            </a:r>
+          </a:p>
+          <a:p>
+            <a:pPr algn="l">
+              <a:defRPr sz="1900" b="1">
+                <a:solidFill>
+                  <a:srgbClr val="023047"/>
+                </a:solidFill>
+                <a:latin typeface="Calibri"/>
+              </a:defRPr>
+            </a:pPr>
+            <a:r>
+              <a:t>Predictive Digital Twin</a:t>
+            </a:r>
+          </a:p>
+        </p:txBody>
+      </p:sp>
+      <p:sp>
+        <p:nvSpPr>
+          <p:cNvPr id="13" name="TextBox 12"/>
+          <p:cNvSpPr txBox="1"/>
+          <p:nvPr/>
+        </p:nvSpPr>
+        <p:spPr>
+          <a:xfrm>
+            <a:off x="4721961" y="2258568"/>
+            <a:ext cx="2746857" cy="1737360"/>
+          </a:xfrm>
+          <a:prstGeom prst="rect">
+            <a:avLst/>
+          </a:prstGeom>
+          <a:noFill/>
+        </p:spPr>
+        <p:txBody>
+          <a:bodyPr wrap="square" anchor="t" lIns="0" tIns="0" rIns="0" bIns="0">
+            <a:spAutoFit/>
+          </a:bodyPr>
+          <a:lstStyle/>
           <a:p>
             <a:pPr algn="l">
               <a:spcBef>
                 <a:spcPts val="0"/>
               </a:spcBef>
               <a:spcAft>
-                <a:spcPts val="900"/>
+                <a:spcPts val="600"/>
               </a:spcAft>
-              <a:defRPr sz="1500">
+              <a:defRPr sz="1400">
                 <a:solidFill>
                   <a:srgbClr val="023047"/>
                 </a:solidFill>
@@ -5513,21 +7510,178 @@
               </a:defRPr>
             </a:pPr>
             <a:r>
-              <a:t>-  Emulated chemical sensor payload</a:t>
-            </a:r>
-          </a:p>
-        </p:txBody>
-      </p:sp>
-      <p:sp>
-        <p:nvSpPr>
-          <p:cNvPr id="4" name="Rounded Rectangle 3"/>
+              <a:t>-  Hydrodynamic river advection-dispersion engine</a:t>
+            </a:r>
+          </a:p>
+          <a:p>
+            <a:pPr algn="l">
+              <a:spcBef>
+                <a:spcPts val="0"/>
+              </a:spcBef>
+              <a:spcAft>
+                <a:spcPts val="600"/>
+              </a:spcAft>
+              <a:defRPr sz="1400">
+                <a:solidFill>
+                  <a:srgbClr val="023047"/>
+                </a:solidFill>
+                <a:latin typeface="Calibri"/>
+              </a:defRPr>
+            </a:pPr>
+            <a:r>
+              <a:t>-  Ingests live DWD storm radar &amp; river discharge</a:t>
+            </a:r>
+          </a:p>
+          <a:p>
+            <a:pPr algn="l">
+              <a:spcBef>
+                <a:spcPts val="0"/>
+              </a:spcBef>
+              <a:spcAft>
+                <a:spcPts val="600"/>
+              </a:spcAft>
+              <a:defRPr sz="1400">
+                <a:solidFill>
+                  <a:srgbClr val="023047"/>
+                </a:solidFill>
+                <a:latin typeface="Calibri"/>
+              </a:defRPr>
+            </a:pPr>
+            <a:r>
+              <a:t>-  Multi-objective solver computes optimal sampling</a:t>
+            </a:r>
+          </a:p>
+          <a:p>
+            <a:pPr algn="l">
+              <a:spcBef>
+                <a:spcPts val="0"/>
+              </a:spcBef>
+              <a:spcAft>
+                <a:spcPts val="600"/>
+              </a:spcAft>
+              <a:defRPr sz="1400">
+                <a:solidFill>
+                  <a:srgbClr val="023047"/>
+                </a:solidFill>
+                <a:latin typeface="Calibri"/>
+              </a:defRPr>
+            </a:pPr>
+            <a:r>
+              <a:t>-  Continuously directs robot where to navigate next</a:t>
+            </a:r>
+          </a:p>
+        </p:txBody>
+      </p:sp>
+      <p:sp>
+        <p:nvSpPr>
+          <p:cNvPr id="14" name="Rounded Rectangle 13"/>
           <p:cNvSpPr/>
           <p:nvPr/>
         </p:nvSpPr>
         <p:spPr>
           <a:xfrm>
-            <a:off x="4429353" y="1554480"/>
-            <a:ext cx="3332073" cy="4709160"/>
+            <a:off x="4685385" y="3931920"/>
+            <a:ext cx="2820009" cy="320040"/>
+          </a:xfrm>
+          <a:prstGeom prst="roundRect">
+            <a:avLst>
+              <a:gd name="adj" fmla="val 8000"/>
+            </a:avLst>
+          </a:prstGeom>
+          <a:solidFill>
+            <a:srgbClr val="EBF4FA"/>
+          </a:solidFill>
+          <a:ln w="12700">
+            <a:solidFill>
+              <a:srgbClr val="8ECAE6"/>
+            </a:solidFill>
+          </a:ln>
+        </p:spPr>
+        <p:style>
+          <a:lnRef idx="1">
+            <a:schemeClr val="accent1"/>
+          </a:lnRef>
+          <a:fillRef idx="3">
+            <a:schemeClr val="accent1"/>
+          </a:fillRef>
+          <a:effectRef idx="2">
+            <a:schemeClr val="accent1"/>
+          </a:effectRef>
+          <a:fontRef idx="minor">
+            <a:schemeClr val="lt1"/>
+          </a:fontRef>
+        </p:style>
+        <p:txBody>
+          <a:bodyPr rtlCol="0" anchor="ctr" wrap="square" lIns="137160" rIns="137160" tIns="0" bIns="0"/>
+          <a:lstStyle/>
+          <a:p>
+            <a:pPr algn="l">
+              <a:defRPr sz="1100" b="1">
+                <a:solidFill>
+                  <a:srgbClr val="219EBC"/>
+                </a:solidFill>
+                <a:latin typeface="Calibri"/>
+              </a:defRPr>
+            </a:pPr>
+            <a:r>
+              <a:t>Hydrodynamic Dispersion  |  Radar  |  Retasking</a:t>
+            </a:r>
+          </a:p>
+        </p:txBody>
+      </p:sp>
+      <p:sp>
+        <p:nvSpPr>
+          <p:cNvPr id="15" name="Right Arrow 14"/>
+          <p:cNvSpPr/>
+          <p:nvPr/>
+        </p:nvSpPr>
+        <p:spPr>
+          <a:xfrm>
+            <a:off x="7834578" y="2697480"/>
+            <a:ext cx="219456" cy="320040"/>
+          </a:xfrm>
+          <a:prstGeom prst="rightArrow">
+            <a:avLst/>
+          </a:prstGeom>
+          <a:solidFill>
+            <a:srgbClr val="219EBC"/>
+          </a:solidFill>
+          <a:ln>
+            <a:noFill/>
+          </a:ln>
+        </p:spPr>
+        <p:style>
+          <a:lnRef idx="1">
+            <a:schemeClr val="accent1"/>
+          </a:lnRef>
+          <a:fillRef idx="3">
+            <a:schemeClr val="accent1"/>
+          </a:fillRef>
+          <a:effectRef idx="2">
+            <a:schemeClr val="accent1"/>
+          </a:effectRef>
+          <a:fontRef idx="minor">
+            <a:schemeClr val="lt1"/>
+          </a:fontRef>
+        </p:style>
+        <p:txBody>
+          <a:bodyPr rtlCol="0" anchor="ctr"/>
+          <a:lstStyle/>
+          <a:p>
+            <a:pPr algn="ctr"/>
+          </a:p>
+        </p:txBody>
+      </p:sp>
+      <p:sp>
+        <p:nvSpPr>
+          <p:cNvPr id="16" name="Rounded Rectangle 15"/>
+          <p:cNvSpPr/>
+          <p:nvPr/>
+        </p:nvSpPr>
+        <p:spPr>
+          <a:xfrm>
+            <a:off x="8127186" y="1417320"/>
+            <a:ext cx="3332073" cy="2971800"/>
           </a:xfrm>
           <a:prstGeom prst="roundRect">
             <a:avLst>
@@ -5539,7 +7693,7 @@
           </a:solidFill>
           <a:ln w="19050">
             <a:solidFill>
-              <a:srgbClr val="8ECAE6"/>
+              <a:srgbClr val="B4DAEE"/>
             </a:solidFill>
           </a:ln>
         </p:spPr>
@@ -5558,7 +7712,109 @@
           </a:fontRef>
         </p:style>
         <p:txBody>
-          <a:bodyPr rtlCol="0" anchor="t" wrap="square" lIns="320040" rIns="320040" tIns="274320" bIns="228600"/>
+          <a:bodyPr rtlCol="0" anchor="ctr"/>
+          <a:lstStyle/>
+          <a:p>
+            <a:pPr algn="ctr"/>
+          </a:p>
+        </p:txBody>
+      </p:sp>
+      <p:pic>
+        <p:nvPicPr>
+          <p:cNvPr id="17" name="Picture 16" descr="digital_twin_3d.png"/>
+          <p:cNvPicPr>
+            <a:picLocks noChangeAspect="1"/>
+          </p:cNvPicPr>
+          <p:nvPr/>
+        </p:nvPicPr>
+        <p:blipFill>
+          <a:blip r:embed="rId4"/>
+          <a:stretch>
+            <a:fillRect/>
+          </a:stretch>
+        </p:blipFill>
+        <p:spPr>
+          <a:xfrm>
+            <a:off x="8401506" y="1636776"/>
+            <a:ext cx="438912" cy="438912"/>
+          </a:xfrm>
+          <a:prstGeom prst="rect">
+            <a:avLst/>
+          </a:prstGeom>
+        </p:spPr>
+      </p:pic>
+      <p:sp>
+        <p:nvSpPr>
+          <p:cNvPr id="18" name="TextBox 17"/>
+          <p:cNvSpPr txBox="1"/>
+          <p:nvPr/>
+        </p:nvSpPr>
+        <p:spPr>
+          <a:xfrm>
+            <a:off x="8931858" y="1581912"/>
+            <a:ext cx="2280513" cy="594360"/>
+          </a:xfrm>
+          <a:prstGeom prst="rect">
+            <a:avLst/>
+          </a:prstGeom>
+          <a:noFill/>
+        </p:spPr>
+        <p:txBody>
+          <a:bodyPr wrap="square" anchor="t" lIns="0" tIns="0" rIns="0" bIns="0">
+            <a:spAutoFit/>
+          </a:bodyPr>
+          <a:lstStyle/>
+          <a:p>
+            <a:pPr>
+              <a:spcAft>
+                <a:spcPts val="200"/>
+              </a:spcAft>
+              <a:defRPr sz="1000" b="1">
+                <a:solidFill>
+                  <a:srgbClr val="219EBC"/>
+                </a:solidFill>
+                <a:latin typeface="Calibri"/>
+              </a:defRPr>
+            </a:pPr>
+            <a:r>
+              <a:t>DECISION &amp; COMPLIANCE LAYER</a:t>
+            </a:r>
+          </a:p>
+          <a:p>
+            <a:pPr algn="l">
+              <a:defRPr sz="1900" b="1">
+                <a:solidFill>
+                  <a:srgbClr val="023047"/>
+                </a:solidFill>
+                <a:latin typeface="Calibri"/>
+              </a:defRPr>
+            </a:pPr>
+            <a:r>
+              <a:t>Municipal Command Center</a:t>
+            </a:r>
+          </a:p>
+        </p:txBody>
+      </p:sp>
+      <p:sp>
+        <p:nvSpPr>
+          <p:cNvPr id="19" name="TextBox 18"/>
+          <p:cNvSpPr txBox="1"/>
+          <p:nvPr/>
+        </p:nvSpPr>
+        <p:spPr>
+          <a:xfrm>
+            <a:off x="8419794" y="2258568"/>
+            <a:ext cx="2746857" cy="1737360"/>
+          </a:xfrm>
+          <a:prstGeom prst="rect">
+            <a:avLst/>
+          </a:prstGeom>
+          <a:noFill/>
+        </p:spPr>
+        <p:txBody>
+          <a:bodyPr wrap="square" anchor="t" lIns="0" tIns="0" rIns="0" bIns="0">
+            <a:spAutoFit/>
+          </a:bodyPr>
           <a:lstStyle/>
           <a:p>
             <a:pPr algn="l">
@@ -5566,9 +7822,9 @@
                 <a:spcPts val="0"/>
               </a:spcBef>
               <a:spcAft>
-                <a:spcPts val="1200"/>
+                <a:spcPts val="600"/>
               </a:spcAft>
-              <a:defRPr sz="2100" b="1">
+              <a:defRPr sz="1400">
                 <a:solidFill>
                   <a:srgbClr val="023047"/>
                 </a:solidFill>
@@ -5576,7 +7832,7 @@
               </a:defRPr>
             </a:pPr>
             <a:r>
-              <a:t>Simulation Mirror</a:t>
+              <a:t>-  Geospatial 3D twin with Bavarian LOD2 data</a:t>
             </a:r>
           </a:p>
           <a:p>
@@ -5585,9 +7841,9 @@
                 <a:spcPts val="0"/>
               </a:spcBef>
               <a:spcAft>
-                <a:spcPts val="900"/>
+                <a:spcPts val="600"/>
               </a:spcAft>
-              <a:defRPr sz="1500">
+              <a:defRPr sz="1400">
                 <a:solidFill>
                   <a:srgbClr val="023047"/>
                 </a:solidFill>
@@ -5595,7 +7851,7 @@
               </a:defRPr>
             </a:pPr>
             <a:r>
-              <a:t>-  Gazebo Harmonic physics engine</a:t>
+              <a:t>-  Real-time pollution heatmaps &amp; outfall health</a:t>
             </a:r>
           </a:p>
           <a:p>
@@ -5604,9 +7860,9 @@
                 <a:spcPts val="0"/>
               </a:spcBef>
               <a:spcAft>
-                <a:spcPts val="900"/>
+                <a:spcPts val="600"/>
               </a:spcAft>
-              <a:defRPr sz="1500">
+              <a:defRPr sz="1400">
                 <a:solidFill>
                   <a:srgbClr val="023047"/>
                 </a:solidFill>
@@ -5614,7 +7870,7 @@
               </a:defRPr>
             </a:pPr>
             <a:r>
-              <a:t>-  Bi-directional ROS-Gazebo bridge</a:t>
+              <a:t>-  Pinpoints exact sewer outfalls causing violations</a:t>
             </a:r>
           </a:p>
           <a:p>
@@ -5623,9 +7879,9 @@
                 <a:spcPts val="0"/>
               </a:spcBef>
               <a:spcAft>
-                <a:spcPts val="900"/>
+                <a:spcPts val="600"/>
               </a:spcAft>
-              <a:defRPr sz="1500">
+              <a:defRPr sz="1400">
                 <a:solidFill>
                   <a:srgbClr val="023047"/>
                 </a:solidFill>
@@ -5633,40 +7889,78 @@
               </a:defRPr>
             </a:pPr>
             <a:r>
-              <a:t>-  Ghost follower pose tracking</a:t>
-            </a:r>
-          </a:p>
+              <a:t>-  Automated statutory alerts (&lt;60s) to WWA &amp; SUN</a:t>
+            </a:r>
+          </a:p>
+        </p:txBody>
+      </p:sp>
+      <p:sp>
+        <p:nvSpPr>
+          <p:cNvPr id="20" name="Rounded Rectangle 19"/>
+          <p:cNvSpPr/>
+          <p:nvPr/>
+        </p:nvSpPr>
+        <p:spPr>
+          <a:xfrm>
+            <a:off x="8383218" y="3931920"/>
+            <a:ext cx="2820009" cy="320040"/>
+          </a:xfrm>
+          <a:prstGeom prst="roundRect">
+            <a:avLst>
+              <a:gd name="adj" fmla="val 8000"/>
+            </a:avLst>
+          </a:prstGeom>
+          <a:solidFill>
+            <a:srgbClr val="EBF4FA"/>
+          </a:solidFill>
+          <a:ln w="12700">
+            <a:solidFill>
+              <a:srgbClr val="8ECAE6"/>
+            </a:solidFill>
+          </a:ln>
+        </p:spPr>
+        <p:style>
+          <a:lnRef idx="1">
+            <a:schemeClr val="accent1"/>
+          </a:lnRef>
+          <a:fillRef idx="3">
+            <a:schemeClr val="accent1"/>
+          </a:fillRef>
+          <a:effectRef idx="2">
+            <a:schemeClr val="accent1"/>
+          </a:effectRef>
+          <a:fontRef idx="minor">
+            <a:schemeClr val="lt1"/>
+          </a:fontRef>
+        </p:style>
+        <p:txBody>
+          <a:bodyPr rtlCol="0" anchor="ctr" wrap="square" lIns="137160" rIns="137160" tIns="0" bIns="0"/>
+          <a:lstStyle/>
           <a:p>
             <a:pPr algn="l">
-              <a:spcBef>
-                <a:spcPts val="0"/>
-              </a:spcBef>
-              <a:spcAft>
-                <a:spcPts val="900"/>
-              </a:spcAft>
-              <a:defRPr sz="1500">
-                <a:solidFill>
-                  <a:srgbClr val="023047"/>
-                </a:solidFill>
-                <a:latin typeface="Calibri"/>
-              </a:defRPr>
-            </a:pPr>
-            <a:r>
-              <a:t>-  Dynamic obstacle injection</a:t>
-            </a:r>
-          </a:p>
-        </p:txBody>
-      </p:sp>
-      <p:sp>
-        <p:nvSpPr>
-          <p:cNvPr id="5" name="Rounded Rectangle 4"/>
+              <a:defRPr sz="1100" b="1">
+                <a:solidFill>
+                  <a:srgbClr val="219EBC"/>
+                </a:solidFill>
+                <a:latin typeface="Calibri"/>
+              </a:defRPr>
+            </a:pPr>
+            <a:r>
+              <a:t>CesiumJS 3D  |  Bavarian LOD2  |  &lt; 60s Alerts</a:t>
+            </a:r>
+          </a:p>
+        </p:txBody>
+      </p:sp>
+      <p:sp>
+        <p:nvSpPr>
+          <p:cNvPr id="21" name="Rounded Rectangle 20"/>
           <p:cNvSpPr/>
           <p:nvPr/>
         </p:nvSpPr>
         <p:spPr>
           <a:xfrm>
-            <a:off x="8127186" y="1554480"/>
-            <a:ext cx="3332073" cy="4709160"/>
+            <a:off x="731520" y="4572000"/>
+            <a:ext cx="10728655" cy="1691640"/>
           </a:xfrm>
           <a:prstGeom prst="roundRect">
             <a:avLst>
@@ -5678,7 +7972,7 @@
           </a:solidFill>
           <a:ln w="19050">
             <a:solidFill>
-              <a:srgbClr val="8ECAE6"/>
+              <a:srgbClr val="B4DAEE"/>
             </a:solidFill>
           </a:ln>
         </p:spPr>
@@ -5697,17 +7991,87 @@
           </a:fontRef>
         </p:style>
         <p:txBody>
-          <a:bodyPr rtlCol="0" anchor="t" wrap="square" lIns="320040" rIns="320040" tIns="274320" bIns="228600"/>
-          <a:lstStyle/>
-          <a:p>
-            <a:pPr algn="l">
+          <a:bodyPr rtlCol="0" anchor="t" wrap="square" lIns="320040" rIns="320040" tIns="164592"/>
+          <a:lstStyle/>
+          <a:p>
+            <a:pPr algn="ctr">
+              <a:spcAft>
+                <a:spcPts val="800"/>
+              </a:spcAft>
+              <a:defRPr sz="1100" b="1">
+                <a:solidFill>
+                  <a:srgbClr val="219EBC"/>
+                </a:solidFill>
+                <a:latin typeface="Calibri"/>
+              </a:defRPr>
+            </a:pPr>
+            <a:r>
+              <a:t>END-TO-END AUTONOMOUS ARCHITECTURE PIPELINE</a:t>
+            </a:r>
+          </a:p>
+        </p:txBody>
+      </p:sp>
+      <p:sp>
+        <p:nvSpPr>
+          <p:cNvPr id="22" name="Rounded Rectangle 21"/>
+          <p:cNvSpPr/>
+          <p:nvPr/>
+        </p:nvSpPr>
+        <p:spPr>
+          <a:xfrm>
+            <a:off x="1005840" y="4956048"/>
+            <a:ext cx="3154680" cy="1115568"/>
+          </a:xfrm>
+          <a:prstGeom prst="roundRect">
+            <a:avLst>
+              <a:gd name="adj" fmla="val 5000"/>
+            </a:avLst>
+          </a:prstGeom>
+          <a:solidFill>
+            <a:srgbClr val="FFFFFF"/>
+          </a:solidFill>
+          <a:ln w="12700">
+            <a:solidFill>
+              <a:srgbClr val="8ECAE6"/>
+            </a:solidFill>
+          </a:ln>
+        </p:spPr>
+        <p:style>
+          <a:lnRef idx="1">
+            <a:schemeClr val="accent1"/>
+          </a:lnRef>
+          <a:fillRef idx="3">
+            <a:schemeClr val="accent1"/>
+          </a:fillRef>
+          <a:effectRef idx="2">
+            <a:schemeClr val="accent1"/>
+          </a:effectRef>
+          <a:fontRef idx="minor">
+            <a:schemeClr val="lt1"/>
+          </a:fontRef>
+        </p:style>
+        <p:txBody>
+          <a:bodyPr rtlCol="0" anchor="t" wrap="square" lIns="109728" rIns="109728" tIns="109728"/>
+          <a:lstStyle/>
+          <a:p>
+            <a:pPr algn="ctr">
+              <a:defRPr sz="1200" b="1">
+                <a:solidFill>
+                  <a:srgbClr val="023047"/>
+                </a:solidFill>
+                <a:latin typeface="Calibri"/>
+              </a:defRPr>
+            </a:pPr>
+            <a:r>
+              <a:t>1. Aquatic In-River Sensing</a:t>
+            </a:r>
+          </a:p>
+          <a:p>
+            <a:pPr>
               <a:spcBef>
-                <a:spcPts val="0"/>
+                <a:spcPts val="300"/>
               </a:spcBef>
-              <a:spcAft>
-                <a:spcPts val="1200"/>
-              </a:spcAft>
-              <a:defRPr sz="2100" b="1">
+              <a:defRPr sz="1050">
                 <a:solidFill>
                   <a:srgbClr val="023047"/>
                 </a:solidFill>
@@ -5715,18 +8079,115 @@
               </a:defRPr>
             </a:pPr>
             <a:r>
-              <a:t>3D Digital Twin</a:t>
-            </a:r>
-          </a:p>
-          <a:p>
-            <a:pPr algn="l">
+              <a:t>Autonomous surface vessel streams chemical telemetry, obstacle LiDAR scans, and GPS coordinates at 5 Hz.</a:t>
+            </a:r>
+          </a:p>
+        </p:txBody>
+      </p:sp>
+      <p:sp>
+        <p:nvSpPr>
+          <p:cNvPr id="23" name="Right Arrow 22"/>
+          <p:cNvSpPr/>
+          <p:nvPr/>
+        </p:nvSpPr>
+        <p:spPr>
+          <a:xfrm>
+            <a:off x="4270248" y="5394960"/>
+            <a:ext cx="228600" cy="256032"/>
+          </a:xfrm>
+          <a:prstGeom prst="rightArrow">
+            <a:avLst/>
+          </a:prstGeom>
+          <a:solidFill>
+            <a:srgbClr val="219EBC"/>
+          </a:solidFill>
+          <a:ln>
+            <a:noFill/>
+          </a:ln>
+        </p:spPr>
+        <p:style>
+          <a:lnRef idx="1">
+            <a:schemeClr val="accent1"/>
+          </a:lnRef>
+          <a:fillRef idx="3">
+            <a:schemeClr val="accent1"/>
+          </a:fillRef>
+          <a:effectRef idx="2">
+            <a:schemeClr val="accent1"/>
+          </a:effectRef>
+          <a:fontRef idx="minor">
+            <a:schemeClr val="lt1"/>
+          </a:fontRef>
+        </p:style>
+        <p:txBody>
+          <a:bodyPr rtlCol="0" anchor="ctr"/>
+          <a:lstStyle/>
+          <a:p>
+            <a:pPr algn="ctr"/>
+          </a:p>
+        </p:txBody>
+      </p:sp>
+      <p:sp>
+        <p:nvSpPr>
+          <p:cNvPr id="24" name="Rounded Rectangle 23"/>
+          <p:cNvSpPr/>
+          <p:nvPr/>
+        </p:nvSpPr>
+        <p:spPr>
+          <a:xfrm>
+            <a:off x="4617720" y="4956048"/>
+            <a:ext cx="3154680" cy="1115568"/>
+          </a:xfrm>
+          <a:prstGeom prst="roundRect">
+            <a:avLst>
+              <a:gd name="adj" fmla="val 5000"/>
+            </a:avLst>
+          </a:prstGeom>
+          <a:solidFill>
+            <a:srgbClr val="FFFFFF"/>
+          </a:solidFill>
+          <a:ln w="12700">
+            <a:solidFill>
+              <a:srgbClr val="8ECAE6"/>
+            </a:solidFill>
+          </a:ln>
+        </p:spPr>
+        <p:style>
+          <a:lnRef idx="1">
+            <a:schemeClr val="accent1"/>
+          </a:lnRef>
+          <a:fillRef idx="3">
+            <a:schemeClr val="accent1"/>
+          </a:fillRef>
+          <a:effectRef idx="2">
+            <a:schemeClr val="accent1"/>
+          </a:effectRef>
+          <a:fontRef idx="minor">
+            <a:schemeClr val="lt1"/>
+          </a:fontRef>
+        </p:style>
+        <p:txBody>
+          <a:bodyPr rtlCol="0" anchor="t" wrap="square" lIns="109728" rIns="109728" tIns="109728"/>
+          <a:lstStyle/>
+          <a:p>
+            <a:pPr algn="ctr">
+              <a:defRPr sz="1200" b="1">
+                <a:solidFill>
+                  <a:srgbClr val="023047"/>
+                </a:solidFill>
+                <a:latin typeface="Calibri"/>
+              </a:defRPr>
+            </a:pPr>
+            <a:r>
+              <a:t>2. Predictive Digital Twin</a:t>
+            </a:r>
+          </a:p>
+          <a:p>
+            <a:pPr>
               <a:spcBef>
-                <a:spcPts val="0"/>
+                <a:spcPts val="300"/>
               </a:spcBef>
-              <a:spcAft>
-                <a:spcPts val="900"/>
-              </a:spcAft>
-              <a:defRPr sz="1500">
+              <a:defRPr sz="1050">
                 <a:solidFill>
                   <a:srgbClr val="023047"/>
                 </a:solidFill>
@@ -5734,18 +8195,115 @@
               </a:defRPr>
             </a:pPr>
             <a:r>
-              <a:t>-  CesiumJS with Bavarian LOD2 3D data</a:t>
-            </a:r>
-          </a:p>
-          <a:p>
-            <a:pPr algn="l">
+              <a:t>Cloud twin simulates hydrodynamics, assimilates storm radar, and computes optimal upstream waypoints.</a:t>
+            </a:r>
+          </a:p>
+        </p:txBody>
+      </p:sp>
+      <p:sp>
+        <p:nvSpPr>
+          <p:cNvPr id="25" name="Right Arrow 24"/>
+          <p:cNvSpPr/>
+          <p:nvPr/>
+        </p:nvSpPr>
+        <p:spPr>
+          <a:xfrm>
+            <a:off x="7882128" y="5394960"/>
+            <a:ext cx="228600" cy="256032"/>
+          </a:xfrm>
+          <a:prstGeom prst="rightArrow">
+            <a:avLst/>
+          </a:prstGeom>
+          <a:solidFill>
+            <a:srgbClr val="219EBC"/>
+          </a:solidFill>
+          <a:ln>
+            <a:noFill/>
+          </a:ln>
+        </p:spPr>
+        <p:style>
+          <a:lnRef idx="1">
+            <a:schemeClr val="accent1"/>
+          </a:lnRef>
+          <a:fillRef idx="3">
+            <a:schemeClr val="accent1"/>
+          </a:fillRef>
+          <a:effectRef idx="2">
+            <a:schemeClr val="accent1"/>
+          </a:effectRef>
+          <a:fontRef idx="minor">
+            <a:schemeClr val="lt1"/>
+          </a:fontRef>
+        </p:style>
+        <p:txBody>
+          <a:bodyPr rtlCol="0" anchor="ctr"/>
+          <a:lstStyle/>
+          <a:p>
+            <a:pPr algn="ctr"/>
+          </a:p>
+        </p:txBody>
+      </p:sp>
+      <p:sp>
+        <p:nvSpPr>
+          <p:cNvPr id="26" name="Rounded Rectangle 25"/>
+          <p:cNvSpPr/>
+          <p:nvPr/>
+        </p:nvSpPr>
+        <p:spPr>
+          <a:xfrm>
+            <a:off x="8229600" y="4956048"/>
+            <a:ext cx="3154680" cy="1115568"/>
+          </a:xfrm>
+          <a:prstGeom prst="roundRect">
+            <a:avLst>
+              <a:gd name="adj" fmla="val 5000"/>
+            </a:avLst>
+          </a:prstGeom>
+          <a:solidFill>
+            <a:srgbClr val="FFFFFF"/>
+          </a:solidFill>
+          <a:ln w="12700">
+            <a:solidFill>
+              <a:srgbClr val="8ECAE6"/>
+            </a:solidFill>
+          </a:ln>
+        </p:spPr>
+        <p:style>
+          <a:lnRef idx="1">
+            <a:schemeClr val="accent1"/>
+          </a:lnRef>
+          <a:fillRef idx="3">
+            <a:schemeClr val="accent1"/>
+          </a:fillRef>
+          <a:effectRef idx="2">
+            <a:schemeClr val="accent1"/>
+          </a:effectRef>
+          <a:fontRef idx="minor">
+            <a:schemeClr val="lt1"/>
+          </a:fontRef>
+        </p:style>
+        <p:txBody>
+          <a:bodyPr rtlCol="0" anchor="t" wrap="square" lIns="109728" rIns="109728" tIns="109728"/>
+          <a:lstStyle/>
+          <a:p>
+            <a:pPr algn="ctr">
+              <a:defRPr sz="1200" b="1">
+                <a:solidFill>
+                  <a:srgbClr val="023047"/>
+                </a:solidFill>
+                <a:latin typeface="Calibri"/>
+              </a:defRPr>
+            </a:pPr>
+            <a:r>
+              <a:t>3. City &amp; Authority Actions</a:t>
+            </a:r>
+          </a:p>
+          <a:p>
+            <a:pPr>
               <a:spcBef>
-                <a:spcPts val="0"/>
+                <a:spcPts val="300"/>
               </a:spcBef>
-              <a:spcAft>
-                <a:spcPts val="900"/>
-              </a:spcAft>
-              <a:defRPr sz="1500">
+              <a:defRPr sz="1050">
                 <a:solidFill>
                   <a:srgbClr val="023047"/>
                 </a:solidFill>
@@ -5753,45 +8311,7 @@
               </a:defRPr>
             </a:pPr>
             <a:r>
-              <a:t>-  Real-time WebSocket telemetry stream</a:t>
-            </a:r>
-          </a:p>
-          <a:p>
-            <a:pPr algn="l">
-              <a:spcBef>
-                <a:spcPts val="0"/>
-              </a:spcBef>
-              <a:spcAft>
-                <a:spcPts val="900"/>
-              </a:spcAft>
-              <a:defRPr sz="1500">
-                <a:solidFill>
-                  <a:srgbClr val="023047"/>
-                </a:solidFill>
-                <a:latin typeface="Calibri"/>
-              </a:defRPr>
-            </a:pPr>
-            <a:r>
-              <a:t>-  Geo-referenced pipe outfall health</a:t>
-            </a:r>
-          </a:p>
-          <a:p>
-            <a:pPr algn="l">
-              <a:spcBef>
-                <a:spcPts val="0"/>
-              </a:spcBef>
-              <a:spcAft>
-                <a:spcPts val="900"/>
-              </a:spcAft>
-              <a:defRPr sz="1500">
-                <a:solidFill>
-                  <a:srgbClr val="023047"/>
-                </a:solidFill>
-                <a:latin typeface="Calibri"/>
-              </a:defRPr>
-            </a:pPr>
-            <a:r>
-              <a:t>-  Interactive urban risk heatmaps</a:t>
+              <a:t>CesiumJS renders live 3D risk heatmaps, updates outfall asset health, and dispatches statutory alerts.</a:t>
             </a:r>
           </a:p>
         </p:txBody>
@@ -5830,8 +8350,8 @@
         </p:nvSpPr>
         <p:spPr>
           <a:xfrm>
-            <a:off x="731520" y="502920"/>
-            <a:ext cx="10728655" cy="822960"/>
+            <a:off x="731520" y="411480"/>
+            <a:ext cx="9144000" cy="292608"/>
           </a:xfrm>
           <a:prstGeom prst="rect">
             <a:avLst/>
@@ -5844,8 +8364,44 @@
           </a:bodyPr>
           <a:lstStyle/>
           <a:p>
+            <a:pPr>
+              <a:defRPr sz="1100" b="1">
+                <a:solidFill>
+                  <a:srgbClr val="219EBC"/>
+                </a:solidFill>
+                <a:latin typeface="Calibri"/>
+              </a:defRPr>
+            </a:pPr>
+            <a:r>
+              <a:t>TECHNICAL SOLUTION 2/3</a:t>
+            </a:r>
+          </a:p>
+        </p:txBody>
+      </p:sp>
+      <p:sp>
+        <p:nvSpPr>
+          <p:cNvPr id="3" name="TextBox 2"/>
+          <p:cNvSpPr txBox="1"/>
+          <p:nvPr/>
+        </p:nvSpPr>
+        <p:spPr>
+          <a:xfrm>
+            <a:off x="731520" y="658368"/>
+            <a:ext cx="10728655" cy="640080"/>
+          </a:xfrm>
+          <a:prstGeom prst="rect">
+            <a:avLst/>
+          </a:prstGeom>
+          <a:noFill/>
+        </p:spPr>
+        <p:txBody>
+          <a:bodyPr wrap="square" anchor="t" lIns="0" tIns="0" rIns="0" bIns="0">
+            <a:spAutoFit/>
+          </a:bodyPr>
+          <a:lstStyle/>
+          <a:p>
             <a:pPr algn="l">
-              <a:defRPr sz="4000" b="1">
+              <a:defRPr sz="3600" b="1">
                 <a:solidFill>
                   <a:srgbClr val="023047"/>
                 </a:solidFill>
@@ -5853,21 +8409,21 @@
               </a:defRPr>
             </a:pPr>
             <a:r>
-              <a:t>Autonomous Closed Loop</a:t>
-            </a:r>
-          </a:p>
-        </p:txBody>
-      </p:sp>
-      <p:sp>
-        <p:nvSpPr>
-          <p:cNvPr id="3" name="Rounded Rectangle 2"/>
+              <a:t>Autonomous Closed-Loop Guidance</a:t>
+            </a:r>
+          </a:p>
+        </p:txBody>
+      </p:sp>
+      <p:sp>
+        <p:nvSpPr>
+          <p:cNvPr id="4" name="Rounded Rectangle 3"/>
           <p:cNvSpPr/>
           <p:nvPr/>
         </p:nvSpPr>
         <p:spPr>
           <a:xfrm>
-            <a:off x="731520" y="1554480"/>
-            <a:ext cx="5180990" cy="4709160"/>
+            <a:off x="731520" y="1417320"/>
+            <a:ext cx="5180990" cy="2926080"/>
           </a:xfrm>
           <a:prstGeom prst="roundRect">
             <a:avLst>
@@ -5879,7 +8435,7 @@
           </a:solidFill>
           <a:ln w="19050">
             <a:solidFill>
-              <a:srgbClr val="8ECAE6"/>
+              <a:srgbClr val="B4DAEE"/>
             </a:solidFill>
           </a:ln>
         </p:spPr>
@@ -5898,7 +8454,109 @@
           </a:fontRef>
         </p:style>
         <p:txBody>
-          <a:bodyPr rtlCol="0" anchor="t" wrap="square" lIns="320040" rIns="320040" tIns="274320" bIns="228600"/>
+          <a:bodyPr rtlCol="0" anchor="ctr"/>
+          <a:lstStyle/>
+          <a:p>
+            <a:pPr algn="ctr"/>
+          </a:p>
+        </p:txBody>
+      </p:sp>
+      <p:pic>
+        <p:nvPicPr>
+          <p:cNvPr id="5" name="Picture 4" descr="adaptive_retask.png"/>
+          <p:cNvPicPr>
+            <a:picLocks noChangeAspect="1"/>
+          </p:cNvPicPr>
+          <p:nvPr/>
+        </p:nvPicPr>
+        <p:blipFill>
+          <a:blip r:embed="rId2"/>
+          <a:stretch>
+            <a:fillRect/>
+          </a:stretch>
+        </p:blipFill>
+        <p:spPr>
+          <a:xfrm>
+            <a:off x="1005840" y="1636776"/>
+            <a:ext cx="438912" cy="438912"/>
+          </a:xfrm>
+          <a:prstGeom prst="rect">
+            <a:avLst/>
+          </a:prstGeom>
+        </p:spPr>
+      </p:pic>
+      <p:sp>
+        <p:nvSpPr>
+          <p:cNvPr id="6" name="TextBox 5"/>
+          <p:cNvSpPr txBox="1"/>
+          <p:nvPr/>
+        </p:nvSpPr>
+        <p:spPr>
+          <a:xfrm>
+            <a:off x="1536192" y="1581912"/>
+            <a:ext cx="4129430" cy="594360"/>
+          </a:xfrm>
+          <a:prstGeom prst="rect">
+            <a:avLst/>
+          </a:prstGeom>
+          <a:noFill/>
+        </p:spPr>
+        <p:txBody>
+          <a:bodyPr wrap="square" anchor="t" lIns="0" tIns="0" rIns="0" bIns="0">
+            <a:spAutoFit/>
+          </a:bodyPr>
+          <a:lstStyle/>
+          <a:p>
+            <a:pPr>
+              <a:spcAft>
+                <a:spcPts val="200"/>
+              </a:spcAft>
+              <a:defRPr sz="1000" b="1">
+                <a:solidFill>
+                  <a:srgbClr val="219EBC"/>
+                </a:solidFill>
+                <a:latin typeface="Calibri"/>
+              </a:defRPr>
+            </a:pPr>
+            <a:r>
+              <a:t>AUTONOMY CORE</a:t>
+            </a:r>
+          </a:p>
+          <a:p>
+            <a:pPr algn="l">
+              <a:defRPr sz="2100" b="1">
+                <a:solidFill>
+                  <a:srgbClr val="023047"/>
+                </a:solidFill>
+                <a:latin typeface="Calibri"/>
+              </a:defRPr>
+            </a:pPr>
+            <a:r>
+              <a:t>4D Adaptive Retasking</a:t>
+            </a:r>
+          </a:p>
+        </p:txBody>
+      </p:sp>
+      <p:sp>
+        <p:nvSpPr>
+          <p:cNvPr id="7" name="TextBox 6"/>
+          <p:cNvSpPr txBox="1"/>
+          <p:nvPr/>
+        </p:nvSpPr>
+        <p:spPr>
+          <a:xfrm>
+            <a:off x="1024128" y="2258568"/>
+            <a:ext cx="4595774" cy="1691640"/>
+          </a:xfrm>
+          <a:prstGeom prst="rect">
+            <a:avLst/>
+          </a:prstGeom>
+          <a:noFill/>
+        </p:spPr>
+        <p:txBody>
+          <a:bodyPr wrap="square" anchor="t" lIns="0" tIns="0" rIns="0" bIns="0">
+            <a:spAutoFit/>
+          </a:bodyPr>
           <a:lstStyle/>
           <a:p>
             <a:pPr algn="l">
@@ -5906,9 +8564,9 @@
                 <a:spcPts val="0"/>
               </a:spcBef>
               <a:spcAft>
-                <a:spcPts val="1200"/>
+                <a:spcPts val="600"/>
               </a:spcAft>
-              <a:defRPr sz="2300" b="1">
+              <a:defRPr sz="1500">
                 <a:solidFill>
                   <a:srgbClr val="023047"/>
                 </a:solidFill>
@@ -5916,7 +8574,7 @@
               </a:defRPr>
             </a:pPr>
             <a:r>
-              <a:t>4D Adaptive Retasking</a:t>
+              <a:t>-  Chemical Gradient: homes upstream to leaking pipe</a:t>
             </a:r>
           </a:p>
           <a:p>
@@ -5925,9 +8583,9 @@
                 <a:spcPts val="0"/>
               </a:spcBef>
               <a:spcAft>
-                <a:spcPts val="900"/>
+                <a:spcPts val="600"/>
               </a:spcAft>
-              <a:defRPr sz="1700">
+              <a:defRPr sz="1500">
                 <a:solidFill>
                   <a:srgbClr val="023047"/>
                 </a:solidFill>
@@ -5935,7 +8593,7 @@
               </a:defRPr>
             </a:pPr>
             <a:r>
-              <a:t>-  Dynamically recomputes waypoints in real time</a:t>
+              <a:t>-  Storm Rain Radar: pre-positions vessel before runoff</a:t>
             </a:r>
           </a:p>
           <a:p>
@@ -5944,9 +8602,9 @@
                 <a:spcPts val="0"/>
               </a:spcBef>
               <a:spcAft>
-                <a:spcPts val="900"/>
+                <a:spcPts val="600"/>
               </a:spcAft>
-              <a:defRPr sz="1700">
+              <a:defRPr sz="1500">
                 <a:solidFill>
                   <a:srgbClr val="023047"/>
                 </a:solidFill>
@@ -5954,7 +8612,7 @@
               </a:defRPr>
             </a:pPr>
             <a:r>
-              <a:t>-  Chemical Gradient: homes upstream to leaking pipe</a:t>
+              <a:t>-  Data Freshness: prioritizes unvisited river reaches</a:t>
             </a:r>
           </a:p>
           <a:p>
@@ -5963,9 +8621,9 @@
                 <a:spcPts val="0"/>
               </a:spcBef>
               <a:spcAft>
-                <a:spcPts val="900"/>
+                <a:spcPts val="600"/>
               </a:spcAft>
-              <a:defRPr sz="1700">
+              <a:defRPr sz="1500">
                 <a:solidFill>
                   <a:srgbClr val="023047"/>
                 </a:solidFill>
@@ -5973,18 +8631,221 @@
               </a:defRPr>
             </a:pPr>
             <a:r>
-              <a:t>-  Rain Radar: pre-positions robot before storm runoff</a:t>
-            </a:r>
-          </a:p>
+              <a:t>-  Dynamic goal updates dispatched in under 35 seconds</a:t>
+            </a:r>
+          </a:p>
+        </p:txBody>
+      </p:sp>
+      <p:sp>
+        <p:nvSpPr>
+          <p:cNvPr id="8" name="Rounded Rectangle 7"/>
+          <p:cNvSpPr/>
+          <p:nvPr/>
+        </p:nvSpPr>
+        <p:spPr>
+          <a:xfrm>
+            <a:off x="987552" y="3886200"/>
+            <a:ext cx="4668926" cy="320040"/>
+          </a:xfrm>
+          <a:prstGeom prst="roundRect">
+            <a:avLst>
+              <a:gd name="adj" fmla="val 8000"/>
+            </a:avLst>
+          </a:prstGeom>
+          <a:solidFill>
+            <a:srgbClr val="EBF4FA"/>
+          </a:solidFill>
+          <a:ln w="12700">
+            <a:solidFill>
+              <a:srgbClr val="8ECAE6"/>
+            </a:solidFill>
+          </a:ln>
+        </p:spPr>
+        <p:style>
+          <a:lnRef idx="1">
+            <a:schemeClr val="accent1"/>
+          </a:lnRef>
+          <a:fillRef idx="3">
+            <a:schemeClr val="accent1"/>
+          </a:fillRef>
+          <a:effectRef idx="2">
+            <a:schemeClr val="accent1"/>
+          </a:effectRef>
+          <a:fontRef idx="minor">
+            <a:schemeClr val="lt1"/>
+          </a:fontRef>
+        </p:style>
+        <p:txBody>
+          <a:bodyPr rtlCol="0" anchor="ctr" wrap="square" lIns="137160" rIns="137160" tIns="0" bIns="0"/>
+          <a:lstStyle/>
+          <a:p>
+            <a:pPr algn="l">
+              <a:defRPr sz="1100" b="1">
+                <a:solidFill>
+                  <a:srgbClr val="219EBC"/>
+                </a:solidFill>
+                <a:latin typeface="Calibri"/>
+              </a:defRPr>
+            </a:pPr>
+            <a:r>
+              <a:t>Multi-Objective Optimizer  |  Upstream Gradient Homing  |  &lt; 35s Loop</a:t>
+            </a:r>
+          </a:p>
+        </p:txBody>
+      </p:sp>
+      <p:sp>
+        <p:nvSpPr>
+          <p:cNvPr id="9" name="Rounded Rectangle 8"/>
+          <p:cNvSpPr/>
+          <p:nvPr/>
+        </p:nvSpPr>
+        <p:spPr>
+          <a:xfrm>
+            <a:off x="6278270" y="1417320"/>
+            <a:ext cx="5180990" cy="2926080"/>
+          </a:xfrm>
+          <a:prstGeom prst="roundRect">
+            <a:avLst>
+              <a:gd name="adj" fmla="val 3500"/>
+            </a:avLst>
+          </a:prstGeom>
+          <a:solidFill>
+            <a:srgbClr val="F4F9FC"/>
+          </a:solidFill>
+          <a:ln w="19050">
+            <a:solidFill>
+              <a:srgbClr val="B4DAEE"/>
+            </a:solidFill>
+          </a:ln>
+        </p:spPr>
+        <p:style>
+          <a:lnRef idx="1">
+            <a:schemeClr val="accent1"/>
+          </a:lnRef>
+          <a:fillRef idx="3">
+            <a:schemeClr val="accent1"/>
+          </a:fillRef>
+          <a:effectRef idx="2">
+            <a:schemeClr val="accent1"/>
+          </a:effectRef>
+          <a:fontRef idx="minor">
+            <a:schemeClr val="lt1"/>
+          </a:fontRef>
+        </p:style>
+        <p:txBody>
+          <a:bodyPr rtlCol="0" anchor="ctr"/>
+          <a:lstStyle/>
+          <a:p>
+            <a:pPr algn="ctr"/>
+          </a:p>
+        </p:txBody>
+      </p:sp>
+      <p:pic>
+        <p:nvPicPr>
+          <p:cNvPr id="10" name="Picture 9" descr="safety_resilience.png"/>
+          <p:cNvPicPr>
+            <a:picLocks noChangeAspect="1"/>
+          </p:cNvPicPr>
+          <p:nvPr/>
+        </p:nvPicPr>
+        <p:blipFill>
+          <a:blip r:embed="rId3"/>
+          <a:stretch>
+            <a:fillRect/>
+          </a:stretch>
+        </p:blipFill>
+        <p:spPr>
+          <a:xfrm>
+            <a:off x="6552590" y="1636776"/>
+            <a:ext cx="438912" cy="438912"/>
+          </a:xfrm>
+          <a:prstGeom prst="rect">
+            <a:avLst/>
+          </a:prstGeom>
+        </p:spPr>
+      </p:pic>
+      <p:sp>
+        <p:nvSpPr>
+          <p:cNvPr id="11" name="TextBox 10"/>
+          <p:cNvSpPr txBox="1"/>
+          <p:nvPr/>
+        </p:nvSpPr>
+        <p:spPr>
+          <a:xfrm>
+            <a:off x="7082942" y="1581912"/>
+            <a:ext cx="4129430" cy="594360"/>
+          </a:xfrm>
+          <a:prstGeom prst="rect">
+            <a:avLst/>
+          </a:prstGeom>
+          <a:noFill/>
+        </p:spPr>
+        <p:txBody>
+          <a:bodyPr wrap="square" anchor="t" lIns="0" tIns="0" rIns="0" bIns="0">
+            <a:spAutoFit/>
+          </a:bodyPr>
+          <a:lstStyle/>
+          <a:p>
+            <a:pPr>
+              <a:spcAft>
+                <a:spcPts val="200"/>
+              </a:spcAft>
+              <a:defRPr sz="1000" b="1">
+                <a:solidFill>
+                  <a:srgbClr val="219EBC"/>
+                </a:solidFill>
+                <a:latin typeface="Calibri"/>
+              </a:defRPr>
+            </a:pPr>
+            <a:r>
+              <a:t>DIGITAL TWIN RATIONALE</a:t>
+            </a:r>
+          </a:p>
+          <a:p>
+            <a:pPr algn="l">
+              <a:defRPr sz="2100" b="1">
+                <a:solidFill>
+                  <a:srgbClr val="023047"/>
+                </a:solidFill>
+                <a:latin typeface="Calibri"/>
+              </a:defRPr>
+            </a:pPr>
+            <a:r>
+              <a:t>Why Digital Twinning?</a:t>
+            </a:r>
+          </a:p>
+        </p:txBody>
+      </p:sp>
+      <p:sp>
+        <p:nvSpPr>
+          <p:cNvPr id="12" name="TextBox 11"/>
+          <p:cNvSpPr txBox="1"/>
+          <p:nvPr/>
+        </p:nvSpPr>
+        <p:spPr>
+          <a:xfrm>
+            <a:off x="6570878" y="2258568"/>
+            <a:ext cx="4595774" cy="1691640"/>
+          </a:xfrm>
+          <a:prstGeom prst="rect">
+            <a:avLst/>
+          </a:prstGeom>
+          <a:noFill/>
+        </p:spPr>
+        <p:txBody>
+          <a:bodyPr wrap="square" anchor="t" lIns="0" tIns="0" rIns="0" bIns="0">
+            <a:spAutoFit/>
+          </a:bodyPr>
+          <a:lstStyle/>
           <a:p>
             <a:pPr algn="l">
               <a:spcBef>
                 <a:spcPts val="0"/>
               </a:spcBef>
               <a:spcAft>
-                <a:spcPts val="900"/>
+                <a:spcPts val="600"/>
               </a:spcAft>
-              <a:defRPr sz="1700">
+              <a:defRPr sz="1500">
                 <a:solidFill>
                   <a:srgbClr val="023047"/>
                 </a:solidFill>
@@ -5992,21 +8853,135 @@
               </a:defRPr>
             </a:pPr>
             <a:r>
-              <a:t>-  Data Freshness: prioritizes unvisited river reaches</a:t>
-            </a:r>
-          </a:p>
-        </p:txBody>
-      </p:sp>
-      <p:sp>
-        <p:nvSpPr>
-          <p:cNvPr id="4" name="Rounded Rectangle 3"/>
+              <a:t>-  Active Gradient Tracing overcomes point dilution</a:t>
+            </a:r>
+          </a:p>
+          <a:p>
+            <a:pPr algn="l">
+              <a:spcBef>
+                <a:spcPts val="0"/>
+              </a:spcBef>
+              <a:spcAft>
+                <a:spcPts val="600"/>
+              </a:spcAft>
+              <a:defRPr sz="1500">
+                <a:solidFill>
+                  <a:srgbClr val="023047"/>
+                </a:solidFill>
+                <a:latin typeface="Calibri"/>
+              </a:defRPr>
+            </a:pPr>
+            <a:r>
+              <a:t>-  Predictive storm anticipation replaces reactive lab lag</a:t>
+            </a:r>
+          </a:p>
+          <a:p>
+            <a:pPr algn="l">
+              <a:spcBef>
+                <a:spcPts val="0"/>
+              </a:spcBef>
+              <a:spcAft>
+                <a:spcPts val="600"/>
+              </a:spcAft>
+              <a:defRPr sz="1500">
+                <a:solidFill>
+                  <a:srgbClr val="023047"/>
+                </a:solidFill>
+                <a:latin typeface="Calibri"/>
+              </a:defRPr>
+            </a:pPr>
+            <a:r>
+              <a:t>-  One mobile vessel replaces 50+ biofouled static probes</a:t>
+            </a:r>
+          </a:p>
+          <a:p>
+            <a:pPr algn="l">
+              <a:spcBef>
+                <a:spcPts val="0"/>
+              </a:spcBef>
+              <a:spcAft>
+                <a:spcPts val="600"/>
+              </a:spcAft>
+              <a:defRPr sz="1500">
+                <a:solidFill>
+                  <a:srgbClr val="023047"/>
+                </a:solidFill>
+                <a:latin typeface="Calibri"/>
+              </a:defRPr>
+            </a:pPr>
+            <a:r>
+              <a:t>-  Continuous feedback synchronizes twin with physical state</a:t>
+            </a:r>
+          </a:p>
+        </p:txBody>
+      </p:sp>
+      <p:sp>
+        <p:nvSpPr>
+          <p:cNvPr id="13" name="Rounded Rectangle 12"/>
           <p:cNvSpPr/>
           <p:nvPr/>
         </p:nvSpPr>
         <p:spPr>
           <a:xfrm>
-            <a:off x="6278270" y="1554480"/>
-            <a:ext cx="5180990" cy="4709160"/>
+            <a:off x="6534302" y="3886200"/>
+            <a:ext cx="4668926" cy="320040"/>
+          </a:xfrm>
+          <a:prstGeom prst="roundRect">
+            <a:avLst>
+              <a:gd name="adj" fmla="val 8000"/>
+            </a:avLst>
+          </a:prstGeom>
+          <a:solidFill>
+            <a:srgbClr val="EBF4FA"/>
+          </a:solidFill>
+          <a:ln w="12700">
+            <a:solidFill>
+              <a:srgbClr val="8ECAE6"/>
+            </a:solidFill>
+          </a:ln>
+        </p:spPr>
+        <p:style>
+          <a:lnRef idx="1">
+            <a:schemeClr val="accent1"/>
+          </a:lnRef>
+          <a:fillRef idx="3">
+            <a:schemeClr val="accent1"/>
+          </a:fillRef>
+          <a:effectRef idx="2">
+            <a:schemeClr val="accent1"/>
+          </a:effectRef>
+          <a:fontRef idx="minor">
+            <a:schemeClr val="lt1"/>
+          </a:fontRef>
+        </p:style>
+        <p:txBody>
+          <a:bodyPr rtlCol="0" anchor="ctr" wrap="square" lIns="137160" rIns="137160" tIns="0" bIns="0"/>
+          <a:lstStyle/>
+          <a:p>
+            <a:pPr algn="l">
+              <a:defRPr sz="1100" b="1">
+                <a:solidFill>
+                  <a:srgbClr val="219EBC"/>
+                </a:solidFill>
+                <a:latin typeface="Calibri"/>
+              </a:defRPr>
+            </a:pPr>
+            <a:r>
+              <a:t>Solves Point Dilution  |  Predictive Protection  |  CapEx Optimization</a:t>
+            </a:r>
+          </a:p>
+        </p:txBody>
+      </p:sp>
+      <p:sp>
+        <p:nvSpPr>
+          <p:cNvPr id="14" name="Rounded Rectangle 13"/>
+          <p:cNvSpPr/>
+          <p:nvPr/>
+        </p:nvSpPr>
+        <p:spPr>
+          <a:xfrm>
+            <a:off x="731520" y="4526280"/>
+            <a:ext cx="10728655" cy="1783080"/>
           </a:xfrm>
           <a:prstGeom prst="roundRect">
             <a:avLst>
@@ -6018,7 +8993,7 @@
           </a:solidFill>
           <a:ln w="19050">
             <a:solidFill>
-              <a:srgbClr val="8ECAE6"/>
+              <a:srgbClr val="B4DAEE"/>
             </a:solidFill>
           </a:ln>
         </p:spPr>
@@ -6037,17 +9012,87 @@
           </a:fontRef>
         </p:style>
         <p:txBody>
-          <a:bodyPr rtlCol="0" anchor="t" wrap="square" lIns="320040" rIns="320040" tIns="274320" bIns="228600"/>
-          <a:lstStyle/>
-          <a:p>
-            <a:pPr algn="l">
+          <a:bodyPr rtlCol="0" anchor="t" wrap="square" lIns="320040" rIns="320040" tIns="164592"/>
+          <a:lstStyle/>
+          <a:p>
+            <a:pPr algn="ctr">
+              <a:spcAft>
+                <a:spcPts val="800"/>
+              </a:spcAft>
+              <a:defRPr sz="1100" b="1">
+                <a:solidFill>
+                  <a:srgbClr val="219EBC"/>
+                </a:solidFill>
+                <a:latin typeface="Calibri"/>
+              </a:defRPr>
+            </a:pPr>
+            <a:r>
+              <a:t>THE 4D AUTONOMOUS DECISION CYCLE (CONTINUOUS CLOSED LOOP)</a:t>
+            </a:r>
+          </a:p>
+        </p:txBody>
+      </p:sp>
+      <p:sp>
+        <p:nvSpPr>
+          <p:cNvPr id="15" name="Rounded Rectangle 14"/>
+          <p:cNvSpPr/>
+          <p:nvPr/>
+        </p:nvSpPr>
+        <p:spPr>
+          <a:xfrm>
+            <a:off x="960120" y="4919472"/>
+            <a:ext cx="2240280" cy="1188720"/>
+          </a:xfrm>
+          <a:prstGeom prst="roundRect">
+            <a:avLst>
+              <a:gd name="adj" fmla="val 6000"/>
+            </a:avLst>
+          </a:prstGeom>
+          <a:solidFill>
+            <a:srgbClr val="FFFFFF"/>
+          </a:solidFill>
+          <a:ln w="12700">
+            <a:solidFill>
+              <a:srgbClr val="8ECAE6"/>
+            </a:solidFill>
+          </a:ln>
+        </p:spPr>
+        <p:style>
+          <a:lnRef idx="1">
+            <a:schemeClr val="accent1"/>
+          </a:lnRef>
+          <a:fillRef idx="3">
+            <a:schemeClr val="accent1"/>
+          </a:fillRef>
+          <a:effectRef idx="2">
+            <a:schemeClr val="accent1"/>
+          </a:effectRef>
+          <a:fontRef idx="minor">
+            <a:schemeClr val="lt1"/>
+          </a:fontRef>
+        </p:style>
+        <p:txBody>
+          <a:bodyPr rtlCol="0" anchor="t" wrap="square" lIns="109728" rIns="109728" tIns="109728"/>
+          <a:lstStyle/>
+          <a:p>
+            <a:pPr algn="ctr">
+              <a:defRPr sz="1050" b="1">
+                <a:solidFill>
+                  <a:srgbClr val="219EBC"/>
+                </a:solidFill>
+                <a:latin typeface="Calibri"/>
+              </a:defRPr>
+            </a:pPr>
+            <a:r>
+              <a:t>1. SENSE</a:t>
+            </a:r>
+          </a:p>
+          <a:p>
+            <a:pPr>
               <a:spcBef>
-                <a:spcPts val="0"/>
+                <a:spcPts val="100"/>
               </a:spcBef>
-              <a:spcAft>
-                <a:spcPts val="1200"/>
-              </a:spcAft>
-              <a:defRPr sz="2300" b="1">
+              <a:defRPr sz="1200" b="1">
                 <a:solidFill>
                   <a:srgbClr val="023047"/>
                 </a:solidFill>
@@ -6055,18 +9100,15 @@
               </a:defRPr>
             </a:pPr>
             <a:r>
-              <a:t>Safety and Resilience</a:t>
-            </a:r>
-          </a:p>
-          <a:p>
-            <a:pPr algn="l">
+              <a:t>Gradient Spike</a:t>
+            </a:r>
+          </a:p>
+          <a:p>
+            <a:pPr>
               <a:spcBef>
-                <a:spcPts val="0"/>
+                <a:spcPts val="300"/>
               </a:spcBef>
-              <a:spcAft>
-                <a:spcPts val="900"/>
-              </a:spcAft>
-              <a:defRPr sz="1700">
+              <a:defRPr sz="1000">
                 <a:solidFill>
                   <a:srgbClr val="023047"/>
                 </a:solidFill>
@@ -6074,18 +9116,115 @@
               </a:defRPr>
             </a:pPr>
             <a:r>
-              <a:t>-  Dual obstacle cloud: reroute navigation vs collision stop</a:t>
-            </a:r>
-          </a:p>
-          <a:p>
-            <a:pPr algn="l">
+              <a:t>Mobile payload detects ammonium spike above baseline.</a:t>
+            </a:r>
+          </a:p>
+        </p:txBody>
+      </p:sp>
+      <p:sp>
+        <p:nvSpPr>
+          <p:cNvPr id="16" name="Right Arrow 15"/>
+          <p:cNvSpPr/>
+          <p:nvPr/>
+        </p:nvSpPr>
+        <p:spPr>
+          <a:xfrm>
+            <a:off x="3310128" y="5376672"/>
+            <a:ext cx="219456" cy="256032"/>
+          </a:xfrm>
+          <a:prstGeom prst="rightArrow">
+            <a:avLst/>
+          </a:prstGeom>
+          <a:solidFill>
+            <a:srgbClr val="219EBC"/>
+          </a:solidFill>
+          <a:ln>
+            <a:noFill/>
+          </a:ln>
+        </p:spPr>
+        <p:style>
+          <a:lnRef idx="1">
+            <a:schemeClr val="accent1"/>
+          </a:lnRef>
+          <a:fillRef idx="3">
+            <a:schemeClr val="accent1"/>
+          </a:fillRef>
+          <a:effectRef idx="2">
+            <a:schemeClr val="accent1"/>
+          </a:effectRef>
+          <a:fontRef idx="minor">
+            <a:schemeClr val="lt1"/>
+          </a:fontRef>
+        </p:style>
+        <p:txBody>
+          <a:bodyPr rtlCol="0" anchor="ctr"/>
+          <a:lstStyle/>
+          <a:p>
+            <a:pPr algn="ctr"/>
+          </a:p>
+        </p:txBody>
+      </p:sp>
+      <p:sp>
+        <p:nvSpPr>
+          <p:cNvPr id="17" name="Rounded Rectangle 16"/>
+          <p:cNvSpPr/>
+          <p:nvPr/>
+        </p:nvSpPr>
+        <p:spPr>
+          <a:xfrm>
+            <a:off x="2449854124920" y="4919472"/>
+            <a:ext cx="2240280" cy="1188720"/>
+          </a:xfrm>
+          <a:prstGeom prst="roundRect">
+            <a:avLst>
+              <a:gd name="adj" fmla="val 6000"/>
+            </a:avLst>
+          </a:prstGeom>
+          <a:solidFill>
+            <a:srgbClr val="FFFFFF"/>
+          </a:solidFill>
+          <a:ln w="12700">
+            <a:solidFill>
+              <a:srgbClr val="8ECAE6"/>
+            </a:solidFill>
+          </a:ln>
+        </p:spPr>
+        <p:style>
+          <a:lnRef idx="1">
+            <a:schemeClr val="accent1"/>
+          </a:lnRef>
+          <a:fillRef idx="3">
+            <a:schemeClr val="accent1"/>
+          </a:fillRef>
+          <a:effectRef idx="2">
+            <a:schemeClr val="accent1"/>
+          </a:effectRef>
+          <a:fontRef idx="minor">
+            <a:schemeClr val="lt1"/>
+          </a:fontRef>
+        </p:style>
+        <p:txBody>
+          <a:bodyPr rtlCol="0" anchor="t" wrap="square" lIns="109728" rIns="109728" tIns="109728"/>
+          <a:lstStyle/>
+          <a:p>
+            <a:pPr algn="ctr">
+              <a:defRPr sz="1050" b="1">
+                <a:solidFill>
+                  <a:srgbClr val="219EBC"/>
+                </a:solidFill>
+                <a:latin typeface="Calibri"/>
+              </a:defRPr>
+            </a:pPr>
+            <a:r>
+              <a:t>2. ASSIMILATE</a:t>
+            </a:r>
+          </a:p>
+          <a:p>
+            <a:pPr>
               <a:spcBef>
-                <a:spcPts val="0"/>
+                <a:spcPts val="100"/>
               </a:spcBef>
-              <a:spcAft>
-                <a:spcPts val="900"/>
-              </a:spcAft>
-              <a:defRPr sz="1700">
+              <a:defRPr sz="1200" b="1">
                 <a:solidFill>
                   <a:srgbClr val="023047"/>
                 </a:solidFill>
@@ -6093,18 +9232,15 @@
               </a:defRPr>
             </a:pPr>
             <a:r>
-              <a:t>-  Edge buffer: zero data loss during network dropouts</a:t>
-            </a:r>
-          </a:p>
-          <a:p>
-            <a:pPr algn="l">
+              <a:t>Radar &amp; Flow</a:t>
+            </a:r>
+          </a:p>
+          <a:p>
+            <a:pPr>
               <a:spcBef>
-                <a:spcPts val="0"/>
+                <a:spcPts val="300"/>
               </a:spcBef>
-              <a:spcAft>
-                <a:spcPts val="900"/>
-              </a:spcAft>
-              <a:defRPr sz="1700">
+              <a:defRPr sz="1000">
                 <a:solidFill>
                   <a:srgbClr val="023047"/>
                 </a:solidFill>
@@ -6112,18 +9248,115 @@
               </a:defRPr>
             </a:pPr>
             <a:r>
-              <a:t>-  Tri-fold sync: odometry, AMCL, and Gazebo alignment</a:t>
-            </a:r>
-          </a:p>
-          <a:p>
-            <a:pPr algn="l">
+              <a:t>Digital twin integrates DWD rain radar &amp; Pegnitz flow rate.</a:t>
+            </a:r>
+          </a:p>
+        </p:txBody>
+      </p:sp>
+      <p:sp>
+        <p:nvSpPr>
+          <p:cNvPr id="18" name="Right Arrow 17"/>
+          <p:cNvSpPr/>
+          <p:nvPr/>
+        </p:nvSpPr>
+        <p:spPr>
+          <a:xfrm>
+            <a:off x="2449856474928" y="5376672"/>
+            <a:ext cx="219456" cy="256032"/>
+          </a:xfrm>
+          <a:prstGeom prst="rightArrow">
+            <a:avLst/>
+          </a:prstGeom>
+          <a:solidFill>
+            <a:srgbClr val="219EBC"/>
+          </a:solidFill>
+          <a:ln>
+            <a:noFill/>
+          </a:ln>
+        </p:spPr>
+        <p:style>
+          <a:lnRef idx="1">
+            <a:schemeClr val="accent1"/>
+          </a:lnRef>
+          <a:fillRef idx="3">
+            <a:schemeClr val="accent1"/>
+          </a:fillRef>
+          <a:effectRef idx="2">
+            <a:schemeClr val="accent1"/>
+          </a:effectRef>
+          <a:fontRef idx="minor">
+            <a:schemeClr val="lt1"/>
+          </a:fontRef>
+        </p:style>
+        <p:txBody>
+          <a:bodyPr rtlCol="0" anchor="ctr"/>
+          <a:lstStyle/>
+          <a:p>
+            <a:pPr algn="ctr"/>
+          </a:p>
+        </p:txBody>
+      </p:sp>
+      <p:sp>
+        <p:nvSpPr>
+          <p:cNvPr id="19" name="Rounded Rectangle 18"/>
+          <p:cNvSpPr/>
+          <p:nvPr/>
+        </p:nvSpPr>
+        <p:spPr>
+          <a:xfrm>
+            <a:off x="4899707289720" y="4919472"/>
+            <a:ext cx="2240280" cy="1188720"/>
+          </a:xfrm>
+          <a:prstGeom prst="roundRect">
+            <a:avLst>
+              <a:gd name="adj" fmla="val 6000"/>
+            </a:avLst>
+          </a:prstGeom>
+          <a:solidFill>
+            <a:srgbClr val="FFFFFF"/>
+          </a:solidFill>
+          <a:ln w="12700">
+            <a:solidFill>
+              <a:srgbClr val="8ECAE6"/>
+            </a:solidFill>
+          </a:ln>
+        </p:spPr>
+        <p:style>
+          <a:lnRef idx="1">
+            <a:schemeClr val="accent1"/>
+          </a:lnRef>
+          <a:fillRef idx="3">
+            <a:schemeClr val="accent1"/>
+          </a:fillRef>
+          <a:effectRef idx="2">
+            <a:schemeClr val="accent1"/>
+          </a:effectRef>
+          <a:fontRef idx="minor">
+            <a:schemeClr val="lt1"/>
+          </a:fontRef>
+        </p:style>
+        <p:txBody>
+          <a:bodyPr rtlCol="0" anchor="t" wrap="square" lIns="109728" rIns="109728" tIns="109728"/>
+          <a:lstStyle/>
+          <a:p>
+            <a:pPr algn="ctr">
+              <a:defRPr sz="1050" b="1">
+                <a:solidFill>
+                  <a:srgbClr val="219EBC"/>
+                </a:solidFill>
+                <a:latin typeface="Calibri"/>
+              </a:defRPr>
+            </a:pPr>
+            <a:r>
+              <a:t>3. RETASK</a:t>
+            </a:r>
+          </a:p>
+          <a:p>
+            <a:pPr>
               <a:spcBef>
-                <a:spcPts val="0"/>
+                <a:spcPts val="100"/>
               </a:spcBef>
-              <a:spcAft>
-                <a:spcPts val="900"/>
-              </a:spcAft>
-              <a:defRPr sz="1700">
+              <a:defRPr sz="1200" b="1">
                 <a:solidFill>
                   <a:srgbClr val="023047"/>
                 </a:solidFill>
@@ -6131,7 +9364,155 @@
               </a:defRPr>
             </a:pPr>
             <a:r>
-              <a:t>-  Dynamic Nav2 goal updates in under 35 seconds</a:t>
+              <a:t>Optimal Waypoint</a:t>
+            </a:r>
+          </a:p>
+          <a:p>
+            <a:pPr>
+              <a:spcBef>
+                <a:spcPts val="300"/>
+              </a:spcBef>
+              <a:defRPr sz="1000">
+                <a:solidFill>
+                  <a:srgbClr val="023047"/>
+                </a:solidFill>
+                <a:latin typeface="Calibri"/>
+              </a:defRPr>
+            </a:pPr>
+            <a:r>
+              <a:t>Optimizer computes upstream navigation goal in &lt; 35s.</a:t>
+            </a:r>
+          </a:p>
+        </p:txBody>
+      </p:sp>
+      <p:sp>
+        <p:nvSpPr>
+          <p:cNvPr id="20" name="Right Arrow 19"/>
+          <p:cNvSpPr/>
+          <p:nvPr/>
+        </p:nvSpPr>
+        <p:spPr>
+          <a:xfrm>
+            <a:off x="4899709639728" y="5376672"/>
+            <a:ext cx="219456" cy="256032"/>
+          </a:xfrm>
+          <a:prstGeom prst="rightArrow">
+            <a:avLst/>
+          </a:prstGeom>
+          <a:solidFill>
+            <a:srgbClr val="219EBC"/>
+          </a:solidFill>
+          <a:ln>
+            <a:noFill/>
+          </a:ln>
+        </p:spPr>
+        <p:style>
+          <a:lnRef idx="1">
+            <a:schemeClr val="accent1"/>
+          </a:lnRef>
+          <a:fillRef idx="3">
+            <a:schemeClr val="accent1"/>
+          </a:fillRef>
+          <a:effectRef idx="2">
+            <a:schemeClr val="accent1"/>
+          </a:effectRef>
+          <a:fontRef idx="minor">
+            <a:schemeClr val="lt1"/>
+          </a:fontRef>
+        </p:style>
+        <p:txBody>
+          <a:bodyPr rtlCol="0" anchor="ctr"/>
+          <a:lstStyle/>
+          <a:p>
+            <a:pPr algn="ctr"/>
+          </a:p>
+        </p:txBody>
+      </p:sp>
+      <p:sp>
+        <p:nvSpPr>
+          <p:cNvPr id="21" name="Rounded Rectangle 20"/>
+          <p:cNvSpPr/>
+          <p:nvPr/>
+        </p:nvSpPr>
+        <p:spPr>
+          <a:xfrm>
+            <a:off x="7349560454520" y="4919472"/>
+            <a:ext cx="2240280" cy="1188720"/>
+          </a:xfrm>
+          <a:prstGeom prst="roundRect">
+            <a:avLst>
+              <a:gd name="adj" fmla="val 6000"/>
+            </a:avLst>
+          </a:prstGeom>
+          <a:solidFill>
+            <a:srgbClr val="FFFFFF"/>
+          </a:solidFill>
+          <a:ln w="12700">
+            <a:solidFill>
+              <a:srgbClr val="8ECAE6"/>
+            </a:solidFill>
+          </a:ln>
+        </p:spPr>
+        <p:style>
+          <a:lnRef idx="1">
+            <a:schemeClr val="accent1"/>
+          </a:lnRef>
+          <a:fillRef idx="3">
+            <a:schemeClr val="accent1"/>
+          </a:fillRef>
+          <a:effectRef idx="2">
+            <a:schemeClr val="accent1"/>
+          </a:effectRef>
+          <a:fontRef idx="minor">
+            <a:schemeClr val="lt1"/>
+          </a:fontRef>
+        </p:style>
+        <p:txBody>
+          <a:bodyPr rtlCol="0" anchor="t" wrap="square" lIns="109728" rIns="109728" tIns="109728"/>
+          <a:lstStyle/>
+          <a:p>
+            <a:pPr algn="ctr">
+              <a:defRPr sz="1050" b="1">
+                <a:solidFill>
+                  <a:srgbClr val="219EBC"/>
+                </a:solidFill>
+                <a:latin typeface="Calibri"/>
+              </a:defRPr>
+            </a:pPr>
+            <a:r>
+              <a:t>4. LOCALIZED</a:t>
+            </a:r>
+          </a:p>
+          <a:p>
+            <a:pPr>
+              <a:spcBef>
+                <a:spcPts val="100"/>
+              </a:spcBef>
+              <a:defRPr sz="1200" b="1">
+                <a:solidFill>
+                  <a:srgbClr val="023047"/>
+                </a:solidFill>
+                <a:latin typeface="Calibri"/>
+              </a:defRPr>
+            </a:pPr>
+            <a:r>
+              <a:t>Source Confirmed</a:t>
+            </a:r>
+          </a:p>
+          <a:p>
+            <a:pPr>
+              <a:spcBef>
+                <a:spcPts val="300"/>
+              </a:spcBef>
+              <a:defRPr sz="1000">
+                <a:solidFill>
+                  <a:srgbClr val="023047"/>
+                </a:solidFill>
+                <a:latin typeface="Calibri"/>
+              </a:defRPr>
+            </a:pPr>
+            <a:r>
+              <a:t>Leaking outfall pinpointed and logged with geo-proof.</a:t>
             </a:r>
           </a:p>
         </p:txBody>
@@ -6170,8 +9551,8 @@
         </p:nvSpPr>
         <p:spPr>
           <a:xfrm>
-            <a:off x="731520" y="502920"/>
-            <a:ext cx="10728655" cy="822960"/>
+            <a:off x="731520" y="411480"/>
+            <a:ext cx="9144000" cy="292608"/>
           </a:xfrm>
           <a:prstGeom prst="rect">
             <a:avLst/>
@@ -6184,8 +9565,44 @@
           </a:bodyPr>
           <a:lstStyle/>
           <a:p>
+            <a:pPr>
+              <a:defRPr sz="1100" b="1">
+                <a:solidFill>
+                  <a:srgbClr val="219EBC"/>
+                </a:solidFill>
+                <a:latin typeface="Calibri"/>
+              </a:defRPr>
+            </a:pPr>
+            <a:r>
+              <a:t>TECHNICAL SOLUTION 3/3</a:t>
+            </a:r>
+          </a:p>
+        </p:txBody>
+      </p:sp>
+      <p:sp>
+        <p:nvSpPr>
+          <p:cNvPr id="3" name="TextBox 2"/>
+          <p:cNvSpPr txBox="1"/>
+          <p:nvPr/>
+        </p:nvSpPr>
+        <p:spPr>
+          <a:xfrm>
+            <a:off x="731520" y="658368"/>
+            <a:ext cx="10728655" cy="640080"/>
+          </a:xfrm>
+          <a:prstGeom prst="rect">
+            <a:avLst/>
+          </a:prstGeom>
+          <a:noFill/>
+        </p:spPr>
+        <p:txBody>
+          <a:bodyPr wrap="square" anchor="t" lIns="0" tIns="0" rIns="0" bIns="0">
+            <a:spAutoFit/>
+          </a:bodyPr>
+          <a:lstStyle/>
+          <a:p>
             <a:pPr algn="l">
-              <a:defRPr sz="4000" b="1">
+              <a:defRPr sz="3600" b="1">
                 <a:solidFill>
                   <a:srgbClr val="023047"/>
                 </a:solidFill>
@@ -6193,21 +9610,21 @@
               </a:defRPr>
             </a:pPr>
             <a:r>
-              <a:t>Why Mobile Robotics?</a:t>
-            </a:r>
-          </a:p>
-        </p:txBody>
-      </p:sp>
-      <p:sp>
-        <p:nvSpPr>
-          <p:cNvPr id="3" name="Rounded Rectangle 2"/>
+              <a:t>Stakeholder Action &amp; AI Public Access</a:t>
+            </a:r>
+          </a:p>
+        </p:txBody>
+      </p:sp>
+      <p:sp>
+        <p:nvSpPr>
+          <p:cNvPr id="4" name="Rounded Rectangle 3"/>
           <p:cNvSpPr/>
           <p:nvPr/>
         </p:nvSpPr>
         <p:spPr>
           <a:xfrm>
-            <a:off x="731520" y="1554480"/>
-            <a:ext cx="5180990" cy="2240280"/>
+            <a:off x="731520" y="1417320"/>
+            <a:ext cx="5180990" cy="2926080"/>
           </a:xfrm>
           <a:prstGeom prst="roundRect">
             <a:avLst>
@@ -6219,7 +9636,7 @@
           </a:solidFill>
           <a:ln w="19050">
             <a:solidFill>
-              <a:srgbClr val="8ECAE6"/>
+              <a:srgbClr val="B4DAEE"/>
             </a:solidFill>
           </a:ln>
         </p:spPr>
@@ -6238,7 +9655,109 @@
           </a:fontRef>
         </p:style>
         <p:txBody>
-          <a:bodyPr rtlCol="0" anchor="t" wrap="square" lIns="320040" rIns="320040" tIns="274320" bIns="228600"/>
+          <a:bodyPr rtlCol="0" anchor="ctr"/>
+          <a:lstStyle/>
+          <a:p>
+            <a:pPr algn="ctr"/>
+          </a:p>
+        </p:txBody>
+      </p:sp>
+      <p:pic>
+        <p:nvPicPr>
+          <p:cNvPr id="5" name="Picture 4" descr="authority.png"/>
+          <p:cNvPicPr>
+            <a:picLocks noChangeAspect="1"/>
+          </p:cNvPicPr>
+          <p:nvPr/>
+        </p:nvPicPr>
+        <p:blipFill>
+          <a:blip r:embed="rId2"/>
+          <a:stretch>
+            <a:fillRect/>
+          </a:stretch>
+        </p:blipFill>
+        <p:spPr>
+          <a:xfrm>
+            <a:off x="1005840" y="1636776"/>
+            <a:ext cx="438912" cy="438912"/>
+          </a:xfrm>
+          <a:prstGeom prst="rect">
+            <a:avLst/>
+          </a:prstGeom>
+        </p:spPr>
+      </p:pic>
+      <p:sp>
+        <p:nvSpPr>
+          <p:cNvPr id="6" name="TextBox 5"/>
+          <p:cNvSpPr txBox="1"/>
+          <p:nvPr/>
+        </p:nvSpPr>
+        <p:spPr>
+          <a:xfrm>
+            <a:off x="1536192" y="1581912"/>
+            <a:ext cx="4129430" cy="594360"/>
+          </a:xfrm>
+          <a:prstGeom prst="rect">
+            <a:avLst/>
+          </a:prstGeom>
+          <a:noFill/>
+        </p:spPr>
+        <p:txBody>
+          <a:bodyPr wrap="square" anchor="t" lIns="0" tIns="0" rIns="0" bIns="0">
+            <a:spAutoFit/>
+          </a:bodyPr>
+          <a:lstStyle/>
+          <a:p>
+            <a:pPr>
+              <a:spcAft>
+                <a:spcPts val="200"/>
+              </a:spcAft>
+              <a:defRPr sz="1000" b="1">
+                <a:solidFill>
+                  <a:srgbClr val="219EBC"/>
+                </a:solidFill>
+                <a:latin typeface="Calibri"/>
+              </a:defRPr>
+            </a:pPr>
+            <a:r>
+              <a:t>GOVERNANCE &amp; CAPEX PRIORITIZATION</a:t>
+            </a:r>
+          </a:p>
+          <a:p>
+            <a:pPr algn="l">
+              <a:defRPr sz="2000" b="1">
+                <a:solidFill>
+                  <a:srgbClr val="023047"/>
+                </a:solidFill>
+                <a:latin typeface="Calibri"/>
+              </a:defRPr>
+            </a:pPr>
+            <a:r>
+              <a:t>City &amp; Authority Command</a:t>
+            </a:r>
+          </a:p>
+        </p:txBody>
+      </p:sp>
+      <p:sp>
+        <p:nvSpPr>
+          <p:cNvPr id="7" name="TextBox 6"/>
+          <p:cNvSpPr txBox="1"/>
+          <p:nvPr/>
+        </p:nvSpPr>
+        <p:spPr>
+          <a:xfrm>
+            <a:off x="1024128" y="2258568"/>
+            <a:ext cx="4595774" cy="1691640"/>
+          </a:xfrm>
+          <a:prstGeom prst="rect">
+            <a:avLst/>
+          </a:prstGeom>
+          <a:noFill/>
+        </p:spPr>
+        <p:txBody>
+          <a:bodyPr wrap="square" anchor="t" lIns="0" tIns="0" rIns="0" bIns="0">
+            <a:spAutoFit/>
+          </a:bodyPr>
           <a:lstStyle/>
           <a:p>
             <a:pPr algn="l">
@@ -6246,9 +9765,9 @@
                 <a:spcPts val="0"/>
               </a:spcBef>
               <a:spcAft>
-                <a:spcPts val="1200"/>
+                <a:spcPts val="600"/>
               </a:spcAft>
-              <a:defRPr sz="2200" b="1">
+              <a:defRPr sz="1500">
                 <a:solidFill>
                   <a:srgbClr val="023047"/>
                 </a:solidFill>
@@ -6256,7 +9775,7 @@
               </a:defRPr>
             </a:pPr>
             <a:r>
-              <a:t>Gradient Tracing</a:t>
+              <a:t>-  Outfall Asset Health: links chemical spikes to specific pipe IDs</a:t>
             </a:r>
           </a:p>
           <a:p>
@@ -6265,9 +9784,9 @@
                 <a:spcPts val="0"/>
               </a:spcBef>
               <a:spcAft>
-                <a:spcPts val="900"/>
+                <a:spcPts val="600"/>
               </a:spcAft>
-              <a:defRPr sz="1600">
+              <a:defRPr sz="1500">
                 <a:solidFill>
                   <a:srgbClr val="023047"/>
                 </a:solidFill>
@@ -6275,7 +9794,7 @@
               </a:defRPr>
             </a:pPr>
             <a:r>
-              <a:t>-  Tracks concentration gradients upstream</a:t>
+              <a:t>-  Targeted CapEx: empirical proof for 1.5M - 5M+ EUR basin upgrades</a:t>
             </a:r>
           </a:p>
           <a:p>
@@ -6284,9 +9803,9 @@
                 <a:spcPts val="0"/>
               </a:spcBef>
               <a:spcAft>
-                <a:spcPts val="900"/>
+                <a:spcPts val="600"/>
               </a:spcAft>
-              <a:defRPr sz="1600">
+              <a:defRPr sz="1500">
                 <a:solidFill>
                   <a:srgbClr val="023047"/>
                 </a:solidFill>
@@ -6294,21 +9813,97 @@
               </a:defRPr>
             </a:pPr>
             <a:r>
-              <a:t>-  Locates exact leaking pipe instead of diluted mix</a:t>
-            </a:r>
-          </a:p>
-        </p:txBody>
-      </p:sp>
-      <p:sp>
-        <p:nvSpPr>
-          <p:cNvPr id="4" name="Rounded Rectangle 3"/>
+              <a:t>-  Chronic Seepage: uncovers leaking pipes before structural collapse</a:t>
+            </a:r>
+          </a:p>
+          <a:p>
+            <a:pPr algn="l">
+              <a:spcBef>
+                <a:spcPts val="0"/>
+              </a:spcBef>
+              <a:spcAft>
+                <a:spcPts val="600"/>
+              </a:spcAft>
+              <a:defRPr sz="1500">
+                <a:solidFill>
+                  <a:srgbClr val="023047"/>
+                </a:solidFill>
+                <a:latin typeface="Calibri"/>
+              </a:defRPr>
+            </a:pPr>
+            <a:r>
+              <a:t>-  Automated audit logs for EU Water Framework Directive &amp; OGewV</a:t>
+            </a:r>
+          </a:p>
+        </p:txBody>
+      </p:sp>
+      <p:sp>
+        <p:nvSpPr>
+          <p:cNvPr id="8" name="Rounded Rectangle 7"/>
           <p:cNvSpPr/>
           <p:nvPr/>
         </p:nvSpPr>
         <p:spPr>
           <a:xfrm>
-            <a:off x="6278270" y="1554480"/>
-            <a:ext cx="5180990" cy="2240280"/>
+            <a:off x="987552" y="3886200"/>
+            <a:ext cx="4668926" cy="320040"/>
+          </a:xfrm>
+          <a:prstGeom prst="roundRect">
+            <a:avLst>
+              <a:gd name="adj" fmla="val 8000"/>
+            </a:avLst>
+          </a:prstGeom>
+          <a:solidFill>
+            <a:srgbClr val="EBF4FA"/>
+          </a:solidFill>
+          <a:ln w="12700">
+            <a:solidFill>
+              <a:srgbClr val="8ECAE6"/>
+            </a:solidFill>
+          </a:ln>
+        </p:spPr>
+        <p:style>
+          <a:lnRef idx="1">
+            <a:schemeClr val="accent1"/>
+          </a:lnRef>
+          <a:fillRef idx="3">
+            <a:schemeClr val="accent1"/>
+          </a:fillRef>
+          <a:effectRef idx="2">
+            <a:schemeClr val="accent1"/>
+          </a:effectRef>
+          <a:fontRef idx="minor">
+            <a:schemeClr val="lt1"/>
+          </a:fontRef>
+        </p:style>
+        <p:txBody>
+          <a:bodyPr rtlCol="0" anchor="ctr" wrap="square" lIns="137160" rIns="137160" tIns="0" bIns="0"/>
+          <a:lstStyle/>
+          <a:p>
+            <a:pPr algn="l">
+              <a:defRPr sz="1100" b="1">
+                <a:solidFill>
+                  <a:srgbClr val="219EBC"/>
+                </a:solidFill>
+                <a:latin typeface="Calibri"/>
+              </a:defRPr>
+            </a:pPr>
+            <a:r>
+              <a:t>Asset Health Scoring  |  Targeted €1.5M-€5M+ CapEx  |  EU WFD Compliance</a:t>
+            </a:r>
+          </a:p>
+        </p:txBody>
+      </p:sp>
+      <p:sp>
+        <p:nvSpPr>
+          <p:cNvPr id="9" name="Rounded Rectangle 8"/>
+          <p:cNvSpPr/>
+          <p:nvPr/>
+        </p:nvSpPr>
+        <p:spPr>
+          <a:xfrm>
+            <a:off x="6278270" y="1417320"/>
+            <a:ext cx="5180990" cy="2926080"/>
           </a:xfrm>
           <a:prstGeom prst="roundRect">
             <a:avLst>
@@ -6320,7 +9915,7 @@
           </a:solidFill>
           <a:ln w="19050">
             <a:solidFill>
-              <a:srgbClr val="8ECAE6"/>
+              <a:srgbClr val="B4DAEE"/>
             </a:solidFill>
           </a:ln>
         </p:spPr>
@@ -6339,7 +9934,109 @@
           </a:fontRef>
         </p:style>
         <p:txBody>
-          <a:bodyPr rtlCol="0" anchor="t" wrap="square" lIns="320040" rIns="320040" tIns="274320" bIns="228600"/>
+          <a:bodyPr rtlCol="0" anchor="ctr"/>
+          <a:lstStyle/>
+          <a:p>
+            <a:pPr algn="ctr"/>
+          </a:p>
+        </p:txBody>
+      </p:sp>
+      <p:pic>
+        <p:nvPicPr>
+          <p:cNvPr id="10" name="Picture 9" descr="ai_mcp.png"/>
+          <p:cNvPicPr>
+            <a:picLocks noChangeAspect="1"/>
+          </p:cNvPicPr>
+          <p:nvPr/>
+        </p:nvPicPr>
+        <p:blipFill>
+          <a:blip r:embed="rId3"/>
+          <a:stretch>
+            <a:fillRect/>
+          </a:stretch>
+        </p:blipFill>
+        <p:spPr>
+          <a:xfrm>
+            <a:off x="6552590" y="1636776"/>
+            <a:ext cx="438912" cy="438912"/>
+          </a:xfrm>
+          <a:prstGeom prst="rect">
+            <a:avLst/>
+          </a:prstGeom>
+        </p:spPr>
+      </p:pic>
+      <p:sp>
+        <p:nvSpPr>
+          <p:cNvPr id="11" name="TextBox 10"/>
+          <p:cNvSpPr txBox="1"/>
+          <p:nvPr/>
+        </p:nvSpPr>
+        <p:spPr>
+          <a:xfrm>
+            <a:off x="7082942" y="1581912"/>
+            <a:ext cx="4129430" cy="594360"/>
+          </a:xfrm>
+          <a:prstGeom prst="rect">
+            <a:avLst/>
+          </a:prstGeom>
+          <a:noFill/>
+        </p:spPr>
+        <p:txBody>
+          <a:bodyPr wrap="square" anchor="t" lIns="0" tIns="0" rIns="0" bIns="0">
+            <a:spAutoFit/>
+          </a:bodyPr>
+          <a:lstStyle/>
+          <a:p>
+            <a:pPr>
+              <a:spcAft>
+                <a:spcPts val="200"/>
+              </a:spcAft>
+              <a:defRPr sz="1000" b="1">
+                <a:solidFill>
+                  <a:srgbClr val="219EBC"/>
+                </a:solidFill>
+                <a:latin typeface="Calibri"/>
+              </a:defRPr>
+            </a:pPr>
+            <a:r>
+              <a:t>CITIZEN INTERACTION &amp; OPEN DATA</a:t>
+            </a:r>
+          </a:p>
+          <a:p>
+            <a:pPr algn="l">
+              <a:defRPr sz="2000" b="1">
+                <a:solidFill>
+                  <a:srgbClr val="023047"/>
+                </a:solidFill>
+                <a:latin typeface="Calibri"/>
+              </a:defRPr>
+            </a:pPr>
+            <a:r>
+              <a:t>AI Public Access via MCP</a:t>
+            </a:r>
+          </a:p>
+        </p:txBody>
+      </p:sp>
+      <p:sp>
+        <p:nvSpPr>
+          <p:cNvPr id="12" name="TextBox 11"/>
+          <p:cNvSpPr txBox="1"/>
+          <p:nvPr/>
+        </p:nvSpPr>
+        <p:spPr>
+          <a:xfrm>
+            <a:off x="6570878" y="2258568"/>
+            <a:ext cx="4595774" cy="1691640"/>
+          </a:xfrm>
+          <a:prstGeom prst="rect">
+            <a:avLst/>
+          </a:prstGeom>
+          <a:noFill/>
+        </p:spPr>
+        <p:txBody>
+          <a:bodyPr wrap="square" anchor="t" lIns="0" tIns="0" rIns="0" bIns="0">
+            <a:spAutoFit/>
+          </a:bodyPr>
           <a:lstStyle/>
           <a:p>
             <a:pPr algn="l">
@@ -6347,9 +10044,9 @@
                 <a:spcPts val="0"/>
               </a:spcBef>
               <a:spcAft>
-                <a:spcPts val="1200"/>
+                <a:spcPts val="600"/>
               </a:spcAft>
-              <a:defRPr sz="2200" b="1">
+              <a:defRPr sz="1500">
                 <a:solidFill>
                   <a:srgbClr val="023047"/>
                 </a:solidFill>
@@ -6357,7 +10054,7 @@
               </a:defRPr>
             </a:pPr>
             <a:r>
-              <a:t>Asset Intelligence</a:t>
+              <a:t>-  Model Context Protocol (MCP) connects AI models to live twin data</a:t>
             </a:r>
           </a:p>
           <a:p>
@@ -6366,9 +10063,9 @@
                 <a:spcPts val="0"/>
               </a:spcBef>
               <a:spcAft>
-                <a:spcPts val="900"/>
+                <a:spcPts val="600"/>
               </a:spcAft>
-              <a:defRPr sz="1600">
+              <a:defRPr sz="1500">
                 <a:solidFill>
                   <a:srgbClr val="023047"/>
                 </a:solidFill>
@@ -6376,7 +10073,7 @@
               </a:defRPr>
             </a:pPr>
             <a:r>
-              <a:t>-  Links water chemistry to specific municipal outfall IDs</a:t>
+              <a:t>-  Conversational Queries: 'Can I surf at Fuchslochwelle today?'</a:t>
             </a:r>
           </a:p>
           <a:p>
@@ -6385,9 +10082,9 @@
                 <a:spcPts val="0"/>
               </a:spcBef>
               <a:spcAft>
-                <a:spcPts val="900"/>
+                <a:spcPts val="600"/>
               </a:spcAft>
-              <a:defRPr sz="1600">
+              <a:defRPr sz="1500">
                 <a:solidFill>
                   <a:srgbClr val="023047"/>
                 </a:solidFill>
@@ -6395,21 +10092,97 @@
               </a:defRPr>
             </a:pPr>
             <a:r>
-              <a:t>-  Direct evidence for multi-million EUR basin upgrades</a:t>
-            </a:r>
-          </a:p>
-        </p:txBody>
-      </p:sp>
-      <p:sp>
-        <p:nvSpPr>
-          <p:cNvPr id="5" name="Rounded Rectangle 4"/>
+              <a:t>-  Live Citizen Traffic Light: instant Green / Yellow / Red alerts</a:t>
+            </a:r>
+          </a:p>
+          <a:p>
+            <a:pPr algn="l">
+              <a:spcBef>
+                <a:spcPts val="0"/>
+              </a:spcBef>
+              <a:spcAft>
+                <a:spcPts val="600"/>
+              </a:spcAft>
+              <a:defRPr sz="1500">
+                <a:solidFill>
+                  <a:srgbClr val="023047"/>
+                </a:solidFill>
+                <a:latin typeface="Calibri"/>
+              </a:defRPr>
+            </a:pPr>
+            <a:r>
+              <a:t>-  Eliminates 48h lab delay with direct public health warnings</a:t>
+            </a:r>
+          </a:p>
+        </p:txBody>
+      </p:sp>
+      <p:sp>
+        <p:nvSpPr>
+          <p:cNvPr id="13" name="Rounded Rectangle 12"/>
           <p:cNvSpPr/>
           <p:nvPr/>
         </p:nvSpPr>
         <p:spPr>
           <a:xfrm>
-            <a:off x="731520" y="4069080"/>
-            <a:ext cx="5180990" cy="2240280"/>
+            <a:off x="6534302" y="3886200"/>
+            <a:ext cx="4668926" cy="320040"/>
+          </a:xfrm>
+          <a:prstGeom prst="roundRect">
+            <a:avLst>
+              <a:gd name="adj" fmla="val 8000"/>
+            </a:avLst>
+          </a:prstGeom>
+          <a:solidFill>
+            <a:srgbClr val="EBF4FA"/>
+          </a:solidFill>
+          <a:ln w="12700">
+            <a:solidFill>
+              <a:srgbClr val="8ECAE6"/>
+            </a:solidFill>
+          </a:ln>
+        </p:spPr>
+        <p:style>
+          <a:lnRef idx="1">
+            <a:schemeClr val="accent1"/>
+          </a:lnRef>
+          <a:fillRef idx="3">
+            <a:schemeClr val="accent1"/>
+          </a:fillRef>
+          <a:effectRef idx="2">
+            <a:schemeClr val="accent1"/>
+          </a:effectRef>
+          <a:fontRef idx="minor">
+            <a:schemeClr val="lt1"/>
+          </a:fontRef>
+        </p:style>
+        <p:txBody>
+          <a:bodyPr rtlCol="0" anchor="ctr" wrap="square" lIns="137160" rIns="137160" tIns="0" bIns="0"/>
+          <a:lstStyle/>
+          <a:p>
+            <a:pPr algn="l">
+              <a:defRPr sz="1100" b="1">
+                <a:solidFill>
+                  <a:srgbClr val="219EBC"/>
+                </a:solidFill>
+                <a:latin typeface="Calibri"/>
+              </a:defRPr>
+            </a:pPr>
+            <a:r>
+              <a:t>MCP Integration  |  Conversational AI Assistant  |  Citizen Traffic Light</a:t>
+            </a:r>
+          </a:p>
+        </p:txBody>
+      </p:sp>
+      <p:sp>
+        <p:nvSpPr>
+          <p:cNvPr id="14" name="Rounded Rectangle 13"/>
+          <p:cNvSpPr/>
+          <p:nvPr/>
+        </p:nvSpPr>
+        <p:spPr>
+          <a:xfrm>
+            <a:off x="731520" y="4526280"/>
+            <a:ext cx="10728655" cy="1783080"/>
           </a:xfrm>
           <a:prstGeom prst="roundRect">
             <a:avLst>
@@ -6421,7 +10194,7 @@
           </a:solidFill>
           <a:ln w="19050">
             <a:solidFill>
-              <a:srgbClr val="8ECAE6"/>
+              <a:srgbClr val="B4DAEE"/>
             </a:solidFill>
           </a:ln>
         </p:spPr>
@@ -6440,87 +10213,46 @@
           </a:fontRef>
         </p:style>
         <p:txBody>
-          <a:bodyPr rtlCol="0" anchor="t" wrap="square" lIns="320040" rIns="320040" tIns="274320" bIns="228600"/>
-          <a:lstStyle/>
-          <a:p>
-            <a:pPr algn="l">
-              <a:spcBef>
-                <a:spcPts val="0"/>
-              </a:spcBef>
+          <a:bodyPr rtlCol="0" anchor="t" wrap="square" lIns="320040" rIns="320040" tIns="164592"/>
+          <a:lstStyle/>
+          <a:p>
+            <a:pPr algn="ctr">
               <a:spcAft>
-                <a:spcPts val="1200"/>
+                <a:spcPts val="800"/>
               </a:spcAft>
-              <a:defRPr sz="2200" b="1">
-                <a:solidFill>
-                  <a:srgbClr val="023047"/>
-                </a:solidFill>
-                <a:latin typeface="Calibri"/>
-              </a:defRPr>
-            </a:pPr>
-            <a:r>
-              <a:t>River Corridor Mapping</a:t>
-            </a:r>
-          </a:p>
-          <a:p>
-            <a:pPr algn="l">
-              <a:spcBef>
-                <a:spcPts val="0"/>
-              </a:spcBef>
-              <a:spcAft>
-                <a:spcPts val="900"/>
-              </a:spcAft>
-              <a:defRPr sz="1600">
-                <a:solidFill>
-                  <a:srgbClr val="023047"/>
-                </a:solidFill>
-                <a:latin typeface="Calibri"/>
-              </a:defRPr>
-            </a:pPr>
-            <a:r>
-              <a:t>-  LiDAR detects riverbank erosion and sediment build-up</a:t>
-            </a:r>
-          </a:p>
-          <a:p>
-            <a:pPr algn="l">
-              <a:spcBef>
-                <a:spcPts val="0"/>
-              </a:spcBef>
-              <a:spcAft>
-                <a:spcPts val="900"/>
-              </a:spcAft>
-              <a:defRPr sz="1600">
-                <a:solidFill>
-                  <a:srgbClr val="023047"/>
-                </a:solidFill>
-                <a:latin typeface="Calibri"/>
-              </a:defRPr>
-            </a:pPr>
-            <a:r>
-              <a:t>-  Supports EU renaturation compliance</a:t>
-            </a:r>
-          </a:p>
-        </p:txBody>
-      </p:sp>
-      <p:sp>
-        <p:nvSpPr>
-          <p:cNvPr id="6" name="Rounded Rectangle 5"/>
+              <a:defRPr sz="1100" b="1">
+                <a:solidFill>
+                  <a:srgbClr val="219EBC"/>
+                </a:solidFill>
+                <a:latin typeface="Calibri"/>
+              </a:defRPr>
+            </a:pPr>
+            <a:r>
+              <a:t>OPEN DATA &amp; MCP INTEGRATION ARCHITECTURE (PUBLIC &amp; CITY ACCESS)</a:t>
+            </a:r>
+          </a:p>
+        </p:txBody>
+      </p:sp>
+      <p:sp>
+        <p:nvSpPr>
+          <p:cNvPr id="15" name="Rounded Rectangle 14"/>
           <p:cNvSpPr/>
           <p:nvPr/>
         </p:nvSpPr>
         <p:spPr>
           <a:xfrm>
-            <a:off x="6278270" y="4069080"/>
-            <a:ext cx="5180990" cy="2240280"/>
+            <a:off x="1005840" y="4919472"/>
+            <a:ext cx="3154680" cy="1170432"/>
           </a:xfrm>
           <a:prstGeom prst="roundRect">
             <a:avLst>
-              <a:gd name="adj" fmla="val 3500"/>
+              <a:gd name="adj" fmla="val 5000"/>
             </a:avLst>
           </a:prstGeom>
           <a:solidFill>
-            <a:srgbClr val="F4F9FC"/>
+            <a:srgbClr val="FFFFFF"/>
           </a:solidFill>
-          <a:ln w="19050">
+          <a:ln w="12700">
             <a:solidFill>
               <a:srgbClr val="8ECAE6"/>
             </a:solidFill>
@@ -6541,17 +10273,27 @@
           </a:fontRef>
         </p:style>
         <p:txBody>
-          <a:bodyPr rtlCol="0" anchor="t" wrap="square" lIns="320040" rIns="320040" tIns="274320" bIns="228600"/>
-          <a:lstStyle/>
-          <a:p>
-            <a:pPr algn="l">
+          <a:bodyPr rtlCol="0" anchor="t" wrap="square" lIns="109728" rIns="109728" tIns="109728"/>
+          <a:lstStyle/>
+          <a:p>
+            <a:pPr algn="ctr">
+              <a:defRPr sz="1200" b="1">
+                <a:solidFill>
+                  <a:srgbClr val="023047"/>
+                </a:solidFill>
+                <a:latin typeface="Calibri"/>
+              </a:defRPr>
+            </a:pPr>
+            <a:r>
+              <a:t>1. Public Open Data Sources</a:t>
+            </a:r>
+          </a:p>
+          <a:p>
+            <a:pPr>
               <a:spcBef>
-                <a:spcPts val="0"/>
+                <a:spcPts val="300"/>
               </a:spcBef>
-              <a:spcAft>
-                <a:spcPts val="1200"/>
-              </a:spcAft>
-              <a:defRPr sz="2200" b="1">
+              <a:defRPr sz="1050">
                 <a:solidFill>
                   <a:srgbClr val="023047"/>
                 </a:solidFill>
@@ -6559,18 +10301,115 @@
               </a:defRPr>
             </a:pPr>
             <a:r>
-              <a:t>Operational Economics</a:t>
-            </a:r>
-          </a:p>
-          <a:p>
-            <a:pPr algn="l">
+              <a:t>Bavarian LOD2 3D mesh, DWD precipitation radar, and GKD Bayern real-time gauge telemetry.</a:t>
+            </a:r>
+          </a:p>
+        </p:txBody>
+      </p:sp>
+      <p:sp>
+        <p:nvSpPr>
+          <p:cNvPr id="16" name="Right Arrow 15"/>
+          <p:cNvSpPr/>
+          <p:nvPr/>
+        </p:nvSpPr>
+        <p:spPr>
+          <a:xfrm>
+            <a:off x="4270248" y="5394960"/>
+            <a:ext cx="228600" cy="256032"/>
+          </a:xfrm>
+          <a:prstGeom prst="rightArrow">
+            <a:avLst/>
+          </a:prstGeom>
+          <a:solidFill>
+            <a:srgbClr val="219EBC"/>
+          </a:solidFill>
+          <a:ln>
+            <a:noFill/>
+          </a:ln>
+        </p:spPr>
+        <p:style>
+          <a:lnRef idx="1">
+            <a:schemeClr val="accent1"/>
+          </a:lnRef>
+          <a:fillRef idx="3">
+            <a:schemeClr val="accent1"/>
+          </a:fillRef>
+          <a:effectRef idx="2">
+            <a:schemeClr val="accent1"/>
+          </a:effectRef>
+          <a:fontRef idx="minor">
+            <a:schemeClr val="lt1"/>
+          </a:fontRef>
+        </p:style>
+        <p:txBody>
+          <a:bodyPr rtlCol="0" anchor="ctr"/>
+          <a:lstStyle/>
+          <a:p>
+            <a:pPr algn="ctr"/>
+          </a:p>
+        </p:txBody>
+      </p:sp>
+      <p:sp>
+        <p:nvSpPr>
+          <p:cNvPr id="17" name="Rounded Rectangle 16"/>
+          <p:cNvSpPr/>
+          <p:nvPr/>
+        </p:nvSpPr>
+        <p:spPr>
+          <a:xfrm>
+            <a:off x="4617720" y="4919472"/>
+            <a:ext cx="3154680" cy="1170432"/>
+          </a:xfrm>
+          <a:prstGeom prst="roundRect">
+            <a:avLst>
+              <a:gd name="adj" fmla="val 5000"/>
+            </a:avLst>
+          </a:prstGeom>
+          <a:solidFill>
+            <a:srgbClr val="FFFFFF"/>
+          </a:solidFill>
+          <a:ln w="12700">
+            <a:solidFill>
+              <a:srgbClr val="8ECAE6"/>
+            </a:solidFill>
+          </a:ln>
+        </p:spPr>
+        <p:style>
+          <a:lnRef idx="1">
+            <a:schemeClr val="accent1"/>
+          </a:lnRef>
+          <a:fillRef idx="3">
+            <a:schemeClr val="accent1"/>
+          </a:fillRef>
+          <a:effectRef idx="2">
+            <a:schemeClr val="accent1"/>
+          </a:effectRef>
+          <a:fontRef idx="minor">
+            <a:schemeClr val="lt1"/>
+          </a:fontRef>
+        </p:style>
+        <p:txBody>
+          <a:bodyPr rtlCol="0" anchor="t" wrap="square" lIns="109728" rIns="109728" tIns="109728"/>
+          <a:lstStyle/>
+          <a:p>
+            <a:pPr algn="ctr">
+              <a:defRPr sz="1200" b="1">
+                <a:solidFill>
+                  <a:srgbClr val="023047"/>
+                </a:solidFill>
+                <a:latin typeface="Calibri"/>
+              </a:defRPr>
+            </a:pPr>
+            <a:r>
+              <a:t>2. PlumeTrace MCP Server</a:t>
+            </a:r>
+          </a:p>
+          <a:p>
+            <a:pPr>
               <a:spcBef>
-                <a:spcPts val="0"/>
+                <a:spcPts val="300"/>
               </a:spcBef>
-              <a:spcAft>
-                <a:spcPts val="900"/>
-              </a:spcAft>
-              <a:defRPr sz="1600">
+              <a:defRPr sz="1050">
                 <a:solidFill>
                   <a:srgbClr val="023047"/>
                 </a:solidFill>
@@ -6578,18 +10417,115 @@
               </a:defRPr>
             </a:pPr>
             <a:r>
-              <a:t>-  One self-cleaning mobile robot replaces 50+ fixed probes</a:t>
-            </a:r>
-          </a:p>
-          <a:p>
-            <a:pPr algn="l">
+              <a:t>Standardized Model Context Protocol exposes river safety status, outfall scores, and alerts to AI agents.</a:t>
+            </a:r>
+          </a:p>
+        </p:txBody>
+      </p:sp>
+      <p:sp>
+        <p:nvSpPr>
+          <p:cNvPr id="18" name="Right Arrow 17"/>
+          <p:cNvSpPr/>
+          <p:nvPr/>
+        </p:nvSpPr>
+        <p:spPr>
+          <a:xfrm>
+            <a:off x="7882128" y="5394960"/>
+            <a:ext cx="228600" cy="256032"/>
+          </a:xfrm>
+          <a:prstGeom prst="rightArrow">
+            <a:avLst/>
+          </a:prstGeom>
+          <a:solidFill>
+            <a:srgbClr val="219EBC"/>
+          </a:solidFill>
+          <a:ln>
+            <a:noFill/>
+          </a:ln>
+        </p:spPr>
+        <p:style>
+          <a:lnRef idx="1">
+            <a:schemeClr val="accent1"/>
+          </a:lnRef>
+          <a:fillRef idx="3">
+            <a:schemeClr val="accent1"/>
+          </a:fillRef>
+          <a:effectRef idx="2">
+            <a:schemeClr val="accent1"/>
+          </a:effectRef>
+          <a:fontRef idx="minor">
+            <a:schemeClr val="lt1"/>
+          </a:fontRef>
+        </p:style>
+        <p:txBody>
+          <a:bodyPr rtlCol="0" anchor="ctr"/>
+          <a:lstStyle/>
+          <a:p>
+            <a:pPr algn="ctr"/>
+          </a:p>
+        </p:txBody>
+      </p:sp>
+      <p:sp>
+        <p:nvSpPr>
+          <p:cNvPr id="19" name="Rounded Rectangle 18"/>
+          <p:cNvSpPr/>
+          <p:nvPr/>
+        </p:nvSpPr>
+        <p:spPr>
+          <a:xfrm>
+            <a:off x="8229600" y="4919472"/>
+            <a:ext cx="3154680" cy="1170432"/>
+          </a:xfrm>
+          <a:prstGeom prst="roundRect">
+            <a:avLst>
+              <a:gd name="adj" fmla="val 5000"/>
+            </a:avLst>
+          </a:prstGeom>
+          <a:solidFill>
+            <a:srgbClr val="FFFFFF"/>
+          </a:solidFill>
+          <a:ln w="12700">
+            <a:solidFill>
+              <a:srgbClr val="8ECAE6"/>
+            </a:solidFill>
+          </a:ln>
+        </p:spPr>
+        <p:style>
+          <a:lnRef idx="1">
+            <a:schemeClr val="accent1"/>
+          </a:lnRef>
+          <a:fillRef idx="3">
+            <a:schemeClr val="accent1"/>
+          </a:fillRef>
+          <a:effectRef idx="2">
+            <a:schemeClr val="accent1"/>
+          </a:effectRef>
+          <a:fontRef idx="minor">
+            <a:schemeClr val="lt1"/>
+          </a:fontRef>
+        </p:style>
+        <p:txBody>
+          <a:bodyPr rtlCol="0" anchor="t" wrap="square" lIns="109728" rIns="109728" tIns="109728"/>
+          <a:lstStyle/>
+          <a:p>
+            <a:pPr algn="ctr">
+              <a:defRPr sz="1200" b="1">
+                <a:solidFill>
+                  <a:srgbClr val="023047"/>
+                </a:solidFill>
+                <a:latin typeface="Calibri"/>
+              </a:defRPr>
+            </a:pPr>
+            <a:r>
+              <a:t>3. Public &amp; City Interfaces</a:t>
+            </a:r>
+          </a:p>
+          <a:p>
+            <a:pPr>
               <a:spcBef>
-                <a:spcPts val="0"/>
+                <a:spcPts val="300"/>
               </a:spcBef>
-              <a:spcAft>
-                <a:spcPts val="900"/>
-              </a:spcAft>
-              <a:defRPr sz="1600">
+              <a:defRPr sz="1050">
                 <a:solidFill>
                   <a:srgbClr val="023047"/>
                 </a:solidFill>
@@ -6597,7 +10533,7 @@
               </a:defRPr>
             </a:pPr>
             <a:r>
-              <a:t>-  Eliminates biofouling and flood destruction</a:t>
+              <a:t>Natural language AI answers citizen queries instantly; city dashboard automates regulatory compliance.</a:t>
             </a:r>
           </a:p>
         </p:txBody>

--- a/presentation/plumetrace_presentation.pptx
+++ b/presentation/plumetrace_presentation.pptx
@@ -776,12 +776,6 @@
           <a:p>
             <a:r>
               <a:t>Second, Citizens and Surfers: People entering the Pegnitz at the Fuchslochwelle or in city parks have zero real-time warning. They unknowingly expose themselves to acute bacterial contamination because municipal data is either delayed by days or buried in complex chemical reports.</a:t>
-            </a:r>
-          </a:p>
-          <a:p/>
-          <a:p>
-            <a:r>
-              <a:t>This brings us to our formal challenge definition: How can digital twinning be applied to autonomous systems to detect and localize transient Combined Sewer Overflows for environmental authorities?</a:t>
             </a:r>
           </a:p>
         </p:txBody>
@@ -4063,8 +4057,8 @@
         </p:blipFill>
         <p:spPr>
           <a:xfrm>
-            <a:off x="1097280" y="1737360"/>
-            <a:ext cx="3200400" cy="3200400"/>
+            <a:off x="1280160" y="1828800"/>
+            <a:ext cx="3108960" cy="3108960"/>
           </a:xfrm>
           <a:prstGeom prst="rect">
             <a:avLst/>
@@ -4079,8 +4073,8 @@
         </p:nvSpPr>
         <p:spPr>
           <a:xfrm>
-            <a:off x="4572000" y="1920240"/>
-            <a:ext cx="6858000" cy="2926080"/>
+            <a:off x="4754880" y="2011680"/>
+            <a:ext cx="6675120" cy="2743200"/>
           </a:xfrm>
           <a:prstGeom prst="rect">
             <a:avLst/>
@@ -4095,23 +4089,7 @@
           <a:p>
             <a:pPr algn="l">
               <a:spcAft>
-                <a:spcPts val="800"/>
-              </a:spcAft>
-              <a:defRPr sz="1300" b="1">
-                <a:solidFill>
-                  <a:srgbClr val="219EBC"/>
-                </a:solidFill>
-                <a:latin typeface="Calibri"/>
-              </a:defRPr>
-            </a:pPr>
-            <a:r>
-              <a:t>EUROTEQ ENGINEERING UNIVERSITY | TRACK 3</a:t>
-            </a:r>
-          </a:p>
-          <a:p>
-            <a:pPr algn="l">
-              <a:spcAft>
-                <a:spcPts val="1000"/>
+                <a:spcPts val="1400"/>
               </a:spcAft>
               <a:defRPr sz="6400" b="1">
                 <a:solidFill>
@@ -4126,10 +4104,7 @@
           </a:p>
           <a:p>
             <a:pPr algn="l">
-              <a:spcAft>
-                <a:spcPts val="2000"/>
-              </a:spcAft>
-              <a:defRPr sz="2400" b="1">
+              <a:defRPr sz="2600" b="1">
                 <a:solidFill>
                   <a:srgbClr val="023047"/>
                 </a:solidFill>
@@ -4138,177 +4113,6 @@
             </a:pPr>
             <a:r>
               <a:t>Autonomous Water Protection for the Pegnitz River</a:t>
-            </a:r>
-          </a:p>
-        </p:txBody>
-      </p:sp>
-      <p:sp>
-        <p:nvSpPr>
-          <p:cNvPr id="4" name="Rounded Rectangle 3"/>
-          <p:cNvSpPr/>
-          <p:nvPr/>
-        </p:nvSpPr>
-        <p:spPr>
-          <a:xfrm>
-            <a:off x="4572000" y="4389120"/>
-            <a:ext cx="2103120" cy="384048"/>
-          </a:xfrm>
-          <a:prstGeom prst="roundRect">
-            <a:avLst>
-              <a:gd name="adj" fmla="val 10000"/>
-            </a:avLst>
-          </a:prstGeom>
-          <a:solidFill>
-            <a:srgbClr val="F4F9FC"/>
-          </a:solidFill>
-          <a:ln w="12700">
-            <a:solidFill>
-              <a:srgbClr val="8ECAE6"/>
-            </a:solidFill>
-          </a:ln>
-        </p:spPr>
-        <p:style>
-          <a:lnRef idx="1">
-            <a:schemeClr val="accent1"/>
-          </a:lnRef>
-          <a:fillRef idx="3">
-            <a:schemeClr val="accent1"/>
-          </a:fillRef>
-          <a:effectRef idx="2">
-            <a:schemeClr val="accent1"/>
-          </a:effectRef>
-          <a:fontRef idx="minor">
-            <a:schemeClr val="lt1"/>
-          </a:fontRef>
-        </p:style>
-        <p:txBody>
-          <a:bodyPr rtlCol="0" anchor="ctr" lIns="0" rIns="0" tIns="0" bIns="0"/>
-          <a:lstStyle/>
-          <a:p>
-            <a:pPr algn="ctr">
-              <a:defRPr sz="1100" b="1">
-                <a:solidFill>
-                  <a:srgbClr val="023047"/>
-                </a:solidFill>
-                <a:latin typeface="Calibri"/>
-              </a:defRPr>
-            </a:pPr>
-            <a:r>
-              <a:t>Autonomous River Robotics</a:t>
-            </a:r>
-          </a:p>
-        </p:txBody>
-      </p:sp>
-      <p:sp>
-        <p:nvSpPr>
-          <p:cNvPr id="5" name="Rounded Rectangle 4"/>
-          <p:cNvSpPr/>
-          <p:nvPr/>
-        </p:nvSpPr>
-        <p:spPr>
-          <a:xfrm>
-            <a:off x="6812280" y="4389120"/>
-            <a:ext cx="2103120" cy="384048"/>
-          </a:xfrm>
-          <a:prstGeom prst="roundRect">
-            <a:avLst>
-              <a:gd name="adj" fmla="val 10000"/>
-            </a:avLst>
-          </a:prstGeom>
-          <a:solidFill>
-            <a:srgbClr val="F4F9FC"/>
-          </a:solidFill>
-          <a:ln w="12700">
-            <a:solidFill>
-              <a:srgbClr val="8ECAE6"/>
-            </a:solidFill>
-          </a:ln>
-        </p:spPr>
-        <p:style>
-          <a:lnRef idx="1">
-            <a:schemeClr val="accent1"/>
-          </a:lnRef>
-          <a:fillRef idx="3">
-            <a:schemeClr val="accent1"/>
-          </a:fillRef>
-          <a:effectRef idx="2">
-            <a:schemeClr val="accent1"/>
-          </a:effectRef>
-          <a:fontRef idx="minor">
-            <a:schemeClr val="lt1"/>
-          </a:fontRef>
-        </p:style>
-        <p:txBody>
-          <a:bodyPr rtlCol="0" anchor="ctr" lIns="0" rIns="0" tIns="0" bIns="0"/>
-          <a:lstStyle/>
-          <a:p>
-            <a:pPr algn="ctr">
-              <a:defRPr sz="1100" b="1">
-                <a:solidFill>
-                  <a:srgbClr val="023047"/>
-                </a:solidFill>
-                <a:latin typeface="Calibri"/>
-              </a:defRPr>
-            </a:pPr>
-            <a:r>
-              <a:t>Predictive Digital Twin</a:t>
-            </a:r>
-          </a:p>
-        </p:txBody>
-      </p:sp>
-      <p:sp>
-        <p:nvSpPr>
-          <p:cNvPr id="6" name="Rounded Rectangle 5"/>
-          <p:cNvSpPr/>
-          <p:nvPr/>
-        </p:nvSpPr>
-        <p:spPr>
-          <a:xfrm>
-            <a:off x="9052560" y="4389120"/>
-            <a:ext cx="2103120" cy="384048"/>
-          </a:xfrm>
-          <a:prstGeom prst="roundRect">
-            <a:avLst>
-              <a:gd name="adj" fmla="val 10000"/>
-            </a:avLst>
-          </a:prstGeom>
-          <a:solidFill>
-            <a:srgbClr val="F4F9FC"/>
-          </a:solidFill>
-          <a:ln w="12700">
-            <a:solidFill>
-              <a:srgbClr val="8ECAE6"/>
-            </a:solidFill>
-          </a:ln>
-        </p:spPr>
-        <p:style>
-          <a:lnRef idx="1">
-            <a:schemeClr val="accent1"/>
-          </a:lnRef>
-          <a:fillRef idx="3">
-            <a:schemeClr val="accent1"/>
-          </a:fillRef>
-          <a:effectRef idx="2">
-            <a:schemeClr val="accent1"/>
-          </a:effectRef>
-          <a:fontRef idx="minor">
-            <a:schemeClr val="lt1"/>
-          </a:fontRef>
-        </p:style>
-        <p:txBody>
-          <a:bodyPr rtlCol="0" anchor="ctr" lIns="0" rIns="0" tIns="0" bIns="0"/>
-          <a:lstStyle/>
-          <a:p>
-            <a:pPr algn="ctr">
-              <a:defRPr sz="1100" b="1">
-                <a:solidFill>
-                  <a:srgbClr val="023047"/>
-                </a:solidFill>
-                <a:latin typeface="Calibri"/>
-              </a:defRPr>
-            </a:pPr>
-            <a:r>
-              <a:t>AI &amp; Open Data Interface</a:t>
             </a:r>
           </a:p>
         </p:txBody>
@@ -4347,8 +4151,8 @@
         </p:nvSpPr>
         <p:spPr>
           <a:xfrm>
-            <a:off x="731520" y="411480"/>
-            <a:ext cx="9144000" cy="292608"/>
+            <a:off x="731520" y="502920"/>
+            <a:ext cx="10728655" cy="777240"/>
           </a:xfrm>
           <a:prstGeom prst="rect">
             <a:avLst/>
@@ -4361,51 +4165,15 @@
           </a:bodyPr>
           <a:lstStyle/>
           <a:p>
-            <a:pPr>
-              <a:defRPr sz="1100" b="1">
-                <a:solidFill>
-                  <a:srgbClr val="219EBC"/>
+            <a:pPr algn="l">
+              <a:defRPr sz="3800" b="1">
+                <a:solidFill>
+                  <a:srgbClr val="023047"/>
                 </a:solidFill>
                 <a:latin typeface="Calibri"/>
               </a:defRPr>
             </a:pPr>
             <a:r>
-              <a:t>CONTEXT &amp; PROBLEM STATEMENT</a:t>
-            </a:r>
-          </a:p>
-        </p:txBody>
-      </p:sp>
-      <p:sp>
-        <p:nvSpPr>
-          <p:cNvPr id="3" name="TextBox 2"/>
-          <p:cNvSpPr txBox="1"/>
-          <p:nvPr/>
-        </p:nvSpPr>
-        <p:spPr>
-          <a:xfrm>
-            <a:off x="731520" y="658368"/>
-            <a:ext cx="10728655" cy="640080"/>
-          </a:xfrm>
-          <a:prstGeom prst="rect">
-            <a:avLst/>
-          </a:prstGeom>
-          <a:noFill/>
-        </p:spPr>
-        <p:txBody>
-          <a:bodyPr wrap="square" anchor="t" lIns="0" tIns="0" rIns="0" bIns="0">
-            <a:spAutoFit/>
-          </a:bodyPr>
-          <a:lstStyle/>
-          <a:p>
-            <a:pPr algn="l">
-              <a:defRPr sz="3600" b="1">
-                <a:solidFill>
-                  <a:srgbClr val="023047"/>
-                </a:solidFill>
-                <a:latin typeface="Calibri"/>
-              </a:defRPr>
-            </a:pPr>
-            <a:r>
               <a:t>Why Pegnitz</a:t>
             </a:r>
           </a:p>
@@ -4413,14 +4181,14 @@
       </p:sp>
       <p:sp>
         <p:nvSpPr>
-          <p:cNvPr id="4" name="Rounded Rectangle 3"/>
+          <p:cNvPr id="3" name="Rounded Rectangle 2"/>
           <p:cNvSpPr/>
           <p:nvPr/>
         </p:nvSpPr>
         <p:spPr>
           <a:xfrm>
-            <a:off x="731520" y="1417320"/>
-            <a:ext cx="5180990" cy="2331720"/>
+            <a:off x="731520" y="1508760"/>
+            <a:ext cx="5180990" cy="2240280"/>
           </a:xfrm>
           <a:prstGeom prst="roundRect">
             <a:avLst>
@@ -4460,7 +4228,7 @@
       </p:sp>
       <p:pic>
         <p:nvPicPr>
-          <p:cNvPr id="5" name="Picture 4" descr="health.png"/>
+          <p:cNvPr id="4" name="Picture 3" descr="health.png"/>
           <p:cNvPicPr>
             <a:picLocks noChangeAspect="1"/>
           </p:cNvPicPr>
@@ -4474,8 +4242,8 @@
         </p:blipFill>
         <p:spPr>
           <a:xfrm>
-            <a:off x="1005840" y="1636776"/>
-            <a:ext cx="438912" cy="438912"/>
+            <a:off x="1024128" y="1801368"/>
+            <a:ext cx="475488" cy="475488"/>
           </a:xfrm>
           <a:prstGeom prst="rect">
             <a:avLst/>
@@ -4484,14 +4252,14 @@
       </p:pic>
       <p:sp>
         <p:nvSpPr>
-          <p:cNvPr id="6" name="TextBox 5"/>
+          <p:cNvPr id="5" name="TextBox 4"/>
           <p:cNvSpPr txBox="1"/>
           <p:nvPr/>
         </p:nvSpPr>
         <p:spPr>
           <a:xfrm>
-            <a:off x="1536192" y="1581912"/>
-            <a:ext cx="4129430" cy="594360"/>
+            <a:off x="1609344" y="1764792"/>
+            <a:ext cx="4037990" cy="594360"/>
           </a:xfrm>
           <a:prstGeom prst="rect">
             <a:avLst/>
@@ -4505,7 +4273,7 @@
           <a:lstStyle/>
           <a:p>
             <a:pPr algn="l">
-              <a:defRPr sz="2000" b="1">
+              <a:defRPr sz="2100" b="1">
                 <a:solidFill>
                   <a:srgbClr val="023047"/>
                 </a:solidFill>
@@ -4520,14 +4288,14 @@
       </p:sp>
       <p:sp>
         <p:nvSpPr>
-          <p:cNvPr id="7" name="TextBox 6"/>
+          <p:cNvPr id="6" name="TextBox 5"/>
           <p:cNvSpPr txBox="1"/>
           <p:nvPr/>
         </p:nvSpPr>
         <p:spPr>
           <a:xfrm>
-            <a:off x="1024128" y="2167128"/>
-            <a:ext cx="4595774" cy="1097280"/>
+            <a:off x="1051560" y="2377440"/>
+            <a:ext cx="4540910" cy="1280160"/>
           </a:xfrm>
           <a:prstGeom prst="rect">
             <a:avLst/>
@@ -4545,9 +4313,9 @@
                 <a:spcPts val="0"/>
               </a:spcBef>
               <a:spcAft>
-                <a:spcPts val="600"/>
+                <a:spcPts val="1000"/>
               </a:spcAft>
-              <a:defRPr sz="1500">
+              <a:defRPr sz="1600">
                 <a:solidFill>
                   <a:srgbClr val="023047"/>
                 </a:solidFill>
@@ -4564,9 +4332,9 @@
                 <a:spcPts val="0"/>
               </a:spcBef>
               <a:spcAft>
-                <a:spcPts val="600"/>
+                <a:spcPts val="1000"/>
               </a:spcAft>
-              <a:defRPr sz="1500">
+              <a:defRPr sz="1600">
                 <a:solidFill>
                   <a:srgbClr val="023047"/>
                 </a:solidFill>
@@ -4581,26 +4349,26 @@
       </p:sp>
       <p:sp>
         <p:nvSpPr>
-          <p:cNvPr id="8" name="Rounded Rectangle 7"/>
+          <p:cNvPr id="7" name="Rounded Rectangle 6"/>
           <p:cNvSpPr/>
           <p:nvPr/>
         </p:nvSpPr>
         <p:spPr>
           <a:xfrm>
-            <a:off x="987552" y="3291840"/>
-            <a:ext cx="4668926" cy="320040"/>
+            <a:off x="6278270" y="1508760"/>
+            <a:ext cx="5180990" cy="2240280"/>
           </a:xfrm>
           <a:prstGeom prst="roundRect">
             <a:avLst>
-              <a:gd name="adj" fmla="val 8000"/>
+              <a:gd name="adj" fmla="val 3500"/>
             </a:avLst>
           </a:prstGeom>
           <a:solidFill>
-            <a:srgbClr val="EBF4FA"/>
+            <a:srgbClr val="F4F9FC"/>
           </a:solidFill>
-          <a:ln w="12700">
+          <a:ln w="19050">
             <a:solidFill>
-              <a:srgbClr val="8ECAE6"/>
+              <a:srgbClr val="B4DAEE"/>
             </a:solidFill>
           </a:ln>
         </p:spPr>
@@ -4619,33 +4387,144 @@
           </a:fontRef>
         </p:style>
         <p:txBody>
-          <a:bodyPr rtlCol="0" anchor="ctr" wrap="square" lIns="137160" rIns="137160" tIns="0" bIns="0"/>
+          <a:bodyPr rtlCol="0" anchor="ctr"/>
+          <a:lstStyle/>
+          <a:p>
+            <a:pPr algn="ctr"/>
+          </a:p>
+        </p:txBody>
+      </p:sp>
+      <p:pic>
+        <p:nvPicPr>
+          <p:cNvPr id="8" name="Picture 7" descr="storm_pipe.png"/>
+          <p:cNvPicPr>
+            <a:picLocks noChangeAspect="1"/>
+          </p:cNvPicPr>
+          <p:nvPr/>
+        </p:nvPicPr>
+        <p:blipFill>
+          <a:blip r:embed="rId3"/>
+          <a:stretch>
+            <a:fillRect/>
+          </a:stretch>
+        </p:blipFill>
+        <p:spPr>
+          <a:xfrm>
+            <a:off x="6570878" y="1801368"/>
+            <a:ext cx="475488" cy="475488"/>
+          </a:xfrm>
+          <a:prstGeom prst="rect">
+            <a:avLst/>
+          </a:prstGeom>
+        </p:spPr>
+      </p:pic>
+      <p:sp>
+        <p:nvSpPr>
+          <p:cNvPr id="9" name="TextBox 8"/>
+          <p:cNvSpPr txBox="1"/>
+          <p:nvPr/>
+        </p:nvSpPr>
+        <p:spPr>
+          <a:xfrm>
+            <a:off x="7156094" y="1764792"/>
+            <a:ext cx="4037990" cy="594360"/>
+          </a:xfrm>
+          <a:prstGeom prst="rect">
+            <a:avLst/>
+          </a:prstGeom>
+          <a:noFill/>
+        </p:spPr>
+        <p:txBody>
+          <a:bodyPr wrap="square" anchor="t" lIns="0" tIns="0" rIns="0" bIns="0">
+            <a:spAutoFit/>
+          </a:bodyPr>
           <a:lstStyle/>
           <a:p>
             <a:pPr algn="l">
-              <a:defRPr sz="1100" b="1">
-                <a:solidFill>
-                  <a:srgbClr val="219EBC"/>
+              <a:defRPr sz="2100" b="1">
+                <a:solidFill>
+                  <a:srgbClr val="023047"/>
                 </a:solidFill>
                 <a:latin typeface="Calibri"/>
               </a:defRPr>
             </a:pPr>
             <a:r>
-              <a:t>Fuchslochwelle Surf Wave  |  Acute Bacterial Risk</a:t>
-            </a:r>
-          </a:p>
-        </p:txBody>
-      </p:sp>
-      <p:sp>
-        <p:nvSpPr>
-          <p:cNvPr id="9" name="Rounded Rectangle 8"/>
+              <a:t>Sewer Overflows (CSOs)</a:t>
+            </a:r>
+          </a:p>
+        </p:txBody>
+      </p:sp>
+      <p:sp>
+        <p:nvSpPr>
+          <p:cNvPr id="10" name="TextBox 9"/>
+          <p:cNvSpPr txBox="1"/>
+          <p:nvPr/>
+        </p:nvSpPr>
+        <p:spPr>
+          <a:xfrm>
+            <a:off x="6598310" y="2377440"/>
+            <a:ext cx="4540910" cy="1280160"/>
+          </a:xfrm>
+          <a:prstGeom prst="rect">
+            <a:avLst/>
+          </a:prstGeom>
+          <a:noFill/>
+        </p:spPr>
+        <p:txBody>
+          <a:bodyPr wrap="square" anchor="t" lIns="0" tIns="0" rIns="0" bIns="0">
+            <a:spAutoFit/>
+          </a:bodyPr>
+          <a:lstStyle/>
+          <a:p>
+            <a:pPr algn="l">
+              <a:spcBef>
+                <a:spcPts val="0"/>
+              </a:spcBef>
+              <a:spcAft>
+                <a:spcPts val="1000"/>
+              </a:spcAft>
+              <a:defRPr sz="1600">
+                <a:solidFill>
+                  <a:srgbClr val="023047"/>
+                </a:solidFill>
+                <a:latin typeface="Calibri"/>
+              </a:defRPr>
+            </a:pPr>
+            <a:r>
+              <a:t>-  1,500 km municipal network overloaded by storms</a:t>
+            </a:r>
+          </a:p>
+          <a:p>
+            <a:pPr algn="l">
+              <a:spcBef>
+                <a:spcPts val="0"/>
+              </a:spcBef>
+              <a:spcAft>
+                <a:spcPts val="1000"/>
+              </a:spcAft>
+              <a:defRPr sz="1600">
+                <a:solidFill>
+                  <a:srgbClr val="023047"/>
+                </a:solidFill>
+                <a:latin typeface="Calibri"/>
+              </a:defRPr>
+            </a:pPr>
+            <a:r>
+              <a:t>-  1.5M - 5M+ EUR cost per retention basin</a:t>
+            </a:r>
+          </a:p>
+        </p:txBody>
+      </p:sp>
+      <p:sp>
+        <p:nvSpPr>
+          <p:cNvPr id="11" name="Rounded Rectangle 10"/>
           <p:cNvSpPr/>
           <p:nvPr/>
         </p:nvSpPr>
         <p:spPr>
           <a:xfrm>
-            <a:off x="6278270" y="1417320"/>
-            <a:ext cx="5180990" cy="2331720"/>
+            <a:off x="731520" y="3977639"/>
+            <a:ext cx="5180990" cy="2240280"/>
           </a:xfrm>
           <a:prstGeom prst="roundRect">
             <a:avLst>
@@ -4685,22 +4564,22 @@
       </p:sp>
       <p:pic>
         <p:nvPicPr>
-          <p:cNvPr id="10" name="Picture 9" descr="storm_pipe.png"/>
+          <p:cNvPr id="12" name="Picture 11" descr="agriculture.png"/>
           <p:cNvPicPr>
             <a:picLocks noChangeAspect="1"/>
           </p:cNvPicPr>
           <p:nvPr/>
         </p:nvPicPr>
         <p:blipFill>
-          <a:blip r:embed="rId3"/>
+          <a:blip r:embed="rId4"/>
           <a:stretch>
             <a:fillRect/>
           </a:stretch>
         </p:blipFill>
         <p:spPr>
           <a:xfrm>
-            <a:off x="6552590" y="1636776"/>
-            <a:ext cx="438912" cy="438912"/>
+            <a:off x="1024128" y="4270247"/>
+            <a:ext cx="475488" cy="475488"/>
           </a:xfrm>
           <a:prstGeom prst="rect">
             <a:avLst/>
@@ -4709,14 +4588,14 @@
       </p:pic>
       <p:sp>
         <p:nvSpPr>
-          <p:cNvPr id="11" name="TextBox 10"/>
+          <p:cNvPr id="13" name="TextBox 12"/>
           <p:cNvSpPr txBox="1"/>
           <p:nvPr/>
         </p:nvSpPr>
         <p:spPr>
           <a:xfrm>
-            <a:off x="7082942" y="1581912"/>
-            <a:ext cx="4129430" cy="594360"/>
+            <a:off x="1609344" y="4233671"/>
+            <a:ext cx="4037990" cy="594360"/>
           </a:xfrm>
           <a:prstGeom prst="rect">
             <a:avLst/>
@@ -4730,7 +4609,7 @@
           <a:lstStyle/>
           <a:p>
             <a:pPr algn="l">
-              <a:defRPr sz="2000" b="1">
+              <a:defRPr sz="2100" b="1">
                 <a:solidFill>
                   <a:srgbClr val="023047"/>
                 </a:solidFill>
@@ -4738,21 +4617,21 @@
               </a:defRPr>
             </a:pPr>
             <a:r>
-              <a:t>Sewer Overflows (CSOs)</a:t>
-            </a:r>
-          </a:p>
-        </p:txBody>
-      </p:sp>
-      <p:sp>
-        <p:nvSpPr>
-          <p:cNvPr id="12" name="TextBox 11"/>
+              <a:t>Knoblauchsland Agriculture</a:t>
+            </a:r>
+          </a:p>
+        </p:txBody>
+      </p:sp>
+      <p:sp>
+        <p:nvSpPr>
+          <p:cNvPr id="14" name="TextBox 13"/>
           <p:cNvSpPr txBox="1"/>
           <p:nvPr/>
         </p:nvSpPr>
         <p:spPr>
           <a:xfrm>
-            <a:off x="6570878" y="2167128"/>
-            <a:ext cx="4595774" cy="1097280"/>
+            <a:off x="1051560" y="4846319"/>
+            <a:ext cx="4540910" cy="1280160"/>
           </a:xfrm>
           <a:prstGeom prst="rect">
             <a:avLst/>
@@ -4770,9 +4649,9 @@
                 <a:spcPts val="0"/>
               </a:spcBef>
               <a:spcAft>
-                <a:spcPts val="600"/>
+                <a:spcPts val="1000"/>
               </a:spcAft>
-              <a:defRPr sz="1500">
+              <a:defRPr sz="1600">
                 <a:solidFill>
                   <a:srgbClr val="023047"/>
                 </a:solidFill>
@@ -4780,7 +4659,7 @@
               </a:defRPr>
             </a:pPr>
             <a:r>
-              <a:t>-  1,500 km municipal network overloaded by storms</a:t>
+              <a:t>-  Nitrate leaching into drinking water aquifers</a:t>
             </a:r>
           </a:p>
           <a:p>
@@ -4789,9 +4668,9 @@
                 <a:spcPts val="0"/>
               </a:spcBef>
               <a:spcAft>
-                <a:spcPts val="600"/>
+                <a:spcPts val="1000"/>
               </a:spcAft>
-              <a:defRPr sz="1500">
+              <a:defRPr sz="1600">
                 <a:solidFill>
                   <a:srgbClr val="023047"/>
                 </a:solidFill>
@@ -4799,33 +4678,33 @@
               </a:defRPr>
             </a:pPr>
             <a:r>
-              <a:t>-  1.5M - 5M+ EUR cost per retention basin</a:t>
-            </a:r>
-          </a:p>
-        </p:txBody>
-      </p:sp>
-      <p:sp>
-        <p:nvSpPr>
-          <p:cNvPr id="13" name="Rounded Rectangle 12"/>
+              <a:t>-  Strict EU limits and compliance penalties</a:t>
+            </a:r>
+          </a:p>
+        </p:txBody>
+      </p:sp>
+      <p:sp>
+        <p:nvSpPr>
+          <p:cNvPr id="15" name="Rounded Rectangle 14"/>
           <p:cNvSpPr/>
           <p:nvPr/>
         </p:nvSpPr>
         <p:spPr>
           <a:xfrm>
-            <a:off x="6534302" y="3291840"/>
-            <a:ext cx="4668926" cy="320040"/>
+            <a:off x="6278270" y="3977639"/>
+            <a:ext cx="5180990" cy="2240280"/>
           </a:xfrm>
           <a:prstGeom prst="roundRect">
             <a:avLst>
-              <a:gd name="adj" fmla="val 8000"/>
+              <a:gd name="adj" fmla="val 3500"/>
             </a:avLst>
           </a:prstGeom>
           <a:solidFill>
-            <a:srgbClr val="EBF4FA"/>
+            <a:srgbClr val="F4F9FC"/>
           </a:solidFill>
-          <a:ln w="12700">
+          <a:ln w="19050">
             <a:solidFill>
-              <a:srgbClr val="8ECAE6"/>
+              <a:srgbClr val="B4DAEE"/>
             </a:solidFill>
           </a:ln>
         </p:spPr>
@@ -4844,63 +4723,6 @@
           </a:fontRef>
         </p:style>
         <p:txBody>
-          <a:bodyPr rtlCol="0" anchor="ctr" wrap="square" lIns="137160" rIns="137160" tIns="0" bIns="0"/>
-          <a:lstStyle/>
-          <a:p>
-            <a:pPr algn="l">
-              <a:defRPr sz="1100" b="1">
-                <a:solidFill>
-                  <a:srgbClr val="219EBC"/>
-                </a:solidFill>
-                <a:latin typeface="Calibri"/>
-              </a:defRPr>
-            </a:pPr>
-            <a:r>
-              <a:t>1,500 km Sewer Grid  |  €1.5M - €5M+ CapEx per Basin</a:t>
-            </a:r>
-          </a:p>
-        </p:txBody>
-      </p:sp>
-      <p:sp>
-        <p:nvSpPr>
-          <p:cNvPr id="14" name="Rounded Rectangle 13"/>
-          <p:cNvSpPr/>
-          <p:nvPr/>
-        </p:nvSpPr>
-        <p:spPr>
-          <a:xfrm>
-            <a:off x="731520" y="3977639"/>
-            <a:ext cx="5180990" cy="2331720"/>
-          </a:xfrm>
-          <a:prstGeom prst="roundRect">
-            <a:avLst>
-              <a:gd name="adj" fmla="val 3500"/>
-            </a:avLst>
-          </a:prstGeom>
-          <a:solidFill>
-            <a:srgbClr val="F4F9FC"/>
-          </a:solidFill>
-          <a:ln w="19050">
-            <a:solidFill>
-              <a:srgbClr val="B4DAEE"/>
-            </a:solidFill>
-          </a:ln>
-        </p:spPr>
-        <p:style>
-          <a:lnRef idx="1">
-            <a:schemeClr val="accent1"/>
-          </a:lnRef>
-          <a:fillRef idx="3">
-            <a:schemeClr val="accent1"/>
-          </a:fillRef>
-          <a:effectRef idx="2">
-            <a:schemeClr val="accent1"/>
-          </a:effectRef>
-          <a:fontRef idx="minor">
-            <a:schemeClr val="lt1"/>
-          </a:fontRef>
-        </p:style>
-        <p:txBody>
           <a:bodyPr rtlCol="0" anchor="ctr"/>
           <a:lstStyle/>
           <a:p>
@@ -4910,232 +4732,7 @@
       </p:sp>
       <p:pic>
         <p:nvPicPr>
-          <p:cNvPr id="15" name="Picture 14" descr="agriculture.png"/>
-          <p:cNvPicPr>
-            <a:picLocks noChangeAspect="1"/>
-          </p:cNvPicPr>
-          <p:nvPr/>
-        </p:nvPicPr>
-        <p:blipFill>
-          <a:blip r:embed="rId4"/>
-          <a:stretch>
-            <a:fillRect/>
-          </a:stretch>
-        </p:blipFill>
-        <p:spPr>
-          <a:xfrm>
-            <a:off x="1005840" y="4197095"/>
-            <a:ext cx="438912" cy="438912"/>
-          </a:xfrm>
-          <a:prstGeom prst="rect">
-            <a:avLst/>
-          </a:prstGeom>
-        </p:spPr>
-      </p:pic>
-      <p:sp>
-        <p:nvSpPr>
-          <p:cNvPr id="16" name="TextBox 15"/>
-          <p:cNvSpPr txBox="1"/>
-          <p:nvPr/>
-        </p:nvSpPr>
-        <p:spPr>
-          <a:xfrm>
-            <a:off x="1536192" y="4142231"/>
-            <a:ext cx="4129430" cy="594360"/>
-          </a:xfrm>
-          <a:prstGeom prst="rect">
-            <a:avLst/>
-          </a:prstGeom>
-          <a:noFill/>
-        </p:spPr>
-        <p:txBody>
-          <a:bodyPr wrap="square" anchor="t" lIns="0" tIns="0" rIns="0" bIns="0">
-            <a:spAutoFit/>
-          </a:bodyPr>
-          <a:lstStyle/>
-          <a:p>
-            <a:pPr algn="l">
-              <a:defRPr sz="2000" b="1">
-                <a:solidFill>
-                  <a:srgbClr val="023047"/>
-                </a:solidFill>
-                <a:latin typeface="Calibri"/>
-              </a:defRPr>
-            </a:pPr>
-            <a:r>
-              <a:t>Knoblauchsland Agriculture</a:t>
-            </a:r>
-          </a:p>
-        </p:txBody>
-      </p:sp>
-      <p:sp>
-        <p:nvSpPr>
-          <p:cNvPr id="17" name="TextBox 16"/>
-          <p:cNvSpPr txBox="1"/>
-          <p:nvPr/>
-        </p:nvSpPr>
-        <p:spPr>
-          <a:xfrm>
-            <a:off x="1024128" y="4727447"/>
-            <a:ext cx="4595774" cy="1097280"/>
-          </a:xfrm>
-          <a:prstGeom prst="rect">
-            <a:avLst/>
-          </a:prstGeom>
-          <a:noFill/>
-        </p:spPr>
-        <p:txBody>
-          <a:bodyPr wrap="square" anchor="t" lIns="0" tIns="0" rIns="0" bIns="0">
-            <a:spAutoFit/>
-          </a:bodyPr>
-          <a:lstStyle/>
-          <a:p>
-            <a:pPr algn="l">
-              <a:spcBef>
-                <a:spcPts val="0"/>
-              </a:spcBef>
-              <a:spcAft>
-                <a:spcPts val="600"/>
-              </a:spcAft>
-              <a:defRPr sz="1500">
-                <a:solidFill>
-                  <a:srgbClr val="023047"/>
-                </a:solidFill>
-                <a:latin typeface="Calibri"/>
-              </a:defRPr>
-            </a:pPr>
-            <a:r>
-              <a:t>-  Nitrate leaching into drinking water aquifers</a:t>
-            </a:r>
-          </a:p>
-          <a:p>
-            <a:pPr algn="l">
-              <a:spcBef>
-                <a:spcPts val="0"/>
-              </a:spcBef>
-              <a:spcAft>
-                <a:spcPts val="600"/>
-              </a:spcAft>
-              <a:defRPr sz="1500">
-                <a:solidFill>
-                  <a:srgbClr val="023047"/>
-                </a:solidFill>
-                <a:latin typeface="Calibri"/>
-              </a:defRPr>
-            </a:pPr>
-            <a:r>
-              <a:t>-  Strict EU limits and compliance penalties</a:t>
-            </a:r>
-          </a:p>
-        </p:txBody>
-      </p:sp>
-      <p:sp>
-        <p:nvSpPr>
-          <p:cNvPr id="18" name="Rounded Rectangle 17"/>
-          <p:cNvSpPr/>
-          <p:nvPr/>
-        </p:nvSpPr>
-        <p:spPr>
-          <a:xfrm>
-            <a:off x="987552" y="5852159"/>
-            <a:ext cx="4668926" cy="320040"/>
-          </a:xfrm>
-          <a:prstGeom prst="roundRect">
-            <a:avLst>
-              <a:gd name="adj" fmla="val 8000"/>
-            </a:avLst>
-          </a:prstGeom>
-          <a:solidFill>
-            <a:srgbClr val="EBF4FA"/>
-          </a:solidFill>
-          <a:ln w="12700">
-            <a:solidFill>
-              <a:srgbClr val="8ECAE6"/>
-            </a:solidFill>
-          </a:ln>
-        </p:spPr>
-        <p:style>
-          <a:lnRef idx="1">
-            <a:schemeClr val="accent1"/>
-          </a:lnRef>
-          <a:fillRef idx="3">
-            <a:schemeClr val="accent1"/>
-          </a:fillRef>
-          <a:effectRef idx="2">
-            <a:schemeClr val="accent1"/>
-          </a:effectRef>
-          <a:fontRef idx="minor">
-            <a:schemeClr val="lt1"/>
-          </a:fontRef>
-        </p:style>
-        <p:txBody>
-          <a:bodyPr rtlCol="0" anchor="ctr" wrap="square" lIns="137160" rIns="137160" tIns="0" bIns="0"/>
-          <a:lstStyle/>
-          <a:p>
-            <a:pPr algn="l">
-              <a:defRPr sz="1100" b="1">
-                <a:solidFill>
-                  <a:srgbClr val="219EBC"/>
-                </a:solidFill>
-                <a:latin typeface="Calibri"/>
-              </a:defRPr>
-            </a:pPr>
-            <a:r>
-              <a:t>Alluvial Drinking Aquifers  |  EU Compliance Risk</a:t>
-            </a:r>
-          </a:p>
-        </p:txBody>
-      </p:sp>
-      <p:sp>
-        <p:nvSpPr>
-          <p:cNvPr id="19" name="Rounded Rectangle 18"/>
-          <p:cNvSpPr/>
-          <p:nvPr/>
-        </p:nvSpPr>
-        <p:spPr>
-          <a:xfrm>
-            <a:off x="6278270" y="3977639"/>
-            <a:ext cx="5180990" cy="2331720"/>
-          </a:xfrm>
-          <a:prstGeom prst="roundRect">
-            <a:avLst>
-              <a:gd name="adj" fmla="val 3500"/>
-            </a:avLst>
-          </a:prstGeom>
-          <a:solidFill>
-            <a:srgbClr val="F4F9FC"/>
-          </a:solidFill>
-          <a:ln w="19050">
-            <a:solidFill>
-              <a:srgbClr val="B4DAEE"/>
-            </a:solidFill>
-          </a:ln>
-        </p:spPr>
-        <p:style>
-          <a:lnRef idx="1">
-            <a:schemeClr val="accent1"/>
-          </a:lnRef>
-          <a:fillRef idx="3">
-            <a:schemeClr val="accent1"/>
-          </a:fillRef>
-          <a:effectRef idx="2">
-            <a:schemeClr val="accent1"/>
-          </a:effectRef>
-          <a:fontRef idx="minor">
-            <a:schemeClr val="lt1"/>
-          </a:fontRef>
-        </p:style>
-        <p:txBody>
-          <a:bodyPr rtlCol="0" anchor="ctr"/>
-          <a:lstStyle/>
-          <a:p>
-            <a:pPr algn="ctr"/>
-          </a:p>
-        </p:txBody>
-      </p:sp>
-      <p:pic>
-        <p:nvPicPr>
-          <p:cNvPr id="20" name="Picture 19" descr="drought.png"/>
+          <p:cNvPr id="16" name="Picture 15" descr="drought.png"/>
           <p:cNvPicPr>
             <a:picLocks noChangeAspect="1"/>
           </p:cNvPicPr>
@@ -5149,8 +4746,8 @@
         </p:blipFill>
         <p:spPr>
           <a:xfrm>
-            <a:off x="6552590" y="4197095"/>
-            <a:ext cx="438912" cy="438912"/>
+            <a:off x="6570878" y="4270247"/>
+            <a:ext cx="475488" cy="475488"/>
           </a:xfrm>
           <a:prstGeom prst="rect">
             <a:avLst/>
@@ -5159,14 +4756,14 @@
       </p:pic>
       <p:sp>
         <p:nvSpPr>
-          <p:cNvPr id="21" name="TextBox 20"/>
+          <p:cNvPr id="17" name="TextBox 16"/>
           <p:cNvSpPr txBox="1"/>
           <p:nvPr/>
         </p:nvSpPr>
         <p:spPr>
           <a:xfrm>
-            <a:off x="7082942" y="4142231"/>
-            <a:ext cx="4129430" cy="594360"/>
+            <a:off x="7156094" y="4233671"/>
+            <a:ext cx="4037990" cy="594360"/>
           </a:xfrm>
           <a:prstGeom prst="rect">
             <a:avLst/>
@@ -5180,7 +4777,7 @@
           <a:lstStyle/>
           <a:p>
             <a:pPr algn="l">
-              <a:defRPr sz="2000" b="1">
+              <a:defRPr sz="2100" b="1">
                 <a:solidFill>
                   <a:srgbClr val="023047"/>
                 </a:solidFill>
@@ -5195,14 +4792,14 @@
       </p:sp>
       <p:sp>
         <p:nvSpPr>
-          <p:cNvPr id="22" name="TextBox 21"/>
+          <p:cNvPr id="18" name="TextBox 17"/>
           <p:cNvSpPr txBox="1"/>
           <p:nvPr/>
         </p:nvSpPr>
         <p:spPr>
           <a:xfrm>
-            <a:off x="6570878" y="4727447"/>
-            <a:ext cx="4595774" cy="1097280"/>
+            <a:off x="6598310" y="4846319"/>
+            <a:ext cx="4540910" cy="1280160"/>
           </a:xfrm>
           <a:prstGeom prst="rect">
             <a:avLst/>
@@ -5220,9 +4817,9 @@
                 <a:spcPts val="0"/>
               </a:spcBef>
               <a:spcAft>
-                <a:spcPts val="600"/>
+                <a:spcPts val="1000"/>
               </a:spcAft>
-              <a:defRPr sz="1500">
+              <a:defRPr sz="1600">
                 <a:solidFill>
                   <a:srgbClr val="023047"/>
                 </a:solidFill>
@@ -5239,9 +4836,9 @@
                 <a:spcPts val="0"/>
               </a:spcBef>
               <a:spcAft>
-                <a:spcPts val="600"/>
+                <a:spcPts val="1000"/>
               </a:spcAft>
-              <a:defRPr sz="1500">
+              <a:defRPr sz="1600">
                 <a:solidFill>
                   <a:srgbClr val="023047"/>
                 </a:solidFill>
@@ -5249,64 +4846,7 @@
               </a:defRPr>
             </a:pPr>
             <a:r>
-              <a:t>-  Dissolved oxygen drops &lt; 3 mg/L causing fish mortality</a:t>
-            </a:r>
-          </a:p>
-        </p:txBody>
-      </p:sp>
-      <p:sp>
-        <p:nvSpPr>
-          <p:cNvPr id="23" name="Rounded Rectangle 22"/>
-          <p:cNvSpPr/>
-          <p:nvPr/>
-        </p:nvSpPr>
-        <p:spPr>
-          <a:xfrm>
-            <a:off x="6534302" y="5852159"/>
-            <a:ext cx="4668926" cy="320040"/>
-          </a:xfrm>
-          <a:prstGeom prst="roundRect">
-            <a:avLst>
-              <a:gd name="adj" fmla="val 8000"/>
-            </a:avLst>
-          </a:prstGeom>
-          <a:solidFill>
-            <a:srgbClr val="EBF4FA"/>
-          </a:solidFill>
-          <a:ln w="12700">
-            <a:solidFill>
-              <a:srgbClr val="8ECAE6"/>
-            </a:solidFill>
-          </a:ln>
-        </p:spPr>
-        <p:style>
-          <a:lnRef idx="1">
-            <a:schemeClr val="accent1"/>
-          </a:lnRef>
-          <a:fillRef idx="3">
-            <a:schemeClr val="accent1"/>
-          </a:fillRef>
-          <a:effectRef idx="2">
-            <a:schemeClr val="accent1"/>
-          </a:effectRef>
-          <a:fontRef idx="minor">
-            <a:schemeClr val="lt1"/>
-          </a:fontRef>
-        </p:style>
-        <p:txBody>
-          <a:bodyPr rtlCol="0" anchor="ctr" wrap="square" lIns="137160" rIns="137160" tIns="0" bIns="0"/>
-          <a:lstStyle/>
-          <a:p>
-            <a:pPr algn="l">
-              <a:defRPr sz="1100" b="1">
-                <a:solidFill>
-                  <a:srgbClr val="219EBC"/>
-                </a:solidFill>
-                <a:latin typeface="Calibri"/>
-              </a:defRPr>
-            </a:pPr>
-            <a:r>
-              <a:t>Oxygen Collapses &lt; 3 mg/L  |  Summer Ecosystem Crisis</a:t>
+              <a:t>-  Dissolved oxygen drops &lt; 3 mg/L (fish kills)</a:t>
             </a:r>
           </a:p>
         </p:txBody>
@@ -5345,8 +4885,8 @@
         </p:nvSpPr>
         <p:spPr>
           <a:xfrm>
-            <a:off x="731520" y="411480"/>
-            <a:ext cx="9144000" cy="292608"/>
+            <a:off x="731520" y="502920"/>
+            <a:ext cx="10728655" cy="777240"/>
           </a:xfrm>
           <a:prstGeom prst="rect">
             <a:avLst/>
@@ -5359,51 +4899,15 @@
           </a:bodyPr>
           <a:lstStyle/>
           <a:p>
-            <a:pPr>
-              <a:defRPr sz="1100" b="1">
-                <a:solidFill>
-                  <a:srgbClr val="219EBC"/>
+            <a:pPr algn="l">
+              <a:defRPr sz="3800" b="1">
+                <a:solidFill>
+                  <a:srgbClr val="023047"/>
                 </a:solidFill>
                 <a:latin typeface="Calibri"/>
               </a:defRPr>
             </a:pPr>
             <a:r>
-              <a:t>THE MONITORING BOTTLENECK</a:t>
-            </a:r>
-          </a:p>
-        </p:txBody>
-      </p:sp>
-      <p:sp>
-        <p:nvSpPr>
-          <p:cNvPr id="3" name="TextBox 2"/>
-          <p:cNvSpPr txBox="1"/>
-          <p:nvPr/>
-        </p:nvSpPr>
-        <p:spPr>
-          <a:xfrm>
-            <a:off x="731520" y="658368"/>
-            <a:ext cx="10728655" cy="640080"/>
-          </a:xfrm>
-          <a:prstGeom prst="rect">
-            <a:avLst/>
-          </a:prstGeom>
-          <a:noFill/>
-        </p:spPr>
-        <p:txBody>
-          <a:bodyPr wrap="square" anchor="t" lIns="0" tIns="0" rIns="0" bIns="0">
-            <a:spAutoFit/>
-          </a:bodyPr>
-          <a:lstStyle/>
-          <a:p>
-            <a:pPr algn="l">
-              <a:defRPr sz="3600" b="1">
-                <a:solidFill>
-                  <a:srgbClr val="023047"/>
-                </a:solidFill>
-                <a:latin typeface="Calibri"/>
-              </a:defRPr>
-            </a:pPr>
-            <a:r>
               <a:t>Current Monitoring</a:t>
             </a:r>
           </a:p>
@@ -5411,14 +4915,14 @@
       </p:sp>
       <p:sp>
         <p:nvSpPr>
-          <p:cNvPr id="4" name="Rounded Rectangle 3"/>
+          <p:cNvPr id="3" name="Rounded Rectangle 2"/>
           <p:cNvSpPr/>
           <p:nvPr/>
         </p:nvSpPr>
         <p:spPr>
           <a:xfrm>
-            <a:off x="731520" y="1417320"/>
-            <a:ext cx="5180990" cy="2788920"/>
+            <a:off x="731520" y="1508760"/>
+            <a:ext cx="5180990" cy="3657600"/>
           </a:xfrm>
           <a:prstGeom prst="roundRect">
             <a:avLst>
@@ -5458,7 +4962,7 @@
       </p:sp>
       <p:pic>
         <p:nvPicPr>
-          <p:cNvPr id="5" name="Picture 4" descr="municipal_sensor.png"/>
+          <p:cNvPr id="4" name="Picture 3" descr="municipal_sensor.png"/>
           <p:cNvPicPr>
             <a:picLocks noChangeAspect="1"/>
           </p:cNvPicPr>
@@ -5472,8 +4976,8 @@
         </p:blipFill>
         <p:spPr>
           <a:xfrm>
-            <a:off x="1005840" y="1636776"/>
-            <a:ext cx="438912" cy="438912"/>
+            <a:off x="1024128" y="1801368"/>
+            <a:ext cx="475488" cy="475488"/>
           </a:xfrm>
           <a:prstGeom prst="rect">
             <a:avLst/>
@@ -5482,14 +4986,14 @@
       </p:pic>
       <p:sp>
         <p:nvSpPr>
-          <p:cNvPr id="6" name="TextBox 5"/>
+          <p:cNvPr id="5" name="TextBox 4"/>
           <p:cNvSpPr txBox="1"/>
           <p:nvPr/>
         </p:nvSpPr>
         <p:spPr>
           <a:xfrm>
-            <a:off x="1536192" y="1581912"/>
-            <a:ext cx="4129430" cy="594360"/>
+            <a:off x="1609344" y="1764792"/>
+            <a:ext cx="4037990" cy="594360"/>
           </a:xfrm>
           <a:prstGeom prst="rect">
             <a:avLst/>
@@ -5503,7 +5007,7 @@
           <a:lstStyle/>
           <a:p>
             <a:pPr algn="l">
-              <a:defRPr sz="2100" b="1">
+              <a:defRPr sz="2200" b="1">
                 <a:solidFill>
                   <a:srgbClr val="023047"/>
                 </a:solidFill>
@@ -5517,7 +5021,7 @@
           <a:p>
             <a:pPr algn="l">
               <a:spcBef>
-                <a:spcPts val="200"/>
+                <a:spcPts val="300"/>
               </a:spcBef>
               <a:defRPr sz="1300" b="1">
                 <a:solidFill>
@@ -5534,14 +5038,14 @@
       </p:sp>
       <p:sp>
         <p:nvSpPr>
-          <p:cNvPr id="7" name="TextBox 6"/>
+          <p:cNvPr id="6" name="TextBox 5"/>
           <p:cNvSpPr txBox="1"/>
           <p:nvPr/>
         </p:nvSpPr>
         <p:spPr>
           <a:xfrm>
-            <a:off x="1024128" y="2258568"/>
-            <a:ext cx="4595774" cy="1554480"/>
+            <a:off x="1051560" y="2468880"/>
+            <a:ext cx="4540910" cy="2606040"/>
           </a:xfrm>
           <a:prstGeom prst="rect">
             <a:avLst/>
@@ -5559,9 +5063,9 @@
                 <a:spcPts val="0"/>
               </a:spcBef>
               <a:spcAft>
-                <a:spcPts val="600"/>
+                <a:spcPts val="1000"/>
               </a:spcAft>
-              <a:defRPr sz="1500">
+              <a:defRPr sz="1600">
                 <a:solidFill>
                   <a:srgbClr val="023047"/>
                 </a:solidFill>
@@ -5578,9 +5082,9 @@
                 <a:spcPts val="0"/>
               </a:spcBef>
               <a:spcAft>
-                <a:spcPts val="600"/>
+                <a:spcPts val="1000"/>
               </a:spcAft>
-              <a:defRPr sz="1500">
+              <a:defRPr sz="1600">
                 <a:solidFill>
                   <a:srgbClr val="023047"/>
                 </a:solidFill>
@@ -5597,9 +5101,9 @@
                 <a:spcPts val="0"/>
               </a:spcBef>
               <a:spcAft>
-                <a:spcPts val="600"/>
+                <a:spcPts val="1000"/>
               </a:spcAft>
-              <a:defRPr sz="1500">
+              <a:defRPr sz="1600">
                 <a:solidFill>
                   <a:srgbClr val="023047"/>
                 </a:solidFill>
@@ -5614,26 +5118,26 @@
       </p:sp>
       <p:sp>
         <p:nvSpPr>
-          <p:cNvPr id="8" name="Rounded Rectangle 7"/>
+          <p:cNvPr id="7" name="Rounded Rectangle 6"/>
           <p:cNvSpPr/>
           <p:nvPr/>
         </p:nvSpPr>
         <p:spPr>
           <a:xfrm>
-            <a:off x="987552" y="3749040"/>
-            <a:ext cx="4668926" cy="320040"/>
+            <a:off x="6278270" y="1508760"/>
+            <a:ext cx="5180990" cy="3657600"/>
           </a:xfrm>
           <a:prstGeom prst="roundRect">
             <a:avLst>
-              <a:gd name="adj" fmla="val 8000"/>
+              <a:gd name="adj" fmla="val 3500"/>
             </a:avLst>
           </a:prstGeom>
           <a:solidFill>
-            <a:srgbClr val="EBF4FA"/>
+            <a:srgbClr val="F4F9FC"/>
           </a:solidFill>
-          <a:ln w="12700">
+          <a:ln w="19050">
             <a:solidFill>
-              <a:srgbClr val="8ECAE6"/>
+              <a:srgbClr val="B4DAEE"/>
             </a:solidFill>
           </a:ln>
         </p:spPr>
@@ -5652,33 +5156,163 @@
           </a:fontRef>
         </p:style>
         <p:txBody>
-          <a:bodyPr rtlCol="0" anchor="ctr" wrap="square" lIns="137160" rIns="137160" tIns="0" bIns="0"/>
+          <a:bodyPr rtlCol="0" anchor="ctr"/>
+          <a:lstStyle/>
+          <a:p>
+            <a:pPr algn="ctr"/>
+          </a:p>
+        </p:txBody>
+      </p:sp>
+      <p:pic>
+        <p:nvPicPr>
+          <p:cNvPr id="8" name="Picture 7" descr="sampling_gap.png"/>
+          <p:cNvPicPr>
+            <a:picLocks noChangeAspect="1"/>
+          </p:cNvPicPr>
+          <p:nvPr/>
+        </p:nvPicPr>
+        <p:blipFill>
+          <a:blip r:embed="rId3"/>
+          <a:stretch>
+            <a:fillRect/>
+          </a:stretch>
+        </p:blipFill>
+        <p:spPr>
+          <a:xfrm>
+            <a:off x="6570878" y="1801368"/>
+            <a:ext cx="475488" cy="475488"/>
+          </a:xfrm>
+          <a:prstGeom prst="rect">
+            <a:avLst/>
+          </a:prstGeom>
+        </p:spPr>
+      </p:pic>
+      <p:sp>
+        <p:nvSpPr>
+          <p:cNvPr id="9" name="TextBox 8"/>
+          <p:cNvSpPr txBox="1"/>
+          <p:nvPr/>
+        </p:nvSpPr>
+        <p:spPr>
+          <a:xfrm>
+            <a:off x="7156094" y="1764792"/>
+            <a:ext cx="4037990" cy="594360"/>
+          </a:xfrm>
+          <a:prstGeom prst="rect">
+            <a:avLst/>
+          </a:prstGeom>
+          <a:noFill/>
+        </p:spPr>
+        <p:txBody>
+          <a:bodyPr wrap="square" anchor="t" lIns="0" tIns="0" rIns="0" bIns="0">
+            <a:spAutoFit/>
+          </a:bodyPr>
           <a:lstStyle/>
           <a:p>
             <a:pPr algn="l">
-              <a:defRPr sz="1100" b="1">
-                <a:solidFill>
-                  <a:srgbClr val="219EBC"/>
+              <a:defRPr sz="2200" b="1">
+                <a:solidFill>
+                  <a:srgbClr val="023047"/>
                 </a:solidFill>
                 <a:latin typeface="Calibri"/>
               </a:defRPr>
             </a:pPr>
             <a:r>
-              <a:t>Tracked Parameters: pH, Temp, DO, Turbidity, NH4+, NO3-</a:t>
-            </a:r>
-          </a:p>
-        </p:txBody>
-      </p:sp>
-      <p:sp>
-        <p:nvSpPr>
-          <p:cNvPr id="9" name="Rounded Rectangle 8"/>
+              <a:t>The Sampling Gap</a:t>
+            </a:r>
+          </a:p>
+        </p:txBody>
+      </p:sp>
+      <p:sp>
+        <p:nvSpPr>
+          <p:cNvPr id="10" name="TextBox 9"/>
+          <p:cNvSpPr txBox="1"/>
+          <p:nvPr/>
+        </p:nvSpPr>
+        <p:spPr>
+          <a:xfrm>
+            <a:off x="6598310" y="2377440"/>
+            <a:ext cx="4540910" cy="2697480"/>
+          </a:xfrm>
+          <a:prstGeom prst="rect">
+            <a:avLst/>
+          </a:prstGeom>
+          <a:noFill/>
+        </p:spPr>
+        <p:txBody>
+          <a:bodyPr wrap="square" anchor="t" lIns="0" tIns="0" rIns="0" bIns="0">
+            <a:spAutoFit/>
+          </a:bodyPr>
+          <a:lstStyle/>
+          <a:p>
+            <a:pPr algn="l">
+              <a:spcBef>
+                <a:spcPts val="0"/>
+              </a:spcBef>
+              <a:spcAft>
+                <a:spcPts val="1000"/>
+              </a:spcAft>
+              <a:defRPr sz="1600">
+                <a:solidFill>
+                  <a:srgbClr val="023047"/>
+                </a:solidFill>
+                <a:latin typeface="Calibri"/>
+              </a:defRPr>
+            </a:pPr>
+            <a:r>
+              <a:t>-  Automatic sensors: continuous, but confined to few fixed locations</a:t>
+            </a:r>
+          </a:p>
+          <a:p>
+            <a:pPr algn="l">
+              <a:spcBef>
+                <a:spcPts val="0"/>
+              </a:spcBef>
+              <a:spcAft>
+                <a:spcPts val="1000"/>
+              </a:spcAft>
+              <a:defRPr sz="1600">
+                <a:solidFill>
+                  <a:srgbClr val="023047"/>
+                </a:solidFill>
+                <a:latin typeface="Calibri"/>
+              </a:defRPr>
+            </a:pPr>
+            <a:r>
+              <a:t>-  Manual grab sampling: often only 1x per month (24-48h lab delay)</a:t>
+            </a:r>
+          </a:p>
+          <a:p>
+            <a:pPr algn="l">
+              <a:spcBef>
+                <a:spcPts val="0"/>
+              </a:spcBef>
+              <a:spcAft>
+                <a:spcPts val="1000"/>
+              </a:spcAft>
+              <a:defRPr sz="1600">
+                <a:solidFill>
+                  <a:srgbClr val="023047"/>
+                </a:solidFill>
+                <a:latin typeface="Calibri"/>
+              </a:defRPr>
+            </a:pPr>
+            <a:r>
+              <a:t>-  Convective storm overflows: last only 2 to 4 hours</a:t>
+            </a:r>
+          </a:p>
+        </p:txBody>
+      </p:sp>
+      <p:sp>
+        <p:nvSpPr>
+          <p:cNvPr id="11" name="Rounded Rectangle 10"/>
           <p:cNvSpPr/>
           <p:nvPr/>
         </p:nvSpPr>
         <p:spPr>
           <a:xfrm>
-            <a:off x="6278270" y="1417320"/>
-            <a:ext cx="5180990" cy="2788920"/>
+            <a:off x="731520" y="5486400"/>
+            <a:ext cx="10728655" cy="685800"/>
           </a:xfrm>
           <a:prstGeom prst="roundRect">
             <a:avLst>
@@ -5690,7 +5324,7 @@
           </a:solidFill>
           <a:ln w="19050">
             <a:solidFill>
-              <a:srgbClr val="B4DAEE"/>
+              <a:srgbClr val="219EBC"/>
             </a:solidFill>
           </a:ln>
         </p:spPr>
@@ -5709,457 +5343,7 @@
           </a:fontRef>
         </p:style>
         <p:txBody>
-          <a:bodyPr rtlCol="0" anchor="ctr"/>
-          <a:lstStyle/>
-          <a:p>
-            <a:pPr algn="ctr"/>
-          </a:p>
-        </p:txBody>
-      </p:sp>
-      <p:pic>
-        <p:nvPicPr>
-          <p:cNvPr id="10" name="Picture 9" descr="sampling_gap.png"/>
-          <p:cNvPicPr>
-            <a:picLocks noChangeAspect="1"/>
-          </p:cNvPicPr>
-          <p:nvPr/>
-        </p:nvPicPr>
-        <p:blipFill>
-          <a:blip r:embed="rId3"/>
-          <a:stretch>
-            <a:fillRect/>
-          </a:stretch>
-        </p:blipFill>
-        <p:spPr>
-          <a:xfrm>
-            <a:off x="6552590" y="1636776"/>
-            <a:ext cx="438912" cy="438912"/>
-          </a:xfrm>
-          <a:prstGeom prst="rect">
-            <a:avLst/>
-          </a:prstGeom>
-        </p:spPr>
-      </p:pic>
-      <p:sp>
-        <p:nvSpPr>
-          <p:cNvPr id="11" name="TextBox 10"/>
-          <p:cNvSpPr txBox="1"/>
-          <p:nvPr/>
-        </p:nvSpPr>
-        <p:spPr>
-          <a:xfrm>
-            <a:off x="7082942" y="1581912"/>
-            <a:ext cx="4129430" cy="594360"/>
-          </a:xfrm>
-          <a:prstGeom prst="rect">
-            <a:avLst/>
-          </a:prstGeom>
-          <a:noFill/>
-        </p:spPr>
-        <p:txBody>
-          <a:bodyPr wrap="square" anchor="t" lIns="0" tIns="0" rIns="0" bIns="0">
-            <a:spAutoFit/>
-          </a:bodyPr>
-          <a:lstStyle/>
-          <a:p>
-            <a:pPr algn="l">
-              <a:defRPr sz="2100" b="1">
-                <a:solidFill>
-                  <a:srgbClr val="023047"/>
-                </a:solidFill>
-                <a:latin typeface="Calibri"/>
-              </a:defRPr>
-            </a:pPr>
-            <a:r>
-              <a:t>The Sampling Gap</a:t>
-            </a:r>
-          </a:p>
-        </p:txBody>
-      </p:sp>
-      <p:sp>
-        <p:nvSpPr>
-          <p:cNvPr id="12" name="TextBox 11"/>
-          <p:cNvSpPr txBox="1"/>
-          <p:nvPr/>
-        </p:nvSpPr>
-        <p:spPr>
-          <a:xfrm>
-            <a:off x="6570878" y="2167128"/>
-            <a:ext cx="4595774" cy="1554480"/>
-          </a:xfrm>
-          <a:prstGeom prst="rect">
-            <a:avLst/>
-          </a:prstGeom>
-          <a:noFill/>
-        </p:spPr>
-        <p:txBody>
-          <a:bodyPr wrap="square" anchor="t" lIns="0" tIns="0" rIns="0" bIns="0">
-            <a:spAutoFit/>
-          </a:bodyPr>
-          <a:lstStyle/>
-          <a:p>
-            <a:pPr algn="l">
-              <a:spcBef>
-                <a:spcPts val="0"/>
-              </a:spcBef>
-              <a:spcAft>
-                <a:spcPts val="600"/>
-              </a:spcAft>
-              <a:defRPr sz="1500">
-                <a:solidFill>
-                  <a:srgbClr val="023047"/>
-                </a:solidFill>
-                <a:latin typeface="Calibri"/>
-              </a:defRPr>
-            </a:pPr>
-            <a:r>
-              <a:t>-  Automatic sensors: continuous, but confined to few fixed locations</a:t>
-            </a:r>
-          </a:p>
-          <a:p>
-            <a:pPr algn="l">
-              <a:spcBef>
-                <a:spcPts val="0"/>
-              </a:spcBef>
-              <a:spcAft>
-                <a:spcPts val="600"/>
-              </a:spcAft>
-              <a:defRPr sz="1500">
-                <a:solidFill>
-                  <a:srgbClr val="023047"/>
-                </a:solidFill>
-                <a:latin typeface="Calibri"/>
-              </a:defRPr>
-            </a:pPr>
-            <a:r>
-              <a:t>-  Manual grab sampling: often only 1x per month (24-48h lab delay)</a:t>
-            </a:r>
-          </a:p>
-          <a:p>
-            <a:pPr algn="l">
-              <a:spcBef>
-                <a:spcPts val="0"/>
-              </a:spcBef>
-              <a:spcAft>
-                <a:spcPts val="600"/>
-              </a:spcAft>
-              <a:defRPr sz="1500">
-                <a:solidFill>
-                  <a:srgbClr val="023047"/>
-                </a:solidFill>
-                <a:latin typeface="Calibri"/>
-              </a:defRPr>
-            </a:pPr>
-            <a:r>
-              <a:t>-  Convective storm overflows: last only 2 to 4 hours</a:t>
-            </a:r>
-          </a:p>
-        </p:txBody>
-      </p:sp>
-      <p:sp>
-        <p:nvSpPr>
-          <p:cNvPr id="13" name="Rounded Rectangle 12"/>
-          <p:cNvSpPr/>
-          <p:nvPr/>
-        </p:nvSpPr>
-        <p:spPr>
-          <a:xfrm>
-            <a:off x="6534302" y="3749040"/>
-            <a:ext cx="4668926" cy="320040"/>
-          </a:xfrm>
-          <a:prstGeom prst="roundRect">
-            <a:avLst>
-              <a:gd name="adj" fmla="val 8000"/>
-            </a:avLst>
-          </a:prstGeom>
-          <a:solidFill>
-            <a:srgbClr val="EBF4FA"/>
-          </a:solidFill>
-          <a:ln w="12700">
-            <a:solidFill>
-              <a:srgbClr val="8ECAE6"/>
-            </a:solidFill>
-          </a:ln>
-        </p:spPr>
-        <p:style>
-          <a:lnRef idx="1">
-            <a:schemeClr val="accent1"/>
-          </a:lnRef>
-          <a:fillRef idx="3">
-            <a:schemeClr val="accent1"/>
-          </a:fillRef>
-          <a:effectRef idx="2">
-            <a:schemeClr val="accent1"/>
-          </a:effectRef>
-          <a:fontRef idx="minor">
-            <a:schemeClr val="lt1"/>
-          </a:fontRef>
-        </p:style>
-        <p:txBody>
-          <a:bodyPr rtlCol="0" anchor="ctr" wrap="square" lIns="137160" rIns="137160" tIns="0" bIns="0"/>
-          <a:lstStyle/>
-          <a:p>
-            <a:pPr algn="l">
-              <a:defRPr sz="1100" b="1">
-                <a:solidFill>
-                  <a:srgbClr val="219EBC"/>
-                </a:solidFill>
-                <a:latin typeface="Calibri"/>
-              </a:defRPr>
-            </a:pPr>
-            <a:r>
-              <a:t>Critical Bottleneck: 1x/Month Sampling  |  24-48h Lab Delay</a:t>
-            </a:r>
-          </a:p>
-        </p:txBody>
-      </p:sp>
-      <p:sp>
-        <p:nvSpPr>
-          <p:cNvPr id="14" name="Rounded Rectangle 13"/>
-          <p:cNvSpPr/>
-          <p:nvPr/>
-        </p:nvSpPr>
-        <p:spPr>
-          <a:xfrm>
-            <a:off x="731520" y="4389120"/>
-            <a:ext cx="10728655" cy="1097280"/>
-          </a:xfrm>
-          <a:prstGeom prst="roundRect">
-            <a:avLst>
-              <a:gd name="adj" fmla="val 3500"/>
-            </a:avLst>
-          </a:prstGeom>
-          <a:solidFill>
-            <a:srgbClr val="F4F9FC"/>
-          </a:solidFill>
-          <a:ln w="19050">
-            <a:solidFill>
-              <a:srgbClr val="B4DAEE"/>
-            </a:solidFill>
-          </a:ln>
-        </p:spPr>
-        <p:style>
-          <a:lnRef idx="1">
-            <a:schemeClr val="accent1"/>
-          </a:lnRef>
-          <a:fillRef idx="3">
-            <a:schemeClr val="accent1"/>
-          </a:fillRef>
-          <a:effectRef idx="2">
-            <a:schemeClr val="accent1"/>
-          </a:effectRef>
-          <a:fontRef idx="minor">
-            <a:schemeClr val="lt1"/>
-          </a:fontRef>
-        </p:style>
-        <p:txBody>
-          <a:bodyPr rtlCol="0" anchor="t" wrap="square" lIns="274320" rIns="274320" tIns="137160"/>
-          <a:lstStyle/>
-          <a:p>
-            <a:pPr algn="ctr">
-              <a:spcAft>
-                <a:spcPts val="600"/>
-              </a:spcAft>
-              <a:defRPr sz="1100" b="1">
-                <a:solidFill>
-                  <a:srgbClr val="219EBC"/>
-                </a:solidFill>
-                <a:latin typeface="Calibri"/>
-              </a:defRPr>
-            </a:pPr>
-            <a:r>
-              <a:t>THE TEMPORAL MISMATCH INFOGRAPHIC</a:t>
-            </a:r>
-          </a:p>
-        </p:txBody>
-      </p:sp>
-      <p:sp>
-        <p:nvSpPr>
-          <p:cNvPr id="15" name="Rounded Rectangle 14"/>
-          <p:cNvSpPr/>
-          <p:nvPr/>
-        </p:nvSpPr>
-        <p:spPr>
-          <a:xfrm>
-            <a:off x="1005840" y="4828032"/>
-            <a:ext cx="2011680" cy="219456"/>
-          </a:xfrm>
-          <a:prstGeom prst="roundRect">
-            <a:avLst>
-              <a:gd name="adj" fmla="val 20000"/>
-            </a:avLst>
-          </a:prstGeom>
-          <a:solidFill>
-            <a:srgbClr val="FB8500"/>
-          </a:solidFill>
-          <a:ln>
-            <a:noFill/>
-          </a:ln>
-        </p:spPr>
-        <p:style>
-          <a:lnRef idx="1">
-            <a:schemeClr val="accent1"/>
-          </a:lnRef>
-          <a:fillRef idx="3">
-            <a:schemeClr val="accent1"/>
-          </a:fillRef>
-          <a:effectRef idx="2">
-            <a:schemeClr val="accent1"/>
-          </a:effectRef>
-          <a:fontRef idx="minor">
-            <a:schemeClr val="lt1"/>
-          </a:fontRef>
-        </p:style>
-        <p:txBody>
-          <a:bodyPr rtlCol="0" anchor="ctr"/>
-          <a:lstStyle/>
-          <a:p>
-            <a:pPr algn="ctr">
-              <a:defRPr sz="950" b="1">
-                <a:solidFill>
-                  <a:srgbClr val="FFFFFF"/>
-                </a:solidFill>
-                <a:latin typeface="Calibri"/>
-              </a:defRPr>
-            </a:pPr>
-            <a:r>
-              <a:t>Storm Overflow: 2-4 Hours</a:t>
-            </a:r>
-          </a:p>
-        </p:txBody>
-      </p:sp>
-      <p:sp>
-        <p:nvSpPr>
-          <p:cNvPr id="16" name="Rounded Rectangle 15"/>
-          <p:cNvSpPr/>
-          <p:nvPr/>
-        </p:nvSpPr>
-        <p:spPr>
-          <a:xfrm>
-            <a:off x="3291840" y="4828032"/>
-            <a:ext cx="7863840" cy="219456"/>
-          </a:xfrm>
-          <a:prstGeom prst="roundRect">
-            <a:avLst>
-              <a:gd name="adj" fmla="val 6000"/>
-            </a:avLst>
-          </a:prstGeom>
-          <a:solidFill>
-            <a:srgbClr val="023047"/>
-          </a:solidFill>
-          <a:ln>
-            <a:noFill/>
-          </a:ln>
-        </p:spPr>
-        <p:style>
-          <a:lnRef idx="1">
-            <a:schemeClr val="accent1"/>
-          </a:lnRef>
-          <a:fillRef idx="3">
-            <a:schemeClr val="accent1"/>
-          </a:fillRef>
-          <a:effectRef idx="2">
-            <a:schemeClr val="accent1"/>
-          </a:effectRef>
-          <a:fontRef idx="minor">
-            <a:schemeClr val="lt1"/>
-          </a:fontRef>
-        </p:style>
-        <p:txBody>
-          <a:bodyPr rtlCol="0" anchor="ctr" lIns="137160"/>
-          <a:lstStyle/>
-          <a:p>
-            <a:pPr algn="ctr">
-              <a:defRPr sz="950" b="1">
-                <a:solidFill>
-                  <a:srgbClr val="FFFFFF"/>
-                </a:solidFill>
-                <a:latin typeface="Calibri"/>
-              </a:defRPr>
-            </a:pPr>
-            <a:r>
-              <a:t>Laboratory Grab Sample Verification Delay: 24 to 48 Hours (Plume Long Cleared)</a:t>
-            </a:r>
-          </a:p>
-        </p:txBody>
-      </p:sp>
-      <p:sp>
-        <p:nvSpPr>
-          <p:cNvPr id="17" name="TextBox 16"/>
-          <p:cNvSpPr txBox="1"/>
-          <p:nvPr/>
-        </p:nvSpPr>
-        <p:spPr>
-          <a:xfrm>
-            <a:off x="1005840" y="5102352"/>
-            <a:ext cx="10149840" cy="274320"/>
-          </a:xfrm>
-          <a:prstGeom prst="rect">
-            <a:avLst/>
-          </a:prstGeom>
-          <a:noFill/>
-        </p:spPr>
-        <p:txBody>
-          <a:bodyPr wrap="square" lIns="0" tIns="0" rIns="0" bIns="0">
-            <a:spAutoFit/>
-          </a:bodyPr>
-          <a:lstStyle/>
-          <a:p>
-            <a:pPr>
-              <a:defRPr sz="1150">
-                <a:solidFill>
-                  <a:srgbClr val="023047"/>
-                </a:solidFill>
-                <a:latin typeface="Calibri"/>
-              </a:defRPr>
-            </a:pPr>
-            <a:r>
-              <a:t>Static sensors only show that something passed. Laboratory delays mean warnings arrive days after the pollution event has ended.</a:t>
-            </a:r>
-          </a:p>
-        </p:txBody>
-      </p:sp>
-      <p:sp>
-        <p:nvSpPr>
-          <p:cNvPr id="18" name="Rounded Rectangle 17"/>
-          <p:cNvSpPr/>
-          <p:nvPr/>
-        </p:nvSpPr>
-        <p:spPr>
-          <a:xfrm>
-            <a:off x="731520" y="5650992"/>
-            <a:ext cx="10728655" cy="621792"/>
-          </a:xfrm>
-          <a:prstGeom prst="roundRect">
-            <a:avLst>
-              <a:gd name="adj" fmla="val 3500"/>
-            </a:avLst>
-          </a:prstGeom>
-          <a:solidFill>
-            <a:srgbClr val="F4F9FC"/>
-          </a:solidFill>
-          <a:ln w="19050">
-            <a:solidFill>
-              <a:srgbClr val="219EBC"/>
-            </a:solidFill>
-          </a:ln>
-        </p:spPr>
-        <p:style>
-          <a:lnRef idx="1">
-            <a:schemeClr val="accent1"/>
-          </a:lnRef>
-          <a:fillRef idx="3">
-            <a:schemeClr val="accent1"/>
-          </a:fillRef>
-          <a:effectRef idx="2">
-            <a:schemeClr val="accent1"/>
-          </a:effectRef>
-          <a:fontRef idx="minor">
-            <a:schemeClr val="lt1"/>
-          </a:fontRef>
-        </p:style>
-        <p:txBody>
-          <a:bodyPr rtlCol="0" anchor="ctr" wrap="square" lIns="320040" rIns="320040" tIns="73152"/>
+          <a:bodyPr rtlCol="0" anchor="ctr" wrap="square" lIns="320040" rIns="320040" tIns="91440"/>
           <a:lstStyle/>
           <a:p>
             <a:pPr algn="l">
@@ -6219,8 +5403,8 @@
         </p:nvSpPr>
         <p:spPr>
           <a:xfrm>
-            <a:off x="731520" y="411480"/>
-            <a:ext cx="9144000" cy="292608"/>
+            <a:off x="731520" y="502920"/>
+            <a:ext cx="10728655" cy="777240"/>
           </a:xfrm>
           <a:prstGeom prst="rect">
             <a:avLst/>
@@ -6233,66 +5417,30 @@
           </a:bodyPr>
           <a:lstStyle/>
           <a:p>
-            <a:pPr>
-              <a:defRPr sz="1100" b="1">
-                <a:solidFill>
-                  <a:srgbClr val="219EBC"/>
+            <a:pPr algn="l">
+              <a:defRPr sz="3800" b="1">
+                <a:solidFill>
+                  <a:srgbClr val="023047"/>
                 </a:solidFill>
                 <a:latin typeface="Calibri"/>
               </a:defRPr>
             </a:pPr>
             <a:r>
-              <a:t>STAKEHOLDER NEEDS &amp; CHALLENGE FRAMING</a:t>
-            </a:r>
-          </a:p>
-        </p:txBody>
-      </p:sp>
-      <p:sp>
-        <p:nvSpPr>
-          <p:cNvPr id="3" name="TextBox 2"/>
-          <p:cNvSpPr txBox="1"/>
-          <p:nvPr/>
-        </p:nvSpPr>
-        <p:spPr>
-          <a:xfrm>
-            <a:off x="731520" y="658368"/>
-            <a:ext cx="10728655" cy="640080"/>
-          </a:xfrm>
-          <a:prstGeom prst="rect">
-            <a:avLst/>
-          </a:prstGeom>
-          <a:noFill/>
-        </p:spPr>
-        <p:txBody>
-          <a:bodyPr wrap="square" anchor="t" lIns="0" tIns="0" rIns="0" bIns="0">
-            <a:spAutoFit/>
-          </a:bodyPr>
-          <a:lstStyle/>
-          <a:p>
-            <a:pPr algn="l">
-              <a:defRPr sz="3600" b="1">
-                <a:solidFill>
-                  <a:srgbClr val="023047"/>
-                </a:solidFill>
-                <a:latin typeface="Calibri"/>
-              </a:defRPr>
-            </a:pPr>
-            <a:r>
-              <a:t>Key Stakeholders &amp; Challenge</a:t>
-            </a:r>
-          </a:p>
-        </p:txBody>
-      </p:sp>
-      <p:sp>
-        <p:nvSpPr>
-          <p:cNvPr id="4" name="Rounded Rectangle 3"/>
+              <a:t>Key Stakeholders</a:t>
+            </a:r>
+          </a:p>
+        </p:txBody>
+      </p:sp>
+      <p:sp>
+        <p:nvSpPr>
+          <p:cNvPr id="3" name="Rounded Rectangle 2"/>
           <p:cNvSpPr/>
           <p:nvPr/>
         </p:nvSpPr>
         <p:spPr>
           <a:xfrm>
-            <a:off x="731520" y="1417320"/>
-            <a:ext cx="5180990" cy="2971800"/>
+            <a:off x="731520" y="1508760"/>
+            <a:ext cx="5180990" cy="4389120"/>
           </a:xfrm>
           <a:prstGeom prst="roundRect">
             <a:avLst>
@@ -6332,7 +5480,7 @@
       </p:sp>
       <p:pic>
         <p:nvPicPr>
-          <p:cNvPr id="5" name="Picture 4" descr="authority.png"/>
+          <p:cNvPr id="4" name="Picture 3" descr="authority.png"/>
           <p:cNvPicPr>
             <a:picLocks noChangeAspect="1"/>
           </p:cNvPicPr>
@@ -6346,8 +5494,8 @@
         </p:blipFill>
         <p:spPr>
           <a:xfrm>
-            <a:off x="1005840" y="1636776"/>
-            <a:ext cx="438912" cy="438912"/>
+            <a:off x="1024128" y="1801368"/>
+            <a:ext cx="475488" cy="475488"/>
           </a:xfrm>
           <a:prstGeom prst="rect">
             <a:avLst/>
@@ -6356,14 +5504,14 @@
       </p:pic>
       <p:sp>
         <p:nvSpPr>
-          <p:cNvPr id="6" name="TextBox 5"/>
+          <p:cNvPr id="5" name="TextBox 4"/>
           <p:cNvSpPr txBox="1"/>
           <p:nvPr/>
         </p:nvSpPr>
         <p:spPr>
           <a:xfrm>
-            <a:off x="1536192" y="1581912"/>
-            <a:ext cx="4129430" cy="594360"/>
+            <a:off x="1609344" y="1764792"/>
+            <a:ext cx="4037990" cy="594360"/>
           </a:xfrm>
           <a:prstGeom prst="rect">
             <a:avLst/>
@@ -6376,31 +5524,15 @@
           </a:bodyPr>
           <a:lstStyle/>
           <a:p>
-            <a:pPr>
-              <a:spcAft>
-                <a:spcPts val="200"/>
-              </a:spcAft>
-              <a:defRPr sz="1000" b="1">
-                <a:solidFill>
-                  <a:srgbClr val="219EBC"/>
+            <a:pPr algn="l">
+              <a:defRPr sz="2200" b="1">
+                <a:solidFill>
+                  <a:srgbClr val="023047"/>
                 </a:solidFill>
                 <a:latin typeface="Calibri"/>
               </a:defRPr>
             </a:pPr>
             <a:r>
-              <a:t>REGULATORY &amp; INFRASTRUCTURE</a:t>
-            </a:r>
-          </a:p>
-          <a:p>
-            <a:pPr algn="l">
-              <a:defRPr sz="2100" b="1">
-                <a:solidFill>
-                  <a:srgbClr val="023047"/>
-                </a:solidFill>
-                <a:latin typeface="Calibri"/>
-              </a:defRPr>
-            </a:pPr>
-            <a:r>
               <a:t>Water Authorities (WWA, SUN)</a:t>
             </a:r>
           </a:p>
@@ -6408,14 +5540,14 @@
       </p:sp>
       <p:sp>
         <p:nvSpPr>
-          <p:cNvPr id="7" name="TextBox 6"/>
+          <p:cNvPr id="6" name="TextBox 5"/>
           <p:cNvSpPr txBox="1"/>
           <p:nvPr/>
         </p:nvSpPr>
         <p:spPr>
           <a:xfrm>
-            <a:off x="1024128" y="2258568"/>
-            <a:ext cx="4595774" cy="1737360"/>
+            <a:off x="1051560" y="2377440"/>
+            <a:ext cx="4540910" cy="3429000"/>
           </a:xfrm>
           <a:prstGeom prst="rect">
             <a:avLst/>
@@ -6433,9 +5565,9 @@
                 <a:spcPts val="0"/>
               </a:spcBef>
               <a:spcAft>
-                <a:spcPts val="600"/>
+                <a:spcPts val="1000"/>
               </a:spcAft>
-              <a:defRPr sz="1500">
+              <a:defRPr sz="1600">
                 <a:solidFill>
                   <a:srgbClr val="023047"/>
                 </a:solidFill>
@@ -6452,9 +5584,9 @@
                 <a:spcPts val="0"/>
               </a:spcBef>
               <a:spcAft>
-                <a:spcPts val="600"/>
+                <a:spcPts val="1000"/>
               </a:spcAft>
-              <a:defRPr sz="1500">
+              <a:defRPr sz="1600">
                 <a:solidFill>
                   <a:srgbClr val="023047"/>
                 </a:solidFill>
@@ -6471,9 +5603,9 @@
                 <a:spcPts val="0"/>
               </a:spcBef>
               <a:spcAft>
-                <a:spcPts val="600"/>
+                <a:spcPts val="1000"/>
               </a:spcAft>
-              <a:defRPr sz="1500">
+              <a:defRPr sz="1600">
                 <a:solidFill>
                   <a:srgbClr val="023047"/>
                 </a:solidFill>
@@ -6490,9 +5622,9 @@
                 <a:spcPts val="0"/>
               </a:spcBef>
               <a:spcAft>
-                <a:spcPts val="600"/>
+                <a:spcPts val="1000"/>
               </a:spcAft>
-              <a:defRPr sz="1500">
+              <a:defRPr sz="1600">
                 <a:solidFill>
                   <a:srgbClr val="023047"/>
                 </a:solidFill>
@@ -6507,26 +5639,26 @@
       </p:sp>
       <p:sp>
         <p:nvSpPr>
-          <p:cNvPr id="8" name="Rounded Rectangle 7"/>
+          <p:cNvPr id="7" name="Rounded Rectangle 6"/>
           <p:cNvSpPr/>
           <p:nvPr/>
         </p:nvSpPr>
         <p:spPr>
           <a:xfrm>
-            <a:off x="987552" y="3931920"/>
-            <a:ext cx="4668926" cy="320040"/>
+            <a:off x="6278270" y="1508760"/>
+            <a:ext cx="5180990" cy="4389120"/>
           </a:xfrm>
           <a:prstGeom prst="roundRect">
             <a:avLst>
-              <a:gd name="adj" fmla="val 8000"/>
+              <a:gd name="adj" fmla="val 3500"/>
             </a:avLst>
           </a:prstGeom>
           <a:solidFill>
-            <a:srgbClr val="EBF4FA"/>
+            <a:srgbClr val="F4F9FC"/>
           </a:solidFill>
-          <a:ln w="12700">
+          <a:ln w="19050">
             <a:solidFill>
-              <a:srgbClr val="8ECAE6"/>
+              <a:srgbClr val="B4DAEE"/>
             </a:solidFill>
           </a:ln>
         </p:spPr>
@@ -6545,63 +5677,6 @@
           </a:fontRef>
         </p:style>
         <p:txBody>
-          <a:bodyPr rtlCol="0" anchor="ctr" wrap="square" lIns="137160" rIns="137160" tIns="0" bIns="0"/>
-          <a:lstStyle/>
-          <a:p>
-            <a:pPr algn="l">
-              <a:defRPr sz="1100" b="1">
-                <a:solidFill>
-                  <a:srgbClr val="219EBC"/>
-                </a:solidFill>
-                <a:latin typeface="Calibri"/>
-              </a:defRPr>
-            </a:pPr>
-            <a:r>
-              <a:t>High Financial Risk: €1.5M - €5M+ CapEx per Basin  |  Delayed Lab Data</a:t>
-            </a:r>
-          </a:p>
-        </p:txBody>
-      </p:sp>
-      <p:sp>
-        <p:nvSpPr>
-          <p:cNvPr id="9" name="Rounded Rectangle 8"/>
-          <p:cNvSpPr/>
-          <p:nvPr/>
-        </p:nvSpPr>
-        <p:spPr>
-          <a:xfrm>
-            <a:off x="6278270" y="1417320"/>
-            <a:ext cx="5180990" cy="2971800"/>
-          </a:xfrm>
-          <a:prstGeom prst="roundRect">
-            <a:avLst>
-              <a:gd name="adj" fmla="val 3500"/>
-            </a:avLst>
-          </a:prstGeom>
-          <a:solidFill>
-            <a:srgbClr val="F4F9FC"/>
-          </a:solidFill>
-          <a:ln w="19050">
-            <a:solidFill>
-              <a:srgbClr val="B4DAEE"/>
-            </a:solidFill>
-          </a:ln>
-        </p:spPr>
-        <p:style>
-          <a:lnRef idx="1">
-            <a:schemeClr val="accent1"/>
-          </a:lnRef>
-          <a:fillRef idx="3">
-            <a:schemeClr val="accent1"/>
-          </a:fillRef>
-          <a:effectRef idx="2">
-            <a:schemeClr val="accent1"/>
-          </a:effectRef>
-          <a:fontRef idx="minor">
-            <a:schemeClr val="lt1"/>
-          </a:fontRef>
-        </p:style>
-        <p:txBody>
           <a:bodyPr rtlCol="0" anchor="ctr"/>
           <a:lstStyle/>
           <a:p>
@@ -6611,7 +5686,7 @@
       </p:sp>
       <p:pic>
         <p:nvPicPr>
-          <p:cNvPr id="10" name="Picture 9" descr="citizens_surfer.png"/>
+          <p:cNvPr id="8" name="Picture 7" descr="citizens_surfer.png"/>
           <p:cNvPicPr>
             <a:picLocks noChangeAspect="1"/>
           </p:cNvPicPr>
@@ -6625,8 +5700,8 @@
         </p:blipFill>
         <p:spPr>
           <a:xfrm>
-            <a:off x="6552590" y="1636776"/>
-            <a:ext cx="438912" cy="438912"/>
+            <a:off x="6570878" y="1801368"/>
+            <a:ext cx="475488" cy="475488"/>
           </a:xfrm>
           <a:prstGeom prst="rect">
             <a:avLst/>
@@ -6635,14 +5710,14 @@
       </p:pic>
       <p:sp>
         <p:nvSpPr>
-          <p:cNvPr id="11" name="TextBox 10"/>
+          <p:cNvPr id="9" name="TextBox 8"/>
           <p:cNvSpPr txBox="1"/>
           <p:nvPr/>
         </p:nvSpPr>
         <p:spPr>
           <a:xfrm>
-            <a:off x="7082942" y="1581912"/>
-            <a:ext cx="4129430" cy="594360"/>
+            <a:off x="7156094" y="1764792"/>
+            <a:ext cx="4037990" cy="594360"/>
           </a:xfrm>
           <a:prstGeom prst="rect">
             <a:avLst/>
@@ -6655,31 +5730,15 @@
           </a:bodyPr>
           <a:lstStyle/>
           <a:p>
-            <a:pPr>
-              <a:spcAft>
-                <a:spcPts val="200"/>
-              </a:spcAft>
-              <a:defRPr sz="1000" b="1">
-                <a:solidFill>
-                  <a:srgbClr val="219EBC"/>
+            <a:pPr algn="l">
+              <a:defRPr sz="2200" b="1">
+                <a:solidFill>
+                  <a:srgbClr val="023047"/>
                 </a:solidFill>
                 <a:latin typeface="Calibri"/>
               </a:defRPr>
             </a:pPr>
             <a:r>
-              <a:t>PUBLIC HEALTH &amp; RECREATION</a:t>
-            </a:r>
-          </a:p>
-          <a:p>
-            <a:pPr algn="l">
-              <a:defRPr sz="2100" b="1">
-                <a:solidFill>
-                  <a:srgbClr val="023047"/>
-                </a:solidFill>
-                <a:latin typeface="Calibri"/>
-              </a:defRPr>
-            </a:pPr>
-            <a:r>
               <a:t>Citizens and Surfers</a:t>
             </a:r>
           </a:p>
@@ -6687,14 +5746,14 @@
       </p:sp>
       <p:sp>
         <p:nvSpPr>
-          <p:cNvPr id="12" name="TextBox 11"/>
+          <p:cNvPr id="10" name="TextBox 9"/>
           <p:cNvSpPr txBox="1"/>
           <p:nvPr/>
         </p:nvSpPr>
         <p:spPr>
           <a:xfrm>
-            <a:off x="6570878" y="2258568"/>
-            <a:ext cx="4595774" cy="1737360"/>
+            <a:off x="6598310" y="2377440"/>
+            <a:ext cx="4540910" cy="3429000"/>
           </a:xfrm>
           <a:prstGeom prst="rect">
             <a:avLst/>
@@ -6712,9 +5771,9 @@
                 <a:spcPts val="0"/>
               </a:spcBef>
               <a:spcAft>
-                <a:spcPts val="600"/>
+                <a:spcPts val="1000"/>
               </a:spcAft>
-              <a:defRPr sz="1500">
+              <a:defRPr sz="1600">
                 <a:solidFill>
                   <a:srgbClr val="023047"/>
                 </a:solidFill>
@@ -6731,9 +5790,9 @@
                 <a:spcPts val="0"/>
               </a:spcBef>
               <a:spcAft>
-                <a:spcPts val="600"/>
+                <a:spcPts val="1000"/>
               </a:spcAft>
-              <a:defRPr sz="1500">
+              <a:defRPr sz="1600">
                 <a:solidFill>
                   <a:srgbClr val="023047"/>
                 </a:solidFill>
@@ -6750,9 +5809,9 @@
                 <a:spcPts val="0"/>
               </a:spcBef>
               <a:spcAft>
-                <a:spcPts val="600"/>
+                <a:spcPts val="1000"/>
               </a:spcAft>
-              <a:defRPr sz="1500">
+              <a:defRPr sz="1600">
                 <a:solidFill>
                   <a:srgbClr val="023047"/>
                 </a:solidFill>
@@ -6769,9 +5828,9 @@
                 <a:spcPts val="0"/>
               </a:spcBef>
               <a:spcAft>
-                <a:spcPts val="600"/>
+                <a:spcPts val="1000"/>
               </a:spcAft>
-              <a:defRPr sz="1500">
+              <a:defRPr sz="1600">
                 <a:solidFill>
                   <a:srgbClr val="023047"/>
                 </a:solidFill>
@@ -6780,152 +5839,6 @@
             </a:pPr>
             <a:r>
               <a:t>-  Delayed municipal reports provide no immediate guidance</a:t>
-            </a:r>
-          </a:p>
-        </p:txBody>
-      </p:sp>
-      <p:sp>
-        <p:nvSpPr>
-          <p:cNvPr id="13" name="Rounded Rectangle 12"/>
-          <p:cNvSpPr/>
-          <p:nvPr/>
-        </p:nvSpPr>
-        <p:spPr>
-          <a:xfrm>
-            <a:off x="6534302" y="3931920"/>
-            <a:ext cx="4668926" cy="320040"/>
-          </a:xfrm>
-          <a:prstGeom prst="roundRect">
-            <a:avLst>
-              <a:gd name="adj" fmla="val 8000"/>
-            </a:avLst>
-          </a:prstGeom>
-          <a:solidFill>
-            <a:srgbClr val="EBF4FA"/>
-          </a:solidFill>
-          <a:ln w="12700">
-            <a:solidFill>
-              <a:srgbClr val="8ECAE6"/>
-            </a:solidFill>
-          </a:ln>
-        </p:spPr>
-        <p:style>
-          <a:lnRef idx="1">
-            <a:schemeClr val="accent1"/>
-          </a:lnRef>
-          <a:fillRef idx="3">
-            <a:schemeClr val="accent1"/>
-          </a:fillRef>
-          <a:effectRef idx="2">
-            <a:schemeClr val="accent1"/>
-          </a:effectRef>
-          <a:fontRef idx="minor">
-            <a:schemeClr val="lt1"/>
-          </a:fontRef>
-        </p:style>
-        <p:txBody>
-          <a:bodyPr rtlCol="0" anchor="ctr" wrap="square" lIns="137160" rIns="137160" tIns="0" bIns="0"/>
-          <a:lstStyle/>
-          <a:p>
-            <a:pPr algn="l">
-              <a:defRPr sz="1100" b="1">
-                <a:solidFill>
-                  <a:srgbClr val="219EBC"/>
-                </a:solidFill>
-                <a:latin typeface="Calibri"/>
-              </a:defRPr>
-            </a:pPr>
-            <a:r>
-              <a:t>Acute Health Risk: Unwarned Bacterial Exposure  |  No Live Warnings</a:t>
-            </a:r>
-          </a:p>
-        </p:txBody>
-      </p:sp>
-      <p:sp>
-        <p:nvSpPr>
-          <p:cNvPr id="14" name="Rounded Rectangle 13"/>
-          <p:cNvSpPr/>
-          <p:nvPr/>
-        </p:nvSpPr>
-        <p:spPr>
-          <a:xfrm>
-            <a:off x="731520" y="4572000"/>
-            <a:ext cx="10728655" cy="1691640"/>
-          </a:xfrm>
-          <a:prstGeom prst="roundRect">
-            <a:avLst>
-              <a:gd name="adj" fmla="val 3500"/>
-            </a:avLst>
-          </a:prstGeom>
-          <a:solidFill>
-            <a:srgbClr val="F4F9FC"/>
-          </a:solidFill>
-          <a:ln w="19050">
-            <a:solidFill>
-              <a:srgbClr val="219EBC"/>
-            </a:solidFill>
-          </a:ln>
-        </p:spPr>
-        <p:style>
-          <a:lnRef idx="1">
-            <a:schemeClr val="accent1"/>
-          </a:lnRef>
-          <a:fillRef idx="3">
-            <a:schemeClr val="accent1"/>
-          </a:fillRef>
-          <a:effectRef idx="2">
-            <a:schemeClr val="accent1"/>
-          </a:effectRef>
-          <a:fontRef idx="minor">
-            <a:schemeClr val="lt1"/>
-          </a:fontRef>
-        </p:style>
-        <p:txBody>
-          <a:bodyPr rtlCol="0" anchor="t" wrap="square" lIns="320040" rIns="320040" tIns="164592"/>
-          <a:lstStyle/>
-          <a:p>
-            <a:pPr algn="ctr">
-              <a:spcAft>
-                <a:spcPts val="600"/>
-              </a:spcAft>
-              <a:defRPr sz="1100" b="1">
-                <a:solidFill>
-                  <a:srgbClr val="219EBC"/>
-                </a:solidFill>
-                <a:latin typeface="Calibri"/>
-              </a:defRPr>
-            </a:pPr>
-            <a:r>
-              <a:t>FORMAL DTAS CHALLENGE DEFINITION</a:t>
-            </a:r>
-          </a:p>
-          <a:p>
-            <a:pPr>
-              <a:spcAft>
-                <a:spcPts val="800"/>
-              </a:spcAft>
-              <a:defRPr sz="1550" b="1">
-                <a:solidFill>
-                  <a:srgbClr val="023047"/>
-                </a:solidFill>
-                <a:latin typeface="Calibri"/>
-              </a:defRPr>
-            </a:pPr>
-            <a:r>
-              <a:t>"How can digital twinning be applied to autonomous systems in order to address the challenge of detecting and localizing transient Combined Sewer Overflows (CSOs) for the Wasserwirtschaftsamt and regional environmental authorities?"</a:t>
-            </a:r>
-          </a:p>
-          <a:p>
-            <a:pPr>
-              <a:defRPr sz="1200">
-                <a:solidFill>
-                  <a:srgbClr val="219EBC"/>
-                </a:solidFill>
-                <a:latin typeface="Calibri"/>
-              </a:defRPr>
-            </a:pPr>
-            <a:r>
-              <a:t>Goal: Replace delayed monthly grab testing with an autonomous closed-loop system connecting physical sensing to predictive action.</a:t>
             </a:r>
           </a:p>
         </p:txBody>
@@ -6964,8 +5877,8 @@
         </p:nvSpPr>
         <p:spPr>
           <a:xfrm>
-            <a:off x="731520" y="411480"/>
-            <a:ext cx="9144000" cy="292608"/>
+            <a:off x="731520" y="502920"/>
+            <a:ext cx="10728655" cy="777240"/>
           </a:xfrm>
           <a:prstGeom prst="rect">
             <a:avLst/>
@@ -6978,51 +5891,15 @@
           </a:bodyPr>
           <a:lstStyle/>
           <a:p>
-            <a:pPr>
-              <a:defRPr sz="1100" b="1">
-                <a:solidFill>
-                  <a:srgbClr val="219EBC"/>
+            <a:pPr algn="l">
+              <a:defRPr sz="3800" b="1">
+                <a:solidFill>
+                  <a:srgbClr val="023047"/>
                 </a:solidFill>
                 <a:latin typeface="Calibri"/>
               </a:defRPr>
             </a:pPr>
             <a:r>
-              <a:t>TECHNICAL SOLUTION 1/3</a:t>
-            </a:r>
-          </a:p>
-        </p:txBody>
-      </p:sp>
-      <p:sp>
-        <p:nvSpPr>
-          <p:cNvPr id="3" name="TextBox 2"/>
-          <p:cNvSpPr txBox="1"/>
-          <p:nvPr/>
-        </p:nvSpPr>
-        <p:spPr>
-          <a:xfrm>
-            <a:off x="731520" y="658368"/>
-            <a:ext cx="10728655" cy="640080"/>
-          </a:xfrm>
-          <a:prstGeom prst="rect">
-            <a:avLst/>
-          </a:prstGeom>
-          <a:noFill/>
-        </p:spPr>
-        <p:txBody>
-          <a:bodyPr wrap="square" anchor="t" lIns="0" tIns="0" rIns="0" bIns="0">
-            <a:spAutoFit/>
-          </a:bodyPr>
-          <a:lstStyle/>
-          <a:p>
-            <a:pPr algn="l">
-              <a:defRPr sz="3600" b="1">
-                <a:solidFill>
-                  <a:srgbClr val="023047"/>
-                </a:solidFill>
-                <a:latin typeface="Calibri"/>
-              </a:defRPr>
-            </a:pPr>
-            <a:r>
               <a:t>The PlumeTrace Architecture</a:t>
             </a:r>
           </a:p>
@@ -7030,14 +5907,14 @@
       </p:sp>
       <p:sp>
         <p:nvSpPr>
-          <p:cNvPr id="4" name="Rounded Rectangle 3"/>
+          <p:cNvPr id="3" name="Rounded Rectangle 2"/>
           <p:cNvSpPr/>
           <p:nvPr/>
         </p:nvSpPr>
         <p:spPr>
           <a:xfrm>
-            <a:off x="731520" y="1417320"/>
-            <a:ext cx="3332073" cy="2971800"/>
+            <a:off x="731520" y="1508760"/>
+            <a:ext cx="3332073" cy="4389120"/>
           </a:xfrm>
           <a:prstGeom prst="roundRect">
             <a:avLst>
@@ -7077,7 +5954,7 @@
       </p:sp>
       <p:pic>
         <p:nvPicPr>
-          <p:cNvPr id="5" name="Picture 4" descr="river_asv.png"/>
+          <p:cNvPr id="4" name="Picture 3" descr="river_asv.png"/>
           <p:cNvPicPr>
             <a:picLocks noChangeAspect="1"/>
           </p:cNvPicPr>
@@ -7091,8 +5968,8 @@
         </p:blipFill>
         <p:spPr>
           <a:xfrm>
-            <a:off x="1005840" y="1636776"/>
-            <a:ext cx="438912" cy="438912"/>
+            <a:off x="1024128" y="1801368"/>
+            <a:ext cx="475488" cy="475488"/>
           </a:xfrm>
           <a:prstGeom prst="rect">
             <a:avLst/>
@@ -7101,14 +5978,14 @@
       </p:pic>
       <p:sp>
         <p:nvSpPr>
-          <p:cNvPr id="6" name="TextBox 5"/>
+          <p:cNvPr id="5" name="TextBox 4"/>
           <p:cNvSpPr txBox="1"/>
           <p:nvPr/>
         </p:nvSpPr>
         <p:spPr>
           <a:xfrm>
-            <a:off x="1536192" y="1581912"/>
-            <a:ext cx="2280513" cy="594360"/>
+            <a:off x="1609344" y="1764792"/>
+            <a:ext cx="2189073" cy="594360"/>
           </a:xfrm>
           <a:prstGeom prst="rect">
             <a:avLst/>
@@ -7121,31 +5998,15 @@
           </a:bodyPr>
           <a:lstStyle/>
           <a:p>
-            <a:pPr>
-              <a:spcAft>
-                <a:spcPts val="200"/>
-              </a:spcAft>
-              <a:defRPr sz="1000" b="1">
-                <a:solidFill>
-                  <a:srgbClr val="219EBC"/>
+            <a:pPr algn="l">
+              <a:defRPr sz="2000" b="1">
+                <a:solidFill>
+                  <a:srgbClr val="023047"/>
                 </a:solidFill>
                 <a:latin typeface="Calibri"/>
               </a:defRPr>
             </a:pPr>
             <a:r>
-              <a:t>AQUATIC PHYSICAL LAYER</a:t>
-            </a:r>
-          </a:p>
-          <a:p>
-            <a:pPr algn="l">
-              <a:defRPr sz="1900" b="1">
-                <a:solidFill>
-                  <a:srgbClr val="023047"/>
-                </a:solidFill>
-                <a:latin typeface="Calibri"/>
-              </a:defRPr>
-            </a:pPr>
-            <a:r>
               <a:t>Autonomous River Robot</a:t>
             </a:r>
           </a:p>
@@ -7153,14 +6014,14 @@
       </p:sp>
       <p:sp>
         <p:nvSpPr>
-          <p:cNvPr id="7" name="TextBox 6"/>
+          <p:cNvPr id="6" name="TextBox 5"/>
           <p:cNvSpPr txBox="1"/>
           <p:nvPr/>
         </p:nvSpPr>
         <p:spPr>
           <a:xfrm>
-            <a:off x="1024128" y="2258568"/>
-            <a:ext cx="2746857" cy="1737360"/>
+            <a:off x="1051560" y="2377440"/>
+            <a:ext cx="2691993" cy="3429000"/>
           </a:xfrm>
           <a:prstGeom prst="rect">
             <a:avLst/>
@@ -7178,9 +6039,9 @@
                 <a:spcPts val="0"/>
               </a:spcBef>
               <a:spcAft>
-                <a:spcPts val="600"/>
+                <a:spcPts val="1000"/>
               </a:spcAft>
-              <a:defRPr sz="1400">
+              <a:defRPr sz="1500">
                 <a:solidFill>
                   <a:srgbClr val="023047"/>
                 </a:solidFill>
@@ -7197,9 +6058,9 @@
                 <a:spcPts val="0"/>
               </a:spcBef>
               <a:spcAft>
-                <a:spcPts val="600"/>
+                <a:spcPts val="1000"/>
               </a:spcAft>
-              <a:defRPr sz="1400">
+              <a:defRPr sz="1500">
                 <a:solidFill>
                   <a:srgbClr val="023047"/>
                 </a:solidFill>
@@ -7216,9 +6077,9 @@
                 <a:spcPts val="0"/>
               </a:spcBef>
               <a:spcAft>
-                <a:spcPts val="600"/>
+                <a:spcPts val="1000"/>
               </a:spcAft>
-              <a:defRPr sz="1400">
+              <a:defRPr sz="1500">
                 <a:solidFill>
                   <a:srgbClr val="023047"/>
                 </a:solidFill>
@@ -7226,7 +6087,7 @@
               </a:defRPr>
             </a:pPr>
             <a:r>
-              <a:t>-  360° LiDAR maps riverbank morphology &amp; culverts</a:t>
+              <a:t>-  360° LiDAR scans riverbank morphology &amp; culverts</a:t>
             </a:r>
           </a:p>
           <a:p>
@@ -7235,9 +6096,9 @@
                 <a:spcPts val="0"/>
               </a:spcBef>
               <a:spcAft>
-                <a:spcPts val="600"/>
+                <a:spcPts val="1000"/>
               </a:spcAft>
-              <a:defRPr sz="1400">
+              <a:defRPr sz="1500">
                 <a:solidFill>
                   <a:srgbClr val="023047"/>
                 </a:solidFill>
@@ -7252,26 +6113,26 @@
       </p:sp>
       <p:sp>
         <p:nvSpPr>
-          <p:cNvPr id="8" name="Rounded Rectangle 7"/>
+          <p:cNvPr id="7" name="Rounded Rectangle 6"/>
           <p:cNvSpPr/>
           <p:nvPr/>
         </p:nvSpPr>
         <p:spPr>
           <a:xfrm>
-            <a:off x="987552" y="3931920"/>
-            <a:ext cx="2820009" cy="320040"/>
+            <a:off x="4429353" y="1508760"/>
+            <a:ext cx="3332073" cy="4389120"/>
           </a:xfrm>
           <a:prstGeom prst="roundRect">
             <a:avLst>
-              <a:gd name="adj" fmla="val 8000"/>
+              <a:gd name="adj" fmla="val 3500"/>
             </a:avLst>
           </a:prstGeom>
           <a:solidFill>
-            <a:srgbClr val="EBF4FA"/>
+            <a:srgbClr val="F4F9FC"/>
           </a:solidFill>
-          <a:ln w="12700">
+          <a:ln w="19050">
             <a:solidFill>
-              <a:srgbClr val="8ECAE6"/>
+              <a:srgbClr val="B4DAEE"/>
             </a:solidFill>
           </a:ln>
         </p:spPr>
@@ -7290,42 +6151,195 @@
           </a:fontRef>
         </p:style>
         <p:txBody>
-          <a:bodyPr rtlCol="0" anchor="ctr" wrap="square" lIns="137160" rIns="137160" tIns="0" bIns="0"/>
+          <a:bodyPr rtlCol="0" anchor="ctr"/>
+          <a:lstStyle/>
+          <a:p>
+            <a:pPr algn="ctr"/>
+          </a:p>
+        </p:txBody>
+      </p:sp>
+      <p:pic>
+        <p:nvPicPr>
+          <p:cNvPr id="8" name="Picture 7" descr="cloud_twin.png"/>
+          <p:cNvPicPr>
+            <a:picLocks noChangeAspect="1"/>
+          </p:cNvPicPr>
+          <p:nvPr/>
+        </p:nvPicPr>
+        <p:blipFill>
+          <a:blip r:embed="rId3"/>
+          <a:stretch>
+            <a:fillRect/>
+          </a:stretch>
+        </p:blipFill>
+        <p:spPr>
+          <a:xfrm>
+            <a:off x="4721961" y="1801368"/>
+            <a:ext cx="475488" cy="475488"/>
+          </a:xfrm>
+          <a:prstGeom prst="rect">
+            <a:avLst/>
+          </a:prstGeom>
+        </p:spPr>
+      </p:pic>
+      <p:sp>
+        <p:nvSpPr>
+          <p:cNvPr id="9" name="TextBox 8"/>
+          <p:cNvSpPr txBox="1"/>
+          <p:nvPr/>
+        </p:nvSpPr>
+        <p:spPr>
+          <a:xfrm>
+            <a:off x="5307177" y="1764792"/>
+            <a:ext cx="2189073" cy="594360"/>
+          </a:xfrm>
+          <a:prstGeom prst="rect">
+            <a:avLst/>
+          </a:prstGeom>
+          <a:noFill/>
+        </p:spPr>
+        <p:txBody>
+          <a:bodyPr wrap="square" anchor="t" lIns="0" tIns="0" rIns="0" bIns="0">
+            <a:spAutoFit/>
+          </a:bodyPr>
           <a:lstStyle/>
           <a:p>
             <a:pPr algn="l">
-              <a:defRPr sz="1100" b="1">
-                <a:solidFill>
-                  <a:srgbClr val="219EBC"/>
+              <a:defRPr sz="2000" b="1">
+                <a:solidFill>
+                  <a:srgbClr val="023047"/>
                 </a:solidFill>
                 <a:latin typeface="Calibri"/>
               </a:defRPr>
             </a:pPr>
             <a:r>
-              <a:t>Active In-River Sensing  |  3D LiDAR  |  Auto-Dock</a:t>
-            </a:r>
-          </a:p>
-        </p:txBody>
-      </p:sp>
-      <p:sp>
-        <p:nvSpPr>
-          <p:cNvPr id="9" name="Right Arrow 8"/>
+              <a:t>Predictive Digital Twin</a:t>
+            </a:r>
+          </a:p>
+        </p:txBody>
+      </p:sp>
+      <p:sp>
+        <p:nvSpPr>
+          <p:cNvPr id="10" name="TextBox 9"/>
+          <p:cNvSpPr txBox="1"/>
+          <p:nvPr/>
+        </p:nvSpPr>
+        <p:spPr>
+          <a:xfrm>
+            <a:off x="4749393" y="2377440"/>
+            <a:ext cx="2691993" cy="3429000"/>
+          </a:xfrm>
+          <a:prstGeom prst="rect">
+            <a:avLst/>
+          </a:prstGeom>
+          <a:noFill/>
+        </p:spPr>
+        <p:txBody>
+          <a:bodyPr wrap="square" anchor="t" lIns="0" tIns="0" rIns="0" bIns="0">
+            <a:spAutoFit/>
+          </a:bodyPr>
+          <a:lstStyle/>
+          <a:p>
+            <a:pPr algn="l">
+              <a:spcBef>
+                <a:spcPts val="0"/>
+              </a:spcBef>
+              <a:spcAft>
+                <a:spcPts val="1000"/>
+              </a:spcAft>
+              <a:defRPr sz="1500">
+                <a:solidFill>
+                  <a:srgbClr val="023047"/>
+                </a:solidFill>
+                <a:latin typeface="Calibri"/>
+              </a:defRPr>
+            </a:pPr>
+            <a:r>
+              <a:t>-  Hydrodynamic river advection-dispersion model</a:t>
+            </a:r>
+          </a:p>
+          <a:p>
+            <a:pPr algn="l">
+              <a:spcBef>
+                <a:spcPts val="0"/>
+              </a:spcBef>
+              <a:spcAft>
+                <a:spcPts val="1000"/>
+              </a:spcAft>
+              <a:defRPr sz="1500">
+                <a:solidFill>
+                  <a:srgbClr val="023047"/>
+                </a:solidFill>
+                <a:latin typeface="Calibri"/>
+              </a:defRPr>
+            </a:pPr>
+            <a:r>
+              <a:t>-  Ingests live DWD storm radar &amp; river discharge</a:t>
+            </a:r>
+          </a:p>
+          <a:p>
+            <a:pPr algn="l">
+              <a:spcBef>
+                <a:spcPts val="0"/>
+              </a:spcBef>
+              <a:spcAft>
+                <a:spcPts val="1000"/>
+              </a:spcAft>
+              <a:defRPr sz="1500">
+                <a:solidFill>
+                  <a:srgbClr val="023047"/>
+                </a:solidFill>
+                <a:latin typeface="Calibri"/>
+              </a:defRPr>
+            </a:pPr>
+            <a:r>
+              <a:t>-  Multi-objective solver computes optimal sampling</a:t>
+            </a:r>
+          </a:p>
+          <a:p>
+            <a:pPr algn="l">
+              <a:spcBef>
+                <a:spcPts val="0"/>
+              </a:spcBef>
+              <a:spcAft>
+                <a:spcPts val="1000"/>
+              </a:spcAft>
+              <a:defRPr sz="1500">
+                <a:solidFill>
+                  <a:srgbClr val="023047"/>
+                </a:solidFill>
+                <a:latin typeface="Calibri"/>
+              </a:defRPr>
+            </a:pPr>
+            <a:r>
+              <a:t>-  Continuously directs robot where to navigate next</a:t>
+            </a:r>
+          </a:p>
+        </p:txBody>
+      </p:sp>
+      <p:sp>
+        <p:nvSpPr>
+          <p:cNvPr id="11" name="Rounded Rectangle 10"/>
           <p:cNvSpPr/>
           <p:nvPr/>
         </p:nvSpPr>
         <p:spPr>
           <a:xfrm>
-            <a:off x="4136745" y="2697480"/>
-            <a:ext cx="219456" cy="320040"/>
-          </a:xfrm>
-          <a:prstGeom prst="rightArrow">
-            <a:avLst/>
+            <a:off x="8127186" y="1508760"/>
+            <a:ext cx="3332073" cy="4389120"/>
+          </a:xfrm>
+          <a:prstGeom prst="roundRect">
+            <a:avLst>
+              <a:gd name="adj" fmla="val 3500"/>
+            </a:avLst>
           </a:prstGeom>
           <a:solidFill>
-            <a:srgbClr val="219EBC"/>
+            <a:srgbClr val="F4F9FC"/>
           </a:solidFill>
-          <a:ln>
-            <a:noFill/>
+          <a:ln w="19050">
+            <a:solidFill>
+              <a:srgbClr val="B4DAEE"/>
+            </a:solidFill>
           </a:ln>
         </p:spPr>
         <p:style>
@@ -7350,378 +6364,9 @@
           </a:p>
         </p:txBody>
       </p:sp>
-      <p:sp>
-        <p:nvSpPr>
-          <p:cNvPr id="10" name="Rounded Rectangle 9"/>
-          <p:cNvSpPr/>
-          <p:nvPr/>
-        </p:nvSpPr>
-        <p:spPr>
-          <a:xfrm>
-            <a:off x="4429353" y="1417320"/>
-            <a:ext cx="3332073" cy="2971800"/>
-          </a:xfrm>
-          <a:prstGeom prst="roundRect">
-            <a:avLst>
-              <a:gd name="adj" fmla="val 3500"/>
-            </a:avLst>
-          </a:prstGeom>
-          <a:solidFill>
-            <a:srgbClr val="F4F9FC"/>
-          </a:solidFill>
-          <a:ln w="19050">
-            <a:solidFill>
-              <a:srgbClr val="B4DAEE"/>
-            </a:solidFill>
-          </a:ln>
-        </p:spPr>
-        <p:style>
-          <a:lnRef idx="1">
-            <a:schemeClr val="accent1"/>
-          </a:lnRef>
-          <a:fillRef idx="3">
-            <a:schemeClr val="accent1"/>
-          </a:fillRef>
-          <a:effectRef idx="2">
-            <a:schemeClr val="accent1"/>
-          </a:effectRef>
-          <a:fontRef idx="minor">
-            <a:schemeClr val="lt1"/>
-          </a:fontRef>
-        </p:style>
-        <p:txBody>
-          <a:bodyPr rtlCol="0" anchor="ctr"/>
-          <a:lstStyle/>
-          <a:p>
-            <a:pPr algn="ctr"/>
-          </a:p>
-        </p:txBody>
-      </p:sp>
       <p:pic>
         <p:nvPicPr>
-          <p:cNvPr id="11" name="Picture 10" descr="cloud_twin.png"/>
-          <p:cNvPicPr>
-            <a:picLocks noChangeAspect="1"/>
-          </p:cNvPicPr>
-          <p:nvPr/>
-        </p:nvPicPr>
-        <p:blipFill>
-          <a:blip r:embed="rId3"/>
-          <a:stretch>
-            <a:fillRect/>
-          </a:stretch>
-        </p:blipFill>
-        <p:spPr>
-          <a:xfrm>
-            <a:off x="4703673" y="1636776"/>
-            <a:ext cx="438912" cy="438912"/>
-          </a:xfrm>
-          <a:prstGeom prst="rect">
-            <a:avLst/>
-          </a:prstGeom>
-        </p:spPr>
-      </p:pic>
-      <p:sp>
-        <p:nvSpPr>
-          <p:cNvPr id="12" name="TextBox 11"/>
-          <p:cNvSpPr txBox="1"/>
-          <p:nvPr/>
-        </p:nvSpPr>
-        <p:spPr>
-          <a:xfrm>
-            <a:off x="5234025" y="1581912"/>
-            <a:ext cx="2280513" cy="594360"/>
-          </a:xfrm>
-          <a:prstGeom prst="rect">
-            <a:avLst/>
-          </a:prstGeom>
-          <a:noFill/>
-        </p:spPr>
-        <p:txBody>
-          <a:bodyPr wrap="square" anchor="t" lIns="0" tIns="0" rIns="0" bIns="0">
-            <a:spAutoFit/>
-          </a:bodyPr>
-          <a:lstStyle/>
-          <a:p>
-            <a:pPr>
-              <a:spcAft>
-                <a:spcPts val="200"/>
-              </a:spcAft>
-              <a:defRPr sz="1000" b="1">
-                <a:solidFill>
-                  <a:srgbClr val="219EBC"/>
-                </a:solidFill>
-                <a:latin typeface="Calibri"/>
-              </a:defRPr>
-            </a:pPr>
-            <a:r>
-              <a:t>CLOUD SIMULATION &amp; AI CORE</a:t>
-            </a:r>
-          </a:p>
-          <a:p>
-            <a:pPr algn="l">
-              <a:defRPr sz="1900" b="1">
-                <a:solidFill>
-                  <a:srgbClr val="023047"/>
-                </a:solidFill>
-                <a:latin typeface="Calibri"/>
-              </a:defRPr>
-            </a:pPr>
-            <a:r>
-              <a:t>Predictive Digital Twin</a:t>
-            </a:r>
-          </a:p>
-        </p:txBody>
-      </p:sp>
-      <p:sp>
-        <p:nvSpPr>
-          <p:cNvPr id="13" name="TextBox 12"/>
-          <p:cNvSpPr txBox="1"/>
-          <p:nvPr/>
-        </p:nvSpPr>
-        <p:spPr>
-          <a:xfrm>
-            <a:off x="4721961" y="2258568"/>
-            <a:ext cx="2746857" cy="1737360"/>
-          </a:xfrm>
-          <a:prstGeom prst="rect">
-            <a:avLst/>
-          </a:prstGeom>
-          <a:noFill/>
-        </p:spPr>
-        <p:txBody>
-          <a:bodyPr wrap="square" anchor="t" lIns="0" tIns="0" rIns="0" bIns="0">
-            <a:spAutoFit/>
-          </a:bodyPr>
-          <a:lstStyle/>
-          <a:p>
-            <a:pPr algn="l">
-              <a:spcBef>
-                <a:spcPts val="0"/>
-              </a:spcBef>
-              <a:spcAft>
-                <a:spcPts val="600"/>
-              </a:spcAft>
-              <a:defRPr sz="1400">
-                <a:solidFill>
-                  <a:srgbClr val="023047"/>
-                </a:solidFill>
-                <a:latin typeface="Calibri"/>
-              </a:defRPr>
-            </a:pPr>
-            <a:r>
-              <a:t>-  Hydrodynamic river advection-dispersion engine</a:t>
-            </a:r>
-          </a:p>
-          <a:p>
-            <a:pPr algn="l">
-              <a:spcBef>
-                <a:spcPts val="0"/>
-              </a:spcBef>
-              <a:spcAft>
-                <a:spcPts val="600"/>
-              </a:spcAft>
-              <a:defRPr sz="1400">
-                <a:solidFill>
-                  <a:srgbClr val="023047"/>
-                </a:solidFill>
-                <a:latin typeface="Calibri"/>
-              </a:defRPr>
-            </a:pPr>
-            <a:r>
-              <a:t>-  Ingests live DWD storm radar &amp; river discharge</a:t>
-            </a:r>
-          </a:p>
-          <a:p>
-            <a:pPr algn="l">
-              <a:spcBef>
-                <a:spcPts val="0"/>
-              </a:spcBef>
-              <a:spcAft>
-                <a:spcPts val="600"/>
-              </a:spcAft>
-              <a:defRPr sz="1400">
-                <a:solidFill>
-                  <a:srgbClr val="023047"/>
-                </a:solidFill>
-                <a:latin typeface="Calibri"/>
-              </a:defRPr>
-            </a:pPr>
-            <a:r>
-              <a:t>-  Multi-objective solver computes optimal sampling</a:t>
-            </a:r>
-          </a:p>
-          <a:p>
-            <a:pPr algn="l">
-              <a:spcBef>
-                <a:spcPts val="0"/>
-              </a:spcBef>
-              <a:spcAft>
-                <a:spcPts val="600"/>
-              </a:spcAft>
-              <a:defRPr sz="1400">
-                <a:solidFill>
-                  <a:srgbClr val="023047"/>
-                </a:solidFill>
-                <a:latin typeface="Calibri"/>
-              </a:defRPr>
-            </a:pPr>
-            <a:r>
-              <a:t>-  Continuously directs robot where to navigate next</a:t>
-            </a:r>
-          </a:p>
-        </p:txBody>
-      </p:sp>
-      <p:sp>
-        <p:nvSpPr>
-          <p:cNvPr id="14" name="Rounded Rectangle 13"/>
-          <p:cNvSpPr/>
-          <p:nvPr/>
-        </p:nvSpPr>
-        <p:spPr>
-          <a:xfrm>
-            <a:off x="4685385" y="3931920"/>
-            <a:ext cx="2820009" cy="320040"/>
-          </a:xfrm>
-          <a:prstGeom prst="roundRect">
-            <a:avLst>
-              <a:gd name="adj" fmla="val 8000"/>
-            </a:avLst>
-          </a:prstGeom>
-          <a:solidFill>
-            <a:srgbClr val="EBF4FA"/>
-          </a:solidFill>
-          <a:ln w="12700">
-            <a:solidFill>
-              <a:srgbClr val="8ECAE6"/>
-            </a:solidFill>
-          </a:ln>
-        </p:spPr>
-        <p:style>
-          <a:lnRef idx="1">
-            <a:schemeClr val="accent1"/>
-          </a:lnRef>
-          <a:fillRef idx="3">
-            <a:schemeClr val="accent1"/>
-          </a:fillRef>
-          <a:effectRef idx="2">
-            <a:schemeClr val="accent1"/>
-          </a:effectRef>
-          <a:fontRef idx="minor">
-            <a:schemeClr val="lt1"/>
-          </a:fontRef>
-        </p:style>
-        <p:txBody>
-          <a:bodyPr rtlCol="0" anchor="ctr" wrap="square" lIns="137160" rIns="137160" tIns="0" bIns="0"/>
-          <a:lstStyle/>
-          <a:p>
-            <a:pPr algn="l">
-              <a:defRPr sz="1100" b="1">
-                <a:solidFill>
-                  <a:srgbClr val="219EBC"/>
-                </a:solidFill>
-                <a:latin typeface="Calibri"/>
-              </a:defRPr>
-            </a:pPr>
-            <a:r>
-              <a:t>Hydrodynamic Dispersion  |  Radar  |  Retasking</a:t>
-            </a:r>
-          </a:p>
-        </p:txBody>
-      </p:sp>
-      <p:sp>
-        <p:nvSpPr>
-          <p:cNvPr id="15" name="Right Arrow 14"/>
-          <p:cNvSpPr/>
-          <p:nvPr/>
-        </p:nvSpPr>
-        <p:spPr>
-          <a:xfrm>
-            <a:off x="7834578" y="2697480"/>
-            <a:ext cx="219456" cy="320040"/>
-          </a:xfrm>
-          <a:prstGeom prst="rightArrow">
-            <a:avLst/>
-          </a:prstGeom>
-          <a:solidFill>
-            <a:srgbClr val="219EBC"/>
-          </a:solidFill>
-          <a:ln>
-            <a:noFill/>
-          </a:ln>
-        </p:spPr>
-        <p:style>
-          <a:lnRef idx="1">
-            <a:schemeClr val="accent1"/>
-          </a:lnRef>
-          <a:fillRef idx="3">
-            <a:schemeClr val="accent1"/>
-          </a:fillRef>
-          <a:effectRef idx="2">
-            <a:schemeClr val="accent1"/>
-          </a:effectRef>
-          <a:fontRef idx="minor">
-            <a:schemeClr val="lt1"/>
-          </a:fontRef>
-        </p:style>
-        <p:txBody>
-          <a:bodyPr rtlCol="0" anchor="ctr"/>
-          <a:lstStyle/>
-          <a:p>
-            <a:pPr algn="ctr"/>
-          </a:p>
-        </p:txBody>
-      </p:sp>
-      <p:sp>
-        <p:nvSpPr>
-          <p:cNvPr id="16" name="Rounded Rectangle 15"/>
-          <p:cNvSpPr/>
-          <p:nvPr/>
-        </p:nvSpPr>
-        <p:spPr>
-          <a:xfrm>
-            <a:off x="8127186" y="1417320"/>
-            <a:ext cx="3332073" cy="2971800"/>
-          </a:xfrm>
-          <a:prstGeom prst="roundRect">
-            <a:avLst>
-              <a:gd name="adj" fmla="val 3500"/>
-            </a:avLst>
-          </a:prstGeom>
-          <a:solidFill>
-            <a:srgbClr val="F4F9FC"/>
-          </a:solidFill>
-          <a:ln w="19050">
-            <a:solidFill>
-              <a:srgbClr val="B4DAEE"/>
-            </a:solidFill>
-          </a:ln>
-        </p:spPr>
-        <p:style>
-          <a:lnRef idx="1">
-            <a:schemeClr val="accent1"/>
-          </a:lnRef>
-          <a:fillRef idx="3">
-            <a:schemeClr val="accent1"/>
-          </a:fillRef>
-          <a:effectRef idx="2">
-            <a:schemeClr val="accent1"/>
-          </a:effectRef>
-          <a:fontRef idx="minor">
-            <a:schemeClr val="lt1"/>
-          </a:fontRef>
-        </p:style>
-        <p:txBody>
-          <a:bodyPr rtlCol="0" anchor="ctr"/>
-          <a:lstStyle/>
-          <a:p>
-            <a:pPr algn="ctr"/>
-          </a:p>
-        </p:txBody>
-      </p:sp>
-      <p:pic>
-        <p:nvPicPr>
-          <p:cNvPr id="17" name="Picture 16" descr="digital_twin_3d.png"/>
+          <p:cNvPr id="12" name="Picture 11" descr="digital_twin_3d.png"/>
           <p:cNvPicPr>
             <a:picLocks noChangeAspect="1"/>
           </p:cNvPicPr>
@@ -7735,8 +6380,8 @@
         </p:blipFill>
         <p:spPr>
           <a:xfrm>
-            <a:off x="8401506" y="1636776"/>
-            <a:ext cx="438912" cy="438912"/>
+            <a:off x="8419794" y="1801368"/>
+            <a:ext cx="475488" cy="475488"/>
           </a:xfrm>
           <a:prstGeom prst="rect">
             <a:avLst/>
@@ -7745,14 +6390,14 @@
       </p:pic>
       <p:sp>
         <p:nvSpPr>
-          <p:cNvPr id="18" name="TextBox 17"/>
+          <p:cNvPr id="13" name="TextBox 12"/>
           <p:cNvSpPr txBox="1"/>
           <p:nvPr/>
         </p:nvSpPr>
         <p:spPr>
           <a:xfrm>
-            <a:off x="8931858" y="1581912"/>
-            <a:ext cx="2280513" cy="594360"/>
+            <a:off x="9005010" y="1764792"/>
+            <a:ext cx="2189073" cy="594360"/>
           </a:xfrm>
           <a:prstGeom prst="rect">
             <a:avLst/>
@@ -7765,31 +6410,15 @@
           </a:bodyPr>
           <a:lstStyle/>
           <a:p>
-            <a:pPr>
-              <a:spcAft>
-                <a:spcPts val="200"/>
-              </a:spcAft>
-              <a:defRPr sz="1000" b="1">
-                <a:solidFill>
-                  <a:srgbClr val="219EBC"/>
+            <a:pPr algn="l">
+              <a:defRPr sz="2000" b="1">
+                <a:solidFill>
+                  <a:srgbClr val="023047"/>
                 </a:solidFill>
                 <a:latin typeface="Calibri"/>
               </a:defRPr>
             </a:pPr>
             <a:r>
-              <a:t>DECISION &amp; COMPLIANCE LAYER</a:t>
-            </a:r>
-          </a:p>
-          <a:p>
-            <a:pPr algn="l">
-              <a:defRPr sz="1900" b="1">
-                <a:solidFill>
-                  <a:srgbClr val="023047"/>
-                </a:solidFill>
-                <a:latin typeface="Calibri"/>
-              </a:defRPr>
-            </a:pPr>
-            <a:r>
               <a:t>Municipal Command Center</a:t>
             </a:r>
           </a:p>
@@ -7797,14 +6426,14 @@
       </p:sp>
       <p:sp>
         <p:nvSpPr>
-          <p:cNvPr id="19" name="TextBox 18"/>
+          <p:cNvPr id="14" name="TextBox 13"/>
           <p:cNvSpPr txBox="1"/>
           <p:nvPr/>
         </p:nvSpPr>
         <p:spPr>
           <a:xfrm>
-            <a:off x="8419794" y="2258568"/>
-            <a:ext cx="2746857" cy="1737360"/>
+            <a:off x="8447226" y="2377440"/>
+            <a:ext cx="2691993" cy="3429000"/>
           </a:xfrm>
           <a:prstGeom prst="rect">
             <a:avLst/>
@@ -7822,9 +6451,9 @@
                 <a:spcPts val="0"/>
               </a:spcBef>
               <a:spcAft>
-                <a:spcPts val="600"/>
+                <a:spcPts val="1000"/>
               </a:spcAft>
-              <a:defRPr sz="1400">
+              <a:defRPr sz="1500">
                 <a:solidFill>
                   <a:srgbClr val="023047"/>
                 </a:solidFill>
@@ -7841,9 +6470,9 @@
                 <a:spcPts val="0"/>
               </a:spcBef>
               <a:spcAft>
-                <a:spcPts val="600"/>
+                <a:spcPts val="1000"/>
               </a:spcAft>
-              <a:defRPr sz="1400">
+              <a:defRPr sz="1500">
                 <a:solidFill>
                   <a:srgbClr val="023047"/>
                 </a:solidFill>
@@ -7860,9 +6489,9 @@
                 <a:spcPts val="0"/>
               </a:spcBef>
               <a:spcAft>
-                <a:spcPts val="600"/>
+                <a:spcPts val="1000"/>
               </a:spcAft>
-              <a:defRPr sz="1400">
+              <a:defRPr sz="1500">
                 <a:solidFill>
                   <a:srgbClr val="023047"/>
                 </a:solidFill>
@@ -7879,9 +6508,9 @@
                 <a:spcPts val="0"/>
               </a:spcBef>
               <a:spcAft>
-                <a:spcPts val="600"/>
+                <a:spcPts val="1000"/>
               </a:spcAft>
-              <a:defRPr sz="1400">
+              <a:defRPr sz="1500">
                 <a:solidFill>
                   <a:srgbClr val="023047"/>
                 </a:solidFill>
@@ -7890,428 +6519,6 @@
             </a:pPr>
             <a:r>
               <a:t>-  Automated statutory alerts (&lt;60s) to WWA &amp; SUN</a:t>
-            </a:r>
-          </a:p>
-        </p:txBody>
-      </p:sp>
-      <p:sp>
-        <p:nvSpPr>
-          <p:cNvPr id="20" name="Rounded Rectangle 19"/>
-          <p:cNvSpPr/>
-          <p:nvPr/>
-        </p:nvSpPr>
-        <p:spPr>
-          <a:xfrm>
-            <a:off x="8383218" y="3931920"/>
-            <a:ext cx="2820009" cy="320040"/>
-          </a:xfrm>
-          <a:prstGeom prst="roundRect">
-            <a:avLst>
-              <a:gd name="adj" fmla="val 8000"/>
-            </a:avLst>
-          </a:prstGeom>
-          <a:solidFill>
-            <a:srgbClr val="EBF4FA"/>
-          </a:solidFill>
-          <a:ln w="12700">
-            <a:solidFill>
-              <a:srgbClr val="8ECAE6"/>
-            </a:solidFill>
-          </a:ln>
-        </p:spPr>
-        <p:style>
-          <a:lnRef idx="1">
-            <a:schemeClr val="accent1"/>
-          </a:lnRef>
-          <a:fillRef idx="3">
-            <a:schemeClr val="accent1"/>
-          </a:fillRef>
-          <a:effectRef idx="2">
-            <a:schemeClr val="accent1"/>
-          </a:effectRef>
-          <a:fontRef idx="minor">
-            <a:schemeClr val="lt1"/>
-          </a:fontRef>
-        </p:style>
-        <p:txBody>
-          <a:bodyPr rtlCol="0" anchor="ctr" wrap="square" lIns="137160" rIns="137160" tIns="0" bIns="0"/>
-          <a:lstStyle/>
-          <a:p>
-            <a:pPr algn="l">
-              <a:defRPr sz="1100" b="1">
-                <a:solidFill>
-                  <a:srgbClr val="219EBC"/>
-                </a:solidFill>
-                <a:latin typeface="Calibri"/>
-              </a:defRPr>
-            </a:pPr>
-            <a:r>
-              <a:t>CesiumJS 3D  |  Bavarian LOD2  |  &lt; 60s Alerts</a:t>
-            </a:r>
-          </a:p>
-        </p:txBody>
-      </p:sp>
-      <p:sp>
-        <p:nvSpPr>
-          <p:cNvPr id="21" name="Rounded Rectangle 20"/>
-          <p:cNvSpPr/>
-          <p:nvPr/>
-        </p:nvSpPr>
-        <p:spPr>
-          <a:xfrm>
-            <a:off x="731520" y="4572000"/>
-            <a:ext cx="10728655" cy="1691640"/>
-          </a:xfrm>
-          <a:prstGeom prst="roundRect">
-            <a:avLst>
-              <a:gd name="adj" fmla="val 3500"/>
-            </a:avLst>
-          </a:prstGeom>
-          <a:solidFill>
-            <a:srgbClr val="F4F9FC"/>
-          </a:solidFill>
-          <a:ln w="19050">
-            <a:solidFill>
-              <a:srgbClr val="B4DAEE"/>
-            </a:solidFill>
-          </a:ln>
-        </p:spPr>
-        <p:style>
-          <a:lnRef idx="1">
-            <a:schemeClr val="accent1"/>
-          </a:lnRef>
-          <a:fillRef idx="3">
-            <a:schemeClr val="accent1"/>
-          </a:fillRef>
-          <a:effectRef idx="2">
-            <a:schemeClr val="accent1"/>
-          </a:effectRef>
-          <a:fontRef idx="minor">
-            <a:schemeClr val="lt1"/>
-          </a:fontRef>
-        </p:style>
-        <p:txBody>
-          <a:bodyPr rtlCol="0" anchor="t" wrap="square" lIns="320040" rIns="320040" tIns="164592"/>
-          <a:lstStyle/>
-          <a:p>
-            <a:pPr algn="ctr">
-              <a:spcAft>
-                <a:spcPts val="800"/>
-              </a:spcAft>
-              <a:defRPr sz="1100" b="1">
-                <a:solidFill>
-                  <a:srgbClr val="219EBC"/>
-                </a:solidFill>
-                <a:latin typeface="Calibri"/>
-              </a:defRPr>
-            </a:pPr>
-            <a:r>
-              <a:t>END-TO-END AUTONOMOUS ARCHITECTURE PIPELINE</a:t>
-            </a:r>
-          </a:p>
-        </p:txBody>
-      </p:sp>
-      <p:sp>
-        <p:nvSpPr>
-          <p:cNvPr id="22" name="Rounded Rectangle 21"/>
-          <p:cNvSpPr/>
-          <p:nvPr/>
-        </p:nvSpPr>
-        <p:spPr>
-          <a:xfrm>
-            <a:off x="1005840" y="4956048"/>
-            <a:ext cx="3154680" cy="1115568"/>
-          </a:xfrm>
-          <a:prstGeom prst="roundRect">
-            <a:avLst>
-              <a:gd name="adj" fmla="val 5000"/>
-            </a:avLst>
-          </a:prstGeom>
-          <a:solidFill>
-            <a:srgbClr val="FFFFFF"/>
-          </a:solidFill>
-          <a:ln w="12700">
-            <a:solidFill>
-              <a:srgbClr val="8ECAE6"/>
-            </a:solidFill>
-          </a:ln>
-        </p:spPr>
-        <p:style>
-          <a:lnRef idx="1">
-            <a:schemeClr val="accent1"/>
-          </a:lnRef>
-          <a:fillRef idx="3">
-            <a:schemeClr val="accent1"/>
-          </a:fillRef>
-          <a:effectRef idx="2">
-            <a:schemeClr val="accent1"/>
-          </a:effectRef>
-          <a:fontRef idx="minor">
-            <a:schemeClr val="lt1"/>
-          </a:fontRef>
-        </p:style>
-        <p:txBody>
-          <a:bodyPr rtlCol="0" anchor="t" wrap="square" lIns="109728" rIns="109728" tIns="109728"/>
-          <a:lstStyle/>
-          <a:p>
-            <a:pPr algn="ctr">
-              <a:defRPr sz="1200" b="1">
-                <a:solidFill>
-                  <a:srgbClr val="023047"/>
-                </a:solidFill>
-                <a:latin typeface="Calibri"/>
-              </a:defRPr>
-            </a:pPr>
-            <a:r>
-              <a:t>1. Aquatic In-River Sensing</a:t>
-            </a:r>
-          </a:p>
-          <a:p>
-            <a:pPr>
-              <a:spcBef>
-                <a:spcPts val="300"/>
-              </a:spcBef>
-              <a:defRPr sz="1050">
-                <a:solidFill>
-                  <a:srgbClr val="023047"/>
-                </a:solidFill>
-                <a:latin typeface="Calibri"/>
-              </a:defRPr>
-            </a:pPr>
-            <a:r>
-              <a:t>Autonomous surface vessel streams chemical telemetry, obstacle LiDAR scans, and GPS coordinates at 5 Hz.</a:t>
-            </a:r>
-          </a:p>
-        </p:txBody>
-      </p:sp>
-      <p:sp>
-        <p:nvSpPr>
-          <p:cNvPr id="23" name="Right Arrow 22"/>
-          <p:cNvSpPr/>
-          <p:nvPr/>
-        </p:nvSpPr>
-        <p:spPr>
-          <a:xfrm>
-            <a:off x="4270248" y="5394960"/>
-            <a:ext cx="228600" cy="256032"/>
-          </a:xfrm>
-          <a:prstGeom prst="rightArrow">
-            <a:avLst/>
-          </a:prstGeom>
-          <a:solidFill>
-            <a:srgbClr val="219EBC"/>
-          </a:solidFill>
-          <a:ln>
-            <a:noFill/>
-          </a:ln>
-        </p:spPr>
-        <p:style>
-          <a:lnRef idx="1">
-            <a:schemeClr val="accent1"/>
-          </a:lnRef>
-          <a:fillRef idx="3">
-            <a:schemeClr val="accent1"/>
-          </a:fillRef>
-          <a:effectRef idx="2">
-            <a:schemeClr val="accent1"/>
-          </a:effectRef>
-          <a:fontRef idx="minor">
-            <a:schemeClr val="lt1"/>
-          </a:fontRef>
-        </p:style>
-        <p:txBody>
-          <a:bodyPr rtlCol="0" anchor="ctr"/>
-          <a:lstStyle/>
-          <a:p>
-            <a:pPr algn="ctr"/>
-          </a:p>
-        </p:txBody>
-      </p:sp>
-      <p:sp>
-        <p:nvSpPr>
-          <p:cNvPr id="24" name="Rounded Rectangle 23"/>
-          <p:cNvSpPr/>
-          <p:nvPr/>
-        </p:nvSpPr>
-        <p:spPr>
-          <a:xfrm>
-            <a:off x="4617720" y="4956048"/>
-            <a:ext cx="3154680" cy="1115568"/>
-          </a:xfrm>
-          <a:prstGeom prst="roundRect">
-            <a:avLst>
-              <a:gd name="adj" fmla="val 5000"/>
-            </a:avLst>
-          </a:prstGeom>
-          <a:solidFill>
-            <a:srgbClr val="FFFFFF"/>
-          </a:solidFill>
-          <a:ln w="12700">
-            <a:solidFill>
-              <a:srgbClr val="8ECAE6"/>
-            </a:solidFill>
-          </a:ln>
-        </p:spPr>
-        <p:style>
-          <a:lnRef idx="1">
-            <a:schemeClr val="accent1"/>
-          </a:lnRef>
-          <a:fillRef idx="3">
-            <a:schemeClr val="accent1"/>
-          </a:fillRef>
-          <a:effectRef idx="2">
-            <a:schemeClr val="accent1"/>
-          </a:effectRef>
-          <a:fontRef idx="minor">
-            <a:schemeClr val="lt1"/>
-          </a:fontRef>
-        </p:style>
-        <p:txBody>
-          <a:bodyPr rtlCol="0" anchor="t" wrap="square" lIns="109728" rIns="109728" tIns="109728"/>
-          <a:lstStyle/>
-          <a:p>
-            <a:pPr algn="ctr">
-              <a:defRPr sz="1200" b="1">
-                <a:solidFill>
-                  <a:srgbClr val="023047"/>
-                </a:solidFill>
-                <a:latin typeface="Calibri"/>
-              </a:defRPr>
-            </a:pPr>
-            <a:r>
-              <a:t>2. Predictive Digital Twin</a:t>
-            </a:r>
-          </a:p>
-          <a:p>
-            <a:pPr>
-              <a:spcBef>
-                <a:spcPts val="300"/>
-              </a:spcBef>
-              <a:defRPr sz="1050">
-                <a:solidFill>
-                  <a:srgbClr val="023047"/>
-                </a:solidFill>
-                <a:latin typeface="Calibri"/>
-              </a:defRPr>
-            </a:pPr>
-            <a:r>
-              <a:t>Cloud twin simulates hydrodynamics, assimilates storm radar, and computes optimal upstream waypoints.</a:t>
-            </a:r>
-          </a:p>
-        </p:txBody>
-      </p:sp>
-      <p:sp>
-        <p:nvSpPr>
-          <p:cNvPr id="25" name="Right Arrow 24"/>
-          <p:cNvSpPr/>
-          <p:nvPr/>
-        </p:nvSpPr>
-        <p:spPr>
-          <a:xfrm>
-            <a:off x="7882128" y="5394960"/>
-            <a:ext cx="228600" cy="256032"/>
-          </a:xfrm>
-          <a:prstGeom prst="rightArrow">
-            <a:avLst/>
-          </a:prstGeom>
-          <a:solidFill>
-            <a:srgbClr val="219EBC"/>
-          </a:solidFill>
-          <a:ln>
-            <a:noFill/>
-          </a:ln>
-        </p:spPr>
-        <p:style>
-          <a:lnRef idx="1">
-            <a:schemeClr val="accent1"/>
-          </a:lnRef>
-          <a:fillRef idx="3">
-            <a:schemeClr val="accent1"/>
-          </a:fillRef>
-          <a:effectRef idx="2">
-            <a:schemeClr val="accent1"/>
-          </a:effectRef>
-          <a:fontRef idx="minor">
-            <a:schemeClr val="lt1"/>
-          </a:fontRef>
-        </p:style>
-        <p:txBody>
-          <a:bodyPr rtlCol="0" anchor="ctr"/>
-          <a:lstStyle/>
-          <a:p>
-            <a:pPr algn="ctr"/>
-          </a:p>
-        </p:txBody>
-      </p:sp>
-      <p:sp>
-        <p:nvSpPr>
-          <p:cNvPr id="26" name="Rounded Rectangle 25"/>
-          <p:cNvSpPr/>
-          <p:nvPr/>
-        </p:nvSpPr>
-        <p:spPr>
-          <a:xfrm>
-            <a:off x="8229600" y="4956048"/>
-            <a:ext cx="3154680" cy="1115568"/>
-          </a:xfrm>
-          <a:prstGeom prst="roundRect">
-            <a:avLst>
-              <a:gd name="adj" fmla="val 5000"/>
-            </a:avLst>
-          </a:prstGeom>
-          <a:solidFill>
-            <a:srgbClr val="FFFFFF"/>
-          </a:solidFill>
-          <a:ln w="12700">
-            <a:solidFill>
-              <a:srgbClr val="8ECAE6"/>
-            </a:solidFill>
-          </a:ln>
-        </p:spPr>
-        <p:style>
-          <a:lnRef idx="1">
-            <a:schemeClr val="accent1"/>
-          </a:lnRef>
-          <a:fillRef idx="3">
-            <a:schemeClr val="accent1"/>
-          </a:fillRef>
-          <a:effectRef idx="2">
-            <a:schemeClr val="accent1"/>
-          </a:effectRef>
-          <a:fontRef idx="minor">
-            <a:schemeClr val="lt1"/>
-          </a:fontRef>
-        </p:style>
-        <p:txBody>
-          <a:bodyPr rtlCol="0" anchor="t" wrap="square" lIns="109728" rIns="109728" tIns="109728"/>
-          <a:lstStyle/>
-          <a:p>
-            <a:pPr algn="ctr">
-              <a:defRPr sz="1200" b="1">
-                <a:solidFill>
-                  <a:srgbClr val="023047"/>
-                </a:solidFill>
-                <a:latin typeface="Calibri"/>
-              </a:defRPr>
-            </a:pPr>
-            <a:r>
-              <a:t>3. City &amp; Authority Actions</a:t>
-            </a:r>
-          </a:p>
-          <a:p>
-            <a:pPr>
-              <a:spcBef>
-                <a:spcPts val="300"/>
-              </a:spcBef>
-              <a:defRPr sz="1050">
-                <a:solidFill>
-                  <a:srgbClr val="023047"/>
-                </a:solidFill>
-                <a:latin typeface="Calibri"/>
-              </a:defRPr>
-            </a:pPr>
-            <a:r>
-              <a:t>CesiumJS renders live 3D risk heatmaps, updates outfall asset health, and dispatches statutory alerts.</a:t>
             </a:r>
           </a:p>
         </p:txBody>
@@ -8350,8 +6557,8 @@
         </p:nvSpPr>
         <p:spPr>
           <a:xfrm>
-            <a:off x="731520" y="411480"/>
-            <a:ext cx="9144000" cy="292608"/>
+            <a:off x="731520" y="502920"/>
+            <a:ext cx="10728655" cy="777240"/>
           </a:xfrm>
           <a:prstGeom prst="rect">
             <a:avLst/>
@@ -8364,51 +6571,15 @@
           </a:bodyPr>
           <a:lstStyle/>
           <a:p>
-            <a:pPr>
-              <a:defRPr sz="1100" b="1">
-                <a:solidFill>
-                  <a:srgbClr val="219EBC"/>
+            <a:pPr algn="l">
+              <a:defRPr sz="3800" b="1">
+                <a:solidFill>
+                  <a:srgbClr val="023047"/>
                 </a:solidFill>
                 <a:latin typeface="Calibri"/>
               </a:defRPr>
             </a:pPr>
             <a:r>
-              <a:t>TECHNICAL SOLUTION 2/3</a:t>
-            </a:r>
-          </a:p>
-        </p:txBody>
-      </p:sp>
-      <p:sp>
-        <p:nvSpPr>
-          <p:cNvPr id="3" name="TextBox 2"/>
-          <p:cNvSpPr txBox="1"/>
-          <p:nvPr/>
-        </p:nvSpPr>
-        <p:spPr>
-          <a:xfrm>
-            <a:off x="731520" y="658368"/>
-            <a:ext cx="10728655" cy="640080"/>
-          </a:xfrm>
-          <a:prstGeom prst="rect">
-            <a:avLst/>
-          </a:prstGeom>
-          <a:noFill/>
-        </p:spPr>
-        <p:txBody>
-          <a:bodyPr wrap="square" anchor="t" lIns="0" tIns="0" rIns="0" bIns="0">
-            <a:spAutoFit/>
-          </a:bodyPr>
-          <a:lstStyle/>
-          <a:p>
-            <a:pPr algn="l">
-              <a:defRPr sz="3600" b="1">
-                <a:solidFill>
-                  <a:srgbClr val="023047"/>
-                </a:solidFill>
-                <a:latin typeface="Calibri"/>
-              </a:defRPr>
-            </a:pPr>
-            <a:r>
               <a:t>Autonomous Closed-Loop Guidance</a:t>
             </a:r>
           </a:p>
@@ -8416,14 +6587,14 @@
       </p:sp>
       <p:sp>
         <p:nvSpPr>
-          <p:cNvPr id="4" name="Rounded Rectangle 3"/>
+          <p:cNvPr id="3" name="Rounded Rectangle 2"/>
           <p:cNvSpPr/>
           <p:nvPr/>
         </p:nvSpPr>
         <p:spPr>
           <a:xfrm>
-            <a:off x="731520" y="1417320"/>
-            <a:ext cx="5180990" cy="2926080"/>
+            <a:off x="731520" y="1508760"/>
+            <a:ext cx="5180990" cy="4389120"/>
           </a:xfrm>
           <a:prstGeom prst="roundRect">
             <a:avLst>
@@ -8463,7 +6634,7 @@
       </p:sp>
       <p:pic>
         <p:nvPicPr>
-          <p:cNvPr id="5" name="Picture 4" descr="adaptive_retask.png"/>
+          <p:cNvPr id="4" name="Picture 3" descr="adaptive_retask.png"/>
           <p:cNvPicPr>
             <a:picLocks noChangeAspect="1"/>
           </p:cNvPicPr>
@@ -8477,8 +6648,8 @@
         </p:blipFill>
         <p:spPr>
           <a:xfrm>
-            <a:off x="1005840" y="1636776"/>
-            <a:ext cx="438912" cy="438912"/>
+            <a:off x="1024128" y="1801368"/>
+            <a:ext cx="475488" cy="475488"/>
           </a:xfrm>
           <a:prstGeom prst="rect">
             <a:avLst/>
@@ -8487,14 +6658,14 @@
       </p:pic>
       <p:sp>
         <p:nvSpPr>
-          <p:cNvPr id="6" name="TextBox 5"/>
+          <p:cNvPr id="5" name="TextBox 4"/>
           <p:cNvSpPr txBox="1"/>
           <p:nvPr/>
         </p:nvSpPr>
         <p:spPr>
           <a:xfrm>
-            <a:off x="1536192" y="1581912"/>
-            <a:ext cx="4129430" cy="594360"/>
+            <a:off x="1609344" y="1764792"/>
+            <a:ext cx="4037990" cy="594360"/>
           </a:xfrm>
           <a:prstGeom prst="rect">
             <a:avLst/>
@@ -8507,31 +6678,15 @@
           </a:bodyPr>
           <a:lstStyle/>
           <a:p>
-            <a:pPr>
-              <a:spcAft>
-                <a:spcPts val="200"/>
-              </a:spcAft>
-              <a:defRPr sz="1000" b="1">
-                <a:solidFill>
-                  <a:srgbClr val="219EBC"/>
+            <a:pPr algn="l">
+              <a:defRPr sz="2200" b="1">
+                <a:solidFill>
+                  <a:srgbClr val="023047"/>
                 </a:solidFill>
                 <a:latin typeface="Calibri"/>
               </a:defRPr>
             </a:pPr>
             <a:r>
-              <a:t>AUTONOMY CORE</a:t>
-            </a:r>
-          </a:p>
-          <a:p>
-            <a:pPr algn="l">
-              <a:defRPr sz="2100" b="1">
-                <a:solidFill>
-                  <a:srgbClr val="023047"/>
-                </a:solidFill>
-                <a:latin typeface="Calibri"/>
-              </a:defRPr>
-            </a:pPr>
-            <a:r>
               <a:t>4D Adaptive Retasking</a:t>
             </a:r>
           </a:p>
@@ -8539,14 +6694,14 @@
       </p:sp>
       <p:sp>
         <p:nvSpPr>
-          <p:cNvPr id="7" name="TextBox 6"/>
+          <p:cNvPr id="6" name="TextBox 5"/>
           <p:cNvSpPr txBox="1"/>
           <p:nvPr/>
         </p:nvSpPr>
         <p:spPr>
           <a:xfrm>
-            <a:off x="1024128" y="2258568"/>
-            <a:ext cx="4595774" cy="1691640"/>
+            <a:off x="1051560" y="2377440"/>
+            <a:ext cx="4540910" cy="3429000"/>
           </a:xfrm>
           <a:prstGeom prst="rect">
             <a:avLst/>
@@ -8564,9 +6719,9 @@
                 <a:spcPts val="0"/>
               </a:spcBef>
               <a:spcAft>
-                <a:spcPts val="600"/>
+                <a:spcPts val="1000"/>
               </a:spcAft>
-              <a:defRPr sz="1500">
+              <a:defRPr sz="1600">
                 <a:solidFill>
                   <a:srgbClr val="023047"/>
                 </a:solidFill>
@@ -8574,7 +6729,7 @@
               </a:defRPr>
             </a:pPr>
             <a:r>
-              <a:t>-  Chemical Gradient: homes upstream to leaking pipe</a:t>
+              <a:t>-  Dynamically recomputes waypoints in real time</a:t>
             </a:r>
           </a:p>
           <a:p>
@@ -8583,9 +6738,9 @@
                 <a:spcPts val="0"/>
               </a:spcBef>
               <a:spcAft>
-                <a:spcPts val="600"/>
+                <a:spcPts val="1000"/>
               </a:spcAft>
-              <a:defRPr sz="1500">
+              <a:defRPr sz="1600">
                 <a:solidFill>
                   <a:srgbClr val="023047"/>
                 </a:solidFill>
@@ -8593,7 +6748,7 @@
               </a:defRPr>
             </a:pPr>
             <a:r>
-              <a:t>-  Storm Rain Radar: pre-positions vessel before runoff</a:t>
+              <a:t>-  Chemical Gradient: homes upstream to leaking pipe</a:t>
             </a:r>
           </a:p>
           <a:p>
@@ -8602,9 +6757,9 @@
                 <a:spcPts val="0"/>
               </a:spcBef>
               <a:spcAft>
-                <a:spcPts val="600"/>
+                <a:spcPts val="1000"/>
               </a:spcAft>
-              <a:defRPr sz="1500">
+              <a:defRPr sz="1600">
                 <a:solidFill>
                   <a:srgbClr val="023047"/>
                 </a:solidFill>
@@ -8612,7 +6767,7 @@
               </a:defRPr>
             </a:pPr>
             <a:r>
-              <a:t>-  Data Freshness: prioritizes unvisited river reaches</a:t>
+              <a:t>-  Storm Rain Radar: pre-positions vessel before runoff</a:t>
             </a:r>
           </a:p>
           <a:p>
@@ -8621,9 +6776,9 @@
                 <a:spcPts val="0"/>
               </a:spcBef>
               <a:spcAft>
-                <a:spcPts val="600"/>
+                <a:spcPts val="1000"/>
               </a:spcAft>
-              <a:defRPr sz="1500">
+              <a:defRPr sz="1600">
                 <a:solidFill>
                   <a:srgbClr val="023047"/>
                 </a:solidFill>
@@ -8631,6 +6786,25 @@
               </a:defRPr>
             </a:pPr>
             <a:r>
+              <a:t>-  Data Freshness: prioritizes unvisited river reaches</a:t>
+            </a:r>
+          </a:p>
+          <a:p>
+            <a:pPr algn="l">
+              <a:spcBef>
+                <a:spcPts val="0"/>
+              </a:spcBef>
+              <a:spcAft>
+                <a:spcPts val="1000"/>
+              </a:spcAft>
+              <a:defRPr sz="1600">
+                <a:solidFill>
+                  <a:srgbClr val="023047"/>
+                </a:solidFill>
+                <a:latin typeface="Calibri"/>
+              </a:defRPr>
+            </a:pPr>
+            <a:r>
               <a:t>-  Dynamic goal updates dispatched in under 35 seconds</a:t>
             </a:r>
           </a:p>
@@ -8638,26 +6812,26 @@
       </p:sp>
       <p:sp>
         <p:nvSpPr>
-          <p:cNvPr id="8" name="Rounded Rectangle 7"/>
+          <p:cNvPr id="7" name="Rounded Rectangle 6"/>
           <p:cNvSpPr/>
           <p:nvPr/>
         </p:nvSpPr>
         <p:spPr>
           <a:xfrm>
-            <a:off x="987552" y="3886200"/>
-            <a:ext cx="4668926" cy="320040"/>
+            <a:off x="6278270" y="1508760"/>
+            <a:ext cx="5180990" cy="4389120"/>
           </a:xfrm>
           <a:prstGeom prst="roundRect">
             <a:avLst>
-              <a:gd name="adj" fmla="val 8000"/>
+              <a:gd name="adj" fmla="val 3500"/>
             </a:avLst>
           </a:prstGeom>
           <a:solidFill>
-            <a:srgbClr val="EBF4FA"/>
+            <a:srgbClr val="F4F9FC"/>
           </a:solidFill>
-          <a:ln w="12700">
+          <a:ln w="19050">
             <a:solidFill>
-              <a:srgbClr val="8ECAE6"/>
+              <a:srgbClr val="B4DAEE"/>
             </a:solidFill>
           </a:ln>
         </p:spPr>
@@ -8676,63 +6850,6 @@
           </a:fontRef>
         </p:style>
         <p:txBody>
-          <a:bodyPr rtlCol="0" anchor="ctr" wrap="square" lIns="137160" rIns="137160" tIns="0" bIns="0"/>
-          <a:lstStyle/>
-          <a:p>
-            <a:pPr algn="l">
-              <a:defRPr sz="1100" b="1">
-                <a:solidFill>
-                  <a:srgbClr val="219EBC"/>
-                </a:solidFill>
-                <a:latin typeface="Calibri"/>
-              </a:defRPr>
-            </a:pPr>
-            <a:r>
-              <a:t>Multi-Objective Optimizer  |  Upstream Gradient Homing  |  &lt; 35s Loop</a:t>
-            </a:r>
-          </a:p>
-        </p:txBody>
-      </p:sp>
-      <p:sp>
-        <p:nvSpPr>
-          <p:cNvPr id="9" name="Rounded Rectangle 8"/>
-          <p:cNvSpPr/>
-          <p:nvPr/>
-        </p:nvSpPr>
-        <p:spPr>
-          <a:xfrm>
-            <a:off x="6278270" y="1417320"/>
-            <a:ext cx="5180990" cy="2926080"/>
-          </a:xfrm>
-          <a:prstGeom prst="roundRect">
-            <a:avLst>
-              <a:gd name="adj" fmla="val 3500"/>
-            </a:avLst>
-          </a:prstGeom>
-          <a:solidFill>
-            <a:srgbClr val="F4F9FC"/>
-          </a:solidFill>
-          <a:ln w="19050">
-            <a:solidFill>
-              <a:srgbClr val="B4DAEE"/>
-            </a:solidFill>
-          </a:ln>
-        </p:spPr>
-        <p:style>
-          <a:lnRef idx="1">
-            <a:schemeClr val="accent1"/>
-          </a:lnRef>
-          <a:fillRef idx="3">
-            <a:schemeClr val="accent1"/>
-          </a:fillRef>
-          <a:effectRef idx="2">
-            <a:schemeClr val="accent1"/>
-          </a:effectRef>
-          <a:fontRef idx="minor">
-            <a:schemeClr val="lt1"/>
-          </a:fontRef>
-        </p:style>
-        <p:txBody>
           <a:bodyPr rtlCol="0" anchor="ctr"/>
           <a:lstStyle/>
           <a:p>
@@ -8742,7 +6859,7 @@
       </p:sp>
       <p:pic>
         <p:nvPicPr>
-          <p:cNvPr id="10" name="Picture 9" descr="safety_resilience.png"/>
+          <p:cNvPr id="8" name="Picture 7" descr="safety_resilience.png"/>
           <p:cNvPicPr>
             <a:picLocks noChangeAspect="1"/>
           </p:cNvPicPr>
@@ -8756,8 +6873,8 @@
         </p:blipFill>
         <p:spPr>
           <a:xfrm>
-            <a:off x="6552590" y="1636776"/>
-            <a:ext cx="438912" cy="438912"/>
+            <a:off x="6570878" y="1801368"/>
+            <a:ext cx="475488" cy="475488"/>
           </a:xfrm>
           <a:prstGeom prst="rect">
             <a:avLst/>
@@ -8766,14 +6883,14 @@
       </p:pic>
       <p:sp>
         <p:nvSpPr>
-          <p:cNvPr id="11" name="TextBox 10"/>
+          <p:cNvPr id="9" name="TextBox 8"/>
           <p:cNvSpPr txBox="1"/>
           <p:nvPr/>
         </p:nvSpPr>
         <p:spPr>
           <a:xfrm>
-            <a:off x="7082942" y="1581912"/>
-            <a:ext cx="4129430" cy="594360"/>
+            <a:off x="7156094" y="1764792"/>
+            <a:ext cx="4037990" cy="594360"/>
           </a:xfrm>
           <a:prstGeom prst="rect">
             <a:avLst/>
@@ -8786,31 +6903,15 @@
           </a:bodyPr>
           <a:lstStyle/>
           <a:p>
-            <a:pPr>
-              <a:spcAft>
-                <a:spcPts val="200"/>
-              </a:spcAft>
-              <a:defRPr sz="1000" b="1">
-                <a:solidFill>
-                  <a:srgbClr val="219EBC"/>
+            <a:pPr algn="l">
+              <a:defRPr sz="2200" b="1">
+                <a:solidFill>
+                  <a:srgbClr val="023047"/>
                 </a:solidFill>
                 <a:latin typeface="Calibri"/>
               </a:defRPr>
             </a:pPr>
             <a:r>
-              <a:t>DIGITAL TWIN RATIONALE</a:t>
-            </a:r>
-          </a:p>
-          <a:p>
-            <a:pPr algn="l">
-              <a:defRPr sz="2100" b="1">
-                <a:solidFill>
-                  <a:srgbClr val="023047"/>
-                </a:solidFill>
-                <a:latin typeface="Calibri"/>
-              </a:defRPr>
-            </a:pPr>
-            <a:r>
               <a:t>Why Digital Twinning?</a:t>
             </a:r>
           </a:p>
@@ -8818,14 +6919,14 @@
       </p:sp>
       <p:sp>
         <p:nvSpPr>
-          <p:cNvPr id="12" name="TextBox 11"/>
+          <p:cNvPr id="10" name="TextBox 9"/>
           <p:cNvSpPr txBox="1"/>
           <p:nvPr/>
         </p:nvSpPr>
         <p:spPr>
           <a:xfrm>
-            <a:off x="6570878" y="2258568"/>
-            <a:ext cx="4595774" cy="1691640"/>
+            <a:off x="6598310" y="2377440"/>
+            <a:ext cx="4540910" cy="3429000"/>
           </a:xfrm>
           <a:prstGeom prst="rect">
             <a:avLst/>
@@ -8843,9 +6944,9 @@
                 <a:spcPts val="0"/>
               </a:spcBef>
               <a:spcAft>
-                <a:spcPts val="600"/>
+                <a:spcPts val="1000"/>
               </a:spcAft>
-              <a:defRPr sz="1500">
+              <a:defRPr sz="1600">
                 <a:solidFill>
                   <a:srgbClr val="023047"/>
                 </a:solidFill>
@@ -8862,9 +6963,9 @@
                 <a:spcPts val="0"/>
               </a:spcBef>
               <a:spcAft>
-                <a:spcPts val="600"/>
+                <a:spcPts val="1000"/>
               </a:spcAft>
-              <a:defRPr sz="1500">
+              <a:defRPr sz="1600">
                 <a:solidFill>
                   <a:srgbClr val="023047"/>
                 </a:solidFill>
@@ -8881,9 +6982,9 @@
                 <a:spcPts val="0"/>
               </a:spcBef>
               <a:spcAft>
-                <a:spcPts val="600"/>
+                <a:spcPts val="1000"/>
               </a:spcAft>
-              <a:defRPr sz="1500">
+              <a:defRPr sz="1600">
                 <a:solidFill>
                   <a:srgbClr val="023047"/>
                 </a:solidFill>
@@ -8900,9 +7001,9 @@
                 <a:spcPts val="0"/>
               </a:spcBef>
               <a:spcAft>
-                <a:spcPts val="600"/>
+                <a:spcPts val="1000"/>
               </a:spcAft>
-              <a:defRPr sz="1500">
+              <a:defRPr sz="1600">
                 <a:solidFill>
                   <a:srgbClr val="023047"/>
                 </a:solidFill>
@@ -8913,606 +7014,23 @@
               <a:t>-  Continuous feedback synchronizes twin with physical state</a:t>
             </a:r>
           </a:p>
-        </p:txBody>
-      </p:sp>
-      <p:sp>
-        <p:nvSpPr>
-          <p:cNvPr id="13" name="Rounded Rectangle 12"/>
-          <p:cNvSpPr/>
-          <p:nvPr/>
-        </p:nvSpPr>
-        <p:spPr>
-          <a:xfrm>
-            <a:off x="6534302" y="3886200"/>
-            <a:ext cx="4668926" cy="320040"/>
-          </a:xfrm>
-          <a:prstGeom prst="roundRect">
-            <a:avLst>
-              <a:gd name="adj" fmla="val 8000"/>
-            </a:avLst>
-          </a:prstGeom>
-          <a:solidFill>
-            <a:srgbClr val="EBF4FA"/>
-          </a:solidFill>
-          <a:ln w="12700">
-            <a:solidFill>
-              <a:srgbClr val="8ECAE6"/>
-            </a:solidFill>
-          </a:ln>
-        </p:spPr>
-        <p:style>
-          <a:lnRef idx="1">
-            <a:schemeClr val="accent1"/>
-          </a:lnRef>
-          <a:fillRef idx="3">
-            <a:schemeClr val="accent1"/>
-          </a:fillRef>
-          <a:effectRef idx="2">
-            <a:schemeClr val="accent1"/>
-          </a:effectRef>
-          <a:fontRef idx="minor">
-            <a:schemeClr val="lt1"/>
-          </a:fontRef>
-        </p:style>
-        <p:txBody>
-          <a:bodyPr rtlCol="0" anchor="ctr" wrap="square" lIns="137160" rIns="137160" tIns="0" bIns="0"/>
-          <a:lstStyle/>
           <a:p>
             <a:pPr algn="l">
-              <a:defRPr sz="1100" b="1">
-                <a:solidFill>
-                  <a:srgbClr val="219EBC"/>
+              <a:spcBef>
+                <a:spcPts val="0"/>
+              </a:spcBef>
+              <a:spcAft>
+                <a:spcPts val="1000"/>
+              </a:spcAft>
+              <a:defRPr sz="1600">
+                <a:solidFill>
+                  <a:srgbClr val="023047"/>
                 </a:solidFill>
                 <a:latin typeface="Calibri"/>
               </a:defRPr>
             </a:pPr>
             <a:r>
-              <a:t>Solves Point Dilution  |  Predictive Protection  |  CapEx Optimization</a:t>
-            </a:r>
-          </a:p>
-        </p:txBody>
-      </p:sp>
-      <p:sp>
-        <p:nvSpPr>
-          <p:cNvPr id="14" name="Rounded Rectangle 13"/>
-          <p:cNvSpPr/>
-          <p:nvPr/>
-        </p:nvSpPr>
-        <p:spPr>
-          <a:xfrm>
-            <a:off x="731520" y="4526280"/>
-            <a:ext cx="10728655" cy="1783080"/>
-          </a:xfrm>
-          <a:prstGeom prst="roundRect">
-            <a:avLst>
-              <a:gd name="adj" fmla="val 3500"/>
-            </a:avLst>
-          </a:prstGeom>
-          <a:solidFill>
-            <a:srgbClr val="F4F9FC"/>
-          </a:solidFill>
-          <a:ln w="19050">
-            <a:solidFill>
-              <a:srgbClr val="B4DAEE"/>
-            </a:solidFill>
-          </a:ln>
-        </p:spPr>
-        <p:style>
-          <a:lnRef idx="1">
-            <a:schemeClr val="accent1"/>
-          </a:lnRef>
-          <a:fillRef idx="3">
-            <a:schemeClr val="accent1"/>
-          </a:fillRef>
-          <a:effectRef idx="2">
-            <a:schemeClr val="accent1"/>
-          </a:effectRef>
-          <a:fontRef idx="minor">
-            <a:schemeClr val="lt1"/>
-          </a:fontRef>
-        </p:style>
-        <p:txBody>
-          <a:bodyPr rtlCol="0" anchor="t" wrap="square" lIns="320040" rIns="320040" tIns="164592"/>
-          <a:lstStyle/>
-          <a:p>
-            <a:pPr algn="ctr">
-              <a:spcAft>
-                <a:spcPts val="800"/>
-              </a:spcAft>
-              <a:defRPr sz="1100" b="1">
-                <a:solidFill>
-                  <a:srgbClr val="219EBC"/>
-                </a:solidFill>
-                <a:latin typeface="Calibri"/>
-              </a:defRPr>
-            </a:pPr>
-            <a:r>
-              <a:t>THE 4D AUTONOMOUS DECISION CYCLE (CONTINUOUS CLOSED LOOP)</a:t>
-            </a:r>
-          </a:p>
-        </p:txBody>
-      </p:sp>
-      <p:sp>
-        <p:nvSpPr>
-          <p:cNvPr id="15" name="Rounded Rectangle 14"/>
-          <p:cNvSpPr/>
-          <p:nvPr/>
-        </p:nvSpPr>
-        <p:spPr>
-          <a:xfrm>
-            <a:off x="960120" y="4919472"/>
-            <a:ext cx="2240280" cy="1188720"/>
-          </a:xfrm>
-          <a:prstGeom prst="roundRect">
-            <a:avLst>
-              <a:gd name="adj" fmla="val 6000"/>
-            </a:avLst>
-          </a:prstGeom>
-          <a:solidFill>
-            <a:srgbClr val="FFFFFF"/>
-          </a:solidFill>
-          <a:ln w="12700">
-            <a:solidFill>
-              <a:srgbClr val="8ECAE6"/>
-            </a:solidFill>
-          </a:ln>
-        </p:spPr>
-        <p:style>
-          <a:lnRef idx="1">
-            <a:schemeClr val="accent1"/>
-          </a:lnRef>
-          <a:fillRef idx="3">
-            <a:schemeClr val="accent1"/>
-          </a:fillRef>
-          <a:effectRef idx="2">
-            <a:schemeClr val="accent1"/>
-          </a:effectRef>
-          <a:fontRef idx="minor">
-            <a:schemeClr val="lt1"/>
-          </a:fontRef>
-        </p:style>
-        <p:txBody>
-          <a:bodyPr rtlCol="0" anchor="t" wrap="square" lIns="109728" rIns="109728" tIns="109728"/>
-          <a:lstStyle/>
-          <a:p>
-            <a:pPr algn="ctr">
-              <a:defRPr sz="1050" b="1">
-                <a:solidFill>
-                  <a:srgbClr val="219EBC"/>
-                </a:solidFill>
-                <a:latin typeface="Calibri"/>
-              </a:defRPr>
-            </a:pPr>
-            <a:r>
-              <a:t>1. SENSE</a:t>
-            </a:r>
-          </a:p>
-          <a:p>
-            <a:pPr>
-              <a:spcBef>
-                <a:spcPts val="100"/>
-              </a:spcBef>
-              <a:defRPr sz="1200" b="1">
-                <a:solidFill>
-                  <a:srgbClr val="023047"/>
-                </a:solidFill>
-                <a:latin typeface="Calibri"/>
-              </a:defRPr>
-            </a:pPr>
-            <a:r>
-              <a:t>Gradient Spike</a:t>
-            </a:r>
-          </a:p>
-          <a:p>
-            <a:pPr>
-              <a:spcBef>
-                <a:spcPts val="300"/>
-              </a:spcBef>
-              <a:defRPr sz="1000">
-                <a:solidFill>
-                  <a:srgbClr val="023047"/>
-                </a:solidFill>
-                <a:latin typeface="Calibri"/>
-              </a:defRPr>
-            </a:pPr>
-            <a:r>
-              <a:t>Mobile payload detects ammonium spike above baseline.</a:t>
-            </a:r>
-          </a:p>
-        </p:txBody>
-      </p:sp>
-      <p:sp>
-        <p:nvSpPr>
-          <p:cNvPr id="16" name="Right Arrow 15"/>
-          <p:cNvSpPr/>
-          <p:nvPr/>
-        </p:nvSpPr>
-        <p:spPr>
-          <a:xfrm>
-            <a:off x="3310128" y="5376672"/>
-            <a:ext cx="219456" cy="256032"/>
-          </a:xfrm>
-          <a:prstGeom prst="rightArrow">
-            <a:avLst/>
-          </a:prstGeom>
-          <a:solidFill>
-            <a:srgbClr val="219EBC"/>
-          </a:solidFill>
-          <a:ln>
-            <a:noFill/>
-          </a:ln>
-        </p:spPr>
-        <p:style>
-          <a:lnRef idx="1">
-            <a:schemeClr val="accent1"/>
-          </a:lnRef>
-          <a:fillRef idx="3">
-            <a:schemeClr val="accent1"/>
-          </a:fillRef>
-          <a:effectRef idx="2">
-            <a:schemeClr val="accent1"/>
-          </a:effectRef>
-          <a:fontRef idx="minor">
-            <a:schemeClr val="lt1"/>
-          </a:fontRef>
-        </p:style>
-        <p:txBody>
-          <a:bodyPr rtlCol="0" anchor="ctr"/>
-          <a:lstStyle/>
-          <a:p>
-            <a:pPr algn="ctr"/>
-          </a:p>
-        </p:txBody>
-      </p:sp>
-      <p:sp>
-        <p:nvSpPr>
-          <p:cNvPr id="17" name="Rounded Rectangle 16"/>
-          <p:cNvSpPr/>
-          <p:nvPr/>
-        </p:nvSpPr>
-        <p:spPr>
-          <a:xfrm>
-            <a:off x="2449854124920" y="4919472"/>
-            <a:ext cx="2240280" cy="1188720"/>
-          </a:xfrm>
-          <a:prstGeom prst="roundRect">
-            <a:avLst>
-              <a:gd name="adj" fmla="val 6000"/>
-            </a:avLst>
-          </a:prstGeom>
-          <a:solidFill>
-            <a:srgbClr val="FFFFFF"/>
-          </a:solidFill>
-          <a:ln w="12700">
-            <a:solidFill>
-              <a:srgbClr val="8ECAE6"/>
-            </a:solidFill>
-          </a:ln>
-        </p:spPr>
-        <p:style>
-          <a:lnRef idx="1">
-            <a:schemeClr val="accent1"/>
-          </a:lnRef>
-          <a:fillRef idx="3">
-            <a:schemeClr val="accent1"/>
-          </a:fillRef>
-          <a:effectRef idx="2">
-            <a:schemeClr val="accent1"/>
-          </a:effectRef>
-          <a:fontRef idx="minor">
-            <a:schemeClr val="lt1"/>
-          </a:fontRef>
-        </p:style>
-        <p:txBody>
-          <a:bodyPr rtlCol="0" anchor="t" wrap="square" lIns="109728" rIns="109728" tIns="109728"/>
-          <a:lstStyle/>
-          <a:p>
-            <a:pPr algn="ctr">
-              <a:defRPr sz="1050" b="1">
-                <a:solidFill>
-                  <a:srgbClr val="219EBC"/>
-                </a:solidFill>
-                <a:latin typeface="Calibri"/>
-              </a:defRPr>
-            </a:pPr>
-            <a:r>
-              <a:t>2. ASSIMILATE</a:t>
-            </a:r>
-          </a:p>
-          <a:p>
-            <a:pPr>
-              <a:spcBef>
-                <a:spcPts val="100"/>
-              </a:spcBef>
-              <a:defRPr sz="1200" b="1">
-                <a:solidFill>
-                  <a:srgbClr val="023047"/>
-                </a:solidFill>
-                <a:latin typeface="Calibri"/>
-              </a:defRPr>
-            </a:pPr>
-            <a:r>
-              <a:t>Radar &amp; Flow</a:t>
-            </a:r>
-          </a:p>
-          <a:p>
-            <a:pPr>
-              <a:spcBef>
-                <a:spcPts val="300"/>
-              </a:spcBef>
-              <a:defRPr sz="1000">
-                <a:solidFill>
-                  <a:srgbClr val="023047"/>
-                </a:solidFill>
-                <a:latin typeface="Calibri"/>
-              </a:defRPr>
-            </a:pPr>
-            <a:r>
-              <a:t>Digital twin integrates DWD rain radar &amp; Pegnitz flow rate.</a:t>
-            </a:r>
-          </a:p>
-        </p:txBody>
-      </p:sp>
-      <p:sp>
-        <p:nvSpPr>
-          <p:cNvPr id="18" name="Right Arrow 17"/>
-          <p:cNvSpPr/>
-          <p:nvPr/>
-        </p:nvSpPr>
-        <p:spPr>
-          <a:xfrm>
-            <a:off x="2449856474928" y="5376672"/>
-            <a:ext cx="219456" cy="256032"/>
-          </a:xfrm>
-          <a:prstGeom prst="rightArrow">
-            <a:avLst/>
-          </a:prstGeom>
-          <a:solidFill>
-            <a:srgbClr val="219EBC"/>
-          </a:solidFill>
-          <a:ln>
-            <a:noFill/>
-          </a:ln>
-        </p:spPr>
-        <p:style>
-          <a:lnRef idx="1">
-            <a:schemeClr val="accent1"/>
-          </a:lnRef>
-          <a:fillRef idx="3">
-            <a:schemeClr val="accent1"/>
-          </a:fillRef>
-          <a:effectRef idx="2">
-            <a:schemeClr val="accent1"/>
-          </a:effectRef>
-          <a:fontRef idx="minor">
-            <a:schemeClr val="lt1"/>
-          </a:fontRef>
-        </p:style>
-        <p:txBody>
-          <a:bodyPr rtlCol="0" anchor="ctr"/>
-          <a:lstStyle/>
-          <a:p>
-            <a:pPr algn="ctr"/>
-          </a:p>
-        </p:txBody>
-      </p:sp>
-      <p:sp>
-        <p:nvSpPr>
-          <p:cNvPr id="19" name="Rounded Rectangle 18"/>
-          <p:cNvSpPr/>
-          <p:nvPr/>
-        </p:nvSpPr>
-        <p:spPr>
-          <a:xfrm>
-            <a:off x="4899707289720" y="4919472"/>
-            <a:ext cx="2240280" cy="1188720"/>
-          </a:xfrm>
-          <a:prstGeom prst="roundRect">
-            <a:avLst>
-              <a:gd name="adj" fmla="val 6000"/>
-            </a:avLst>
-          </a:prstGeom>
-          <a:solidFill>
-            <a:srgbClr val="FFFFFF"/>
-          </a:solidFill>
-          <a:ln w="12700">
-            <a:solidFill>
-              <a:srgbClr val="8ECAE6"/>
-            </a:solidFill>
-          </a:ln>
-        </p:spPr>
-        <p:style>
-          <a:lnRef idx="1">
-            <a:schemeClr val="accent1"/>
-          </a:lnRef>
-          <a:fillRef idx="3">
-            <a:schemeClr val="accent1"/>
-          </a:fillRef>
-          <a:effectRef idx="2">
-            <a:schemeClr val="accent1"/>
-          </a:effectRef>
-          <a:fontRef idx="minor">
-            <a:schemeClr val="lt1"/>
-          </a:fontRef>
-        </p:style>
-        <p:txBody>
-          <a:bodyPr rtlCol="0" anchor="t" wrap="square" lIns="109728" rIns="109728" tIns="109728"/>
-          <a:lstStyle/>
-          <a:p>
-            <a:pPr algn="ctr">
-              <a:defRPr sz="1050" b="1">
-                <a:solidFill>
-                  <a:srgbClr val="219EBC"/>
-                </a:solidFill>
-                <a:latin typeface="Calibri"/>
-              </a:defRPr>
-            </a:pPr>
-            <a:r>
-              <a:t>3. RETASK</a:t>
-            </a:r>
-          </a:p>
-          <a:p>
-            <a:pPr>
-              <a:spcBef>
-                <a:spcPts val="100"/>
-              </a:spcBef>
-              <a:defRPr sz="1200" b="1">
-                <a:solidFill>
-                  <a:srgbClr val="023047"/>
-                </a:solidFill>
-                <a:latin typeface="Calibri"/>
-              </a:defRPr>
-            </a:pPr>
-            <a:r>
-              <a:t>Optimal Waypoint</a:t>
-            </a:r>
-          </a:p>
-          <a:p>
-            <a:pPr>
-              <a:spcBef>
-                <a:spcPts val="300"/>
-              </a:spcBef>
-              <a:defRPr sz="1000">
-                <a:solidFill>
-                  <a:srgbClr val="023047"/>
-                </a:solidFill>
-                <a:latin typeface="Calibri"/>
-              </a:defRPr>
-            </a:pPr>
-            <a:r>
-              <a:t>Optimizer computes upstream navigation goal in &lt; 35s.</a:t>
-            </a:r>
-          </a:p>
-        </p:txBody>
-      </p:sp>
-      <p:sp>
-        <p:nvSpPr>
-          <p:cNvPr id="20" name="Right Arrow 19"/>
-          <p:cNvSpPr/>
-          <p:nvPr/>
-        </p:nvSpPr>
-        <p:spPr>
-          <a:xfrm>
-            <a:off x="4899709639728" y="5376672"/>
-            <a:ext cx="219456" cy="256032"/>
-          </a:xfrm>
-          <a:prstGeom prst="rightArrow">
-            <a:avLst/>
-          </a:prstGeom>
-          <a:solidFill>
-            <a:srgbClr val="219EBC"/>
-          </a:solidFill>
-          <a:ln>
-            <a:noFill/>
-          </a:ln>
-        </p:spPr>
-        <p:style>
-          <a:lnRef idx="1">
-            <a:schemeClr val="accent1"/>
-          </a:lnRef>
-          <a:fillRef idx="3">
-            <a:schemeClr val="accent1"/>
-          </a:fillRef>
-          <a:effectRef idx="2">
-            <a:schemeClr val="accent1"/>
-          </a:effectRef>
-          <a:fontRef idx="minor">
-            <a:schemeClr val="lt1"/>
-          </a:fontRef>
-        </p:style>
-        <p:txBody>
-          <a:bodyPr rtlCol="0" anchor="ctr"/>
-          <a:lstStyle/>
-          <a:p>
-            <a:pPr algn="ctr"/>
-          </a:p>
-        </p:txBody>
-      </p:sp>
-      <p:sp>
-        <p:nvSpPr>
-          <p:cNvPr id="21" name="Rounded Rectangle 20"/>
-          <p:cNvSpPr/>
-          <p:nvPr/>
-        </p:nvSpPr>
-        <p:spPr>
-          <a:xfrm>
-            <a:off x="7349560454520" y="4919472"/>
-            <a:ext cx="2240280" cy="1188720"/>
-          </a:xfrm>
-          <a:prstGeom prst="roundRect">
-            <a:avLst>
-              <a:gd name="adj" fmla="val 6000"/>
-            </a:avLst>
-          </a:prstGeom>
-          <a:solidFill>
-            <a:srgbClr val="FFFFFF"/>
-          </a:solidFill>
-          <a:ln w="12700">
-            <a:solidFill>
-              <a:srgbClr val="8ECAE6"/>
-            </a:solidFill>
-          </a:ln>
-        </p:spPr>
-        <p:style>
-          <a:lnRef idx="1">
-            <a:schemeClr val="accent1"/>
-          </a:lnRef>
-          <a:fillRef idx="3">
-            <a:schemeClr val="accent1"/>
-          </a:fillRef>
-          <a:effectRef idx="2">
-            <a:schemeClr val="accent1"/>
-          </a:effectRef>
-          <a:fontRef idx="minor">
-            <a:schemeClr val="lt1"/>
-          </a:fontRef>
-        </p:style>
-        <p:txBody>
-          <a:bodyPr rtlCol="0" anchor="t" wrap="square" lIns="109728" rIns="109728" tIns="109728"/>
-          <a:lstStyle/>
-          <a:p>
-            <a:pPr algn="ctr">
-              <a:defRPr sz="1050" b="1">
-                <a:solidFill>
-                  <a:srgbClr val="219EBC"/>
-                </a:solidFill>
-                <a:latin typeface="Calibri"/>
-              </a:defRPr>
-            </a:pPr>
-            <a:r>
-              <a:t>4. LOCALIZED</a:t>
-            </a:r>
-          </a:p>
-          <a:p>
-            <a:pPr>
-              <a:spcBef>
-                <a:spcPts val="100"/>
-              </a:spcBef>
-              <a:defRPr sz="1200" b="1">
-                <a:solidFill>
-                  <a:srgbClr val="023047"/>
-                </a:solidFill>
-                <a:latin typeface="Calibri"/>
-              </a:defRPr>
-            </a:pPr>
-            <a:r>
-              <a:t>Source Confirmed</a:t>
-            </a:r>
-          </a:p>
-          <a:p>
-            <a:pPr>
-              <a:spcBef>
-                <a:spcPts val="300"/>
-              </a:spcBef>
-              <a:defRPr sz="1000">
-                <a:solidFill>
-                  <a:srgbClr val="023047"/>
-                </a:solidFill>
-                <a:latin typeface="Calibri"/>
-              </a:defRPr>
-            </a:pPr>
-            <a:r>
-              <a:t>Leaking outfall pinpointed and logged with geo-proof.</a:t>
+              <a:t>-  Empirical evidence justifies targeted retention investments</a:t>
             </a:r>
           </a:p>
         </p:txBody>
@@ -9551,8 +7069,8 @@
         </p:nvSpPr>
         <p:spPr>
           <a:xfrm>
-            <a:off x="731520" y="411480"/>
-            <a:ext cx="9144000" cy="292608"/>
+            <a:off x="731520" y="502920"/>
+            <a:ext cx="10728655" cy="777240"/>
           </a:xfrm>
           <a:prstGeom prst="rect">
             <a:avLst/>
@@ -9565,51 +7083,15 @@
           </a:bodyPr>
           <a:lstStyle/>
           <a:p>
-            <a:pPr>
-              <a:defRPr sz="1100" b="1">
-                <a:solidFill>
-                  <a:srgbClr val="219EBC"/>
+            <a:pPr algn="l">
+              <a:defRPr sz="3800" b="1">
+                <a:solidFill>
+                  <a:srgbClr val="023047"/>
                 </a:solidFill>
                 <a:latin typeface="Calibri"/>
               </a:defRPr>
             </a:pPr>
             <a:r>
-              <a:t>TECHNICAL SOLUTION 3/3</a:t>
-            </a:r>
-          </a:p>
-        </p:txBody>
-      </p:sp>
-      <p:sp>
-        <p:nvSpPr>
-          <p:cNvPr id="3" name="TextBox 2"/>
-          <p:cNvSpPr txBox="1"/>
-          <p:nvPr/>
-        </p:nvSpPr>
-        <p:spPr>
-          <a:xfrm>
-            <a:off x="731520" y="658368"/>
-            <a:ext cx="10728655" cy="640080"/>
-          </a:xfrm>
-          <a:prstGeom prst="rect">
-            <a:avLst/>
-          </a:prstGeom>
-          <a:noFill/>
-        </p:spPr>
-        <p:txBody>
-          <a:bodyPr wrap="square" anchor="t" lIns="0" tIns="0" rIns="0" bIns="0">
-            <a:spAutoFit/>
-          </a:bodyPr>
-          <a:lstStyle/>
-          <a:p>
-            <a:pPr algn="l">
-              <a:defRPr sz="3600" b="1">
-                <a:solidFill>
-                  <a:srgbClr val="023047"/>
-                </a:solidFill>
-                <a:latin typeface="Calibri"/>
-              </a:defRPr>
-            </a:pPr>
-            <a:r>
               <a:t>Stakeholder Action &amp; AI Public Access</a:t>
             </a:r>
           </a:p>
@@ -9617,14 +7099,14 @@
       </p:sp>
       <p:sp>
         <p:nvSpPr>
-          <p:cNvPr id="4" name="Rounded Rectangle 3"/>
+          <p:cNvPr id="3" name="Rounded Rectangle 2"/>
           <p:cNvSpPr/>
           <p:nvPr/>
         </p:nvSpPr>
         <p:spPr>
           <a:xfrm>
-            <a:off x="731520" y="1417320"/>
-            <a:ext cx="5180990" cy="2926080"/>
+            <a:off x="731520" y="1508760"/>
+            <a:ext cx="5180990" cy="4389120"/>
           </a:xfrm>
           <a:prstGeom prst="roundRect">
             <a:avLst>
@@ -9664,7 +7146,7 @@
       </p:sp>
       <p:pic>
         <p:nvPicPr>
-          <p:cNvPr id="5" name="Picture 4" descr="authority.png"/>
+          <p:cNvPr id="4" name="Picture 3" descr="authority.png"/>
           <p:cNvPicPr>
             <a:picLocks noChangeAspect="1"/>
           </p:cNvPicPr>
@@ -9678,8 +7160,8 @@
         </p:blipFill>
         <p:spPr>
           <a:xfrm>
-            <a:off x="1005840" y="1636776"/>
-            <a:ext cx="438912" cy="438912"/>
+            <a:off x="1024128" y="1801368"/>
+            <a:ext cx="475488" cy="475488"/>
           </a:xfrm>
           <a:prstGeom prst="rect">
             <a:avLst/>
@@ -9688,14 +7170,14 @@
       </p:pic>
       <p:sp>
         <p:nvSpPr>
-          <p:cNvPr id="6" name="TextBox 5"/>
+          <p:cNvPr id="5" name="TextBox 4"/>
           <p:cNvSpPr txBox="1"/>
           <p:nvPr/>
         </p:nvSpPr>
         <p:spPr>
           <a:xfrm>
-            <a:off x="1536192" y="1581912"/>
-            <a:ext cx="4129430" cy="594360"/>
+            <a:off x="1609344" y="1764792"/>
+            <a:ext cx="4037990" cy="594360"/>
           </a:xfrm>
           <a:prstGeom prst="rect">
             <a:avLst/>
@@ -9708,31 +7190,15 @@
           </a:bodyPr>
           <a:lstStyle/>
           <a:p>
-            <a:pPr>
-              <a:spcAft>
-                <a:spcPts val="200"/>
-              </a:spcAft>
-              <a:defRPr sz="1000" b="1">
-                <a:solidFill>
-                  <a:srgbClr val="219EBC"/>
+            <a:pPr algn="l">
+              <a:defRPr sz="2200" b="1">
+                <a:solidFill>
+                  <a:srgbClr val="023047"/>
                 </a:solidFill>
                 <a:latin typeface="Calibri"/>
               </a:defRPr>
             </a:pPr>
             <a:r>
-              <a:t>GOVERNANCE &amp; CAPEX PRIORITIZATION</a:t>
-            </a:r>
-          </a:p>
-          <a:p>
-            <a:pPr algn="l">
-              <a:defRPr sz="2000" b="1">
-                <a:solidFill>
-                  <a:srgbClr val="023047"/>
-                </a:solidFill>
-                <a:latin typeface="Calibri"/>
-              </a:defRPr>
-            </a:pPr>
-            <a:r>
               <a:t>City &amp; Authority Command</a:t>
             </a:r>
           </a:p>
@@ -9740,14 +7206,14 @@
       </p:sp>
       <p:sp>
         <p:nvSpPr>
-          <p:cNvPr id="7" name="TextBox 6"/>
+          <p:cNvPr id="6" name="TextBox 5"/>
           <p:cNvSpPr txBox="1"/>
           <p:nvPr/>
         </p:nvSpPr>
         <p:spPr>
           <a:xfrm>
-            <a:off x="1024128" y="2258568"/>
-            <a:ext cx="4595774" cy="1691640"/>
+            <a:off x="1051560" y="2377440"/>
+            <a:ext cx="4540910" cy="3429000"/>
           </a:xfrm>
           <a:prstGeom prst="rect">
             <a:avLst/>
@@ -9765,9 +7231,9 @@
                 <a:spcPts val="0"/>
               </a:spcBef>
               <a:spcAft>
-                <a:spcPts val="600"/>
+                <a:spcPts val="1000"/>
               </a:spcAft>
-              <a:defRPr sz="1500">
+              <a:defRPr sz="1600">
                 <a:solidFill>
                   <a:srgbClr val="023047"/>
                 </a:solidFill>
@@ -9784,9 +7250,9 @@
                 <a:spcPts val="0"/>
               </a:spcBef>
               <a:spcAft>
-                <a:spcPts val="600"/>
+                <a:spcPts val="1000"/>
               </a:spcAft>
-              <a:defRPr sz="1500">
+              <a:defRPr sz="1600">
                 <a:solidFill>
                   <a:srgbClr val="023047"/>
                 </a:solidFill>
@@ -9803,9 +7269,9 @@
                 <a:spcPts val="0"/>
               </a:spcBef>
               <a:spcAft>
-                <a:spcPts val="600"/>
+                <a:spcPts val="1000"/>
               </a:spcAft>
-              <a:defRPr sz="1500">
+              <a:defRPr sz="1600">
                 <a:solidFill>
                   <a:srgbClr val="023047"/>
                 </a:solidFill>
@@ -9822,9 +7288,9 @@
                 <a:spcPts val="0"/>
               </a:spcBef>
               <a:spcAft>
-                <a:spcPts val="600"/>
+                <a:spcPts val="1000"/>
               </a:spcAft>
-              <a:defRPr sz="1500">
+              <a:defRPr sz="1600">
                 <a:solidFill>
                   <a:srgbClr val="023047"/>
                 </a:solidFill>
@@ -9832,33 +7298,33 @@
               </a:defRPr>
             </a:pPr>
             <a:r>
-              <a:t>-  Automated audit logs for EU Water Framework Directive &amp; OGewV</a:t>
-            </a:r>
-          </a:p>
-        </p:txBody>
-      </p:sp>
-      <p:sp>
-        <p:nvSpPr>
-          <p:cNvPr id="8" name="Rounded Rectangle 7"/>
+              <a:t>-  Automated compliance logs for EU Water Framework Directive &amp; OGewV</a:t>
+            </a:r>
+          </a:p>
+        </p:txBody>
+      </p:sp>
+      <p:sp>
+        <p:nvSpPr>
+          <p:cNvPr id="7" name="Rounded Rectangle 6"/>
           <p:cNvSpPr/>
           <p:nvPr/>
         </p:nvSpPr>
         <p:spPr>
           <a:xfrm>
-            <a:off x="987552" y="3886200"/>
-            <a:ext cx="4668926" cy="320040"/>
+            <a:off x="6278270" y="1508760"/>
+            <a:ext cx="5180990" cy="4389120"/>
           </a:xfrm>
           <a:prstGeom prst="roundRect">
             <a:avLst>
-              <a:gd name="adj" fmla="val 8000"/>
+              <a:gd name="adj" fmla="val 3500"/>
             </a:avLst>
           </a:prstGeom>
           <a:solidFill>
-            <a:srgbClr val="EBF4FA"/>
+            <a:srgbClr val="F4F9FC"/>
           </a:solidFill>
-          <a:ln w="12700">
+          <a:ln w="19050">
             <a:solidFill>
-              <a:srgbClr val="8ECAE6"/>
+              <a:srgbClr val="B4DAEE"/>
             </a:solidFill>
           </a:ln>
         </p:spPr>
@@ -9877,63 +7343,6 @@
           </a:fontRef>
         </p:style>
         <p:txBody>
-          <a:bodyPr rtlCol="0" anchor="ctr" wrap="square" lIns="137160" rIns="137160" tIns="0" bIns="0"/>
-          <a:lstStyle/>
-          <a:p>
-            <a:pPr algn="l">
-              <a:defRPr sz="1100" b="1">
-                <a:solidFill>
-                  <a:srgbClr val="219EBC"/>
-                </a:solidFill>
-                <a:latin typeface="Calibri"/>
-              </a:defRPr>
-            </a:pPr>
-            <a:r>
-              <a:t>Asset Health Scoring  |  Targeted €1.5M-€5M+ CapEx  |  EU WFD Compliance</a:t>
-            </a:r>
-          </a:p>
-        </p:txBody>
-      </p:sp>
-      <p:sp>
-        <p:nvSpPr>
-          <p:cNvPr id="9" name="Rounded Rectangle 8"/>
-          <p:cNvSpPr/>
-          <p:nvPr/>
-        </p:nvSpPr>
-        <p:spPr>
-          <a:xfrm>
-            <a:off x="6278270" y="1417320"/>
-            <a:ext cx="5180990" cy="2926080"/>
-          </a:xfrm>
-          <a:prstGeom prst="roundRect">
-            <a:avLst>
-              <a:gd name="adj" fmla="val 3500"/>
-            </a:avLst>
-          </a:prstGeom>
-          <a:solidFill>
-            <a:srgbClr val="F4F9FC"/>
-          </a:solidFill>
-          <a:ln w="19050">
-            <a:solidFill>
-              <a:srgbClr val="B4DAEE"/>
-            </a:solidFill>
-          </a:ln>
-        </p:spPr>
-        <p:style>
-          <a:lnRef idx="1">
-            <a:schemeClr val="accent1"/>
-          </a:lnRef>
-          <a:fillRef idx="3">
-            <a:schemeClr val="accent1"/>
-          </a:fillRef>
-          <a:effectRef idx="2">
-            <a:schemeClr val="accent1"/>
-          </a:effectRef>
-          <a:fontRef idx="minor">
-            <a:schemeClr val="lt1"/>
-          </a:fontRef>
-        </p:style>
-        <p:txBody>
           <a:bodyPr rtlCol="0" anchor="ctr"/>
           <a:lstStyle/>
           <a:p>
@@ -9943,7 +7352,7 @@
       </p:sp>
       <p:pic>
         <p:nvPicPr>
-          <p:cNvPr id="10" name="Picture 9" descr="ai_mcp.png"/>
+          <p:cNvPr id="8" name="Picture 7" descr="ai_mcp.png"/>
           <p:cNvPicPr>
             <a:picLocks noChangeAspect="1"/>
           </p:cNvPicPr>
@@ -9957,8 +7366,8 @@
         </p:blipFill>
         <p:spPr>
           <a:xfrm>
-            <a:off x="6552590" y="1636776"/>
-            <a:ext cx="438912" cy="438912"/>
+            <a:off x="6570878" y="1801368"/>
+            <a:ext cx="475488" cy="475488"/>
           </a:xfrm>
           <a:prstGeom prst="rect">
             <a:avLst/>
@@ -9967,14 +7376,14 @@
       </p:pic>
       <p:sp>
         <p:nvSpPr>
-          <p:cNvPr id="11" name="TextBox 10"/>
+          <p:cNvPr id="9" name="TextBox 8"/>
           <p:cNvSpPr txBox="1"/>
           <p:nvPr/>
         </p:nvSpPr>
         <p:spPr>
           <a:xfrm>
-            <a:off x="7082942" y="1581912"/>
-            <a:ext cx="4129430" cy="594360"/>
+            <a:off x="7156094" y="1764792"/>
+            <a:ext cx="4037990" cy="594360"/>
           </a:xfrm>
           <a:prstGeom prst="rect">
             <a:avLst/>
@@ -9987,31 +7396,15 @@
           </a:bodyPr>
           <a:lstStyle/>
           <a:p>
-            <a:pPr>
-              <a:spcAft>
-                <a:spcPts val="200"/>
-              </a:spcAft>
-              <a:defRPr sz="1000" b="1">
-                <a:solidFill>
-                  <a:srgbClr val="219EBC"/>
+            <a:pPr algn="l">
+              <a:defRPr sz="2200" b="1">
+                <a:solidFill>
+                  <a:srgbClr val="023047"/>
                 </a:solidFill>
                 <a:latin typeface="Calibri"/>
               </a:defRPr>
             </a:pPr>
             <a:r>
-              <a:t>CITIZEN INTERACTION &amp; OPEN DATA</a:t>
-            </a:r>
-          </a:p>
-          <a:p>
-            <a:pPr algn="l">
-              <a:defRPr sz="2000" b="1">
-                <a:solidFill>
-                  <a:srgbClr val="023047"/>
-                </a:solidFill>
-                <a:latin typeface="Calibri"/>
-              </a:defRPr>
-            </a:pPr>
-            <a:r>
               <a:t>AI Public Access via MCP</a:t>
             </a:r>
           </a:p>
@@ -10019,14 +7412,14 @@
       </p:sp>
       <p:sp>
         <p:nvSpPr>
-          <p:cNvPr id="12" name="TextBox 11"/>
+          <p:cNvPr id="10" name="TextBox 9"/>
           <p:cNvSpPr txBox="1"/>
           <p:nvPr/>
         </p:nvSpPr>
         <p:spPr>
           <a:xfrm>
-            <a:off x="6570878" y="2258568"/>
-            <a:ext cx="4595774" cy="1691640"/>
+            <a:off x="6598310" y="2377440"/>
+            <a:ext cx="4540910" cy="3429000"/>
           </a:xfrm>
           <a:prstGeom prst="rect">
             <a:avLst/>
@@ -10044,9 +7437,9 @@
                 <a:spcPts val="0"/>
               </a:spcBef>
               <a:spcAft>
-                <a:spcPts val="600"/>
+                <a:spcPts val="1000"/>
               </a:spcAft>
-              <a:defRPr sz="1500">
+              <a:defRPr sz="1600">
                 <a:solidFill>
                   <a:srgbClr val="023047"/>
                 </a:solidFill>
@@ -10063,9 +7456,9 @@
                 <a:spcPts val="0"/>
               </a:spcBef>
               <a:spcAft>
-                <a:spcPts val="600"/>
+                <a:spcPts val="1000"/>
               </a:spcAft>
-              <a:defRPr sz="1500">
+              <a:defRPr sz="1600">
                 <a:solidFill>
                   <a:srgbClr val="023047"/>
                 </a:solidFill>
@@ -10082,9 +7475,9 @@
                 <a:spcPts val="0"/>
               </a:spcBef>
               <a:spcAft>
-                <a:spcPts val="600"/>
+                <a:spcPts val="1000"/>
               </a:spcAft>
-              <a:defRPr sz="1500">
+              <a:defRPr sz="1600">
                 <a:solidFill>
                   <a:srgbClr val="023047"/>
                 </a:solidFill>
@@ -10101,9 +7494,9 @@
                 <a:spcPts val="0"/>
               </a:spcBef>
               <a:spcAft>
-                <a:spcPts val="600"/>
+                <a:spcPts val="1000"/>
               </a:spcAft>
-              <a:defRPr sz="1500">
+              <a:defRPr sz="1600">
                 <a:solidFill>
                   <a:srgbClr val="023047"/>
                 </a:solidFill>
@@ -10112,428 +7505,6 @@
             </a:pPr>
             <a:r>
               <a:t>-  Eliminates 48h lab delay with direct public health warnings</a:t>
-            </a:r>
-          </a:p>
-        </p:txBody>
-      </p:sp>
-      <p:sp>
-        <p:nvSpPr>
-          <p:cNvPr id="13" name="Rounded Rectangle 12"/>
-          <p:cNvSpPr/>
-          <p:nvPr/>
-        </p:nvSpPr>
-        <p:spPr>
-          <a:xfrm>
-            <a:off x="6534302" y="3886200"/>
-            <a:ext cx="4668926" cy="320040"/>
-          </a:xfrm>
-          <a:prstGeom prst="roundRect">
-            <a:avLst>
-              <a:gd name="adj" fmla="val 8000"/>
-            </a:avLst>
-          </a:prstGeom>
-          <a:solidFill>
-            <a:srgbClr val="EBF4FA"/>
-          </a:solidFill>
-          <a:ln w="12700">
-            <a:solidFill>
-              <a:srgbClr val="8ECAE6"/>
-            </a:solidFill>
-          </a:ln>
-        </p:spPr>
-        <p:style>
-          <a:lnRef idx="1">
-            <a:schemeClr val="accent1"/>
-          </a:lnRef>
-          <a:fillRef idx="3">
-            <a:schemeClr val="accent1"/>
-          </a:fillRef>
-          <a:effectRef idx="2">
-            <a:schemeClr val="accent1"/>
-          </a:effectRef>
-          <a:fontRef idx="minor">
-            <a:schemeClr val="lt1"/>
-          </a:fontRef>
-        </p:style>
-        <p:txBody>
-          <a:bodyPr rtlCol="0" anchor="ctr" wrap="square" lIns="137160" rIns="137160" tIns="0" bIns="0"/>
-          <a:lstStyle/>
-          <a:p>
-            <a:pPr algn="l">
-              <a:defRPr sz="1100" b="1">
-                <a:solidFill>
-                  <a:srgbClr val="219EBC"/>
-                </a:solidFill>
-                <a:latin typeface="Calibri"/>
-              </a:defRPr>
-            </a:pPr>
-            <a:r>
-              <a:t>MCP Integration  |  Conversational AI Assistant  |  Citizen Traffic Light</a:t>
-            </a:r>
-          </a:p>
-        </p:txBody>
-      </p:sp>
-      <p:sp>
-        <p:nvSpPr>
-          <p:cNvPr id="14" name="Rounded Rectangle 13"/>
-          <p:cNvSpPr/>
-          <p:nvPr/>
-        </p:nvSpPr>
-        <p:spPr>
-          <a:xfrm>
-            <a:off x="731520" y="4526280"/>
-            <a:ext cx="10728655" cy="1783080"/>
-          </a:xfrm>
-          <a:prstGeom prst="roundRect">
-            <a:avLst>
-              <a:gd name="adj" fmla="val 3500"/>
-            </a:avLst>
-          </a:prstGeom>
-          <a:solidFill>
-            <a:srgbClr val="F4F9FC"/>
-          </a:solidFill>
-          <a:ln w="19050">
-            <a:solidFill>
-              <a:srgbClr val="B4DAEE"/>
-            </a:solidFill>
-          </a:ln>
-        </p:spPr>
-        <p:style>
-          <a:lnRef idx="1">
-            <a:schemeClr val="accent1"/>
-          </a:lnRef>
-          <a:fillRef idx="3">
-            <a:schemeClr val="accent1"/>
-          </a:fillRef>
-          <a:effectRef idx="2">
-            <a:schemeClr val="accent1"/>
-          </a:effectRef>
-          <a:fontRef idx="minor">
-            <a:schemeClr val="lt1"/>
-          </a:fontRef>
-        </p:style>
-        <p:txBody>
-          <a:bodyPr rtlCol="0" anchor="t" wrap="square" lIns="320040" rIns="320040" tIns="164592"/>
-          <a:lstStyle/>
-          <a:p>
-            <a:pPr algn="ctr">
-              <a:spcAft>
-                <a:spcPts val="800"/>
-              </a:spcAft>
-              <a:defRPr sz="1100" b="1">
-                <a:solidFill>
-                  <a:srgbClr val="219EBC"/>
-                </a:solidFill>
-                <a:latin typeface="Calibri"/>
-              </a:defRPr>
-            </a:pPr>
-            <a:r>
-              <a:t>OPEN DATA &amp; MCP INTEGRATION ARCHITECTURE (PUBLIC &amp; CITY ACCESS)</a:t>
-            </a:r>
-          </a:p>
-        </p:txBody>
-      </p:sp>
-      <p:sp>
-        <p:nvSpPr>
-          <p:cNvPr id="15" name="Rounded Rectangle 14"/>
-          <p:cNvSpPr/>
-          <p:nvPr/>
-        </p:nvSpPr>
-        <p:spPr>
-          <a:xfrm>
-            <a:off x="1005840" y="4919472"/>
-            <a:ext cx="3154680" cy="1170432"/>
-          </a:xfrm>
-          <a:prstGeom prst="roundRect">
-            <a:avLst>
-              <a:gd name="adj" fmla="val 5000"/>
-            </a:avLst>
-          </a:prstGeom>
-          <a:solidFill>
-            <a:srgbClr val="FFFFFF"/>
-          </a:solidFill>
-          <a:ln w="12700">
-            <a:solidFill>
-              <a:srgbClr val="8ECAE6"/>
-            </a:solidFill>
-          </a:ln>
-        </p:spPr>
-        <p:style>
-          <a:lnRef idx="1">
-            <a:schemeClr val="accent1"/>
-          </a:lnRef>
-          <a:fillRef idx="3">
-            <a:schemeClr val="accent1"/>
-          </a:fillRef>
-          <a:effectRef idx="2">
-            <a:schemeClr val="accent1"/>
-          </a:effectRef>
-          <a:fontRef idx="minor">
-            <a:schemeClr val="lt1"/>
-          </a:fontRef>
-        </p:style>
-        <p:txBody>
-          <a:bodyPr rtlCol="0" anchor="t" wrap="square" lIns="109728" rIns="109728" tIns="109728"/>
-          <a:lstStyle/>
-          <a:p>
-            <a:pPr algn="ctr">
-              <a:defRPr sz="1200" b="1">
-                <a:solidFill>
-                  <a:srgbClr val="023047"/>
-                </a:solidFill>
-                <a:latin typeface="Calibri"/>
-              </a:defRPr>
-            </a:pPr>
-            <a:r>
-              <a:t>1. Public Open Data Sources</a:t>
-            </a:r>
-          </a:p>
-          <a:p>
-            <a:pPr>
-              <a:spcBef>
-                <a:spcPts val="300"/>
-              </a:spcBef>
-              <a:defRPr sz="1050">
-                <a:solidFill>
-                  <a:srgbClr val="023047"/>
-                </a:solidFill>
-                <a:latin typeface="Calibri"/>
-              </a:defRPr>
-            </a:pPr>
-            <a:r>
-              <a:t>Bavarian LOD2 3D mesh, DWD precipitation radar, and GKD Bayern real-time gauge telemetry.</a:t>
-            </a:r>
-          </a:p>
-        </p:txBody>
-      </p:sp>
-      <p:sp>
-        <p:nvSpPr>
-          <p:cNvPr id="16" name="Right Arrow 15"/>
-          <p:cNvSpPr/>
-          <p:nvPr/>
-        </p:nvSpPr>
-        <p:spPr>
-          <a:xfrm>
-            <a:off x="4270248" y="5394960"/>
-            <a:ext cx="228600" cy="256032"/>
-          </a:xfrm>
-          <a:prstGeom prst="rightArrow">
-            <a:avLst/>
-          </a:prstGeom>
-          <a:solidFill>
-            <a:srgbClr val="219EBC"/>
-          </a:solidFill>
-          <a:ln>
-            <a:noFill/>
-          </a:ln>
-        </p:spPr>
-        <p:style>
-          <a:lnRef idx="1">
-            <a:schemeClr val="accent1"/>
-          </a:lnRef>
-          <a:fillRef idx="3">
-            <a:schemeClr val="accent1"/>
-          </a:fillRef>
-          <a:effectRef idx="2">
-            <a:schemeClr val="accent1"/>
-          </a:effectRef>
-          <a:fontRef idx="minor">
-            <a:schemeClr val="lt1"/>
-          </a:fontRef>
-        </p:style>
-        <p:txBody>
-          <a:bodyPr rtlCol="0" anchor="ctr"/>
-          <a:lstStyle/>
-          <a:p>
-            <a:pPr algn="ctr"/>
-          </a:p>
-        </p:txBody>
-      </p:sp>
-      <p:sp>
-        <p:nvSpPr>
-          <p:cNvPr id="17" name="Rounded Rectangle 16"/>
-          <p:cNvSpPr/>
-          <p:nvPr/>
-        </p:nvSpPr>
-        <p:spPr>
-          <a:xfrm>
-            <a:off x="4617720" y="4919472"/>
-            <a:ext cx="3154680" cy="1170432"/>
-          </a:xfrm>
-          <a:prstGeom prst="roundRect">
-            <a:avLst>
-              <a:gd name="adj" fmla="val 5000"/>
-            </a:avLst>
-          </a:prstGeom>
-          <a:solidFill>
-            <a:srgbClr val="FFFFFF"/>
-          </a:solidFill>
-          <a:ln w="12700">
-            <a:solidFill>
-              <a:srgbClr val="8ECAE6"/>
-            </a:solidFill>
-          </a:ln>
-        </p:spPr>
-        <p:style>
-          <a:lnRef idx="1">
-            <a:schemeClr val="accent1"/>
-          </a:lnRef>
-          <a:fillRef idx="3">
-            <a:schemeClr val="accent1"/>
-          </a:fillRef>
-          <a:effectRef idx="2">
-            <a:schemeClr val="accent1"/>
-          </a:effectRef>
-          <a:fontRef idx="minor">
-            <a:schemeClr val="lt1"/>
-          </a:fontRef>
-        </p:style>
-        <p:txBody>
-          <a:bodyPr rtlCol="0" anchor="t" wrap="square" lIns="109728" rIns="109728" tIns="109728"/>
-          <a:lstStyle/>
-          <a:p>
-            <a:pPr algn="ctr">
-              <a:defRPr sz="1200" b="1">
-                <a:solidFill>
-                  <a:srgbClr val="023047"/>
-                </a:solidFill>
-                <a:latin typeface="Calibri"/>
-              </a:defRPr>
-            </a:pPr>
-            <a:r>
-              <a:t>2. PlumeTrace MCP Server</a:t>
-            </a:r>
-          </a:p>
-          <a:p>
-            <a:pPr>
-              <a:spcBef>
-                <a:spcPts val="300"/>
-              </a:spcBef>
-              <a:defRPr sz="1050">
-                <a:solidFill>
-                  <a:srgbClr val="023047"/>
-                </a:solidFill>
-                <a:latin typeface="Calibri"/>
-              </a:defRPr>
-            </a:pPr>
-            <a:r>
-              <a:t>Standardized Model Context Protocol exposes river safety status, outfall scores, and alerts to AI agents.</a:t>
-            </a:r>
-          </a:p>
-        </p:txBody>
-      </p:sp>
-      <p:sp>
-        <p:nvSpPr>
-          <p:cNvPr id="18" name="Right Arrow 17"/>
-          <p:cNvSpPr/>
-          <p:nvPr/>
-        </p:nvSpPr>
-        <p:spPr>
-          <a:xfrm>
-            <a:off x="7882128" y="5394960"/>
-            <a:ext cx="228600" cy="256032"/>
-          </a:xfrm>
-          <a:prstGeom prst="rightArrow">
-            <a:avLst/>
-          </a:prstGeom>
-          <a:solidFill>
-            <a:srgbClr val="219EBC"/>
-          </a:solidFill>
-          <a:ln>
-            <a:noFill/>
-          </a:ln>
-        </p:spPr>
-        <p:style>
-          <a:lnRef idx="1">
-            <a:schemeClr val="accent1"/>
-          </a:lnRef>
-          <a:fillRef idx="3">
-            <a:schemeClr val="accent1"/>
-          </a:fillRef>
-          <a:effectRef idx="2">
-            <a:schemeClr val="accent1"/>
-          </a:effectRef>
-          <a:fontRef idx="minor">
-            <a:schemeClr val="lt1"/>
-          </a:fontRef>
-        </p:style>
-        <p:txBody>
-          <a:bodyPr rtlCol="0" anchor="ctr"/>
-          <a:lstStyle/>
-          <a:p>
-            <a:pPr algn="ctr"/>
-          </a:p>
-        </p:txBody>
-      </p:sp>
-      <p:sp>
-        <p:nvSpPr>
-          <p:cNvPr id="19" name="Rounded Rectangle 18"/>
-          <p:cNvSpPr/>
-          <p:nvPr/>
-        </p:nvSpPr>
-        <p:spPr>
-          <a:xfrm>
-            <a:off x="8229600" y="4919472"/>
-            <a:ext cx="3154680" cy="1170432"/>
-          </a:xfrm>
-          <a:prstGeom prst="roundRect">
-            <a:avLst>
-              <a:gd name="adj" fmla="val 5000"/>
-            </a:avLst>
-          </a:prstGeom>
-          <a:solidFill>
-            <a:srgbClr val="FFFFFF"/>
-          </a:solidFill>
-          <a:ln w="12700">
-            <a:solidFill>
-              <a:srgbClr val="8ECAE6"/>
-            </a:solidFill>
-          </a:ln>
-        </p:spPr>
-        <p:style>
-          <a:lnRef idx="1">
-            <a:schemeClr val="accent1"/>
-          </a:lnRef>
-          <a:fillRef idx="3">
-            <a:schemeClr val="accent1"/>
-          </a:fillRef>
-          <a:effectRef idx="2">
-            <a:schemeClr val="accent1"/>
-          </a:effectRef>
-          <a:fontRef idx="minor">
-            <a:schemeClr val="lt1"/>
-          </a:fontRef>
-        </p:style>
-        <p:txBody>
-          <a:bodyPr rtlCol="0" anchor="t" wrap="square" lIns="109728" rIns="109728" tIns="109728"/>
-          <a:lstStyle/>
-          <a:p>
-            <a:pPr algn="ctr">
-              <a:defRPr sz="1200" b="1">
-                <a:solidFill>
-                  <a:srgbClr val="023047"/>
-                </a:solidFill>
-                <a:latin typeface="Calibri"/>
-              </a:defRPr>
-            </a:pPr>
-            <a:r>
-              <a:t>3. Public &amp; City Interfaces</a:t>
-            </a:r>
-          </a:p>
-          <a:p>
-            <a:pPr>
-              <a:spcBef>
-                <a:spcPts val="300"/>
-              </a:spcBef>
-              <a:defRPr sz="1050">
-                <a:solidFill>
-                  <a:srgbClr val="023047"/>
-                </a:solidFill>
-                <a:latin typeface="Calibri"/>
-              </a:defRPr>
-            </a:pPr>
-            <a:r>
-              <a:t>Natural language AI answers citizen queries instantly; city dashboard automates regulatory compliance.</a:t>
             </a:r>
           </a:p>
         </p:txBody>
